--- a/atividades/apresentacoes/sr1_2026-05-22.pptx
+++ b/atividades/apresentacoes/sr1_2026-05-22.pptx
@@ -8,6 +8,7 @@
     <p:sldId id="256" r:id="rId7"/>
     <p:sldId id="257" r:id="rId8"/>
     <p:sldId id="259" r:id="rId10"/>
+    <p:sldId id="275" r:id="rId14"/>
     <p:sldId id="264" r:id="rId15"/>
     <p:sldId id="270" r:id="rId21"/>
     <p:sldId id="273" r:id="rId24"/>
@@ -3233,7 +3234,7 @@
                 </a:solidFill>
                 <a:latin typeface="Arial"/>
               </a:rPr>
-              <a:t>ObiOne · Observatório-Comunidade de Projetos</a:t>
+              <a:t>ObiOne · Observatório de Projetos</a:t>
             </a:r>
           </a:p>
         </p:txBody>
@@ -3268,7 +3269,7 @@
                 </a:solidFill>
                 <a:latin typeface="Arial"/>
               </a:rPr>
-              <a:t>Apresentação à cadeira TAES</a:t>
+              <a:t>Apresentação à cadeira Tópicos Avançados em Engenharia de Software</a:t>
             </a:r>
           </a:p>
         </p:txBody>
@@ -3381,7 +3382,7 @@
                 </a:solidFill>
                 <a:latin typeface="Arial"/>
               </a:rPr>
-              <a:t>Bruno Rocha · Cynthia Oliveira · Moisés Júnior · Raniel Silva (apresentador)</a:t>
+              <a:t>Bruno Rocha · Cynthia Oliveira · Moisés Júnior · Raniel Silva</a:t>
             </a:r>
           </a:p>
         </p:txBody>
@@ -3452,41 +3453,6 @@
                 <a:latin typeface="Arial"/>
               </a:rPr>
               <a:t>Prof. Ivaldir Honório de Farias Júnior</a:t>
-            </a:r>
-          </a:p>
-        </p:txBody>
-      </p:sp>
-      <p:sp>
-        <p:nvSpPr>
-          <p:cNvPr id="12" name="TextBox 11"/>
-          <p:cNvSpPr txBox="1"/>
-          <p:nvPr/>
-        </p:nvSpPr>
-        <p:spPr>
-          <a:xfrm>
-            <a:off x="685800" y="6080760"/>
-            <a:ext cx="11000000" cy="228600"/>
-          </a:xfrm>
-          <a:prstGeom prst="rect">
-            <a:avLst/>
-          </a:prstGeom>
-          <a:noFill/>
-        </p:spPr>
-        <p:txBody>
-          <a:bodyPr wrap="square" lIns="0" rIns="0" tIns="0" bIns="0" anchor="t">
-            <a:spAutoFit/>
-          </a:bodyPr>
-          <a:lstStyle/>
-          <a:p>
-            <a:pPr algn="l"/>
-            <a:r>
-              <a:rPr sz="1100" b="0" i="0">
-                <a:solidFill>
-                  <a:srgbClr val="4A4A5A"/>
-                </a:solidFill>
-                <a:latin typeface="Arial"/>
-              </a:rPr>
-              <a:t>Doutorado PPGEC · Tópicos Avançados em Engenharia de Software</a:t>
             </a:r>
           </a:p>
         </p:txBody>
@@ -3832,7 +3798,7 @@
                 </a:solidFill>
                 <a:latin typeface="Arial"/>
               </a:rPr>
-              <a:t>O escopo</a:t>
+              <a:t>Contexto</a:t>
             </a:r>
           </a:p>
         </p:txBody>
@@ -3867,7 +3833,7 @@
                 </a:solidFill>
                 <a:latin typeface="Arial"/>
               </a:rPr>
-              <a:t>O que vamos construir</a:t>
+              <a:t>Por que um observatório vivo</a:t>
             </a:r>
           </a:p>
         </p:txBody>
@@ -3980,7 +3946,7 @@
                 </a:solidFill>
                 <a:latin typeface="Arial"/>
               </a:rPr>
-              <a:t>Onde estamos</a:t>
+              <a:t>O escopo</a:t>
             </a:r>
           </a:p>
         </p:txBody>
@@ -4015,7 +3981,7 @@
                 </a:solidFill>
                 <a:latin typeface="Arial"/>
               </a:rPr>
-              <a:t>Sprint 0 em curso</a:t>
+              <a:t>O que vamos construir</a:t>
             </a:r>
           </a:p>
         </p:txBody>
@@ -4128,7 +4094,7 @@
                 </a:solidFill>
                 <a:latin typeface="Arial"/>
               </a:rPr>
-              <a:t>Onde chegaremos</a:t>
+              <a:t>Cronograma</a:t>
             </a:r>
           </a:p>
         </p:txBody>
@@ -4163,7 +4129,7 @@
                 </a:solidFill>
                 <a:latin typeface="Arial"/>
               </a:rPr>
-              <a:t>Cronograma e marcos</a:t>
+              <a:t>9 semanas · 4 marcos</a:t>
             </a:r>
           </a:p>
         </p:txBody>
@@ -4276,7 +4242,7 @@
                 </a:solidFill>
                 <a:latin typeface="Arial"/>
               </a:rPr>
-              <a:t>Próximos passos</a:t>
+              <a:t>Status atual</a:t>
             </a:r>
           </a:p>
         </p:txBody>
@@ -4311,7 +4277,7 @@
                 </a:solidFill>
                 <a:latin typeface="Arial"/>
               </a:rPr>
-              <a:t>Sprint 1 e riscos</a:t>
+              <a:t>Onde estamos e o que vem</a:t>
             </a:r>
           </a:p>
         </p:txBody>
@@ -4475,7 +4441,7 @@
                 </a:solidFill>
                 <a:latin typeface="Arial"/>
               </a:rPr>
-              <a:t>Equipe ObiOne · Doutorado PPGEC · UPE/POLI · Maio 2026</a:t>
+              <a:t>Equipe ObiOne · UPE/POLI · Maio 2026</a:t>
             </a:r>
           </a:p>
         </p:txBody>
@@ -4510,7 +4476,7 @@
                 </a:solidFill>
                 <a:latin typeface="Arial"/>
               </a:rPr>
-              <a:t>2 / 7</a:t>
+              <a:t>2 / 8</a:t>
             </a:r>
           </a:p>
         </p:txBody>
@@ -4595,7 +4561,7 @@
                 </a:solidFill>
                 <a:latin typeface="Arial"/>
               </a:rPr>
-              <a:t>O QUE PROPOMOS</a:t>
+              <a:t>CONTEXTO</a:t>
             </a:r>
           </a:p>
         </p:txBody>
@@ -4630,7 +4596,7 @@
                 </a:solidFill>
                 <a:latin typeface="Arial"/>
               </a:rPr>
-              <a:t>Observatório-comunidade baseado no MPO</a:t>
+              <a:t>Observatório é mais que dashboard</a:t>
             </a:r>
           </a:p>
         </p:txBody>
@@ -4753,7 +4719,7 @@
                 </a:solidFill>
                 <a:latin typeface="Arial"/>
               </a:rPr>
-              <a:t>O QUE VAMOS CONSTRUIR</a:t>
+              <a:t>OBSERVATÓRIOS VS. FERRAMENTAS</a:t>
             </a:r>
           </a:p>
         </p:txBody>
@@ -4788,7 +4754,7 @@
                 </a:solidFill>
                 <a:latin typeface="Arial"/>
               </a:rPr>
-              <a:t>Três camadas integradas</a:t>
+              <a:t>Comunidade ativa de múltiplos atores</a:t>
             </a:r>
           </a:p>
           <a:p>
@@ -4816,7 +4782,7 @@
                 </a:solidFill>
                 <a:latin typeface="Arial"/>
               </a:rPr>
-              <a:t>Pipeline LLM extrai os atributos do Quadro 37 do MPO de documentos .docx não-estruturados.</a:t>
+              <a:t>Um observatório é espaço de conhecimento entre consultoria, clientes e pesquisa, mediado por interação contínua.</a:t>
             </a:r>
           </a:p>
           <a:p>
@@ -4832,7 +4798,7 @@
                 </a:solidFill>
                 <a:latin typeface="Arial"/>
               </a:rPr>
-              <a:t>Comunidade semi-aberta: consultoria curatoriza e cada cliente acessa apenas o seu projeto, com comentários e feed in-app.</a:t>
+              <a:t>Ferramentas de gestão oferecem visualização do status. Faltam o tecido social e a curadoria do conhecimento.</a:t>
             </a:r>
           </a:p>
           <a:p>
@@ -4844,7 +4810,7 @@
                 </a:solidFill>
                 <a:latin typeface="Arial"/>
               </a:rPr>
-              <a:t>IA-Assistente reduz fricção operacional: gera resumo para o cliente e drafts para o consultor revisar.</a:t>
+              <a:t>Resultado: observatórios reais são raros porque mantê-los vivos custa caro.</a:t>
             </a:r>
           </a:p>
         </p:txBody>
@@ -4967,7 +4933,7 @@
                 </a:solidFill>
                 <a:latin typeface="Arial"/>
               </a:rPr>
-              <a:t>FUNDAMENTAÇÃO MPO</a:t>
+              <a:t>POR QUE É CARO?</a:t>
             </a:r>
           </a:p>
         </p:txBody>
@@ -5002,7 +4968,7 @@
                 </a:solidFill>
                 <a:latin typeface="Arial"/>
               </a:rPr>
-              <a:t>Endereçando lacunas do Vieira (2022)</a:t>
+              <a:t>Três fontes de fricção</a:t>
             </a:r>
           </a:p>
         </p:txBody>
@@ -5037,7 +5003,7 @@
                 </a:solidFill>
                 <a:latin typeface="Arial"/>
               </a:rPr>
-              <a:t>3 / 7</a:t>
+              <a:t>Manual</a:t>
             </a:r>
           </a:p>
         </p:txBody>
@@ -5072,7 +5038,7 @@
                 </a:solidFill>
                 <a:latin typeface="Arial"/>
               </a:rPr>
-              <a:t>atributos do Quadro 37 cobertos</a:t>
+              <a:t>curadoria de atributos do projeto</a:t>
             </a:r>
           </a:p>
         </p:txBody>
@@ -5107,7 +5073,7 @@
                 </a:solidFill>
                 <a:latin typeface="Arial"/>
               </a:rPr>
-              <a:t>8 categorias do MPO (geral, escopo, riscos, lições, etc.)</a:t>
+              <a:t>ler documentos, estruturar, atualizar</a:t>
             </a:r>
           </a:p>
         </p:txBody>
@@ -5142,7 +5108,7 @@
                 </a:solidFill>
                 <a:latin typeface="Arial"/>
               </a:rPr>
-              <a:t>5 reais</a:t>
+              <a:t>Repetitivo</a:t>
             </a:r>
           </a:p>
         </p:txBody>
@@ -5177,7 +5143,7 @@
                 </a:solidFill>
                 <a:latin typeface="Arial"/>
               </a:rPr>
-              <a:t>projetos do estudo de caso</a:t>
+              <a:t>comunicar progresso aos clientes</a:t>
             </a:r>
           </a:p>
         </p:txBody>
@@ -5212,7 +5178,7 @@
                 </a:solidFill>
                 <a:latin typeface="Arial"/>
               </a:rPr>
-              <a:t>jurídico · saúde · esporte · branding</a:t>
+              <a:t>traduzir técnico em narrativa acessível</a:t>
             </a:r>
           </a:p>
         </p:txBody>
@@ -5247,7 +5213,7 @@
                 </a:solidFill>
                 <a:latin typeface="Arial"/>
               </a:rPr>
-              <a:t>3 TF</a:t>
+              <a:t>Custoso</a:t>
             </a:r>
           </a:p>
         </p:txBody>
@@ -5282,7 +5248,7 @@
                 </a:solidFill>
                 <a:latin typeface="Arial"/>
               </a:rPr>
-              <a:t>Trabalhos Futuros endereçados</a:t>
+              <a:t>manter engajamento da comunidade</a:t>
             </a:r>
           </a:p>
         </p:txBody>
@@ -5317,7 +5283,7 @@
                 </a:solidFill>
                 <a:latin typeface="Arial"/>
               </a:rPr>
-              <a:t>#4 Interatividade · #7 Comparativos · #8 Soluções computacionais</a:t>
+              <a:t>responder, contextualizar, sugerir próximos passos</a:t>
             </a:r>
           </a:p>
         </p:txBody>
@@ -5352,7 +5318,7 @@
                 </a:solidFill>
                 <a:latin typeface="Arial"/>
               </a:rPr>
-              <a:t>Diferencial: tecido social que materializa as características Interatividade e Rede de Colaboração do MPO.</a:t>
+              <a:t>Sem reduzir essa fricção, o observatório fica restrito à teoria. É aí que entra a IA Generativa.</a:t>
             </a:r>
           </a:p>
         </p:txBody>
@@ -5430,7 +5396,7 @@
                 </a:solidFill>
                 <a:latin typeface="Arial"/>
               </a:rPr>
-              <a:t>Fonte: Vieira (2022) · Quadro 37 (p. 264)</a:t>
+              <a:t>Fonte: Vieira (2022) · Cap. 5 (MPO)</a:t>
             </a:r>
           </a:p>
         </p:txBody>
@@ -5465,7 +5431,7 @@
                 </a:solidFill>
                 <a:latin typeface="Arial"/>
               </a:rPr>
-              <a:t>Fonte: 5 projetos reais em contexto/projetos/</a:t>
+              <a:t>Fonte: OPTI-PE como caso prático</a:t>
             </a:r>
           </a:p>
         </p:txBody>
@@ -5500,7 +5466,7 @@
                 </a:solidFill>
                 <a:latin typeface="Arial"/>
               </a:rPr>
-              <a:t>Fonte: Vieira (2022) · Seção 6.4 (pp. 215-217)</a:t>
+              <a:t>Fonte: Vieira (2022) · Seção 6.4 · Trabalhos Futuros</a:t>
             </a:r>
           </a:p>
         </p:txBody>
@@ -5578,7 +5544,7 @@
                 </a:solidFill>
                 <a:latin typeface="Arial"/>
               </a:rPr>
-              <a:t>Equipe ObiOne · Doutorado PPGEC · UPE/POLI · Maio 2026</a:t>
+              <a:t>Equipe ObiOne · UPE/POLI · Maio 2026</a:t>
             </a:r>
           </a:p>
         </p:txBody>
@@ -5613,7 +5579,7 @@
                 </a:solidFill>
                 <a:latin typeface="Arial"/>
               </a:rPr>
-              <a:t>3 / 7</a:t>
+              <a:t>3 / 8</a:t>
             </a:r>
           </a:p>
         </p:txBody>
@@ -5969,7 +5935,7 @@
                 </a:solidFill>
                 <a:latin typeface="Arial"/>
               </a:rPr>
-              <a:t>Extração via LLM dos atributos do Quadro 37 (8 categorias) a partir de documentos .docx não-estruturados.</a:t>
+              <a:t>Extração via LLM dos atributos do Quadro 37 a partir de documentos .docx.</a:t>
             </a:r>
           </a:p>
         </p:txBody>
@@ -6162,7 +6128,7 @@
                 </a:solidFill>
                 <a:latin typeface="Arial"/>
               </a:rPr>
-              <a:t>Dashboard de portfólio com indicador de cobertura do MPO. Visão restrita por perfil: consultoria vê todos, cliente vê apenas o seu.</a:t>
+              <a:t>Dashboard com cobertura do MPO. Cliente vê apenas o seu projeto.</a:t>
             </a:r>
           </a:p>
         </p:txBody>
@@ -6355,7 +6321,7 @@
                 </a:solidFill>
                 <a:latin typeface="Arial"/>
               </a:rPr>
-              <a:t>Autenticação simples + perfis semi-abertos + comentários por projeto + feed in-app de novidades. Materializa Interatividade do MPO.</a:t>
+              <a:t>Auth, perfis semi-abertos, comentários e feed in-app.</a:t>
             </a:r>
           </a:p>
         </p:txBody>
@@ -6548,7 +6514,7 @@
                 </a:solidFill>
                 <a:latin typeface="Arial"/>
               </a:rPr>
-              <a:t>Resumo do projeto para o cliente (IA-tradutora) + drafts de Próximos Passos para o consultor revisar (IA-redutora de fricção).</a:t>
+              <a:t>Resumo do projeto (tradutora) + drafts assistidos (redutora de fricção).</a:t>
             </a:r>
           </a:p>
         </p:txBody>
@@ -6741,7 +6707,7 @@
                 </a:solidFill>
                 <a:latin typeface="Arial"/>
               </a:rPr>
-              <a:t>Quantitativa: precisão, recall, F1 e Kappa em 3 projetos com gabarito manual. Qualitativa: Likert separado para consultoria e clientes.</a:t>
+              <a:t>Precisão · recall · F1 · Kappa em 3 projetos + Likert × 2 audiências.</a:t>
             </a:r>
           </a:p>
         </p:txBody>
@@ -6905,7 +6871,7 @@
                 </a:solidFill>
                 <a:latin typeface="Arial"/>
               </a:rPr>
-              <a:t>Equipe ObiOne · Doutorado PPGEC · UPE/POLI · Maio 2026</a:t>
+              <a:t>Equipe ObiOne · UPE/POLI · Maio 2026</a:t>
             </a:r>
           </a:p>
         </p:txBody>
@@ -6940,7 +6906,7 @@
                 </a:solidFill>
                 <a:latin typeface="Arial"/>
               </a:rPr>
-              <a:t>4 / 7</a:t>
+              <a:t>5 / 8</a:t>
             </a:r>
           </a:p>
         </p:txBody>
@@ -7374,7 +7340,7 @@
                 </a:solidFill>
                 <a:latin typeface="Arial"/>
               </a:rPr>
-              <a:t>Semana 9</a:t>
+              <a:t>22-28 mai</a:t>
             </a:r>
           </a:p>
         </p:txBody>
@@ -7584,7 +7550,7 @@
                 </a:solidFill>
                 <a:latin typeface="Arial"/>
               </a:rPr>
-              <a:t>Destrava todo o Sprint 1 e SR2.</a:t>
+              <a:t>Destrava todo o Sprint 1.</a:t>
             </a:r>
           </a:p>
         </p:txBody>
@@ -7925,7 +7891,7 @@
                 </a:solidFill>
                 <a:latin typeface="Arial"/>
               </a:rPr>
-              <a:t>Semanas 10-11</a:t>
+              <a:t>29 mai - 11 jun</a:t>
             </a:r>
           </a:p>
         </p:txBody>
@@ -8100,7 +8066,7 @@
                 </a:solidFill>
                 <a:latin typeface="Arial"/>
               </a:rPr>
-              <a:t>Núcleo técnico da extração de atributos do MPO.</a:t>
+              <a:t>Núcleo técnico da extração de atributos.</a:t>
             </a:r>
           </a:p>
         </p:txBody>
@@ -8441,7 +8407,7 @@
                 </a:solidFill>
                 <a:latin typeface="Arial"/>
               </a:rPr>
-              <a:t>Semanas 12-13</a:t>
+              <a:t>12-25 jun</a:t>
             </a:r>
           </a:p>
         </p:txBody>
@@ -8651,7 +8617,7 @@
                 </a:solidFill>
                 <a:latin typeface="Arial"/>
               </a:rPr>
-              <a:t>Onde a comunidade do observatório vive.</a:t>
+              <a:t>Onde a comunidade vive.</a:t>
             </a:r>
           </a:p>
         </p:txBody>
@@ -8992,7 +8958,7 @@
                 </a:solidFill>
                 <a:latin typeface="Arial"/>
               </a:rPr>
-              <a:t>Semana 14</a:t>
+              <a:t>26 jun - 2 jul</a:t>
             </a:r>
           </a:p>
         </p:txBody>
@@ -9202,7 +9168,7 @@
                 </a:solidFill>
                 <a:latin typeface="Arial"/>
               </a:rPr>
-              <a:t>Fecha o ciclo DSR (Hevner et al., 2004).</a:t>
+              <a:t>Fecha o ciclo DSR.</a:t>
             </a:r>
           </a:p>
         </p:txBody>
@@ -9315,7 +9281,7 @@
                 </a:solidFill>
                 <a:latin typeface="Arial"/>
               </a:rPr>
-              <a:t>Relato + Apresentação final</a:t>
+              <a:t>Relato + Apresentação</a:t>
             </a:r>
           </a:p>
         </p:txBody>
@@ -9350,200 +9316,7 @@
                 </a:solidFill>
                 <a:latin typeface="Arial"/>
               </a:rPr>
-              <a:t>Escrita do relato: semanas 15-16 (Cynthia) · Apresentação final: 10/07 (Moisés)</a:t>
-            </a:r>
-          </a:p>
-        </p:txBody>
-      </p:sp>
-      <p:sp>
-        <p:nvSpPr>
-          <p:cNvPr id="117" name="Rectangle 116"/>
-          <p:cNvSpPr/>
-          <p:nvPr/>
-        </p:nvSpPr>
-        <p:spPr>
-          <a:xfrm>
-            <a:off x="7000000" y="5577840"/>
-            <a:ext cx="4963600" cy="777240"/>
-          </a:xfrm>
-          <a:prstGeom prst="rect">
-            <a:avLst/>
-          </a:prstGeom>
-          <a:solidFill>
-            <a:srgbClr val="F4F4F6"/>
-          </a:solidFill>
-          <a:ln w="19050">
-            <a:solidFill>
-              <a:srgbClr val="E69A29"/>
-            </a:solidFill>
-          </a:ln>
-        </p:spPr>
-        <p:style>
-          <a:lnRef idx="1">
-            <a:schemeClr val="accent1"/>
-          </a:lnRef>
-          <a:fillRef idx="3">
-            <a:schemeClr val="accent1"/>
-          </a:fillRef>
-          <a:effectRef idx="2">
-            <a:schemeClr val="accent1"/>
-          </a:effectRef>
-          <a:fontRef idx="minor">
-            <a:schemeClr val="lt1"/>
-          </a:fontRef>
-        </p:style>
-        <p:txBody>
-          <a:bodyPr rtlCol="0" anchor="ctr"/>
-          <a:lstStyle/>
-          <a:p>
-            <a:pPr algn="ctr"/>
-          </a:p>
-        </p:txBody>
-      </p:sp>
-      <p:sp>
-        <p:nvSpPr>
-          <p:cNvPr id="118" name="Rectangle 117"/>
-          <p:cNvSpPr/>
-          <p:nvPr/>
-        </p:nvSpPr>
-        <p:spPr>
-          <a:xfrm>
-            <a:off x="7000000" y="5577840"/>
-            <a:ext cx="91440" cy="777240"/>
-          </a:xfrm>
-          <a:prstGeom prst="rect">
-            <a:avLst/>
-          </a:prstGeom>
-          <a:solidFill>
-            <a:srgbClr val="E69A29"/>
-          </a:solidFill>
-          <a:ln>
-            <a:noFill/>
-          </a:ln>
-        </p:spPr>
-        <p:style>
-          <a:lnRef idx="1">
-            <a:schemeClr val="accent1"/>
-          </a:lnRef>
-          <a:fillRef idx="3">
-            <a:schemeClr val="accent1"/>
-          </a:fillRef>
-          <a:effectRef idx="2">
-            <a:schemeClr val="accent1"/>
-          </a:effectRef>
-          <a:fontRef idx="minor">
-            <a:schemeClr val="lt1"/>
-          </a:fontRef>
-        </p:style>
-        <p:txBody>
-          <a:bodyPr rtlCol="0" anchor="ctr"/>
-          <a:lstStyle/>
-          <a:p>
-            <a:pPr algn="ctr"/>
-          </a:p>
-        </p:txBody>
-      </p:sp>
-      <p:sp>
-        <p:nvSpPr>
-          <p:cNvPr id="119" name="TextBox 118"/>
-          <p:cNvSpPr txBox="1"/>
-          <p:nvPr/>
-        </p:nvSpPr>
-        <p:spPr>
-          <a:xfrm>
-            <a:off x="7200000" y="5623560"/>
-            <a:ext cx="4700000" cy="228600"/>
-          </a:xfrm>
-          <a:prstGeom prst="rect">
-            <a:avLst/>
-          </a:prstGeom>
-          <a:noFill/>
-        </p:spPr>
-        <p:txBody>
-          <a:bodyPr wrap="square" lIns="0" rIns="0" tIns="0" bIns="0" anchor="t">
-            <a:spAutoFit/>
-          </a:bodyPr>
-          <a:lstStyle/>
-          <a:p>
-            <a:pPr algn="l"/>
-            <a:r>
-              <a:rPr sz="900" b="1" i="0">
-                <a:solidFill>
-                  <a:srgbClr val="C8102E"/>
-                </a:solidFill>
-                <a:latin typeface="Arial"/>
-              </a:rPr>
-              <a:t>PLANO B (LIKERT)</a:t>
-            </a:r>
-          </a:p>
-        </p:txBody>
-      </p:sp>
-      <p:sp>
-        <p:nvSpPr>
-          <p:cNvPr id="120" name="TextBox 119"/>
-          <p:cNvSpPr txBox="1"/>
-          <p:nvPr/>
-        </p:nvSpPr>
-        <p:spPr>
-          <a:xfrm>
-            <a:off x="7200000" y="5852160"/>
-            <a:ext cx="4700000" cy="228600"/>
-          </a:xfrm>
-          <a:prstGeom prst="rect">
-            <a:avLst/>
-          </a:prstGeom>
-          <a:noFill/>
-        </p:spPr>
-        <p:txBody>
-          <a:bodyPr wrap="square" lIns="0" rIns="0" tIns="0" bIns="0" anchor="t">
-            <a:spAutoFit/>
-          </a:bodyPr>
-          <a:lstStyle/>
-          <a:p>
-            <a:pPr algn="l"/>
-            <a:r>
-              <a:rPr sz="1100" b="1" i="0">
-                <a:solidFill>
-                  <a:srgbClr val="C8102E"/>
-                </a:solidFill>
-                <a:latin typeface="Arial"/>
-              </a:rPr>
-              <a:t>Se Likert dos clientes não atingir N ≥ 8:</a:t>
-            </a:r>
-          </a:p>
-        </p:txBody>
-      </p:sp>
-      <p:sp>
-        <p:nvSpPr>
-          <p:cNvPr id="121" name="TextBox 120"/>
-          <p:cNvSpPr txBox="1"/>
-          <p:nvPr/>
-        </p:nvSpPr>
-        <p:spPr>
-          <a:xfrm>
-            <a:off x="7200000" y="6080760"/>
-            <a:ext cx="4700000" cy="304800"/>
-          </a:xfrm>
-          <a:prstGeom prst="rect">
-            <a:avLst/>
-          </a:prstGeom>
-          <a:noFill/>
-        </p:spPr>
-        <p:txBody>
-          <a:bodyPr wrap="square" lIns="0" rIns="0" tIns="0" bIns="0" anchor="t">
-            <a:spAutoFit/>
-          </a:bodyPr>
-          <a:lstStyle/>
-          <a:p>
-            <a:pPr algn="l"/>
-            <a:r>
-              <a:rPr sz="1000" b="0" i="0">
-                <a:solidFill>
-                  <a:srgbClr val="4A4A5A"/>
-                </a:solidFill>
-                <a:latin typeface="Arial"/>
-              </a:rPr>
-              <a:t>Aceitar 1 respondente por projeto e declarar como limitação metodológica no relato.</a:t>
+              <a:t>Escrita do relato: 3-9 jul · Apresentação final: 10/07</a:t>
             </a:r>
           </a:p>
         </p:txBody>
@@ -9664,7 +9437,7 @@
                 </a:solidFill>
                 <a:latin typeface="Arial"/>
               </a:rPr>
-              <a:t>Equipe ObiOne · Doutorado PPGEC · UPE/POLI · Maio 2026</a:t>
+              <a:t>Equipe ObiOne · UPE/POLI · Maio 2026</a:t>
             </a:r>
           </a:p>
         </p:txBody>
@@ -9699,7 +9472,7 @@
                 </a:solidFill>
                 <a:latin typeface="Arial"/>
               </a:rPr>
-              <a:t>5 / 7</a:t>
+              <a:t>6 / 8</a:t>
             </a:r>
           </a:p>
         </p:txBody>
@@ -10020,7 +9793,7 @@
                 </a:solidFill>
                 <a:latin typeface="Arial"/>
               </a:rPr>
-              <a:t>Sprint 0 · esta semana</a:t>
+              <a:t>Sprint 1 · esta semana</a:t>
             </a:r>
           </a:p>
         </p:txBody>
@@ -10125,7 +9898,7 @@
                 </a:solidFill>
                 <a:latin typeface="Arial"/>
               </a:rPr>
-              <a:t>18 funcionais + 9 não funcionais em formato ficha simplificada.</a:t>
+              <a:t>18 funcionais + 9 não funcionais em formato ficha.</a:t>
             </a:r>
           </a:p>
         </p:txBody>
@@ -10230,7 +10003,7 @@
                 </a:solidFill>
                 <a:latin typeface="Arial"/>
               </a:rPr>
-              <a:t>44 atributos do Quadro 37 categorizados como estruturado, texto livre ou fora de escopo.</a:t>
+              <a:t>44 atributos do Quadro 37 categorizados.</a:t>
             </a:r>
           </a:p>
         </p:txBody>
@@ -10335,7 +10108,7 @@
                 </a:solidFill>
                 <a:latin typeface="Arial"/>
               </a:rPr>
-              <a:t>Rubrica híbrida 0/0,5/1 + Kappa para concordância entre avaliadores.</a:t>
+              <a:t>Rubrica híbrida 0/0,5/1 + Kappa.</a:t>
             </a:r>
           </a:p>
         </p:txBody>
@@ -10563,7 +10336,7 @@
                 </a:solidFill>
                 <a:latin typeface="Arial"/>
               </a:rPr>
-              <a:t>Sprint 1 (sem 9-10)</a:t>
+              <a:t>Sprint 2 (22 mai - 4 jun)</a:t>
             </a:r>
           </a:p>
         </p:txBody>
@@ -10598,7 +10371,7 @@
                 </a:solidFill>
                 <a:latin typeface="Arial"/>
               </a:rPr>
-              <a:t>Cadastro · upload · autenticação · pipeline LLM rodando nos 5 projetos.</a:t>
+              <a:t>Cadastro · upload · auth · pipeline LLM nos 5 projetos.</a:t>
             </a:r>
           </a:p>
         </p:txBody>
@@ -10703,7 +10476,7 @@
                 </a:solidFill>
                 <a:latin typeface="Arial"/>
               </a:rPr>
-              <a:t>Valença Odontologia como piloto da rubrica · depois Freire Batista e Kaka JJ.</a:t>
+              <a:t>Valença piloto · depois Freire Batista e Kaka JJ.</a:t>
             </a:r>
           </a:p>
         </p:txBody>
@@ -10808,7 +10581,7 @@
                 </a:solidFill>
                 <a:latin typeface="Arial"/>
               </a:rPr>
-              <a:t>Dashboard + IA-Assistente operacionais nos 5 projetos.</a:t>
+              <a:t>Dashboard + IA-Assistente operacionais.</a:t>
             </a:r>
           </a:p>
         </p:txBody>
@@ -10972,7 +10745,7 @@
                 </a:solidFill>
                 <a:latin typeface="Arial"/>
               </a:rPr>
-              <a:t>Equipe ObiOne · Doutorado PPGEC · UPE/POLI · Maio 2026</a:t>
+              <a:t>Equipe ObiOne · UPE/POLI · Maio 2026</a:t>
             </a:r>
           </a:p>
         </p:txBody>
@@ -11007,7 +10780,7 @@
                 </a:solidFill>
                 <a:latin typeface="Arial"/>
               </a:rPr>
-              <a:t>6 / 7</a:t>
+              <a:t>7 / 8</a:t>
             </a:r>
           </a:p>
         </p:txBody>
@@ -11318,7 +11091,7 @@
                 </a:solidFill>
                 <a:latin typeface="Arial"/>
               </a:rPr>
-              <a:t>Bruno · Cynthia · Moisés · Raniel  ·  Doutorado PPGEC  ·  UPE/POLI</a:t>
+              <a:t>Equipe ObiOne  ·  UPE/POLI</a:t>
             </a:r>
           </a:p>
         </p:txBody>
@@ -11358,6 +11131,1101 @@
           </a:p>
         </p:txBody>
       </p:sp>
+    </p:spTree>
+  </p:cSld>
+  <p:clrMapOvr>
+    <a:masterClrMapping/>
+  </p:clrMapOvr>
+</p:sld>
+</file>
+
+<file path=ppt/slides/slide8.xml><?xml version="1.0" encoding="utf-8"?>
+<p:sld xmlns:a="http://schemas.openxmlformats.org/drawingml/2006/main" xmlns:p="http://schemas.openxmlformats.org/presentationml/2006/main" xmlns:r="http://schemas.openxmlformats.org/officeDocument/2006/relationships">
+  <p:cSld>
+    <p:spTree>
+      <p:nvGrpSpPr>
+        <p:cNvPr id="1" name=""/>
+        <p:cNvGrpSpPr/>
+        <p:nvPr/>
+      </p:nvGrpSpPr>
+      <p:grpSpPr/>
+      <p:sp>
+        <p:nvSpPr>
+          <p:cNvPr id="3" name="TextBox 2"/>
+          <p:cNvSpPr txBox="1"/>
+          <p:nvPr/>
+        </p:nvSpPr>
+        <p:spPr>
+          <a:xfrm>
+            <a:off x="457200" y="457200"/>
+            <a:ext cx="11277600" cy="228600"/>
+          </a:xfrm>
+          <a:prstGeom prst="rect">
+            <a:avLst/>
+          </a:prstGeom>
+          <a:noFill/>
+        </p:spPr>
+        <p:txBody>
+          <a:bodyPr wrap="square" lIns="0" rIns="0" tIns="0" bIns="0" anchor="t">
+            <a:spAutoFit/>
+          </a:bodyPr>
+          <a:lstStyle/>
+          <a:p>
+            <a:pPr algn="l"/>
+            <a:r>
+              <a:rPr sz="1100" b="1" i="0">
+                <a:solidFill>
+                  <a:srgbClr val="E0261E"/>
+                </a:solidFill>
+                <a:latin typeface="Arial"/>
+              </a:rPr>
+              <a:t>O QUE É O OBIONE</a:t>
+            </a:r>
+          </a:p>
+        </p:txBody>
+      </p:sp>
+      <p:sp>
+        <p:nvSpPr>
+          <p:cNvPr id="4" name="TextBox 3"/>
+          <p:cNvSpPr txBox="1"/>
+          <p:nvPr/>
+        </p:nvSpPr>
+        <p:spPr>
+          <a:xfrm>
+            <a:off x="457200" y="685800"/>
+            <a:ext cx="10000000" cy="685800"/>
+          </a:xfrm>
+          <a:prstGeom prst="rect">
+            <a:avLst/>
+          </a:prstGeom>
+          <a:noFill/>
+        </p:spPr>
+        <p:txBody>
+          <a:bodyPr wrap="square" lIns="0" rIns="0" tIns="0" bIns="0" anchor="t">
+            <a:spAutoFit/>
+          </a:bodyPr>
+          <a:lstStyle/>
+          <a:p>
+            <a:pPr algn="l"/>
+            <a:r>
+              <a:rPr sz="2800" b="1" i="0">
+                <a:solidFill>
+                  <a:srgbClr val="1F3A6B"/>
+                </a:solidFill>
+                <a:latin typeface="Arial"/>
+              </a:rPr>
+              <a:t>Observatório-de-portfólio para consultoria de projetos</a:t>
+            </a:r>
+          </a:p>
+        </p:txBody>
+      </p:sp>
+      <p:sp>
+        <p:nvSpPr>
+          <p:cNvPr id="5" name="Rectangle 4"/>
+          <p:cNvSpPr/>
+          <p:nvPr/>
+        </p:nvSpPr>
+        <p:spPr>
+          <a:xfrm>
+            <a:off x="457200" y="1432560"/>
+            <a:ext cx="685800" cy="36576"/>
+          </a:xfrm>
+          <a:prstGeom prst="rect">
+            <a:avLst/>
+          </a:prstGeom>
+          <a:solidFill>
+            <a:srgbClr val="E0261E"/>
+          </a:solidFill>
+          <a:ln>
+            <a:noFill/>
+          </a:ln>
+        </p:spPr>
+        <p:style>
+          <a:lnRef idx="1">
+            <a:schemeClr val="accent1"/>
+          </a:lnRef>
+          <a:fillRef idx="3">
+            <a:schemeClr val="accent1"/>
+          </a:fillRef>
+          <a:effectRef idx="2">
+            <a:schemeClr val="accent1"/>
+          </a:effectRef>
+          <a:fontRef idx="minor">
+            <a:schemeClr val="lt1"/>
+          </a:fontRef>
+        </p:style>
+        <p:txBody>
+          <a:bodyPr rtlCol="0" anchor="ctr"/>
+          <a:lstStyle/>
+          <a:p>
+            <a:pPr algn="ctr"/>
+          </a:p>
+        </p:txBody>
+      </p:sp>
+      <p:sp>
+        <p:nvSpPr>
+          <p:cNvPr id="6" name="Rectangle 5"/>
+          <p:cNvSpPr/>
+          <p:nvPr/>
+        </p:nvSpPr>
+        <p:spPr>
+          <a:xfrm>
+            <a:off x="685800" y="1828800"/>
+            <a:ext cx="5486400" cy="4114800"/>
+          </a:xfrm>
+          <a:prstGeom prst="rect">
+            <a:avLst/>
+          </a:prstGeom>
+          <a:solidFill>
+            <a:srgbClr val="F4F4F6"/>
+          </a:solidFill>
+          <a:ln w="9525">
+            <a:solidFill>
+              <a:srgbClr val="D4D4DC"/>
+            </a:solidFill>
+          </a:ln>
+        </p:spPr>
+        <p:style>
+          <a:lnRef idx="1">
+            <a:schemeClr val="accent1"/>
+          </a:lnRef>
+          <a:fillRef idx="3">
+            <a:schemeClr val="accent1"/>
+          </a:fillRef>
+          <a:effectRef idx="2">
+            <a:schemeClr val="accent1"/>
+          </a:effectRef>
+          <a:fontRef idx="minor">
+            <a:schemeClr val="lt1"/>
+          </a:fontRef>
+        </p:style>
+        <p:txBody>
+          <a:bodyPr rtlCol="0" anchor="ctr"/>
+          <a:lstStyle/>
+          <a:p>
+            <a:pPr algn="ctr"/>
+          </a:p>
+        </p:txBody>
+      </p:sp>
+      <p:sp>
+        <p:nvSpPr>
+          <p:cNvPr id="7" name="TextBox 6"/>
+          <p:cNvSpPr txBox="1"/>
+          <p:nvPr/>
+        </p:nvSpPr>
+        <p:spPr>
+          <a:xfrm>
+            <a:off x="914400" y="2057400"/>
+            <a:ext cx="5029200" cy="304800"/>
+          </a:xfrm>
+          <a:prstGeom prst="rect">
+            <a:avLst/>
+          </a:prstGeom>
+          <a:noFill/>
+        </p:spPr>
+        <p:txBody>
+          <a:bodyPr wrap="square" lIns="0" rIns="0" tIns="0" bIns="0" anchor="t">
+            <a:spAutoFit/>
+          </a:bodyPr>
+          <a:lstStyle/>
+          <a:p>
+            <a:pPr algn="l"/>
+            <a:r>
+              <a:rPr sz="1100" b="1" i="0">
+                <a:solidFill>
+                  <a:srgbClr val="E0261E"/>
+                </a:solidFill>
+                <a:latin typeface="Arial"/>
+              </a:rPr>
+              <a:t>PARA QUEM E PARA QUÊ</a:t>
+            </a:r>
+          </a:p>
+        </p:txBody>
+      </p:sp>
+      <p:sp>
+        <p:nvSpPr>
+          <p:cNvPr id="8" name="TextBox 7"/>
+          <p:cNvSpPr txBox="1"/>
+          <p:nvPr/>
+        </p:nvSpPr>
+        <p:spPr>
+          <a:xfrm>
+            <a:off x="914400" y="2377440"/>
+            <a:ext cx="5029200" cy="457200"/>
+          </a:xfrm>
+          <a:prstGeom prst="rect">
+            <a:avLst/>
+          </a:prstGeom>
+          <a:noFill/>
+        </p:spPr>
+        <p:txBody>
+          <a:bodyPr wrap="square" lIns="0" rIns="0" tIns="0" bIns="0" anchor="t">
+            <a:spAutoFit/>
+          </a:bodyPr>
+          <a:lstStyle/>
+          <a:p>
+            <a:pPr algn="l"/>
+            <a:r>
+              <a:rPr sz="2200" b="1" i="0">
+                <a:solidFill>
+                  <a:srgbClr val="1F3A6B"/>
+                </a:solidFill>
+                <a:latin typeface="Arial"/>
+              </a:rPr>
+              <a:t>Consultoria · Clientes · Comunidade</a:t>
+            </a:r>
+          </a:p>
+          <a:p>
+            <a:pPr algn="l"/>
+            <a:r>
+              <a:rPr sz="800" b="0" i="0">
+                <a:solidFill>
+                  <a:srgbClr val="2C2C3E"/>
+                </a:solidFill>
+                <a:latin typeface="Arial"/>
+              </a:rPr>
+              <a:t/>
+            </a:r>
+          </a:p>
+          <a:p>
+            <a:pPr algn="l">
+              <a:spcAft>
+                <a:spcPts val="800"/>
+              </a:spcAft>
+            </a:pPr>
+            <a:r>
+              <a:rPr sz="1300" b="0" i="0">
+                <a:solidFill>
+                  <a:srgbClr val="2C2C3E"/>
+                </a:solidFill>
+                <a:latin typeface="Arial"/>
+              </a:rPr>
+              <a:t>Consultoria: observa o portfólio como conhecimento estruturado, não como pasta de Drive.</a:t>
+            </a:r>
+          </a:p>
+          <a:p>
+            <a:pPr algn="l">
+              <a:spcAft>
+                <a:spcPts val="800"/>
+              </a:spcAft>
+            </a:pPr>
+            <a:r>
+              <a:rPr sz="1300" b="0" i="0">
+                <a:solidFill>
+                  <a:srgbClr val="2C2C3E"/>
+                </a:solidFill>
+                <a:latin typeface="Arial"/>
+              </a:rPr>
+              <a:t>Cliente: acompanha o próprio projeto em linguagem acessível, sem depender de reunião.</a:t>
+            </a:r>
+          </a:p>
+          <a:p>
+            <a:pPr algn="l"/>
+            <a:r>
+              <a:rPr sz="1300" b="0" i="1">
+                <a:solidFill>
+                  <a:srgbClr val="2C2C3E"/>
+                </a:solidFill>
+                <a:latin typeface="Arial"/>
+              </a:rPr>
+              <a:t>Comunidade vira ativo: comentários, comparativos cross-projeto, IA mantém o tecido vivo.</a:t>
+            </a:r>
+          </a:p>
+        </p:txBody>
+      </p:sp>
+      <p:sp>
+        <p:nvSpPr>
+          <p:cNvPr id="13" name="Rectangle 12"/>
+          <p:cNvSpPr/>
+          <p:nvPr/>
+        </p:nvSpPr>
+        <p:spPr>
+          <a:xfrm>
+            <a:off x="457200" y="6400800"/>
+            <a:ext cx="11277600" cy="15240"/>
+          </a:xfrm>
+          <a:prstGeom prst="rect">
+            <a:avLst/>
+          </a:prstGeom>
+          <a:solidFill>
+            <a:srgbClr val="E0261E"/>
+          </a:solidFill>
+          <a:ln>
+            <a:noFill/>
+          </a:ln>
+        </p:spPr>
+        <p:style>
+          <a:lnRef idx="1">
+            <a:schemeClr val="accent1"/>
+          </a:lnRef>
+          <a:fillRef idx="3">
+            <a:schemeClr val="accent1"/>
+          </a:fillRef>
+          <a:effectRef idx="2">
+            <a:schemeClr val="accent1"/>
+          </a:effectRef>
+          <a:fontRef idx="minor">
+            <a:schemeClr val="lt1"/>
+          </a:fontRef>
+        </p:style>
+        <p:txBody>
+          <a:bodyPr rtlCol="0" anchor="ctr"/>
+          <a:lstStyle/>
+          <a:p>
+            <a:pPr algn="ctr"/>
+          </a:p>
+        </p:txBody>
+      </p:sp>
+      <p:sp>
+        <p:nvSpPr>
+          <p:cNvPr id="16" name="Rectangle 15"/>
+          <p:cNvSpPr/>
+          <p:nvPr/>
+        </p:nvSpPr>
+        <p:spPr>
+          <a:xfrm>
+            <a:off x="6400800" y="1828800"/>
+            <a:ext cx="5486400" cy="4114800"/>
+          </a:xfrm>
+          <a:prstGeom prst="rect">
+            <a:avLst/>
+          </a:prstGeom>
+          <a:solidFill>
+            <a:srgbClr val="F4F4F6"/>
+          </a:solidFill>
+          <a:ln w="9525">
+            <a:solidFill>
+              <a:srgbClr val="D4D4DC"/>
+            </a:solidFill>
+          </a:ln>
+        </p:spPr>
+        <p:style>
+          <a:lnRef idx="1">
+            <a:schemeClr val="accent1"/>
+          </a:lnRef>
+          <a:fillRef idx="3">
+            <a:schemeClr val="accent1"/>
+          </a:fillRef>
+          <a:effectRef idx="2">
+            <a:schemeClr val="accent1"/>
+          </a:effectRef>
+          <a:fontRef idx="minor">
+            <a:schemeClr val="lt1"/>
+          </a:fontRef>
+        </p:style>
+        <p:txBody>
+          <a:bodyPr rtlCol="0" anchor="ctr"/>
+          <a:lstStyle/>
+          <a:p>
+            <a:pPr algn="ctr"/>
+          </a:p>
+        </p:txBody>
+      </p:sp>
+      <p:sp>
+        <p:nvSpPr>
+          <p:cNvPr id="17" name="TextBox 16"/>
+          <p:cNvSpPr txBox="1"/>
+          <p:nvPr/>
+        </p:nvSpPr>
+        <p:spPr>
+          <a:xfrm>
+            <a:off x="6629400" y="2057400"/>
+            <a:ext cx="5029200" cy="304800"/>
+          </a:xfrm>
+          <a:prstGeom prst="rect">
+            <a:avLst/>
+          </a:prstGeom>
+          <a:noFill/>
+        </p:spPr>
+        <p:txBody>
+          <a:bodyPr wrap="square" lIns="0" rIns="0" tIns="0" bIns="0" anchor="t">
+            <a:spAutoFit/>
+          </a:bodyPr>
+          <a:lstStyle/>
+          <a:p>
+            <a:pPr algn="l"/>
+            <a:r>
+              <a:rPr sz="1100" b="1" i="0">
+                <a:solidFill>
+                  <a:srgbClr val="E0261E"/>
+                </a:solidFill>
+                <a:latin typeface="Arial"/>
+              </a:rPr>
+              <a:t>DIFERENCIAL</a:t>
+            </a:r>
+          </a:p>
+        </p:txBody>
+      </p:sp>
+      <p:sp>
+        <p:nvSpPr>
+          <p:cNvPr id="18" name="TextBox 17"/>
+          <p:cNvSpPr txBox="1"/>
+          <p:nvPr/>
+        </p:nvSpPr>
+        <p:spPr>
+          <a:xfrm>
+            <a:off x="6629400" y="2377440"/>
+            <a:ext cx="5029200" cy="457200"/>
+          </a:xfrm>
+          <a:prstGeom prst="rect">
+            <a:avLst/>
+          </a:prstGeom>
+          <a:noFill/>
+        </p:spPr>
+        <p:txBody>
+          <a:bodyPr wrap="square" lIns="0" rIns="0" tIns="0" bIns="0" anchor="t">
+            <a:spAutoFit/>
+          </a:bodyPr>
+          <a:lstStyle/>
+          <a:p>
+            <a:pPr algn="l"/>
+            <a:r>
+              <a:rPr sz="2200" b="1" i="0">
+                <a:solidFill>
+                  <a:srgbClr val="1F3A6B"/>
+                </a:solidFill>
+                <a:latin typeface="Arial"/>
+              </a:rPr>
+              <a:t>Combinação inédita em 3 vetores</a:t>
+            </a:r>
+          </a:p>
+        </p:txBody>
+      </p:sp>
+      <p:sp>
+        <p:nvSpPr>
+          <p:cNvPr id="19" name="TextBox 18"/>
+          <p:cNvSpPr txBox="1"/>
+          <p:nvPr/>
+        </p:nvSpPr>
+        <p:spPr>
+          <a:xfrm>
+            <a:off x="6629400" y="3017520"/>
+            <a:ext cx="1500000" cy="365760"/>
+          </a:xfrm>
+          <a:prstGeom prst="rect">
+            <a:avLst/>
+          </a:prstGeom>
+          <a:noFill/>
+        </p:spPr>
+        <p:txBody>
+          <a:bodyPr wrap="square" lIns="0" rIns="0" tIns="0" bIns="0" anchor="t">
+            <a:spAutoFit/>
+          </a:bodyPr>
+          <a:lstStyle/>
+          <a:p>
+            <a:pPr algn="l"/>
+            <a:r>
+              <a:rPr sz="2200" b="1" i="0">
+                <a:solidFill>
+                  <a:srgbClr val="E0261E"/>
+                </a:solidFill>
+                <a:latin typeface="Arial"/>
+              </a:rPr>
+              <a:t>vs. PM</a:t>
+            </a:r>
+          </a:p>
+        </p:txBody>
+      </p:sp>
+      <p:sp>
+        <p:nvSpPr>
+          <p:cNvPr id="20" name="TextBox 19"/>
+          <p:cNvSpPr txBox="1"/>
+          <p:nvPr/>
+        </p:nvSpPr>
+        <p:spPr>
+          <a:xfrm>
+            <a:off x="8200000" y="3048000"/>
+            <a:ext cx="3500000" cy="304800"/>
+          </a:xfrm>
+          <a:prstGeom prst="rect">
+            <a:avLst/>
+          </a:prstGeom>
+          <a:noFill/>
+        </p:spPr>
+        <p:txBody>
+          <a:bodyPr wrap="square" lIns="0" rIns="0" tIns="0" bIns="0" anchor="t">
+            <a:spAutoFit/>
+          </a:bodyPr>
+          <a:lstStyle/>
+          <a:p>
+            <a:pPr algn="l"/>
+            <a:r>
+              <a:rPr sz="1200" b="1" i="0">
+                <a:solidFill>
+                  <a:srgbClr val="1F3A6B"/>
+                </a:solidFill>
+                <a:latin typeface="Arial"/>
+              </a:rPr>
+              <a:t>Jira, Trello: gerenciam tarefas e prazos</a:t>
+            </a:r>
+          </a:p>
+        </p:txBody>
+      </p:sp>
+      <p:sp>
+        <p:nvSpPr>
+          <p:cNvPr id="21" name="TextBox 20"/>
+          <p:cNvSpPr txBox="1"/>
+          <p:nvPr/>
+        </p:nvSpPr>
+        <p:spPr>
+          <a:xfrm>
+            <a:off x="8200000" y="3291840"/>
+            <a:ext cx="3500000" cy="228600"/>
+          </a:xfrm>
+          <a:prstGeom prst="rect">
+            <a:avLst/>
+          </a:prstGeom>
+          <a:noFill/>
+        </p:spPr>
+        <p:txBody>
+          <a:bodyPr wrap="square" lIns="0" rIns="0" tIns="0" bIns="0" anchor="t">
+            <a:spAutoFit/>
+          </a:bodyPr>
+          <a:lstStyle/>
+          <a:p>
+            <a:pPr algn="l"/>
+            <a:r>
+              <a:rPr sz="1000" b="0" i="0">
+                <a:solidFill>
+                  <a:srgbClr val="4A4A5A"/>
+                </a:solidFill>
+                <a:latin typeface="Arial"/>
+              </a:rPr>
+              <a:t>ObiOne observa o projeto como objeto (MPO · 44 atributos)</a:t>
+            </a:r>
+          </a:p>
+        </p:txBody>
+      </p:sp>
+      <p:sp>
+        <p:nvSpPr>
+          <p:cNvPr id="22" name="TextBox 21"/>
+          <p:cNvSpPr txBox="1"/>
+          <p:nvPr/>
+        </p:nvSpPr>
+        <p:spPr>
+          <a:xfrm>
+            <a:off x="6629400" y="3703320"/>
+            <a:ext cx="1500000" cy="365760"/>
+          </a:xfrm>
+          <a:prstGeom prst="rect">
+            <a:avLst/>
+          </a:prstGeom>
+          <a:noFill/>
+        </p:spPr>
+        <p:txBody>
+          <a:bodyPr wrap="square" lIns="0" rIns="0" tIns="0" bIns="0" anchor="t">
+            <a:spAutoFit/>
+          </a:bodyPr>
+          <a:lstStyle/>
+          <a:p>
+            <a:pPr algn="l"/>
+            <a:r>
+              <a:rPr sz="2200" b="1" i="0">
+                <a:solidFill>
+                  <a:srgbClr val="E0261E"/>
+                </a:solidFill>
+                <a:latin typeface="Arial"/>
+              </a:rPr>
+              <a:t>vs. BI</a:t>
+            </a:r>
+          </a:p>
+        </p:txBody>
+      </p:sp>
+      <p:sp>
+        <p:nvSpPr>
+          <p:cNvPr id="23" name="TextBox 22"/>
+          <p:cNvSpPr txBox="1"/>
+          <p:nvPr/>
+        </p:nvSpPr>
+        <p:spPr>
+          <a:xfrm>
+            <a:off x="8200000" y="3733800"/>
+            <a:ext cx="3500000" cy="304800"/>
+          </a:xfrm>
+          <a:prstGeom prst="rect">
+            <a:avLst/>
+          </a:prstGeom>
+          <a:noFill/>
+        </p:spPr>
+        <p:txBody>
+          <a:bodyPr wrap="square" lIns="0" rIns="0" tIns="0" bIns="0" anchor="t">
+            <a:spAutoFit/>
+          </a:bodyPr>
+          <a:lstStyle/>
+          <a:p>
+            <a:pPr algn="l"/>
+            <a:r>
+              <a:rPr sz="1200" b="1" i="0">
+                <a:solidFill>
+                  <a:srgbClr val="1F3A6B"/>
+                </a:solidFill>
+                <a:latin typeface="Arial"/>
+              </a:rPr>
+              <a:t>Power BI, Looker: dashboards estáticos</a:t>
+            </a:r>
+          </a:p>
+        </p:txBody>
+      </p:sp>
+      <p:sp>
+        <p:nvSpPr>
+          <p:cNvPr id="24" name="TextBox 23"/>
+          <p:cNvSpPr txBox="1"/>
+          <p:nvPr/>
+        </p:nvSpPr>
+        <p:spPr>
+          <a:xfrm>
+            <a:off x="8200000" y="3977640"/>
+            <a:ext cx="3500000" cy="228600"/>
+          </a:xfrm>
+          <a:prstGeom prst="rect">
+            <a:avLst/>
+          </a:prstGeom>
+          <a:noFill/>
+        </p:spPr>
+        <p:txBody>
+          <a:bodyPr wrap="square" lIns="0" rIns="0" tIns="0" bIns="0" anchor="t">
+            <a:spAutoFit/>
+          </a:bodyPr>
+          <a:lstStyle/>
+          <a:p>
+            <a:pPr algn="l"/>
+            <a:r>
+              <a:rPr sz="1000" b="0" i="0">
+                <a:solidFill>
+                  <a:srgbClr val="4A4A5A"/>
+                </a:solidFill>
+                <a:latin typeface="Arial"/>
+              </a:rPr>
+              <a:t>ObiOne extrai significado de .docx com LLM</a:t>
+            </a:r>
+          </a:p>
+        </p:txBody>
+      </p:sp>
+      <p:sp>
+        <p:nvSpPr>
+          <p:cNvPr id="25" name="TextBox 24"/>
+          <p:cNvSpPr txBox="1"/>
+          <p:nvPr/>
+        </p:nvSpPr>
+        <p:spPr>
+          <a:xfrm>
+            <a:off x="6629400" y="4389120"/>
+            <a:ext cx="1500000" cy="365760"/>
+          </a:xfrm>
+          <a:prstGeom prst="rect">
+            <a:avLst/>
+          </a:prstGeom>
+          <a:noFill/>
+        </p:spPr>
+        <p:txBody>
+          <a:bodyPr wrap="square" lIns="0" rIns="0" tIns="0" bIns="0" anchor="t">
+            <a:spAutoFit/>
+          </a:bodyPr>
+          <a:lstStyle/>
+          <a:p>
+            <a:pPr algn="l"/>
+            <a:r>
+              <a:rPr sz="2200" b="1" i="0">
+                <a:solidFill>
+                  <a:srgbClr val="E0261E"/>
+                </a:solidFill>
+                <a:latin typeface="Arial"/>
+              </a:rPr>
+              <a:t>vs. acad</a:t>
+            </a:r>
+          </a:p>
+        </p:txBody>
+      </p:sp>
+      <p:sp>
+        <p:nvSpPr>
+          <p:cNvPr id="26" name="TextBox 25"/>
+          <p:cNvSpPr txBox="1"/>
+          <p:nvPr/>
+        </p:nvSpPr>
+        <p:spPr>
+          <a:xfrm>
+            <a:off x="8200000" y="4419600"/>
+            <a:ext cx="3500000" cy="304800"/>
+          </a:xfrm>
+          <a:prstGeom prst="rect">
+            <a:avLst/>
+          </a:prstGeom>
+          <a:noFill/>
+        </p:spPr>
+        <p:txBody>
+          <a:bodyPr wrap="square" lIns="0" rIns="0" tIns="0" bIns="0" anchor="t">
+            <a:spAutoFit/>
+          </a:bodyPr>
+          <a:lstStyle/>
+          <a:p>
+            <a:pPr algn="l"/>
+            <a:r>
+              <a:rPr sz="1200" b="1" i="0">
+                <a:solidFill>
+                  <a:srgbClr val="1F3A6B"/>
+                </a:solidFill>
+                <a:latin typeface="Arial"/>
+              </a:rPr>
+              <a:t>OPTI-PE e similares: instrumentos de pesquisa</a:t>
+            </a:r>
+          </a:p>
+        </p:txBody>
+      </p:sp>
+      <p:sp>
+        <p:nvSpPr>
+          <p:cNvPr id="27" name="TextBox 26"/>
+          <p:cNvSpPr txBox="1"/>
+          <p:nvPr/>
+        </p:nvSpPr>
+        <p:spPr>
+          <a:xfrm>
+            <a:off x="8200000" y="4663440"/>
+            <a:ext cx="3500000" cy="228600"/>
+          </a:xfrm>
+          <a:prstGeom prst="rect">
+            <a:avLst/>
+          </a:prstGeom>
+          <a:noFill/>
+        </p:spPr>
+        <p:txBody>
+          <a:bodyPr wrap="square" lIns="0" rIns="0" tIns="0" bIns="0" anchor="t">
+            <a:spAutoFit/>
+          </a:bodyPr>
+          <a:lstStyle/>
+          <a:p>
+            <a:pPr algn="l"/>
+            <a:r>
+              <a:rPr sz="1000" b="0" i="0">
+                <a:solidFill>
+                  <a:srgbClr val="4A4A5A"/>
+                </a:solidFill>
+                <a:latin typeface="Arial"/>
+              </a:rPr>
+              <a:t>ObiOne é operacional: consultoria + clientes no dia-a-dia</a:t>
+            </a:r>
+          </a:p>
+        </p:txBody>
+      </p:sp>
+      <p:sp>
+        <p:nvSpPr>
+          <p:cNvPr id="28" name="TextBox 27"/>
+          <p:cNvSpPr txBox="1"/>
+          <p:nvPr/>
+        </p:nvSpPr>
+        <p:spPr>
+          <a:xfrm>
+            <a:off x="685800" y="6172200"/>
+            <a:ext cx="11277600" cy="228600"/>
+          </a:xfrm>
+          <a:prstGeom prst="rect">
+            <a:avLst/>
+          </a:prstGeom>
+          <a:noFill/>
+        </p:spPr>
+        <p:txBody>
+          <a:bodyPr wrap="square" lIns="0" rIns="0" tIns="0" bIns="0" anchor="t">
+            <a:spAutoFit/>
+          </a:bodyPr>
+          <a:lstStyle/>
+          <a:p>
+            <a:pPr algn="ctr"/>
+            <a:r>
+              <a:rPr sz="1400" b="1" i="0">
+                <a:solidFill>
+                  <a:srgbClr val="1F3A6B"/>
+                </a:solidFill>
+                <a:latin typeface="Arial"/>
+              </a:rPr>
+              <a:t>Único a combinar observação MPO + extração com IA + comunidade ativa em uma só plataforma.</a:t>
+            </a:r>
+          </a:p>
+        </p:txBody>
+      </p:sp>
+      <p:sp>
+        <p:nvSpPr>
+          <p:cNvPr id="29" name="Rectangle 28"/>
+          <p:cNvSpPr/>
+          <p:nvPr/>
+        </p:nvSpPr>
+        <p:spPr>
+          <a:xfrm>
+            <a:off x="457200" y="6400800"/>
+            <a:ext cx="11277600" cy="15240"/>
+          </a:xfrm>
+          <a:prstGeom prst="rect">
+            <a:avLst/>
+          </a:prstGeom>
+          <a:solidFill>
+            <a:srgbClr val="E0261E"/>
+          </a:solidFill>
+          <a:ln>
+            <a:noFill/>
+          </a:ln>
+        </p:spPr>
+        <p:style>
+          <a:lnRef idx="1">
+            <a:schemeClr val="accent1"/>
+          </a:lnRef>
+          <a:fillRef idx="3">
+            <a:schemeClr val="accent1"/>
+          </a:fillRef>
+          <a:effectRef idx="2">
+            <a:schemeClr val="accent1"/>
+          </a:effectRef>
+          <a:fontRef idx="minor">
+            <a:schemeClr val="lt1"/>
+          </a:fontRef>
+        </p:style>
+        <p:txBody>
+          <a:bodyPr rtlCol="0" anchor="ctr"/>
+          <a:lstStyle/>
+          <a:p>
+            <a:pPr algn="ctr"/>
+          </a:p>
+        </p:txBody>
+      </p:sp>
+      <p:sp>
+        <p:nvSpPr>
+          <p:cNvPr id="32" name="TextBox 31"/>
+          <p:cNvSpPr txBox="1"/>
+          <p:nvPr/>
+        </p:nvSpPr>
+        <p:spPr>
+          <a:xfrm>
+            <a:off x="8200000" y="3520520"/>
+            <a:ext cx="3500000" cy="182880"/>
+          </a:xfrm>
+          <a:prstGeom prst="rect">
+            <a:avLst/>
+          </a:prstGeom>
+          <a:noFill/>
+        </p:spPr>
+        <p:txBody>
+          <a:bodyPr wrap="square" lIns="0" rIns="0" tIns="0" bIns="0" anchor="t">
+            <a:spAutoFit/>
+          </a:bodyPr>
+          <a:lstStyle/>
+          <a:p>
+            <a:pPr algn="l"/>
+            <a:r>
+              <a:rPr sz="800" b="0" i="1">
+                <a:solidFill>
+                  <a:srgbClr val="6B6B7A"/>
+                </a:solidFill>
+                <a:latin typeface="Arial"/>
+              </a:rPr>
+              <a:t>Base: Quadro 37 (Vieira, 2022 · p. 264)</a:t>
+            </a:r>
+          </a:p>
+        </p:txBody>
+      </p:sp>
+      <p:sp>
+        <p:nvSpPr>
+          <p:cNvPr id="33" name="TextBox 32"/>
+          <p:cNvSpPr txBox="1"/>
+          <p:nvPr/>
+        </p:nvSpPr>
+        <p:spPr>
+          <a:xfrm>
+            <a:off x="8200000" y="4206320"/>
+            <a:ext cx="3500000" cy="182880"/>
+          </a:xfrm>
+          <a:prstGeom prst="rect">
+            <a:avLst/>
+          </a:prstGeom>
+          <a:noFill/>
+        </p:spPr>
+        <p:txBody>
+          <a:bodyPr wrap="square" lIns="0" rIns="0" tIns="0" bIns="0" anchor="t">
+            <a:spAutoFit/>
+          </a:bodyPr>
+          <a:lstStyle/>
+          <a:p>
+            <a:pPr algn="l"/>
+            <a:r>
+              <a:rPr sz="800" b="0" i="1">
+                <a:solidFill>
+                  <a:srgbClr val="6B6B7A"/>
+                </a:solidFill>
+                <a:latin typeface="Arial"/>
+              </a:rPr>
+              <a:t>Referência: OPTI-PE (Vieira, 2022 · Cap. 5)</a:t>
+            </a:r>
+          </a:p>
+        </p:txBody>
+      </p:sp>
+      <p:sp>
+        <p:nvSpPr>
+          <p:cNvPr id="34" name="TextBox 33"/>
+          <p:cNvSpPr txBox="1"/>
+          <p:nvPr/>
+        </p:nvSpPr>
+        <p:spPr>
+          <a:xfrm>
+            <a:off x="8200000" y="4892120"/>
+            <a:ext cx="3500000" cy="182880"/>
+          </a:xfrm>
+          <a:prstGeom prst="rect">
+            <a:avLst/>
+          </a:prstGeom>
+          <a:noFill/>
+        </p:spPr>
+        <p:txBody>
+          <a:bodyPr wrap="square" lIns="0" rIns="0" tIns="0" bIns="0" anchor="t">
+            <a:spAutoFit/>
+          </a:bodyPr>
+          <a:lstStyle/>
+          <a:p>
+            <a:pPr algn="l"/>
+            <a:r>
+              <a:rPr sz="800" b="0" i="1">
+                <a:solidFill>
+                  <a:srgbClr val="6B6B7A"/>
+                </a:solidFill>
+                <a:latin typeface="Arial"/>
+              </a:rPr>
+              <a:t>Análise: levantamento de ferramentas de mercado</a:t>
+            </a:r>
+          </a:p>
+        </p:txBody>
+      </p:sp>
+      <p:sp>
+        <p:nvSpPr>
+          <p:cNvPr id="35" name="Rectangle 34"/>
+          <p:cNvSpPr/>
+          <p:nvPr/>
+        </p:nvSpPr>
+        <p:spPr>
+          <a:xfrm>
+            <a:off x="457200" y="6400800"/>
+            <a:ext cx="11277600" cy="15240"/>
+          </a:xfrm>
+          <a:prstGeom prst="rect">
+            <a:avLst/>
+          </a:prstGeom>
+          <a:solidFill>
+            <a:srgbClr val="E0261E"/>
+          </a:solidFill>
+          <a:ln>
+            <a:noFill/>
+          </a:ln>
+        </p:spPr>
+        <p:style>
+          <a:lnRef idx="1">
+            <a:schemeClr val="accent1"/>
+          </a:lnRef>
+          <a:fillRef idx="3">
+            <a:schemeClr val="accent1"/>
+          </a:fillRef>
+          <a:effectRef idx="2">
+            <a:schemeClr val="accent1"/>
+          </a:effectRef>
+          <a:fontRef idx="minor">
+            <a:schemeClr val="lt1"/>
+          </a:fontRef>
+        </p:style>
+        <p:txBody>
+          <a:bodyPr rtlCol="0" anchor="ctr"/>
+          <a:lstStyle/>
+          <a:p>
+            <a:pPr algn="ctr"/>
+          </a:p>
+        </p:txBody>
+      </p:sp>
+      <p:sp>
+        <p:nvSpPr>
+          <p:cNvPr id="36" name="TextBox 35"/>
+          <p:cNvSpPr txBox="1"/>
+          <p:nvPr/>
+        </p:nvSpPr>
+        <p:spPr>
+          <a:xfrm>
+            <a:off x="457200" y="6492240"/>
+            <a:ext cx="8000000" cy="228600"/>
+          </a:xfrm>
+          <a:prstGeom prst="rect">
+            <a:avLst/>
+          </a:prstGeom>
+          <a:noFill/>
+        </p:spPr>
+        <p:txBody>
+          <a:bodyPr wrap="square" lIns="0" rIns="0" tIns="0" bIns="0" anchor="t">
+            <a:spAutoFit/>
+          </a:bodyPr>
+          <a:lstStyle/>
+          <a:p>
+            <a:pPr algn="l"/>
+            <a:r>
+              <a:rPr sz="900" b="0" i="0">
+                <a:solidFill>
+                  <a:srgbClr val="6B6B7A"/>
+                </a:solidFill>
+                <a:latin typeface="Arial"/>
+              </a:rPr>
+              <a:t>Equipe ObiOne · UPE/POLI · Maio 2026</a:t>
+            </a:r>
+          </a:p>
+        </p:txBody>
+      </p:sp>
+      <p:sp>
+        <p:nvSpPr>
+          <p:cNvPr id="37" name="TextBox 36"/>
+          <p:cNvSpPr txBox="1"/>
+          <p:nvPr/>
+        </p:nvSpPr>
+        <p:spPr>
+          <a:xfrm>
+            <a:off x="11000000" y="6492240"/>
+            <a:ext cx="1000000" cy="228600"/>
+          </a:xfrm>
+          <a:prstGeom prst="rect">
+            <a:avLst/>
+          </a:prstGeom>
+          <a:noFill/>
+        </p:spPr>
+        <p:txBody>
+          <a:bodyPr wrap="square" lIns="0" rIns="0" tIns="0" bIns="0" anchor="t">
+            <a:spAutoFit/>
+          </a:bodyPr>
+          <a:lstStyle/>
+          <a:p>
+            <a:pPr algn="r"/>
+            <a:r>
+              <a:rPr sz="900" b="0" i="0">
+                <a:solidFill>
+                  <a:srgbClr val="6B6B7A"/>
+                </a:solidFill>
+                <a:latin typeface="Arial"/>
+              </a:rPr>
+              <a:t>4 / 8</a:t>
+            </a:r>
+          </a:p>
+        </p:txBody>
+      </p:sp>
+      <p:pic>
+        <p:nvPicPr>
+          <p:cNvPr id="38" name="Picture 37" descr="image.png"/>
+          <p:cNvPicPr>
+            <a:picLocks noChangeAspect="1"/>
+          </p:cNvPicPr>
+          <p:nvPr/>
+        </p:nvPicPr>
+        <p:blipFill>
+          <a:blip r:embed="rId2"/>
+          <a:stretch>
+            <a:fillRect/>
+          </a:stretch>
+        </p:blipFill>
+        <p:spPr>
+          <a:xfrm>
+            <a:off x="11000000" y="228600"/>
+            <a:ext cx="1066800" cy="801716"/>
+          </a:xfrm>
+          <a:prstGeom prst="rect">
+            <a:avLst/>
+          </a:prstGeom>
+        </p:spPr>
+      </p:pic>
     </p:spTree>
   </p:cSld>
   <p:clrMapOvr>

--- a/atividades/apresentacoes/sr1_2026-05-22.pptx
+++ b/atividades/apresentacoes/sr1_2026-05-22.pptx
@@ -112,6 +112,1236 @@
     </a:lvl9pPr>
   </p:defaultTextStyle>
 </p:presentation>
+</file>
+
+<file path=ppt/notesMasters/notesMaster1.xml><?xml version="1.0" encoding="utf-8"?>
+<p:notesMaster xmlns:a="http://schemas.openxmlformats.org/drawingml/2006/main" xmlns:p="http://schemas.openxmlformats.org/presentationml/2006/main" xmlns:r="http://schemas.openxmlformats.org/officeDocument/2006/relationships">
+  <p:cSld>
+    <p:bg>
+      <p:bgRef idx="1001">
+        <a:schemeClr val="bg1"/>
+      </p:bgRef>
+    </p:bg>
+    <p:spTree>
+      <p:nvGrpSpPr>
+        <p:cNvPr id="1" name=""/>
+        <p:cNvGrpSpPr/>
+        <p:nvPr/>
+      </p:nvGrpSpPr>
+      <p:grpSpPr>
+        <a:xfrm>
+          <a:off x="0" y="0"/>
+          <a:ext cx="0" cy="0"/>
+          <a:chOff x="0" y="0"/>
+          <a:chExt cx="0" cy="0"/>
+        </a:xfrm>
+      </p:grpSpPr>
+      <p:sp>
+        <p:nvSpPr>
+          <p:cNvPr id="2" name="Header Placeholder 1"/>
+          <p:cNvSpPr>
+            <a:spLocks noGrp="1"/>
+          </p:cNvSpPr>
+          <p:nvPr>
+            <p:ph type="hdr" sz="quarter"/>
+          </p:nvPr>
+        </p:nvSpPr>
+        <p:spPr>
+          <a:xfrm>
+            <a:off x="0" y="0"/>
+            <a:ext cx="2971800" cy="457200"/>
+          </a:xfrm>
+          <a:prstGeom prst="rect">
+            <a:avLst/>
+          </a:prstGeom>
+        </p:spPr>
+        <p:txBody>
+          <a:bodyPr vert="horz" lIns="91440" tIns="45720" rIns="91440" bIns="45720" rtlCol="0"/>
+          <a:lstStyle>
+            <a:lvl1pPr algn="l">
+              <a:defRPr sz="1200"/>
+            </a:lvl1pPr>
+          </a:lstStyle>
+          <a:p>
+            <a:endParaRPr lang="en-US"/>
+          </a:p>
+        </p:txBody>
+      </p:sp>
+      <p:sp>
+        <p:nvSpPr>
+          <p:cNvPr id="3" name="Date Placeholder 2"/>
+          <p:cNvSpPr>
+            <a:spLocks noGrp="1"/>
+          </p:cNvSpPr>
+          <p:nvPr>
+            <p:ph type="dt" idx="1"/>
+          </p:nvPr>
+        </p:nvSpPr>
+        <p:spPr>
+          <a:xfrm>
+            <a:off x="3884613" y="0"/>
+            <a:ext cx="2971800" cy="457200"/>
+          </a:xfrm>
+          <a:prstGeom prst="rect">
+            <a:avLst/>
+          </a:prstGeom>
+        </p:spPr>
+        <p:txBody>
+          <a:bodyPr vert="horz" lIns="91440" tIns="45720" rIns="91440" bIns="45720" rtlCol="0"/>
+          <a:lstStyle>
+            <a:lvl1pPr algn="r">
+              <a:defRPr sz="1200"/>
+            </a:lvl1pPr>
+          </a:lstStyle>
+          <a:p>
+            <a:fld id="{0F89C1C7-3DCD-1040-A9CF-14679D8B5DDD}" type="datetimeFigureOut">
+              <a:rPr lang="en-US" smtClean="0"/>
+              <a:t>10/17/16</a:t>
+            </a:fld>
+            <a:endParaRPr lang="en-US"/>
+          </a:p>
+        </p:txBody>
+      </p:sp>
+      <p:sp>
+        <p:nvSpPr>
+          <p:cNvPr id="4" name="Slide Image Placeholder 3"/>
+          <p:cNvSpPr>
+            <a:spLocks noGrp="1" noRot="1" noChangeAspect="1"/>
+          </p:cNvSpPr>
+          <p:nvPr>
+            <p:ph type="sldImg" idx="2"/>
+          </p:nvPr>
+        </p:nvSpPr>
+        <p:spPr>
+          <a:xfrm>
+            <a:off x="1143000" y="685800"/>
+            <a:ext cx="4572000" cy="3429000"/>
+          </a:xfrm>
+          <a:prstGeom prst="rect">
+            <a:avLst/>
+          </a:prstGeom>
+          <a:noFill/>
+          <a:ln w="12700">
+            <a:solidFill>
+              <a:prstClr val="black"/>
+            </a:solidFill>
+          </a:ln>
+        </p:spPr>
+        <p:txBody>
+          <a:bodyPr vert="horz" lIns="91440" tIns="45720" rIns="91440" bIns="45720" rtlCol="0" anchor="ctr"/>
+          <a:lstStyle/>
+          <a:p>
+            <a:endParaRPr lang="en-US"/>
+          </a:p>
+        </p:txBody>
+      </p:sp>
+      <p:sp>
+        <p:nvSpPr>
+          <p:cNvPr id="5" name="Notes Placeholder 4"/>
+          <p:cNvSpPr>
+            <a:spLocks noGrp="1"/>
+          </p:cNvSpPr>
+          <p:nvPr>
+            <p:ph type="body" sz="quarter" idx="3"/>
+          </p:nvPr>
+        </p:nvSpPr>
+        <p:spPr>
+          <a:xfrm>
+            <a:off x="685800" y="4343400"/>
+            <a:ext cx="5486400" cy="4114800"/>
+          </a:xfrm>
+          <a:prstGeom prst="rect">
+            <a:avLst/>
+          </a:prstGeom>
+        </p:spPr>
+        <p:txBody>
+          <a:bodyPr vert="horz" lIns="91440" tIns="45720" rIns="91440" bIns="45720" rtlCol="0"/>
+          <a:lstStyle/>
+          <a:p>
+            <a:pPr lvl="0"/>
+            <a:r>
+              <a:rPr lang="en-US" smtClean="0"/>
+              <a:t>Click to edit Master text styles</a:t>
+            </a:r>
+          </a:p>
+          <a:p>
+            <a:pPr lvl="1"/>
+            <a:r>
+              <a:rPr lang="en-US" smtClean="0"/>
+              <a:t>Second level</a:t>
+            </a:r>
+          </a:p>
+          <a:p>
+            <a:pPr lvl="2"/>
+            <a:r>
+              <a:rPr lang="en-US" smtClean="0"/>
+              <a:t>Third level</a:t>
+            </a:r>
+          </a:p>
+          <a:p>
+            <a:pPr lvl="3"/>
+            <a:r>
+              <a:rPr lang="en-US" smtClean="0"/>
+              <a:t>Fourth level</a:t>
+            </a:r>
+          </a:p>
+          <a:p>
+            <a:pPr lvl="4"/>
+            <a:r>
+              <a:rPr lang="en-US" smtClean="0"/>
+              <a:t>Fifth level</a:t>
+            </a:r>
+            <a:endParaRPr lang="en-US"/>
+          </a:p>
+        </p:txBody>
+      </p:sp>
+      <p:sp>
+        <p:nvSpPr>
+          <p:cNvPr id="6" name="Footer Placeholder 5"/>
+          <p:cNvSpPr>
+            <a:spLocks noGrp="1"/>
+          </p:cNvSpPr>
+          <p:nvPr>
+            <p:ph type="ftr" sz="quarter" idx="4"/>
+          </p:nvPr>
+        </p:nvSpPr>
+        <p:spPr>
+          <a:xfrm>
+            <a:off x="0" y="8685213"/>
+            <a:ext cx="2971800" cy="457200"/>
+          </a:xfrm>
+          <a:prstGeom prst="rect">
+            <a:avLst/>
+          </a:prstGeom>
+        </p:spPr>
+        <p:txBody>
+          <a:bodyPr vert="horz" lIns="91440" tIns="45720" rIns="91440" bIns="45720" rtlCol="0" anchor="b"/>
+          <a:lstStyle>
+            <a:lvl1pPr algn="l">
+              <a:defRPr sz="1200"/>
+            </a:lvl1pPr>
+          </a:lstStyle>
+          <a:p>
+            <a:endParaRPr lang="en-US"/>
+          </a:p>
+        </p:txBody>
+      </p:sp>
+      <p:sp>
+        <p:nvSpPr>
+          <p:cNvPr id="7" name="Slide Number Placeholder 6"/>
+          <p:cNvSpPr>
+            <a:spLocks noGrp="1"/>
+          </p:cNvSpPr>
+          <p:nvPr>
+            <p:ph type="sldNum" sz="quarter" idx="5"/>
+          </p:nvPr>
+        </p:nvSpPr>
+        <p:spPr>
+          <a:xfrm>
+            <a:off x="3884613" y="8685213"/>
+            <a:ext cx="2971800" cy="457200"/>
+          </a:xfrm>
+          <a:prstGeom prst="rect">
+            <a:avLst/>
+          </a:prstGeom>
+        </p:spPr>
+        <p:txBody>
+          <a:bodyPr vert="horz" lIns="91440" tIns="45720" rIns="91440" bIns="45720" rtlCol="0" anchor="b"/>
+          <a:lstStyle>
+            <a:lvl1pPr algn="r">
+              <a:defRPr sz="1200"/>
+            </a:lvl1pPr>
+          </a:lstStyle>
+          <a:p>
+            <a:fld id="{BB5E49A5-4136-284D-997B-48E1D791AD67}" type="slidenum">
+              <a:rPr lang="en-US" smtClean="0"/>
+              <a:t>‹#›</a:t>
+            </a:fld>
+            <a:endParaRPr lang="en-US"/>
+          </a:p>
+        </p:txBody>
+      </p:sp>
+    </p:spTree>
+    <p:extLst>
+      <p:ext uri="{BB962C8B-B14F-4D97-AF65-F5344CB8AC3E}">
+        <p14:creationId xmlns:p14="http://schemas.microsoft.com/office/powerpoint/2010/main" val="2623252185"/>
+      </p:ext>
+    </p:extLst>
+  </p:cSld>
+  <p:clrMap bg1="lt1" tx1="dk1" bg2="lt2" tx2="dk2" accent1="accent1" accent2="accent2" accent3="accent3" accent4="accent4" accent5="accent5" accent6="accent6" hlink="hlink" folHlink="folHlink"/>
+  <p:notesStyle>
+    <a:lvl1pPr marL="0" algn="l" defTabSz="457200" rtl="0" eaLnBrk="1" latinLnBrk="0" hangingPunct="1">
+      <a:defRPr sz="1200" kern="1200">
+        <a:solidFill>
+          <a:schemeClr val="tx1"/>
+        </a:solidFill>
+        <a:latin typeface="+mn-lt"/>
+        <a:ea typeface="+mn-ea"/>
+        <a:cs typeface="+mn-cs"/>
+      </a:defRPr>
+    </a:lvl1pPr>
+    <a:lvl2pPr marL="457200" algn="l" defTabSz="457200" rtl="0" eaLnBrk="1" latinLnBrk="0" hangingPunct="1">
+      <a:defRPr sz="1200" kern="1200">
+        <a:solidFill>
+          <a:schemeClr val="tx1"/>
+        </a:solidFill>
+        <a:latin typeface="+mn-lt"/>
+        <a:ea typeface="+mn-ea"/>
+        <a:cs typeface="+mn-cs"/>
+      </a:defRPr>
+    </a:lvl2pPr>
+    <a:lvl3pPr marL="914400" algn="l" defTabSz="457200" rtl="0" eaLnBrk="1" latinLnBrk="0" hangingPunct="1">
+      <a:defRPr sz="1200" kern="1200">
+        <a:solidFill>
+          <a:schemeClr val="tx1"/>
+        </a:solidFill>
+        <a:latin typeface="+mn-lt"/>
+        <a:ea typeface="+mn-ea"/>
+        <a:cs typeface="+mn-cs"/>
+      </a:defRPr>
+    </a:lvl3pPr>
+    <a:lvl4pPr marL="1371600" algn="l" defTabSz="457200" rtl="0" eaLnBrk="1" latinLnBrk="0" hangingPunct="1">
+      <a:defRPr sz="1200" kern="1200">
+        <a:solidFill>
+          <a:schemeClr val="tx1"/>
+        </a:solidFill>
+        <a:latin typeface="+mn-lt"/>
+        <a:ea typeface="+mn-ea"/>
+        <a:cs typeface="+mn-cs"/>
+      </a:defRPr>
+    </a:lvl4pPr>
+    <a:lvl5pPr marL="1828800" algn="l" defTabSz="457200" rtl="0" eaLnBrk="1" latinLnBrk="0" hangingPunct="1">
+      <a:defRPr sz="1200" kern="1200">
+        <a:solidFill>
+          <a:schemeClr val="tx1"/>
+        </a:solidFill>
+        <a:latin typeface="+mn-lt"/>
+        <a:ea typeface="+mn-ea"/>
+        <a:cs typeface="+mn-cs"/>
+      </a:defRPr>
+    </a:lvl5pPr>
+    <a:lvl6pPr marL="2286000" algn="l" defTabSz="457200" rtl="0" eaLnBrk="1" latinLnBrk="0" hangingPunct="1">
+      <a:defRPr sz="1200" kern="1200">
+        <a:solidFill>
+          <a:schemeClr val="tx1"/>
+        </a:solidFill>
+        <a:latin typeface="+mn-lt"/>
+        <a:ea typeface="+mn-ea"/>
+        <a:cs typeface="+mn-cs"/>
+      </a:defRPr>
+    </a:lvl6pPr>
+    <a:lvl7pPr marL="2743200" algn="l" defTabSz="457200" rtl="0" eaLnBrk="1" latinLnBrk="0" hangingPunct="1">
+      <a:defRPr sz="1200" kern="1200">
+        <a:solidFill>
+          <a:schemeClr val="tx1"/>
+        </a:solidFill>
+        <a:latin typeface="+mn-lt"/>
+        <a:ea typeface="+mn-ea"/>
+        <a:cs typeface="+mn-cs"/>
+      </a:defRPr>
+    </a:lvl7pPr>
+    <a:lvl8pPr marL="3200400" algn="l" defTabSz="457200" rtl="0" eaLnBrk="1" latinLnBrk="0" hangingPunct="1">
+      <a:defRPr sz="1200" kern="1200">
+        <a:solidFill>
+          <a:schemeClr val="tx1"/>
+        </a:solidFill>
+        <a:latin typeface="+mn-lt"/>
+        <a:ea typeface="+mn-ea"/>
+        <a:cs typeface="+mn-cs"/>
+      </a:defRPr>
+    </a:lvl8pPr>
+    <a:lvl9pPr marL="3657600" algn="l" defTabSz="457200" rtl="0" eaLnBrk="1" latinLnBrk="0" hangingPunct="1">
+      <a:defRPr sz="1200" kern="1200">
+        <a:solidFill>
+          <a:schemeClr val="tx1"/>
+        </a:solidFill>
+        <a:latin typeface="+mn-lt"/>
+        <a:ea typeface="+mn-ea"/>
+        <a:cs typeface="+mn-cs"/>
+      </a:defRPr>
+    </a:lvl9pPr>
+  </p:notesStyle>
+</p:notesMaster>
+</file>
+
+<file path=ppt/notesSlides/notesSlide1.xml><?xml version="1.0" encoding="utf-8"?>
+<p:notes xmlns:a="http://schemas.openxmlformats.org/drawingml/2006/main" xmlns:p="http://schemas.openxmlformats.org/presentationml/2006/main" xmlns:r="http://schemas.openxmlformats.org/officeDocument/2006/relationships">
+  <p:cSld>
+    <p:spTree>
+      <p:nvGrpSpPr>
+        <p:cNvPr id="1" name=""/>
+        <p:cNvGrpSpPr/>
+        <p:nvPr/>
+      </p:nvGrpSpPr>
+      <p:grpSpPr>
+        <a:xfrm>
+          <a:off x="0" y="0"/>
+          <a:ext cx="0" cy="0"/>
+          <a:chOff x="0" y="0"/>
+          <a:chExt cx="0" cy="0"/>
+        </a:xfrm>
+      </p:grpSpPr>
+      <p:sp>
+        <p:nvSpPr>
+          <p:cNvPr id="2" name="Slide Image Placeholder 1"/>
+          <p:cNvSpPr>
+            <a:spLocks noGrp="1"/>
+          </p:cNvSpPr>
+          <p:nvPr>
+            <p:ph type="sldImg" idx="2"/>
+          </p:nvPr>
+        </p:nvSpPr>
+        <p:spPr/>
+      </p:sp>
+      <p:sp>
+        <p:nvSpPr>
+          <p:cNvPr id="3" name="Notes Placeholder 2"/>
+          <p:cNvSpPr>
+            <a:spLocks noGrp="1"/>
+          </p:cNvSpPr>
+          <p:nvPr>
+            <p:ph type="body" idx="3" sz="quarter"/>
+          </p:nvPr>
+        </p:nvSpPr>
+        <p:spPr/>
+        <p:txBody>
+          <a:bodyPr/>
+          <a:lstStyle/>
+          <a:p>
+            <a:r>
+              <a:t>[Tempo: ~30s]</a:t>
+            </a:r>
+          </a:p>
+          <a:p/>
+          <a:p>
+            <a:r>
+              <a:t>Saudação inicial. Apresentar o grupo e a cadeira:</a:t>
+            </a:r>
+          </a:p>
+          <a:p>
+            <a:r>
+              <a:t>"Somos Bruno, Cynthia, Moisés e Raniel, do grupo ObiOne, da cadeira Tópicos Avançados em Engenharia de Software, do prof. Ivaldir."</a:t>
+            </a:r>
+          </a:p>
+          <a:p/>
+          <a:p>
+            <a:r>
+              <a:t>Gancho: "Esse é o nosso Status Report 1. Vamos te mostrar o que é o ObiOne, o que vamos entregar até 10/07, e onde estamos agora."</a:t>
+            </a:r>
+          </a:p>
+        </p:txBody>
+      </p:sp>
+      <p:sp>
+        <p:nvSpPr>
+          <p:cNvPr id="4" name="Slide Number Placeholder 3"/>
+          <p:cNvSpPr>
+            <a:spLocks noGrp="1"/>
+          </p:cNvSpPr>
+          <p:nvPr>
+            <p:ph type="sldNum" idx="5" sz="quarter"/>
+          </p:nvPr>
+        </p:nvSpPr>
+        <p:spPr/>
+      </p:sp>
+    </p:spTree>
+  </p:cSld>
+  <p:clrMapOvr>
+    <a:masterClrMapping/>
+  </p:clrMapOvr>
+</p:notes>
+</file>
+
+<file path=ppt/notesSlides/notesSlide2.xml><?xml version="1.0" encoding="utf-8"?>
+<p:notes xmlns:a="http://schemas.openxmlformats.org/drawingml/2006/main" xmlns:p="http://schemas.openxmlformats.org/presentationml/2006/main" xmlns:r="http://schemas.openxmlformats.org/officeDocument/2006/relationships">
+  <p:cSld>
+    <p:spTree>
+      <p:nvGrpSpPr>
+        <p:cNvPr id="1" name=""/>
+        <p:cNvGrpSpPr/>
+        <p:nvPr/>
+      </p:nvGrpSpPr>
+      <p:grpSpPr>
+        <a:xfrm>
+          <a:off x="0" y="0"/>
+          <a:ext cx="0" cy="0"/>
+          <a:chOff x="0" y="0"/>
+          <a:chExt cx="0" cy="0"/>
+        </a:xfrm>
+      </p:grpSpPr>
+      <p:sp>
+        <p:nvSpPr>
+          <p:cNvPr id="2" name="Slide Image Placeholder 1"/>
+          <p:cNvSpPr>
+            <a:spLocks noGrp="1"/>
+          </p:cNvSpPr>
+          <p:nvPr>
+            <p:ph type="sldImg" idx="2"/>
+          </p:nvPr>
+        </p:nvSpPr>
+        <p:spPr/>
+      </p:sp>
+      <p:sp>
+        <p:nvSpPr>
+          <p:cNvPr id="3" name="Notes Placeholder 2"/>
+          <p:cNvSpPr>
+            <a:spLocks noGrp="1"/>
+          </p:cNvSpPr>
+          <p:nvPr>
+            <p:ph type="body" idx="3" sz="quarter"/>
+          </p:nvPr>
+        </p:nvSpPr>
+        <p:spPr/>
+        <p:txBody>
+          <a:bodyPr/>
+          <a:lstStyle/>
+          <a:p>
+            <a:r>
+              <a:t>[Tempo: ~30s]</a:t>
+            </a:r>
+          </a:p>
+          <a:p/>
+          <a:p>
+            <a:r>
+              <a:t>Apresente o roteiro em 4 blocos sem detalhar:</a:t>
+            </a:r>
+          </a:p>
+          <a:p>
+            <a:r>
+              <a:t>"Quatro partes: primeiro o contexto que motiva o projeto, depois o que vamos construir, o cronograma das 9 semanas restantes, e fechamos com o status atual."</a:t>
+            </a:r>
+          </a:p>
+        </p:txBody>
+      </p:sp>
+      <p:sp>
+        <p:nvSpPr>
+          <p:cNvPr id="4" name="Slide Number Placeholder 3"/>
+          <p:cNvSpPr>
+            <a:spLocks noGrp="1"/>
+          </p:cNvSpPr>
+          <p:nvPr>
+            <p:ph type="sldNum" idx="5" sz="quarter"/>
+          </p:nvPr>
+        </p:nvSpPr>
+        <p:spPr/>
+      </p:sp>
+    </p:spTree>
+  </p:cSld>
+  <p:clrMapOvr>
+    <a:masterClrMapping/>
+  </p:clrMapOvr>
+</p:notes>
+</file>
+
+<file path=ppt/notesSlides/notesSlide3.xml><?xml version="1.0" encoding="utf-8"?>
+<p:notes xmlns:a="http://schemas.openxmlformats.org/drawingml/2006/main" xmlns:p="http://schemas.openxmlformats.org/presentationml/2006/main" xmlns:r="http://schemas.openxmlformats.org/officeDocument/2006/relationships">
+  <p:cSld>
+    <p:spTree>
+      <p:nvGrpSpPr>
+        <p:cNvPr id="1" name=""/>
+        <p:cNvGrpSpPr/>
+        <p:nvPr/>
+      </p:nvGrpSpPr>
+      <p:grpSpPr>
+        <a:xfrm>
+          <a:off x="0" y="0"/>
+          <a:ext cx="0" cy="0"/>
+          <a:chOff x="0" y="0"/>
+          <a:chExt cx="0" cy="0"/>
+        </a:xfrm>
+      </p:grpSpPr>
+      <p:sp>
+        <p:nvSpPr>
+          <p:cNvPr id="2" name="Slide Image Placeholder 1"/>
+          <p:cNvSpPr>
+            <a:spLocks noGrp="1"/>
+          </p:cNvSpPr>
+          <p:nvPr>
+            <p:ph type="sldImg" idx="2"/>
+          </p:nvPr>
+        </p:nvSpPr>
+        <p:spPr/>
+      </p:sp>
+      <p:sp>
+        <p:nvSpPr>
+          <p:cNvPr id="3" name="Notes Placeholder 2"/>
+          <p:cNvSpPr>
+            <a:spLocks noGrp="1"/>
+          </p:cNvSpPr>
+          <p:nvPr>
+            <p:ph type="body" idx="3" sz="quarter"/>
+          </p:nvPr>
+        </p:nvSpPr>
+        <p:spPr/>
+        <p:txBody>
+          <a:bodyPr/>
+          <a:lstStyle/>
+          <a:p>
+            <a:r>
+              <a:t>[Tempo: ~2min — slide-chave para criar tensão narrativa]</a:t>
+            </a:r>
+          </a:p>
+          <a:p/>
+          <a:p>
+            <a:r>
+              <a:t>CARD ESQUERDO — "Observatórios vs. ferramentas":</a:t>
+            </a:r>
+          </a:p>
+          <a:p>
+            <a:r>
+              <a:t>"Observatório é MAIS que dashboard. É um espaço de conhecimento entre múltiplos atores — consultoria, clientes, pesquisa — mediado por interação contínua. Ferramentas de gestão como Jira ou planilhas só oferecem visualização de status. Falta o tecido social e a curadoria do conhecimento."</a:t>
+            </a:r>
+          </a:p>
+          <a:p/>
+          <a:p>
+            <a:r>
+              <a:t>TRANSIÇÃO para o card direito:</a:t>
+            </a:r>
+          </a:p>
+          <a:p>
+            <a:r>
+              <a:t>"Se observatórios são tão valiosos, por que são raros na prática? Porque mantê-los vivos é CARO."</a:t>
+            </a:r>
+          </a:p>
+          <a:p/>
+          <a:p>
+            <a:r>
+              <a:t>CARD DIREITO — três fontes de fricção:</a:t>
+            </a:r>
+          </a:p>
+          <a:p>
+            <a:r>
+              <a:t>1. Manual: ler .docx, estruturar, atualizar a curadoria de atributos</a:t>
+            </a:r>
+          </a:p>
+          <a:p>
+            <a:r>
+              <a:t>2. Repetitivo: comunicar progresso ao cliente em linguagem acessível</a:t>
+            </a:r>
+          </a:p>
+          <a:p>
+            <a:r>
+              <a:t>3. Custoso: manter engajamento da comunidade — responder, contextualizar</a:t>
+            </a:r>
+          </a:p>
+          <a:p/>
+          <a:p>
+            <a:r>
+              <a:t>FECHAMENTO: "Sem reduzir essa fricção, observatório fica restrito à teoria. É aí que entra a IA Generativa — e o ObiOne."</a:t>
+            </a:r>
+          </a:p>
+          <a:p/>
+          <a:p>
+            <a:r>
+              <a:t>Bases citadas: Vieira (2022) Cap. 5 (MPO); OPTI-PE como caso prático; Seção 6.4 sobre Trabalhos Futuros.</a:t>
+            </a:r>
+          </a:p>
+        </p:txBody>
+      </p:sp>
+      <p:sp>
+        <p:nvSpPr>
+          <p:cNvPr id="4" name="Slide Number Placeholder 3"/>
+          <p:cNvSpPr>
+            <a:spLocks noGrp="1"/>
+          </p:cNvSpPr>
+          <p:nvPr>
+            <p:ph type="sldNum" idx="5" sz="quarter"/>
+          </p:nvPr>
+        </p:nvSpPr>
+        <p:spPr/>
+      </p:sp>
+    </p:spTree>
+  </p:cSld>
+  <p:clrMapOvr>
+    <a:masterClrMapping/>
+  </p:clrMapOvr>
+</p:notes>
+</file>
+
+<file path=ppt/notesSlides/notesSlide4.xml><?xml version="1.0" encoding="utf-8"?>
+<p:notes xmlns:a="http://schemas.openxmlformats.org/drawingml/2006/main" xmlns:p="http://schemas.openxmlformats.org/presentationml/2006/main" xmlns:r="http://schemas.openxmlformats.org/officeDocument/2006/relationships">
+  <p:cSld>
+    <p:spTree>
+      <p:nvGrpSpPr>
+        <p:cNvPr id="1" name=""/>
+        <p:cNvGrpSpPr/>
+        <p:nvPr/>
+      </p:nvGrpSpPr>
+      <p:grpSpPr>
+        <a:xfrm>
+          <a:off x="0" y="0"/>
+          <a:ext cx="0" cy="0"/>
+          <a:chOff x="0" y="0"/>
+          <a:chExt cx="0" cy="0"/>
+        </a:xfrm>
+      </p:grpSpPr>
+      <p:sp>
+        <p:nvSpPr>
+          <p:cNvPr id="2" name="Slide Image Placeholder 1"/>
+          <p:cNvSpPr>
+            <a:spLocks noGrp="1"/>
+          </p:cNvSpPr>
+          <p:nvPr>
+            <p:ph type="sldImg" idx="2"/>
+          </p:nvPr>
+        </p:nvSpPr>
+        <p:spPr/>
+      </p:sp>
+      <p:sp>
+        <p:nvSpPr>
+          <p:cNvPr id="3" name="Notes Placeholder 2"/>
+          <p:cNvSpPr>
+            <a:spLocks noGrp="1"/>
+          </p:cNvSpPr>
+          <p:nvPr>
+            <p:ph type="body" idx="3" sz="quarter"/>
+          </p:nvPr>
+        </p:nvSpPr>
+        <p:spPr/>
+        <p:txBody>
+          <a:bodyPr/>
+          <a:lstStyle/>
+          <a:p>
+            <a:r>
+              <a:t>[Tempo: ~3min — NÚCLEO ESTRATÉGICO da apresentação]</a:t>
+            </a:r>
+          </a:p>
+          <a:p/>
+          <a:p>
+            <a:r>
+              <a:t>CARD ESQUERDO — "O que é o ObiOne":</a:t>
+            </a:r>
+          </a:p>
+          <a:p>
+            <a:r>
+              <a:t>Diga claramente: "O ObiOne é um observatório-de-portfólio para consultoria de projetos."</a:t>
+            </a:r>
+          </a:p>
+          <a:p/>
+          <a:p>
+            <a:r>
+              <a:t>PARA QUEM E PARA QUÊ — três audiências:</a:t>
+            </a:r>
+          </a:p>
+          <a:p>
+            <a:r>
+              <a:t>- CONSULTORIA: observa o portfólio como conhecimento estruturado, não como pasta de Drive.</a:t>
+            </a:r>
+          </a:p>
+          <a:p>
+            <a:r>
+              <a:t>- CLIENTE: acompanha o PRÓPRIO projeto em linguagem acessível, sem depender de reunião.</a:t>
+            </a:r>
+          </a:p>
+          <a:p>
+            <a:r>
+              <a:t>- COMUNIDADE vira ativo: comentários, comparativos cross-projeto, IA mantém o tecido vivo.</a:t>
+            </a:r>
+          </a:p>
+          <a:p/>
+          <a:p>
+            <a:r>
+              <a:t>PAUSA — deixe assentar.</a:t>
+            </a:r>
+          </a:p>
+          <a:p/>
+          <a:p>
+            <a:r>
+              <a:t>CARD DIREITO — "Por que isso é diferente do que já existe? Combinação inédita em 3 vetores":</a:t>
+            </a:r>
+          </a:p>
+          <a:p>
+            <a:r>
+              <a:t>- vs. PM (Jira, Trello, Asana): gerenciam tarefas e prazos. ObiOne OBSERVA o projeto como objeto de conhecimento, mapeando 44 atributos do MPO.</a:t>
+            </a:r>
+          </a:p>
+          <a:p>
+            <a:r>
+              <a:t>- vs. BI (Power BI, Looker): mostram métricas. ObiOne extrai SIGNIFICADO de .docx com LLM.</a:t>
+            </a:r>
+          </a:p>
+          <a:p>
+            <a:r>
+              <a:t>- vs. OBSERVATÓRIOS ACADÊMICOS (OPTI-PE): são instrumentos de pesquisa estáticos. ObiOne é OPERACIONAL — consultoria e clientes no dia-a-dia.</a:t>
+            </a:r>
+          </a:p>
+          <a:p/>
+          <a:p>
+            <a:r>
+              <a:t>FECHAMENTO: "Único a combinar observação MPO + extração com IA + comunidade ativa em uma só plataforma."</a:t>
+            </a:r>
+          </a:p>
+          <a:p/>
+          <a:p>
+            <a:r>
+              <a:t>Bases citadas: Quadro 37 do MPO (44 atributos); OPTI-PE (Vieira 2022 Cap. 5); levantamento de ferramentas de mercado.</a:t>
+            </a:r>
+          </a:p>
+        </p:txBody>
+      </p:sp>
+      <p:sp>
+        <p:nvSpPr>
+          <p:cNvPr id="4" name="Slide Number Placeholder 3"/>
+          <p:cNvSpPr>
+            <a:spLocks noGrp="1"/>
+          </p:cNvSpPr>
+          <p:nvPr>
+            <p:ph type="sldNum" idx="5" sz="quarter"/>
+          </p:nvPr>
+        </p:nvSpPr>
+        <p:spPr/>
+      </p:sp>
+    </p:spTree>
+  </p:cSld>
+  <p:clrMapOvr>
+    <a:masterClrMapping/>
+  </p:clrMapOvr>
+</p:notes>
+</file>
+
+<file path=ppt/notesSlides/notesSlide5.xml><?xml version="1.0" encoding="utf-8"?>
+<p:notes xmlns:a="http://schemas.openxmlformats.org/drawingml/2006/main" xmlns:p="http://schemas.openxmlformats.org/presentationml/2006/main" xmlns:r="http://schemas.openxmlformats.org/officeDocument/2006/relationships">
+  <p:cSld>
+    <p:spTree>
+      <p:nvGrpSpPr>
+        <p:cNvPr id="1" name=""/>
+        <p:cNvGrpSpPr/>
+        <p:nvPr/>
+      </p:nvGrpSpPr>
+      <p:grpSpPr>
+        <a:xfrm>
+          <a:off x="0" y="0"/>
+          <a:ext cx="0" cy="0"/>
+          <a:chOff x="0" y="0"/>
+          <a:chExt cx="0" cy="0"/>
+        </a:xfrm>
+      </p:grpSpPr>
+      <p:sp>
+        <p:nvSpPr>
+          <p:cNvPr id="2" name="Slide Image Placeholder 1"/>
+          <p:cNvSpPr>
+            <a:spLocks noGrp="1"/>
+          </p:cNvSpPr>
+          <p:nvPr>
+            <p:ph type="sldImg" idx="2"/>
+          </p:nvPr>
+        </p:nvSpPr>
+        <p:spPr/>
+      </p:sp>
+      <p:sp>
+        <p:nvSpPr>
+          <p:cNvPr id="3" name="Notes Placeholder 2"/>
+          <p:cNvSpPr>
+            <a:spLocks noGrp="1"/>
+          </p:cNvSpPr>
+          <p:nvPr>
+            <p:ph type="body" idx="3" sz="quarter"/>
+          </p:nvPr>
+        </p:nvSpPr>
+        <p:spPr/>
+        <p:txBody>
+          <a:bodyPr/>
+          <a:lstStyle/>
+          <a:p>
+            <a:r>
+              <a:t>[Tempo: ~2min]</a:t>
+            </a:r>
+          </a:p>
+          <a:p/>
+          <a:p>
+            <a:r>
+              <a:t>Descer ao nível da execução:</a:t>
+            </a:r>
+          </a:p>
+          <a:p>
+            <a:r>
+              <a:t>"Agora o como — escopo organizado em 5 grupos, 18 requisitos funcionais."</a:t>
+            </a:r>
+          </a:p>
+          <a:p/>
+          <a:p>
+            <a:r>
+              <a:t>Aponte para cada grupo brevemente (NÃO leia tudo):</a:t>
+            </a:r>
+          </a:p>
+          <a:p>
+            <a:r>
+              <a:t>- G1 PIPELINE LLM: extrai os 44 atributos via LLM, alimenta tudo</a:t>
+            </a:r>
+          </a:p>
+          <a:p>
+            <a:r>
+              <a:t>- G2 OBSERVAÇÃO: dashboard de cobertura — cliente vê apenas o seu projeto</a:t>
+            </a:r>
+          </a:p>
+          <a:p>
+            <a:r>
+              <a:t>- G3 COMUNIDADE: auth, perfis semi-abertos, comentários e feed</a:t>
+            </a:r>
+          </a:p>
+          <a:p>
+            <a:r>
+              <a:t>- G4 IA-ASSISTENTE: Resumo do Cliente (tradutora) + Drafts (redutora de fricção)</a:t>
+            </a:r>
+          </a:p>
+          <a:p>
+            <a:r>
+              <a:t>- G5 AVALIAÇÃO: rubrica + Cohen's Kappa nos 3 projetos + Likert × 2 audiências</a:t>
+            </a:r>
+          </a:p>
+          <a:p/>
+          <a:p>
+            <a:r>
+              <a:t>FECHAMENTO: "Cada grupo materializa uma categoria do MPO. Detalhes técnicos no repositório."</a:t>
+            </a:r>
+          </a:p>
+        </p:txBody>
+      </p:sp>
+      <p:sp>
+        <p:nvSpPr>
+          <p:cNvPr id="4" name="Slide Number Placeholder 3"/>
+          <p:cNvSpPr>
+            <a:spLocks noGrp="1"/>
+          </p:cNvSpPr>
+          <p:nvPr>
+            <p:ph type="sldNum" idx="5" sz="quarter"/>
+          </p:nvPr>
+        </p:nvSpPr>
+        <p:spPr/>
+      </p:sp>
+    </p:spTree>
+  </p:cSld>
+  <p:clrMapOvr>
+    <a:masterClrMapping/>
+  </p:clrMapOvr>
+</p:notes>
+</file>
+
+<file path=ppt/notesSlides/notesSlide6.xml><?xml version="1.0" encoding="utf-8"?>
+<p:notes xmlns:a="http://schemas.openxmlformats.org/drawingml/2006/main" xmlns:p="http://schemas.openxmlformats.org/presentationml/2006/main" xmlns:r="http://schemas.openxmlformats.org/officeDocument/2006/relationships">
+  <p:cSld>
+    <p:spTree>
+      <p:nvGrpSpPr>
+        <p:cNvPr id="1" name=""/>
+        <p:cNvGrpSpPr/>
+        <p:nvPr/>
+      </p:nvGrpSpPr>
+      <p:grpSpPr>
+        <a:xfrm>
+          <a:off x="0" y="0"/>
+          <a:ext cx="0" cy="0"/>
+          <a:chOff x="0" y="0"/>
+          <a:chExt cx="0" cy="0"/>
+        </a:xfrm>
+      </p:grpSpPr>
+      <p:sp>
+        <p:nvSpPr>
+          <p:cNvPr id="2" name="Slide Image Placeholder 1"/>
+          <p:cNvSpPr>
+            <a:spLocks noGrp="1"/>
+          </p:cNvSpPr>
+          <p:nvPr>
+            <p:ph type="sldImg" idx="2"/>
+          </p:nvPr>
+        </p:nvSpPr>
+        <p:spPr/>
+      </p:sp>
+      <p:sp>
+        <p:nvSpPr>
+          <p:cNvPr id="3" name="Notes Placeholder 2"/>
+          <p:cNvSpPr>
+            <a:spLocks noGrp="1"/>
+          </p:cNvSpPr>
+          <p:nvPr>
+            <p:ph type="body" idx="3" sz="quarter"/>
+          </p:nvPr>
+        </p:nvSpPr>
+        <p:spPr/>
+        <p:txBody>
+          <a:bodyPr/>
+          <a:lstStyle/>
+          <a:p>
+            <a:r>
+              <a:t>[Tempo: ~1.5min]</a:t>
+            </a:r>
+          </a:p>
+          <a:p/>
+          <a:p>
+            <a:r>
+              <a:t>"São 9 semanas até 10/07, divididas em 4 marcos."</a:t>
+            </a:r>
+          </a:p>
+          <a:p/>
+          <a:p>
+            <a:r>
+              <a:t>Percorra rapidamente os marcos (use os subtítulos como âncora):</a:t>
+            </a:r>
+          </a:p>
+          <a:p>
+            <a:r>
+              <a:t>- M1 PREPARAÇÃO (22-28 mai · ESTA SEMANA): atributos, protocolo, primeiros gabaritos. Destrava tudo o que vem.</a:t>
+            </a:r>
+          </a:p>
+          <a:p>
+            <a:r>
+              <a:t>- M2 PIPELINE (29 mai - 11 jun): núcleo técnico. Cadastro + upload + auth + extração LLM nos 5 projetos.</a:t>
+            </a:r>
+          </a:p>
+          <a:p>
+            <a:r>
+              <a:t>- M3 DASHBOARD + IA (12-25 jun): a comunidade ganha vida. Cobertura, perfis, comentários, Resumo do Cliente, Drafts assistidos. Status Report 2 em 19/06.</a:t>
+            </a:r>
+          </a:p>
+          <a:p>
+            <a:r>
+              <a:t>- M4 AVALIAÇÃO (26 jun - 2 jul): fecha o ciclo DSR. Precisão, Recall, F1, Kappa, Likert × 2.</a:t>
+            </a:r>
+          </a:p>
+          <a:p/>
+          <a:p>
+            <a:r>
+              <a:t>FECHAMENTO: "Escrita do relato de 3-9/07. Apresentação final em 10/07."</a:t>
+            </a:r>
+          </a:p>
+        </p:txBody>
+      </p:sp>
+      <p:sp>
+        <p:nvSpPr>
+          <p:cNvPr id="4" name="Slide Number Placeholder 3"/>
+          <p:cNvSpPr>
+            <a:spLocks noGrp="1"/>
+          </p:cNvSpPr>
+          <p:nvPr>
+            <p:ph type="sldNum" idx="5" sz="quarter"/>
+          </p:nvPr>
+        </p:nvSpPr>
+        <p:spPr/>
+      </p:sp>
+    </p:spTree>
+  </p:cSld>
+  <p:clrMapOvr>
+    <a:masterClrMapping/>
+  </p:clrMapOvr>
+</p:notes>
+</file>
+
+<file path=ppt/notesSlides/notesSlide7.xml><?xml version="1.0" encoding="utf-8"?>
+<p:notes xmlns:a="http://schemas.openxmlformats.org/drawingml/2006/main" xmlns:p="http://schemas.openxmlformats.org/presentationml/2006/main" xmlns:r="http://schemas.openxmlformats.org/officeDocument/2006/relationships">
+  <p:cSld>
+    <p:spTree>
+      <p:nvGrpSpPr>
+        <p:cNvPr id="1" name=""/>
+        <p:cNvGrpSpPr/>
+        <p:nvPr/>
+      </p:nvGrpSpPr>
+      <p:grpSpPr>
+        <a:xfrm>
+          <a:off x="0" y="0"/>
+          <a:ext cx="0" cy="0"/>
+          <a:chOff x="0" y="0"/>
+          <a:chExt cx="0" cy="0"/>
+        </a:xfrm>
+      </p:grpSpPr>
+      <p:sp>
+        <p:nvSpPr>
+          <p:cNvPr id="2" name="Slide Image Placeholder 1"/>
+          <p:cNvSpPr>
+            <a:spLocks noGrp="1"/>
+          </p:cNvSpPr>
+          <p:nvPr>
+            <p:ph type="sldImg" idx="2"/>
+          </p:nvPr>
+        </p:nvSpPr>
+        <p:spPr/>
+      </p:sp>
+      <p:sp>
+        <p:nvSpPr>
+          <p:cNvPr id="3" name="Notes Placeholder 2"/>
+          <p:cNvSpPr>
+            <a:spLocks noGrp="1"/>
+          </p:cNvSpPr>
+          <p:nvPr>
+            <p:ph type="body" idx="3" sz="quarter"/>
+          </p:nvPr>
+        </p:nvSpPr>
+        <p:spPr/>
+        <p:txBody>
+          <a:bodyPr/>
+          <a:lstStyle/>
+          <a:p>
+            <a:r>
+              <a:t>[Tempo: ~1.5min]</a:t>
+            </a:r>
+          </a:p>
+          <a:p/>
+          <a:p>
+            <a:r>
+              <a:t>"Onde estamos AGORA e o que vem nas próximas semanas."</a:t>
+            </a:r>
+          </a:p>
+          <a:p/>
+          <a:p>
+            <a:r>
+              <a:t>CARD ESQUERDO — ESTÁ FEITO (Sprint 1, esta semana — preparatória):</a:t>
+            </a:r>
+          </a:p>
+          <a:p>
+            <a:r>
+              <a:t>1. REQUISITOS: 18 funcionais + 9 não funcionais, em formato ficha</a:t>
+            </a:r>
+          </a:p>
+          <a:p>
+            <a:r>
+              <a:t>2. ATRIBUTOS-ALVO do MPO: os 44 do Quadro 37, categorizados por tipo</a:t>
+            </a:r>
+          </a:p>
+          <a:p>
+            <a:r>
+              <a:t>3. PROTOCOLO DE AVALIAÇÃO: rubrica híbrida 0/0,5/1 + Cohen's Kappa</a:t>
+            </a:r>
+          </a:p>
+          <a:p/>
+          <a:p>
+            <a:r>
+              <a:t>CARD DIREITO — PRÓXIMAS SEMANAS:</a:t>
+            </a:r>
+          </a:p>
+          <a:p>
+            <a:r>
+              <a:t>4. SPRINT 2 (22 mai - 4 jun): cadastro + upload + auth + pipeline LLM rodando nos 5 projetos</a:t>
+            </a:r>
+          </a:p>
+          <a:p>
+            <a:r>
+              <a:t>5. GABARITOS MANUAIS: Valença como piloto, depois Freire Batista e Kaka JJ — pareados (Cynthia + Moisés)</a:t>
+            </a:r>
+          </a:p>
+          <a:p>
+            <a:r>
+              <a:t>6. STATUS REPORT 2 (19/06): dashboard + IA-Assistente operacionais</a:t>
+            </a:r>
+          </a:p>
+        </p:txBody>
+      </p:sp>
+      <p:sp>
+        <p:nvSpPr>
+          <p:cNvPr id="4" name="Slide Number Placeholder 3"/>
+          <p:cNvSpPr>
+            <a:spLocks noGrp="1"/>
+          </p:cNvSpPr>
+          <p:nvPr>
+            <p:ph type="sldNum" idx="5" sz="quarter"/>
+          </p:nvPr>
+        </p:nvSpPr>
+        <p:spPr/>
+      </p:sp>
+    </p:spTree>
+  </p:cSld>
+  <p:clrMapOvr>
+    <a:masterClrMapping/>
+  </p:clrMapOvr>
+</p:notes>
+</file>
+
+<file path=ppt/notesSlides/notesSlide8.xml><?xml version="1.0" encoding="utf-8"?>
+<p:notes xmlns:a="http://schemas.openxmlformats.org/drawingml/2006/main" xmlns:p="http://schemas.openxmlformats.org/presentationml/2006/main" xmlns:r="http://schemas.openxmlformats.org/officeDocument/2006/relationships">
+  <p:cSld>
+    <p:spTree>
+      <p:nvGrpSpPr>
+        <p:cNvPr id="1" name=""/>
+        <p:cNvGrpSpPr/>
+        <p:nvPr/>
+      </p:nvGrpSpPr>
+      <p:grpSpPr>
+        <a:xfrm>
+          <a:off x="0" y="0"/>
+          <a:ext cx="0" cy="0"/>
+          <a:chOff x="0" y="0"/>
+          <a:chExt cx="0" cy="0"/>
+        </a:xfrm>
+      </p:grpSpPr>
+      <p:sp>
+        <p:nvSpPr>
+          <p:cNvPr id="2" name="Slide Image Placeholder 1"/>
+          <p:cNvSpPr>
+            <a:spLocks noGrp="1"/>
+          </p:cNvSpPr>
+          <p:nvPr>
+            <p:ph type="sldImg" idx="2"/>
+          </p:nvPr>
+        </p:nvSpPr>
+        <p:spPr/>
+      </p:sp>
+      <p:sp>
+        <p:nvSpPr>
+          <p:cNvPr id="3" name="Notes Placeholder 2"/>
+          <p:cNvSpPr>
+            <a:spLocks noGrp="1"/>
+          </p:cNvSpPr>
+          <p:nvPr>
+            <p:ph type="body" idx="3" sz="quarter"/>
+          </p:nvPr>
+        </p:nvSpPr>
+        <p:spPr/>
+        <p:txBody>
+          <a:bodyPr/>
+          <a:lstStyle/>
+          <a:p>
+            <a:r>
+              <a:t>[Tempo: ~30s + perguntas]</a:t>
+            </a:r>
+          </a:p>
+          <a:p/>
+          <a:p>
+            <a:r>
+              <a:t>"Esse foi nosso Status Report 1. Documentação completa no repositório raniel90/obione. Abrimos para perguntas."</a:t>
+            </a:r>
+          </a:p>
+          <a:p/>
+          <a:p>
+            <a:r>
+              <a:t>Antecipe perguntas prováveis (responda só se vierem):</a:t>
+            </a:r>
+          </a:p>
+          <a:p>
+            <a:r>
+              <a:t>- "Como vão validar o LLM?" → rubrica híbrida + 2 avaliadores independentes + Kappa</a:t>
+            </a:r>
+          </a:p>
+          <a:p>
+            <a:r>
+              <a:t>- "Quem são os clientes?" → consultoria parceira; 5 projetos reais de domínios distintos (jurídico, saúde, esporte, branding)</a:t>
+            </a:r>
+          </a:p>
+          <a:p>
+            <a:r>
+              <a:t>- "E se a IA errar?" → IA gera draft, consultor revisa antes de publicar</a:t>
+            </a:r>
+          </a:p>
+          <a:p>
+            <a:r>
+              <a:t>- "Por que LLM e não regex/parser?" → heterogeneidade dos .docx; LLM lida com variação semântica</a:t>
+            </a:r>
+          </a:p>
+        </p:txBody>
+      </p:sp>
+      <p:sp>
+        <p:nvSpPr>
+          <p:cNvPr id="4" name="Slide Number Placeholder 3"/>
+          <p:cNvSpPr>
+            <a:spLocks noGrp="1"/>
+          </p:cNvSpPr>
+          <p:nvPr>
+            <p:ph type="sldNum" idx="5" sz="quarter"/>
+          </p:nvPr>
+        </p:nvSpPr>
+        <p:spPr/>
+      </p:sp>
+    </p:spTree>
+  </p:cSld>
+  <p:clrMapOvr>
+    <a:masterClrMapping/>
+  </p:clrMapOvr>
+</p:notes>
 </file>
 
 <file path=ppt/slideLayouts/slideLayout1.xml><?xml version="1.0" encoding="utf-8"?>
@@ -9592,7 +10822,7 @@
                 </a:solidFill>
                 <a:latin typeface="Arial"/>
               </a:rPr>
-              <a:t>Sprint 0 concluído e próximas semanas</a:t>
+              <a:t>Status atual e próximas semanas</a:t>
             </a:r>
           </a:p>
         </p:txBody>
@@ -12552,4 +13782,324 @@
   </a:objectDefaults>
   <a:extraClrSchemeLst/>
 </a:theme>
+</file>
+
+<file path=ppt/theme/theme2.xml><?xml version="1.0" encoding="utf-8"?>
+<a:theme xmlns:a="http://schemas.openxmlformats.org/drawingml/2006/main" name="Office Theme">
+  <a:themeElements>
+    <a:clrScheme name="Office">
+      <a:dk1>
+        <a:sysClr val="windowText" lastClr="000000"/>
+      </a:dk1>
+      <a:lt1>
+        <a:sysClr val="window" lastClr="FFFFFF"/>
+      </a:lt1>
+      <a:dk2>
+        <a:srgbClr val="1F497D"/>
+      </a:dk2>
+      <a:lt2>
+        <a:srgbClr val="EEECE1"/>
+      </a:lt2>
+      <a:accent1>
+        <a:srgbClr val="4F81BD"/>
+      </a:accent1>
+      <a:accent2>
+        <a:srgbClr val="C0504D"/>
+      </a:accent2>
+      <a:accent3>
+        <a:srgbClr val="9BBB59"/>
+      </a:accent3>
+      <a:accent4>
+        <a:srgbClr val="8064A2"/>
+      </a:accent4>
+      <a:accent5>
+        <a:srgbClr val="4BACC6"/>
+      </a:accent5>
+      <a:accent6>
+        <a:srgbClr val="F79646"/>
+      </a:accent6>
+      <a:hlink>
+        <a:srgbClr val="0000FF"/>
+      </a:hlink>
+      <a:folHlink>
+        <a:srgbClr val="800080"/>
+      </a:folHlink>
+    </a:clrScheme>
+    <a:fontScheme name="Office">
+      <a:majorFont>
+        <a:latin typeface="Calibri"/>
+        <a:ea typeface=""/>
+        <a:cs typeface=""/>
+        <a:font script="Jpan" typeface="ＭＳ Ｐゴシック"/>
+        <a:font script="Hang" typeface="맑은 고딕"/>
+        <a:font script="Hans" typeface="宋体"/>
+        <a:font script="Hant" typeface="新細明體"/>
+        <a:font script="Arab" typeface="Times New Roman"/>
+        <a:font script="Hebr" typeface="Times New Roman"/>
+        <a:font script="Thai" typeface="Angsana New"/>
+        <a:font script="Ethi" typeface="Nyala"/>
+        <a:font script="Beng" typeface="Vrinda"/>
+        <a:font script="Gujr" typeface="Shruti"/>
+        <a:font script="Khmr" typeface="MoolBoran"/>
+        <a:font script="Knda" typeface="Tunga"/>
+        <a:font script="Guru" typeface="Raavi"/>
+        <a:font script="Cans" typeface="Euphemia"/>
+        <a:font script="Cher" typeface="Plantagenet Cherokee"/>
+        <a:font script="Yiii" typeface="Microsoft Yi Baiti"/>
+        <a:font script="Tibt" typeface="Microsoft Himalaya"/>
+        <a:font script="Thaa" typeface="MV Boli"/>
+        <a:font script="Deva" typeface="Mangal"/>
+        <a:font script="Telu" typeface="Gautami"/>
+        <a:font script="Taml" typeface="Latha"/>
+        <a:font script="Syrc" typeface="Estrangelo Edessa"/>
+        <a:font script="Orya" typeface="Kalinga"/>
+        <a:font script="Mlym" typeface="Kartika"/>
+        <a:font script="Laoo" typeface="DokChampa"/>
+        <a:font script="Sinh" typeface="Iskoola Pota"/>
+        <a:font script="Mong" typeface="Mongolian Baiti"/>
+        <a:font script="Viet" typeface="Times New Roman"/>
+        <a:font script="Uigh" typeface="Microsoft Uighur"/>
+        <a:font script="Geor" typeface="Sylfaen"/>
+      </a:majorFont>
+      <a:minorFont>
+        <a:latin typeface="Calibri"/>
+        <a:ea typeface=""/>
+        <a:cs typeface=""/>
+        <a:font script="Jpan" typeface="ＭＳ Ｐゴシック"/>
+        <a:font script="Hang" typeface="맑은 고딕"/>
+        <a:font script="Hans" typeface="宋体"/>
+        <a:font script="Hant" typeface="新細明體"/>
+        <a:font script="Arab" typeface="Arial"/>
+        <a:font script="Hebr" typeface="Arial"/>
+        <a:font script="Thai" typeface="Cordia New"/>
+        <a:font script="Ethi" typeface="Nyala"/>
+        <a:font script="Beng" typeface="Vrinda"/>
+        <a:font script="Gujr" typeface="Shruti"/>
+        <a:font script="Khmr" typeface="DaunPenh"/>
+        <a:font script="Knda" typeface="Tunga"/>
+        <a:font script="Guru" typeface="Raavi"/>
+        <a:font script="Cans" typeface="Euphemia"/>
+        <a:font script="Cher" typeface="Plantagenet Cherokee"/>
+        <a:font script="Yiii" typeface="Microsoft Yi Baiti"/>
+        <a:font script="Tibt" typeface="Microsoft Himalaya"/>
+        <a:font script="Thaa" typeface="MV Boli"/>
+        <a:font script="Deva" typeface="Mangal"/>
+        <a:font script="Telu" typeface="Gautami"/>
+        <a:font script="Taml" typeface="Latha"/>
+        <a:font script="Syrc" typeface="Estrangelo Edessa"/>
+        <a:font script="Orya" typeface="Kalinga"/>
+        <a:font script="Mlym" typeface="Kartika"/>
+        <a:font script="Laoo" typeface="DokChampa"/>
+        <a:font script="Sinh" typeface="Iskoola Pota"/>
+        <a:font script="Mong" typeface="Mongolian Baiti"/>
+        <a:font script="Viet" typeface="Arial"/>
+        <a:font script="Uigh" typeface="Microsoft Uighur"/>
+        <a:font script="Geor" typeface="Sylfaen"/>
+      </a:minorFont>
+    </a:fontScheme>
+    <a:fmtScheme name="Office">
+      <a:fillStyleLst>
+        <a:solidFill>
+          <a:schemeClr val="phClr"/>
+        </a:solidFill>
+        <a:gradFill rotWithShape="1">
+          <a:gsLst>
+            <a:gs pos="0">
+              <a:schemeClr val="phClr">
+                <a:tint val="50000"/>
+                <a:satMod val="300000"/>
+              </a:schemeClr>
+            </a:gs>
+            <a:gs pos="35000">
+              <a:schemeClr val="phClr">
+                <a:tint val="37000"/>
+                <a:satMod val="300000"/>
+              </a:schemeClr>
+            </a:gs>
+            <a:gs pos="100000">
+              <a:schemeClr val="phClr">
+                <a:tint val="15000"/>
+                <a:satMod val="350000"/>
+              </a:schemeClr>
+            </a:gs>
+          </a:gsLst>
+          <a:lin ang="16200000" scaled="1"/>
+        </a:gradFill>
+        <a:gradFill rotWithShape="1">
+          <a:gsLst>
+            <a:gs pos="0">
+              <a:schemeClr val="phClr">
+                <a:tint val="100000"/>
+                <a:shade val="100000"/>
+                <a:satMod val="130000"/>
+              </a:schemeClr>
+            </a:gs>
+            <a:gs pos="100000">
+              <a:schemeClr val="phClr">
+                <a:tint val="50000"/>
+                <a:shade val="100000"/>
+                <a:satMod val="350000"/>
+              </a:schemeClr>
+            </a:gs>
+          </a:gsLst>
+          <a:lin ang="16200000" scaled="0"/>
+        </a:gradFill>
+      </a:fillStyleLst>
+      <a:lnStyleLst>
+        <a:ln w="9525" cap="flat" cmpd="sng" algn="ctr">
+          <a:solidFill>
+            <a:schemeClr val="phClr">
+              <a:shade val="95000"/>
+              <a:satMod val="105000"/>
+            </a:schemeClr>
+          </a:solidFill>
+          <a:prstDash val="solid"/>
+        </a:ln>
+        <a:ln w="25400" cap="flat" cmpd="sng" algn="ctr">
+          <a:solidFill>
+            <a:schemeClr val="phClr"/>
+          </a:solidFill>
+          <a:prstDash val="solid"/>
+        </a:ln>
+        <a:ln w="38100" cap="flat" cmpd="sng" algn="ctr">
+          <a:solidFill>
+            <a:schemeClr val="phClr"/>
+          </a:solidFill>
+          <a:prstDash val="solid"/>
+        </a:ln>
+      </a:lnStyleLst>
+      <a:effectStyleLst>
+        <a:effectStyle>
+          <a:effectLst>
+            <a:outerShdw blurRad="40000" dist="20000" dir="5400000" rotWithShape="0">
+              <a:srgbClr val="000000">
+                <a:alpha val="38000"/>
+              </a:srgbClr>
+            </a:outerShdw>
+          </a:effectLst>
+        </a:effectStyle>
+        <a:effectStyle>
+          <a:effectLst>
+            <a:outerShdw blurRad="40000" dist="23000" dir="5400000" rotWithShape="0">
+              <a:srgbClr val="000000">
+                <a:alpha val="35000"/>
+              </a:srgbClr>
+            </a:outerShdw>
+          </a:effectLst>
+        </a:effectStyle>
+        <a:effectStyle>
+          <a:effectLst>
+            <a:outerShdw blurRad="40000" dist="23000" dir="5400000" rotWithShape="0">
+              <a:srgbClr val="000000">
+                <a:alpha val="35000"/>
+              </a:srgbClr>
+            </a:outerShdw>
+          </a:effectLst>
+          <a:scene3d>
+            <a:camera prst="orthographicFront">
+              <a:rot lat="0" lon="0" rev="0"/>
+            </a:camera>
+            <a:lightRig rig="threePt" dir="t">
+              <a:rot lat="0" lon="0" rev="1200000"/>
+            </a:lightRig>
+          </a:scene3d>
+          <a:sp3d>
+            <a:bevelT w="63500" h="25400"/>
+          </a:sp3d>
+        </a:effectStyle>
+      </a:effectStyleLst>
+      <a:bgFillStyleLst>
+        <a:solidFill>
+          <a:schemeClr val="phClr"/>
+        </a:solidFill>
+        <a:gradFill rotWithShape="1">
+          <a:gsLst>
+            <a:gs pos="0">
+              <a:schemeClr val="phClr">
+                <a:tint val="40000"/>
+                <a:satMod val="350000"/>
+              </a:schemeClr>
+            </a:gs>
+            <a:gs pos="40000">
+              <a:schemeClr val="phClr">
+                <a:tint val="45000"/>
+                <a:shade val="99000"/>
+                <a:satMod val="350000"/>
+              </a:schemeClr>
+            </a:gs>
+            <a:gs pos="100000">
+              <a:schemeClr val="phClr">
+                <a:shade val="20000"/>
+                <a:satMod val="255000"/>
+              </a:schemeClr>
+            </a:gs>
+          </a:gsLst>
+          <a:path path="circle">
+            <a:fillToRect l="50000" t="-80000" r="50000" b="180000"/>
+          </a:path>
+        </a:gradFill>
+        <a:gradFill rotWithShape="1">
+          <a:gsLst>
+            <a:gs pos="0">
+              <a:schemeClr val="phClr">
+                <a:tint val="80000"/>
+                <a:satMod val="300000"/>
+              </a:schemeClr>
+            </a:gs>
+            <a:gs pos="100000">
+              <a:schemeClr val="phClr">
+                <a:shade val="30000"/>
+                <a:satMod val="200000"/>
+              </a:schemeClr>
+            </a:gs>
+          </a:gsLst>
+          <a:path path="circle">
+            <a:fillToRect l="50000" t="50000" r="50000" b="50000"/>
+          </a:path>
+        </a:gradFill>
+      </a:bgFillStyleLst>
+    </a:fmtScheme>
+  </a:themeElements>
+  <a:objectDefaults>
+    <a:spDef>
+      <a:spPr/>
+      <a:bodyPr/>
+      <a:lstStyle/>
+      <a:style>
+        <a:lnRef idx="1">
+          <a:schemeClr val="accent1"/>
+        </a:lnRef>
+        <a:fillRef idx="3">
+          <a:schemeClr val="accent1"/>
+        </a:fillRef>
+        <a:effectRef idx="2">
+          <a:schemeClr val="accent1"/>
+        </a:effectRef>
+        <a:fontRef idx="minor">
+          <a:schemeClr val="lt1"/>
+        </a:fontRef>
+      </a:style>
+    </a:spDef>
+    <a:lnDef>
+      <a:spPr/>
+      <a:bodyPr/>
+      <a:lstStyle/>
+      <a:style>
+        <a:lnRef idx="2">
+          <a:schemeClr val="accent1"/>
+        </a:lnRef>
+        <a:fillRef idx="0">
+          <a:schemeClr val="accent1"/>
+        </a:fillRef>
+        <a:effectRef idx="1">
+          <a:schemeClr val="accent1"/>
+        </a:effectRef>
+        <a:fontRef idx="minor">
+          <a:schemeClr val="tx1"/>
+        </a:fontRef>
+      </a:style>
+    </a:lnDef>
+  </a:objectDefaults>
+  <a:extraClrSchemeLst/>
+</a:theme>
 </file>
--- a/atividades/apresentacoes/sr1_2026-05-22.pptx
+++ b/atividades/apresentacoes/sr1_2026-05-22.pptx
@@ -10,6 +10,10 @@
     <p:sldId id="259" r:id="rId10"/>
     <p:sldId id="275" r:id="rId14"/>
     <p:sldId id="264" r:id="rId15"/>
+    <p:sldId id="276" r:id="rId13"/>
+    <p:sldId id="277" r:id="rId16"/>
+    <p:sldId id="278" r:id="rId17"/>
+    <p:sldId id="279" r:id="rId18"/>
     <p:sldId id="270" r:id="rId21"/>
     <p:sldId id="273" r:id="rId24"/>
     <p:sldId id="274" r:id="rId25"/>
@@ -526,7 +530,345 @@
           <a:p/>
           <a:p>
             <a:r>
-              <a:t>Gancho: "Esse é o nosso Status Report 1. Vamos te mostrar o que é o ObiOne, o que vamos entregar até 10/07, e onde estamos agora."</a:t>
+              <a:t>Gancho: "Esse é o nosso Status Report 1. Vamos te mostrar o que é o ObiOne, o que vamos entregar até 10/07, e onde estamos agora — e adianto: estamos bem mais à frente do que o cronograma original previa."</a:t>
+            </a:r>
+          </a:p>
+        </p:txBody>
+      </p:sp>
+      <p:sp>
+        <p:nvSpPr>
+          <p:cNvPr id="4" name="Slide Number Placeholder 3"/>
+          <p:cNvSpPr>
+            <a:spLocks noGrp="1"/>
+          </p:cNvSpPr>
+          <p:nvPr>
+            <p:ph type="sldNum" idx="5" sz="quarter"/>
+          </p:nvPr>
+        </p:nvSpPr>
+        <p:spPr/>
+      </p:sp>
+    </p:spTree>
+  </p:cSld>
+  <p:clrMapOvr>
+    <a:masterClrMapping/>
+  </p:clrMapOvr>
+</p:notes>
+</file>
+
+<file path=ppt/notesSlides/notesSlide10.xml><?xml version="1.0" encoding="utf-8"?>
+<p:notes xmlns:a="http://schemas.openxmlformats.org/drawingml/2006/main" xmlns:p="http://schemas.openxmlformats.org/presentationml/2006/main" xmlns:r="http://schemas.openxmlformats.org/officeDocument/2006/relationships">
+  <p:cSld>
+    <p:spTree>
+      <p:nvGrpSpPr>
+        <p:cNvPr id="1" name=""/>
+        <p:cNvGrpSpPr/>
+        <p:nvPr/>
+      </p:nvGrpSpPr>
+      <p:grpSpPr>
+        <a:xfrm>
+          <a:off x="0" y="0"/>
+          <a:ext cx="0" cy="0"/>
+          <a:chOff x="0" y="0"/>
+          <a:chExt cx="0" cy="0"/>
+        </a:xfrm>
+      </p:grpSpPr>
+      <p:sp>
+        <p:nvSpPr>
+          <p:cNvPr id="2" name="Slide Image Placeholder 1"/>
+          <p:cNvSpPr>
+            <a:spLocks noGrp="1"/>
+          </p:cNvSpPr>
+          <p:nvPr>
+            <p:ph type="sldImg" idx="2"/>
+          </p:nvPr>
+        </p:nvSpPr>
+        <p:spPr/>
+      </p:sp>
+      <p:sp>
+        <p:nvSpPr>
+          <p:cNvPr id="3" name="Notes Placeholder 2"/>
+          <p:cNvSpPr>
+            <a:spLocks noGrp="1"/>
+          </p:cNvSpPr>
+          <p:nvPr>
+            <p:ph type="body" idx="3" sz="quarter"/>
+          </p:nvPr>
+        </p:nvSpPr>
+        <p:spPr/>
+        <p:txBody>
+          <a:bodyPr/>
+          <a:lstStyle/>
+          <a:p>
+            <a:r>
+              <a:t>[Tempo: ~1.5min]</a:t>
+            </a:r>
+          </a:p>
+          <a:p/>
+          <a:p>
+            <a:r>
+              <a:t>"São 9 semanas até 10/07, divididas em 4 marcos. Mas atenção: M1 e parte de M2 já estão atingidos antecipadamente."</a:t>
+            </a:r>
+          </a:p>
+          <a:p/>
+          <a:p>
+            <a:r>
+              <a:t>Percorra rapidamente os marcos:</a:t>
+            </a:r>
+          </a:p>
+          <a:p>
+            <a:r>
+              <a:t>- M1 PREPARAÇÃO (22-28 mai · esta semana): atributos, protocolo, primeiros gabaritos. ✅ ATINGIDO.</a:t>
+            </a:r>
+          </a:p>
+          <a:p>
+            <a:r>
+              <a:t>- M2 PIPELINE (29 mai - 11 jun): núcleo técnico. Cadastro + upload + auth + extração LLM nos 5 projetos. ✅ ATINGIDO (3 semanas antecipado).</a:t>
+            </a:r>
+          </a:p>
+          <a:p>
+            <a:r>
+              <a:t>- M3 DASHBOARD + IA (12-25 jun): a comunidade ganha vida. Backend pronto; falta o frontend.</a:t>
+            </a:r>
+          </a:p>
+          <a:p>
+            <a:r>
+              <a:t>- M4 AVALIAÇÃO (26 jun - 2 jul): fecha o ciclo DSR. Precisão, Recall, F1, Kappa, Likert × 2. Backend pronto; falta coleta humana.</a:t>
+            </a:r>
+          </a:p>
+          <a:p/>
+          <a:p>
+            <a:r>
+              <a:t>FECHAMENTO: "Escrita do relato de 3-9/07. Apresentação final em 10/07."</a:t>
+            </a:r>
+          </a:p>
+        </p:txBody>
+      </p:sp>
+      <p:sp>
+        <p:nvSpPr>
+          <p:cNvPr id="4" name="Slide Number Placeholder 3"/>
+          <p:cNvSpPr>
+            <a:spLocks noGrp="1"/>
+          </p:cNvSpPr>
+          <p:nvPr>
+            <p:ph type="sldNum" idx="5" sz="quarter"/>
+          </p:nvPr>
+        </p:nvSpPr>
+        <p:spPr/>
+      </p:sp>
+    </p:spTree>
+  </p:cSld>
+  <p:clrMapOvr>
+    <a:masterClrMapping/>
+  </p:clrMapOvr>
+</p:notes>
+</file>
+
+<file path=ppt/notesSlides/notesSlide11.xml><?xml version="1.0" encoding="utf-8"?>
+<p:notes xmlns:a="http://schemas.openxmlformats.org/drawingml/2006/main" xmlns:p="http://schemas.openxmlformats.org/presentationml/2006/main" xmlns:r="http://schemas.openxmlformats.org/officeDocument/2006/relationships">
+  <p:cSld>
+    <p:spTree>
+      <p:nvGrpSpPr>
+        <p:cNvPr id="1" name=""/>
+        <p:cNvGrpSpPr/>
+        <p:nvPr/>
+      </p:nvGrpSpPr>
+      <p:grpSpPr>
+        <a:xfrm>
+          <a:off x="0" y="0"/>
+          <a:ext cx="0" cy="0"/>
+          <a:chOff x="0" y="0"/>
+          <a:chExt cx="0" cy="0"/>
+        </a:xfrm>
+      </p:grpSpPr>
+      <p:sp>
+        <p:nvSpPr>
+          <p:cNvPr id="2" name="Slide Image Placeholder 1"/>
+          <p:cNvSpPr>
+            <a:spLocks noGrp="1"/>
+          </p:cNvSpPr>
+          <p:nvPr>
+            <p:ph type="sldImg" idx="2"/>
+          </p:nvPr>
+        </p:nvSpPr>
+        <p:spPr/>
+      </p:sp>
+      <p:sp>
+        <p:nvSpPr>
+          <p:cNvPr id="3" name="Notes Placeholder 2"/>
+          <p:cNvSpPr>
+            <a:spLocks noGrp="1"/>
+          </p:cNvSpPr>
+          <p:nvPr>
+            <p:ph type="body" idx="3" sz="quarter"/>
+          </p:nvPr>
+        </p:nvSpPr>
+        <p:spPr/>
+        <p:txBody>
+          <a:bodyPr/>
+          <a:lstStyle/>
+          <a:p>
+            <a:r>
+              <a:t>[Tempo: ~1.5min]</a:t>
+            </a:r>
+          </a:p>
+          <a:p/>
+          <a:p>
+            <a:r>
+              <a:t>"Onde estamos AGORA e o que vem nas próximas semanas."</a:t>
+            </a:r>
+          </a:p>
+          <a:p/>
+          <a:p>
+            <a:r>
+              <a:t>CARD ESQUERDO — ESTÁ FEITO (Sprint 0 + Sprint 1 antecipada):</a:t>
+            </a:r>
+          </a:p>
+          <a:p>
+            <a:r>
+              <a:t>1. REQUISITOS + PROTOCOLO: 18 RFs, 9 RNFs, rubrica híbrida 0/0,5/1 + Kappa.</a:t>
+            </a:r>
+          </a:p>
+          <a:p>
+            <a:r>
+              <a:t>2. BACKEND MVP ENTREGUE: 18/18 USs implementadas. 287 testes verdes. CI rodando em cada PR.</a:t>
+            </a:r>
+          </a:p>
+          <a:p>
+            <a:r>
+              <a:t>3. SMOKE REAL DO PIPELINE LLM: Llama 3.1 8B local em 5/5 projetos do estudo, 46% cobertura média.</a:t>
+            </a:r>
+          </a:p>
+          <a:p/>
+          <a:p>
+            <a:r>
+              <a:t>CARD DIREITO — PRÓXIMAS SEMANAS:</a:t>
+            </a:r>
+          </a:p>
+          <a:p>
+            <a:r>
+              <a:t>4. FRONTEND + GABARITO (sprints 2-4): Bruno integra os 32 endpoints; Cynthia + Moisés produzem o gabarito de 3 projetos.</a:t>
+            </a:r>
+          </a:p>
+          <a:p>
+            <a:r>
+              <a:t>5. SPRINT 5 DESTRAVADA: backend compara via /extractions/evaluation; falta a rubrica humana 0/0,5/1.</a:t>
+            </a:r>
+          </a:p>
+          <a:p>
+            <a:r>
+              <a:t>6. STATUS REPORT 2 (19/06): frontend pronto, IA-Assistente em uso real, Likert lançado.</a:t>
+            </a:r>
+          </a:p>
+        </p:txBody>
+      </p:sp>
+      <p:sp>
+        <p:nvSpPr>
+          <p:cNvPr id="4" name="Slide Number Placeholder 3"/>
+          <p:cNvSpPr>
+            <a:spLocks noGrp="1"/>
+          </p:cNvSpPr>
+          <p:nvPr>
+            <p:ph type="sldNum" idx="5" sz="quarter"/>
+          </p:nvPr>
+        </p:nvSpPr>
+        <p:spPr/>
+      </p:sp>
+    </p:spTree>
+  </p:cSld>
+  <p:clrMapOvr>
+    <a:masterClrMapping/>
+  </p:clrMapOvr>
+</p:notes>
+</file>
+
+<file path=ppt/notesSlides/notesSlide12.xml><?xml version="1.0" encoding="utf-8"?>
+<p:notes xmlns:a="http://schemas.openxmlformats.org/drawingml/2006/main" xmlns:p="http://schemas.openxmlformats.org/presentationml/2006/main" xmlns:r="http://schemas.openxmlformats.org/officeDocument/2006/relationships">
+  <p:cSld>
+    <p:spTree>
+      <p:nvGrpSpPr>
+        <p:cNvPr id="1" name=""/>
+        <p:cNvGrpSpPr/>
+        <p:nvPr/>
+      </p:nvGrpSpPr>
+      <p:grpSpPr>
+        <a:xfrm>
+          <a:off x="0" y="0"/>
+          <a:ext cx="0" cy="0"/>
+          <a:chOff x="0" y="0"/>
+          <a:chExt cx="0" cy="0"/>
+        </a:xfrm>
+      </p:grpSpPr>
+      <p:sp>
+        <p:nvSpPr>
+          <p:cNvPr id="2" name="Slide Image Placeholder 1"/>
+          <p:cNvSpPr>
+            <a:spLocks noGrp="1"/>
+          </p:cNvSpPr>
+          <p:nvPr>
+            <p:ph type="sldImg" idx="2"/>
+          </p:nvPr>
+        </p:nvSpPr>
+        <p:spPr/>
+      </p:sp>
+      <p:sp>
+        <p:nvSpPr>
+          <p:cNvPr id="3" name="Notes Placeholder 2"/>
+          <p:cNvSpPr>
+            <a:spLocks noGrp="1"/>
+          </p:cNvSpPr>
+          <p:nvPr>
+            <p:ph type="body" idx="3" sz="quarter"/>
+          </p:nvPr>
+        </p:nvSpPr>
+        <p:spPr/>
+        <p:txBody>
+          <a:bodyPr/>
+          <a:lstStyle/>
+          <a:p>
+            <a:r>
+              <a:t>[Tempo: ~30s + perguntas]</a:t>
+            </a:r>
+          </a:p>
+          <a:p/>
+          <a:p>
+            <a:r>
+              <a:t>"Esse foi nosso Status Report 1. Documentação completa no repositório raniel90/obione — incluindo os 32 endpoints com request/response real (api_responses.md) e 5 diagramas Mermaid da arquitetura. Abrimos para perguntas."</a:t>
+            </a:r>
+          </a:p>
+          <a:p/>
+          <a:p>
+            <a:r>
+              <a:t>Antecipe perguntas prováveis (responda só se vierem):</a:t>
+            </a:r>
+          </a:p>
+          <a:p>
+            <a:r>
+              <a:t>- "Como vão validar o LLM?" → rubrica híbrida + 2 avaliadores independentes + Kappa. Backend já compara estruturado.</a:t>
+            </a:r>
+          </a:p>
+          <a:p>
+            <a:r>
+              <a:t>- "Quem são os clientes?" → consultoria parceira; 5 projetos reais de domínios distintos (jurídico, saúde, esporte, branding, fitoterápicos).</a:t>
+            </a:r>
+          </a:p>
+          <a:p>
+            <a:r>
+              <a:t>- "E se a IA errar?" → IA gera DRAFT, consultor revisa antes de publicar. Cliente nunca vê não-revisado.</a:t>
+            </a:r>
+          </a:p>
+          <a:p>
+            <a:r>
+              <a:t>- "Por que LLM e não regex/parser?" → heterogeneidade dos .docx; LLM lida com variação semântica. Comprovado em smoke.</a:t>
+            </a:r>
+          </a:p>
+          <a:p>
+            <a:r>
+              <a:t>- "Por que 46% de cobertura?" → muitos atributos do MPO são genuinamente ausentes no documento. Sprint 5 quantifica via precisão/recall.</a:t>
+            </a:r>
+          </a:p>
+          <a:p>
+            <a:r>
+              <a:t>- "Por que tão adiantado?" → IA generativa acelerou implementação; o trabalho intelectual (requisitos, arquitetura, protocolo) virou base sólida pra automação.</a:t>
             </a:r>
           </a:p>
         </p:txBody>
@@ -607,7 +949,7 @@
           </a:p>
           <a:p>
             <a:r>
-              <a:t>"Quatro partes: primeiro o contexto que motiva o projeto, depois o que vamos construir, o cronograma das 9 semanas restantes, e fechamos com o status atual."</a:t>
+              <a:t>"Quatro partes: o contexto que motiva o projeto, o que vamos construir + os requisitos em detalhe, onde estamos hoje (incluindo o backend já entregue), e fechamos com o cronograma e os próximos passos."</a:t>
             </a:r>
           </a:p>
         </p:txBody>
@@ -943,7 +1285,7 @@
           <a:lstStyle/>
           <a:p>
             <a:r>
-              <a:t>[Tempo: ~2min]</a:t>
+              <a:t>[Tempo: ~1.5min]</a:t>
             </a:r>
           </a:p>
           <a:p/>
@@ -954,7 +1296,7 @@
           </a:p>
           <a:p>
             <a:r>
-              <a:t>"Agora o como — escopo organizado em 5 grupos, 18 requisitos funcionais."</a:t>
+              <a:t>"Agora o como — escopo organizado em 5 grupos, 18 requisitos funcionais. Importante: o pipeline LLM já está comprovado — rodamos em 5/5 projetos do estudo com 46% de cobertura média em ~66s por documento."</a:t>
             </a:r>
           </a:p>
           <a:p/>
@@ -965,7 +1307,7 @@
           </a:p>
           <a:p>
             <a:r>
-              <a:t>- G1 PIPELINE LLM: extrai os 44 atributos via LLM, alimenta tudo</a:t>
+              <a:t>- G1 PIPELINE LLM: extrai os 44 atributos via Llama 3.1 8B local. Smoke real feito.</a:t>
             </a:r>
           </a:p>
           <a:p>
@@ -991,7 +1333,7 @@
           <a:p/>
           <a:p>
             <a:r>
-              <a:t>FECHAMENTO: "Cada grupo materializa uma categoria do MPO. Detalhes técnicos no repositório."</a:t>
+              <a:t>TRANSIÇÃO: "Vou agora detalhar cada bloco de requisitos — começando pela Fundação e o Pipeline."</a:t>
             </a:r>
           </a:p>
         </p:txBody>
@@ -1067,39 +1409,38 @@
           <a:p/>
           <a:p>
             <a:r>
-              <a:t>"São 9 semanas até 10/07, divididas em 4 marcos."</a:t>
+              <a:t>CARD por CARD — Fundação + Pipeline:</a:t>
+            </a:r>
+          </a:p>
+          <a:p>
+            <a:r>
+              <a:t>- RF01 AUTENTICAR: JWT 24h, admin cria contas, sem cadastro público.</a:t>
+            </a:r>
+          </a:p>
+          <a:p>
+            <a:r>
+              <a:t>- RF02 PERFIS: 3 papéis (consultor, cliente, admin). Acesso semi-aberto = característica MPO.</a:t>
+            </a:r>
+          </a:p>
+          <a:p>
+            <a:r>
+              <a:t>- RF03 CADASTRO: 6 domínios suportados (legal, health, sports, branding, gastronomy, other).</a:t>
+            </a:r>
+          </a:p>
+          <a:p>
+            <a:r>
+              <a:t>- RF04 UPLOAD .DOCX: sha256 + 50 MB max, rejeita duplicatas.</a:t>
+            </a:r>
+          </a:p>
+          <a:p>
+            <a:r>
+              <a:t>- RF05 + RF06 EXTRAÇÃO: 44 atributos do Quadro 37, prompt e modelo registrados em cada extração.</a:t>
             </a:r>
           </a:p>
           <a:p/>
           <a:p>
             <a:r>
-              <a:t>Percorra rapidamente os marcos (use os subtítulos como âncora):</a:t>
-            </a:r>
-          </a:p>
-          <a:p>
-            <a:r>
-              <a:t>- M1 PREPARAÇÃO (22-28 mai · ESTA SEMANA): atributos, protocolo, primeiros gabaritos. Destrava tudo o que vem.</a:t>
-            </a:r>
-          </a:p>
-          <a:p>
-            <a:r>
-              <a:t>- M2 PIPELINE (29 mai - 11 jun): núcleo técnico. Cadastro + upload + auth + extração LLM nos 5 projetos.</a:t>
-            </a:r>
-          </a:p>
-          <a:p>
-            <a:r>
-              <a:t>- M3 DASHBOARD + IA (12-25 jun): a comunidade ganha vida. Cobertura, perfis, comentários, Resumo do Cliente, Drafts assistidos. Status Report 2 em 19/06.</a:t>
-            </a:r>
-          </a:p>
-          <a:p>
-            <a:r>
-              <a:t>- M4 AVALIAÇÃO (26 jun - 2 jul): fecha o ciclo DSR. Precisão, Recall, F1, Kappa, Likert × 2.</a:t>
-            </a:r>
-          </a:p>
-          <a:p/>
-          <a:p>
-            <a:r>
-              <a:t>FECHAMENTO: "Escrita do relato de 3-9/07. Apresentação final em 10/07."</a:t>
+              <a:t>FECHAMENTO: "Os 6 requisitos da Fundação e do Pipeline estão TODOS implementados no backend."</a:t>
             </a:r>
           </a:p>
         </p:txBody>
@@ -1175,49 +1516,38 @@
           <a:p/>
           <a:p>
             <a:r>
-              <a:t>"Onde estamos AGORA e o que vem nas próximas semanas."</a:t>
+              <a:t>CARD por CARD — Observação + Comunidade + IA:</a:t>
+            </a:r>
+          </a:p>
+          <a:p>
+            <a:r>
+              <a:t>- RF07 + RF09 PORTFÓLIO: visão do consultor com status derivado e cobertura % do MPO.</a:t>
+            </a:r>
+          </a:p>
+          <a:p>
+            <a:r>
+              <a:t>- RF08 DETALHE: view consolidado por projeto.</a:t>
+            </a:r>
+          </a:p>
+          <a:p>
+            <a:r>
+              <a:t>- RF10 + RF11 DIÁLOGO: comentários com 1 nível de threading + feed in-app cronológico.</a:t>
+            </a:r>
+          </a:p>
+          <a:p>
+            <a:r>
+              <a:t>- RF12 RESUMO DO CLIENTE: IA TRADUTORA — extração técnica vira narrativa acessível.</a:t>
+            </a:r>
+          </a:p>
+          <a:p>
+            <a:r>
+              <a:t>- RF13 DRAFTS: IA REDUTORA DE FRICÇÃO — propõe próximos passos e pontos de atenção.</a:t>
             </a:r>
           </a:p>
           <a:p/>
           <a:p>
             <a:r>
-              <a:t>CARD ESQUERDO — ESTÁ FEITO (Sprint 1, esta semana — preparatória):</a:t>
-            </a:r>
-          </a:p>
-          <a:p>
-            <a:r>
-              <a:t>1. REQUISITOS: 18 funcionais + 9 não funcionais, em formato ficha</a:t>
-            </a:r>
-          </a:p>
-          <a:p>
-            <a:r>
-              <a:t>2. ATRIBUTOS-ALVO do MPO: os 44 do Quadro 37, categorizados por tipo</a:t>
-            </a:r>
-          </a:p>
-          <a:p>
-            <a:r>
-              <a:t>3. PROTOCOLO DE AVALIAÇÃO: rubrica híbrida 0/0,5/1 + Cohen's Kappa</a:t>
-            </a:r>
-          </a:p>
-          <a:p/>
-          <a:p>
-            <a:r>
-              <a:t>CARD DIREITO — PRÓXIMAS SEMANAS:</a:t>
-            </a:r>
-          </a:p>
-          <a:p>
-            <a:r>
-              <a:t>4. SPRINT 2 (22 mai - 4 jun): cadastro + upload + auth + pipeline LLM rodando nos 5 projetos</a:t>
-            </a:r>
-          </a:p>
-          <a:p>
-            <a:r>
-              <a:t>5. GABARITOS MANUAIS: Valença como piloto, depois Freire Batista e Kaka JJ — pareados (Cynthia + Moisés)</a:t>
-            </a:r>
-          </a:p>
-          <a:p>
-            <a:r>
-              <a:t>6. STATUS REPORT 2 (19/06): dashboard + IA-Assistente operacionais</a:t>
+              <a:t>ENFATIZE: "Toda saída da IA passa por revisão do consultor antes de virar pública. O cliente nunca vê draft."</a:t>
             </a:r>
           </a:p>
         </p:txBody>
@@ -1287,39 +1617,151 @@
           <a:lstStyle/>
           <a:p>
             <a:r>
-              <a:t>[Tempo: ~30s + perguntas]</a:t>
+              <a:t>[Tempo: ~1.5min]</a:t>
             </a:r>
           </a:p>
           <a:p/>
           <a:p>
             <a:r>
-              <a:t>"Esse foi nosso Status Report 1. Documentação completa no repositório raniel90/obione. Abrimos para perguntas."</a:t>
+              <a:t>CARD por CARD — Avaliação DSR:</a:t>
+            </a:r>
+          </a:p>
+          <a:p>
+            <a:r>
+              <a:t>- RF14 GABARITO: backend já carrega; produção do gabarito é responsabilidade de Cynthia e Moisés.</a:t>
+            </a:r>
+          </a:p>
+          <a:p>
+            <a:r>
+              <a:t>- RF15 COMPARAÇÃO: critério híbrido — comparação exata em estruturados + rubrica humana 0/0,5/1 em texto livre + Cohen's Kappa entre avaliadores.</a:t>
+            </a:r>
+          </a:p>
+          <a:p>
+            <a:r>
+              <a:t>- RF16 LIKERT CONSULTORIA: 4 dimensões — utilidade dos drafts, fricção, qualidade do resumo, manutenibilidade.</a:t>
+            </a:r>
+          </a:p>
+          <a:p>
+            <a:r>
+              <a:t>- RF17 LIKERT CLIENTES: 4 dimensões — clareza, utilidade do espaço, qualidade do diálogo, sentido de inclusão.</a:t>
+            </a:r>
+          </a:p>
+          <a:p>
+            <a:r>
+              <a:t>- RF18 EXPORTAÇÃO: JSON bundle (research) + CSV long-format (rubrica).</a:t>
             </a:r>
           </a:p>
           <a:p/>
           <a:p>
             <a:r>
-              <a:t>Antecipe perguntas prováveis (responda só se vierem):</a:t>
-            </a:r>
-          </a:p>
-          <a:p>
-            <a:r>
-              <a:t>- "Como vão validar o LLM?" → rubrica híbrida + 2 avaliadores independentes + Kappa</a:t>
-            </a:r>
-          </a:p>
-          <a:p>
-            <a:r>
-              <a:t>- "Quem são os clientes?" → consultoria parceira; 5 projetos reais de domínios distintos (jurídico, saúde, esporte, branding)</a:t>
-            </a:r>
-          </a:p>
-          <a:p>
-            <a:r>
-              <a:t>- "E se a IA errar?" → IA gera draft, consultor revisa antes de publicar</a:t>
-            </a:r>
-          </a:p>
-          <a:p>
-            <a:r>
-              <a:t>- "Por que LLM e não regex/parser?" → heterogeneidade dos .docx; LLM lida com variação semântica</a:t>
+              <a:t>DESTAQUE: "Todo o backend de avaliação está pronto. Sprint 5 vira coleta humana — não código."</a:t>
+            </a:r>
+          </a:p>
+        </p:txBody>
+      </p:sp>
+      <p:sp>
+        <p:nvSpPr>
+          <p:cNvPr id="4" name="Slide Number Placeholder 3"/>
+          <p:cNvSpPr>
+            <a:spLocks noGrp="1"/>
+          </p:cNvSpPr>
+          <p:nvPr>
+            <p:ph type="sldNum" idx="5" sz="quarter"/>
+          </p:nvPr>
+        </p:nvSpPr>
+        <p:spPr/>
+      </p:sp>
+    </p:spTree>
+  </p:cSld>
+  <p:clrMapOvr>
+    <a:masterClrMapping/>
+  </p:clrMapOvr>
+</p:notes>
+</file>
+
+<file path=ppt/notesSlides/notesSlide9.xml><?xml version="1.0" encoding="utf-8"?>
+<p:notes xmlns:a="http://schemas.openxmlformats.org/drawingml/2006/main" xmlns:p="http://schemas.openxmlformats.org/presentationml/2006/main" xmlns:r="http://schemas.openxmlformats.org/officeDocument/2006/relationships">
+  <p:cSld>
+    <p:spTree>
+      <p:nvGrpSpPr>
+        <p:cNvPr id="1" name=""/>
+        <p:cNvGrpSpPr/>
+        <p:nvPr/>
+      </p:nvGrpSpPr>
+      <p:grpSpPr>
+        <a:xfrm>
+          <a:off x="0" y="0"/>
+          <a:ext cx="0" cy="0"/>
+          <a:chOff x="0" y="0"/>
+          <a:chExt cx="0" cy="0"/>
+        </a:xfrm>
+      </p:grpSpPr>
+      <p:sp>
+        <p:nvSpPr>
+          <p:cNvPr id="2" name="Slide Image Placeholder 1"/>
+          <p:cNvSpPr>
+            <a:spLocks noGrp="1"/>
+          </p:cNvSpPr>
+          <p:nvPr>
+            <p:ph type="sldImg" idx="2"/>
+          </p:nvPr>
+        </p:nvSpPr>
+        <p:spPr/>
+      </p:sp>
+      <p:sp>
+        <p:nvSpPr>
+          <p:cNvPr id="3" name="Notes Placeholder 2"/>
+          <p:cNvSpPr>
+            <a:spLocks noGrp="1"/>
+          </p:cNvSpPr>
+          <p:nvPr>
+            <p:ph type="body" idx="3" sz="quarter"/>
+          </p:nvPr>
+        </p:nvSpPr>
+        <p:spPr/>
+        <p:txBody>
+          <a:bodyPr/>
+          <a:lstStyle/>
+          <a:p>
+            <a:r>
+              <a:t>[Tempo: ~1min]</a:t>
+            </a:r>
+          </a:p>
+          <a:p/>
+          <a:p>
+            <a:r>
+              <a:t>5 TEMAS por 9 RNFs:</a:t>
+            </a:r>
+          </a:p>
+          <a:p>
+            <a:r>
+              <a:t>- SEGURANÇA &amp; LGPD (RNF01 + RNF02): auth obrigatório, criptografia em trânsito, logs de acesso.</a:t>
+            </a:r>
+          </a:p>
+          <a:p>
+            <a:r>
+              <a:t>- REPRODUTIBILIDADE (RNF03 + RNF04): versão de prompt + modelo LLM registrados; schema JSON versionado.</a:t>
+            </a:r>
+          </a:p>
+          <a:p>
+            <a:r>
+              <a:t>- PERFORMANCE (RNF05 + RNF06): extração ≤ 90s (medimos 46-79s) e REST ≤ 500ms p95.</a:t>
+            </a:r>
+          </a:p>
+          <a:p>
+            <a:r>
+              <a:t>- USABILIDADE (RNF07): linguagem cidadã no Resumo do Cliente.</a:t>
+            </a:r>
+          </a:p>
+          <a:p>
+            <a:r>
+              <a:t>- MANUTENIBILIDADE + CUSTO (RNF08 + RNF09): ports &amp; adapters arquitetural + Ollama local zero-cost.</a:t>
+            </a:r>
+          </a:p>
+          <a:p/>
+          <a:p>
+            <a:r>
+              <a:t>PONTE: "RNFs não viram US, mas todos estão endereçados arquiteturalmente. Vamos ao cronograma."</a:t>
             </a:r>
           </a:p>
         </p:txBody>
@@ -4765,6 +5207,3963 @@
 </p:sld>
 </file>
 
+<file path=ppt/slides/slide10.xml><?xml version="1.0" encoding="utf-8"?>
+<p:sld xmlns:a="http://schemas.openxmlformats.org/drawingml/2006/main" xmlns:p="http://schemas.openxmlformats.org/presentationml/2006/main" xmlns:r="http://schemas.openxmlformats.org/officeDocument/2006/relationships">
+  <p:cSld>
+    <p:spTree>
+      <p:nvGrpSpPr>
+        <p:cNvPr id="1" name=""/>
+        <p:cNvGrpSpPr/>
+        <p:nvPr/>
+      </p:nvGrpSpPr>
+      <p:grpSpPr/>
+      <p:sp>
+        <p:nvSpPr>
+          <p:cNvPr id="3" name="TextBox 2"/>
+          <p:cNvSpPr txBox="1"/>
+          <p:nvPr/>
+        </p:nvSpPr>
+        <p:spPr>
+          <a:xfrm>
+            <a:off x="457200" y="457200"/>
+            <a:ext cx="11277600" cy="228600"/>
+          </a:xfrm>
+          <a:prstGeom prst="rect">
+            <a:avLst/>
+          </a:prstGeom>
+          <a:noFill/>
+        </p:spPr>
+        <p:txBody>
+          <a:bodyPr wrap="square" lIns="0" rIns="0" tIns="0" bIns="0" anchor="t">
+            <a:spAutoFit/>
+          </a:bodyPr>
+          <a:lstStyle/>
+          <a:p>
+            <a:pPr algn="l"/>
+            <a:r>
+              <a:rPr sz="1100" b="1" i="0">
+                <a:solidFill>
+                  <a:srgbClr val="E0261E"/>
+                </a:solidFill>
+                <a:latin typeface="Arial"/>
+              </a:rPr>
+              <a:t>REQUISITOS · OBSERVAÇÃO + COMUNIDADE + IA</a:t>
+            </a:r>
+          </a:p>
+        </p:txBody>
+      </p:sp>
+      <p:sp>
+        <p:nvSpPr>
+          <p:cNvPr id="4" name="TextBox 3"/>
+          <p:cNvSpPr txBox="1"/>
+          <p:nvPr/>
+        </p:nvSpPr>
+        <p:spPr>
+          <a:xfrm>
+            <a:off x="457200" y="685800"/>
+            <a:ext cx="10000000" cy="685800"/>
+          </a:xfrm>
+          <a:prstGeom prst="rect">
+            <a:avLst/>
+          </a:prstGeom>
+          <a:noFill/>
+        </p:spPr>
+        <p:txBody>
+          <a:bodyPr wrap="square" lIns="0" rIns="0" tIns="0" bIns="0" anchor="t">
+            <a:spAutoFit/>
+          </a:bodyPr>
+          <a:lstStyle/>
+          <a:p>
+            <a:pPr algn="l"/>
+            <a:r>
+              <a:rPr sz="2800" b="1" i="0">
+                <a:solidFill>
+                  <a:srgbClr val="1F3A6B"/>
+                </a:solidFill>
+                <a:latin typeface="Arial"/>
+              </a:rPr>
+              <a:t>7 requisitos funcionais · sprints 3 e 4 · todos implementados</a:t>
+            </a:r>
+          </a:p>
+        </p:txBody>
+      </p:sp>
+      <p:sp>
+        <p:nvSpPr>
+          <p:cNvPr id="5" name="Rectangle 4"/>
+          <p:cNvSpPr/>
+          <p:nvPr/>
+        </p:nvSpPr>
+        <p:spPr>
+          <a:xfrm>
+            <a:off x="457200" y="1432560"/>
+            <a:ext cx="685800" cy="36576"/>
+          </a:xfrm>
+          <a:prstGeom prst="rect">
+            <a:avLst/>
+          </a:prstGeom>
+          <a:solidFill>
+            <a:srgbClr val="E0261E"/>
+          </a:solidFill>
+          <a:ln>
+            <a:noFill/>
+          </a:ln>
+        </p:spPr>
+        <p:style>
+          <a:lnRef idx="1">
+            <a:schemeClr val="accent1"/>
+          </a:lnRef>
+          <a:fillRef idx="3">
+            <a:schemeClr val="accent1"/>
+          </a:fillRef>
+          <a:effectRef idx="2">
+            <a:schemeClr val="accent1"/>
+          </a:effectRef>
+          <a:fontRef idx="minor">
+            <a:schemeClr val="lt1"/>
+          </a:fontRef>
+        </p:style>
+        <p:txBody>
+          <a:bodyPr rtlCol="0" anchor="ctr"/>
+          <a:lstStyle/>
+          <a:p>
+            <a:pPr algn="ctr"/>
+          </a:p>
+        </p:txBody>
+      </p:sp>
+      <p:sp>
+        <p:nvSpPr>
+          <p:cNvPr id="6" name="Rectangle 5"/>
+          <p:cNvSpPr/>
+          <p:nvPr/>
+        </p:nvSpPr>
+        <p:spPr>
+          <a:xfrm>
+            <a:off x="685800" y="1828800"/>
+            <a:ext cx="685800" cy="822960"/>
+          </a:xfrm>
+          <a:prstGeom prst="rect">
+            <a:avLst/>
+          </a:prstGeom>
+          <a:solidFill>
+            <a:srgbClr val="E0261E"/>
+          </a:solidFill>
+          <a:ln>
+            <a:noFill/>
+          </a:ln>
+        </p:spPr>
+        <p:style>
+          <a:lnRef idx="1">
+            <a:schemeClr val="accent1"/>
+          </a:lnRef>
+          <a:fillRef idx="3">
+            <a:schemeClr val="accent1"/>
+          </a:fillRef>
+          <a:effectRef idx="2">
+            <a:schemeClr val="accent1"/>
+          </a:effectRef>
+          <a:fontRef idx="minor">
+            <a:schemeClr val="lt1"/>
+          </a:fontRef>
+        </p:style>
+        <p:txBody>
+          <a:bodyPr rtlCol="0" anchor="ctr"/>
+          <a:lstStyle/>
+          <a:p>
+            <a:pPr algn="ctr"/>
+          </a:p>
+        </p:txBody>
+      </p:sp>
+      <p:sp>
+        <p:nvSpPr>
+          <p:cNvPr id="7" name="TextBox 6"/>
+          <p:cNvSpPr txBox="1"/>
+          <p:nvPr/>
+        </p:nvSpPr>
+        <p:spPr>
+          <a:xfrm>
+            <a:off x="685800" y="1828800"/>
+            <a:ext cx="685800" cy="822960"/>
+          </a:xfrm>
+          <a:prstGeom prst="rect">
+            <a:avLst/>
+          </a:prstGeom>
+          <a:noFill/>
+        </p:spPr>
+        <p:txBody>
+          <a:bodyPr wrap="square" lIns="0" rIns="0" tIns="0" bIns="0" anchor="ctr">
+            <a:spAutoFit/>
+          </a:bodyPr>
+          <a:lstStyle/>
+          <a:p>
+            <a:pPr algn="ctr"/>
+            <a:r>
+              <a:rPr sz="2200" b="1" i="0">
+                <a:solidFill>
+                  <a:srgbClr val="FFFFFF"/>
+                </a:solidFill>
+                <a:latin typeface="Arial"/>
+              </a:rPr>
+              <a:t>G1</a:t>
+            </a:r>
+          </a:p>
+        </p:txBody>
+      </p:sp>
+      <p:sp>
+        <p:nvSpPr>
+          <p:cNvPr id="8" name="Rectangle 7"/>
+          <p:cNvSpPr/>
+          <p:nvPr/>
+        </p:nvSpPr>
+        <p:spPr>
+          <a:xfrm>
+            <a:off x="1371600" y="1828800"/>
+            <a:ext cx="10500000" cy="822960"/>
+          </a:xfrm>
+          <a:prstGeom prst="rect">
+            <a:avLst/>
+          </a:prstGeom>
+          <a:solidFill>
+            <a:srgbClr val="F4F4F6"/>
+          </a:solidFill>
+          <a:ln w="9525">
+            <a:solidFill>
+              <a:srgbClr val="D4D4DC"/>
+            </a:solidFill>
+          </a:ln>
+        </p:spPr>
+        <p:style>
+          <a:lnRef idx="1">
+            <a:schemeClr val="accent1"/>
+          </a:lnRef>
+          <a:fillRef idx="3">
+            <a:schemeClr val="accent1"/>
+          </a:fillRef>
+          <a:effectRef idx="2">
+            <a:schemeClr val="accent1"/>
+          </a:effectRef>
+          <a:fontRef idx="minor">
+            <a:schemeClr val="lt1"/>
+          </a:fontRef>
+        </p:style>
+        <p:txBody>
+          <a:bodyPr rtlCol="0" anchor="ctr"/>
+          <a:lstStyle/>
+          <a:p>
+            <a:pPr algn="ctr"/>
+          </a:p>
+        </p:txBody>
+      </p:sp>
+      <p:sp>
+        <p:nvSpPr>
+          <p:cNvPr id="9" name="TextBox 8"/>
+          <p:cNvSpPr txBox="1"/>
+          <p:nvPr/>
+        </p:nvSpPr>
+        <p:spPr>
+          <a:xfrm>
+            <a:off x="1600200" y="1920240"/>
+            <a:ext cx="10000000" cy="304800"/>
+          </a:xfrm>
+          <a:prstGeom prst="rect">
+            <a:avLst/>
+          </a:prstGeom>
+          <a:noFill/>
+        </p:spPr>
+        <p:txBody>
+          <a:bodyPr wrap="square" lIns="0" rIns="0" tIns="0" bIns="0" anchor="t">
+            <a:spAutoFit/>
+          </a:bodyPr>
+          <a:lstStyle/>
+          <a:p>
+            <a:pPr algn="l"/>
+            <a:r>
+              <a:rPr sz="1500" b="1" i="0">
+                <a:solidFill>
+                  <a:srgbClr val="1F3A6B"/>
+                </a:solidFill>
+                <a:latin typeface="Arial"/>
+              </a:rPr>
+              <a:t>RF07 + RF09 · Portfólio</a:t>
+            </a:r>
+          </a:p>
+        </p:txBody>
+      </p:sp>
+      <p:sp>
+        <p:nvSpPr>
+          <p:cNvPr id="10" name="TextBox 9"/>
+          <p:cNvSpPr txBox="1"/>
+          <p:nvPr/>
+        </p:nvSpPr>
+        <p:spPr>
+          <a:xfrm>
+            <a:off x="1600200" y="2240280"/>
+            <a:ext cx="10000000" cy="365760"/>
+          </a:xfrm>
+          <a:prstGeom prst="rect">
+            <a:avLst/>
+          </a:prstGeom>
+          <a:noFill/>
+        </p:spPr>
+        <p:txBody>
+          <a:bodyPr wrap="square" lIns="0" rIns="0" tIns="0" bIns="0" anchor="t">
+            <a:spAutoFit/>
+          </a:bodyPr>
+          <a:lstStyle/>
+          <a:p>
+            <a:pPr algn="l"/>
+            <a:r>
+              <a:rPr sz="1100" b="0" i="0">
+                <a:solidFill>
+                  <a:srgbClr val="4A4A5A"/>
+                </a:solidFill>
+                <a:latin typeface="Arial"/>
+              </a:rPr>
+              <a:t>Visão do consultor com status derivado e cobertura % do MPO por projeto.</a:t>
+            </a:r>
+          </a:p>
+        </p:txBody>
+      </p:sp>
+      <p:sp>
+        <p:nvSpPr>
+          <p:cNvPr id="11" name="Rectangle 10"/>
+          <p:cNvSpPr/>
+          <p:nvPr/>
+        </p:nvSpPr>
+        <p:spPr>
+          <a:xfrm>
+            <a:off x="685800" y="2697480"/>
+            <a:ext cx="685800" cy="822960"/>
+          </a:xfrm>
+          <a:prstGeom prst="rect">
+            <a:avLst/>
+          </a:prstGeom>
+          <a:solidFill>
+            <a:srgbClr val="E0261E"/>
+          </a:solidFill>
+          <a:ln>
+            <a:noFill/>
+          </a:ln>
+        </p:spPr>
+        <p:style>
+          <a:lnRef idx="1">
+            <a:schemeClr val="accent1"/>
+          </a:lnRef>
+          <a:fillRef idx="3">
+            <a:schemeClr val="accent1"/>
+          </a:fillRef>
+          <a:effectRef idx="2">
+            <a:schemeClr val="accent1"/>
+          </a:effectRef>
+          <a:fontRef idx="minor">
+            <a:schemeClr val="lt1"/>
+          </a:fontRef>
+        </p:style>
+        <p:txBody>
+          <a:bodyPr rtlCol="0" anchor="ctr"/>
+          <a:lstStyle/>
+          <a:p>
+            <a:pPr algn="ctr"/>
+          </a:p>
+        </p:txBody>
+      </p:sp>
+      <p:sp>
+        <p:nvSpPr>
+          <p:cNvPr id="12" name="TextBox 11"/>
+          <p:cNvSpPr txBox="1"/>
+          <p:nvPr/>
+        </p:nvSpPr>
+        <p:spPr>
+          <a:xfrm>
+            <a:off x="685800" y="2697480"/>
+            <a:ext cx="685800" cy="822960"/>
+          </a:xfrm>
+          <a:prstGeom prst="rect">
+            <a:avLst/>
+          </a:prstGeom>
+          <a:noFill/>
+        </p:spPr>
+        <p:txBody>
+          <a:bodyPr wrap="square" lIns="0" rIns="0" tIns="0" bIns="0" anchor="ctr">
+            <a:spAutoFit/>
+          </a:bodyPr>
+          <a:lstStyle/>
+          <a:p>
+            <a:pPr algn="ctr"/>
+            <a:r>
+              <a:rPr sz="2200" b="1" i="0">
+                <a:solidFill>
+                  <a:srgbClr val="FFFFFF"/>
+                </a:solidFill>
+                <a:latin typeface="Arial"/>
+              </a:rPr>
+              <a:t>G2</a:t>
+            </a:r>
+          </a:p>
+        </p:txBody>
+      </p:sp>
+      <p:sp>
+        <p:nvSpPr>
+          <p:cNvPr id="13" name="Rectangle 12"/>
+          <p:cNvSpPr/>
+          <p:nvPr/>
+        </p:nvSpPr>
+        <p:spPr>
+          <a:xfrm>
+            <a:off x="1371600" y="2697480"/>
+            <a:ext cx="10500000" cy="822960"/>
+          </a:xfrm>
+          <a:prstGeom prst="rect">
+            <a:avLst/>
+          </a:prstGeom>
+          <a:solidFill>
+            <a:srgbClr val="F4F4F6"/>
+          </a:solidFill>
+          <a:ln w="9525">
+            <a:solidFill>
+              <a:srgbClr val="D4D4DC"/>
+            </a:solidFill>
+          </a:ln>
+        </p:spPr>
+        <p:style>
+          <a:lnRef idx="1">
+            <a:schemeClr val="accent1"/>
+          </a:lnRef>
+          <a:fillRef idx="3">
+            <a:schemeClr val="accent1"/>
+          </a:fillRef>
+          <a:effectRef idx="2">
+            <a:schemeClr val="accent1"/>
+          </a:effectRef>
+          <a:fontRef idx="minor">
+            <a:schemeClr val="lt1"/>
+          </a:fontRef>
+        </p:style>
+        <p:txBody>
+          <a:bodyPr rtlCol="0" anchor="ctr"/>
+          <a:lstStyle/>
+          <a:p>
+            <a:pPr algn="ctr"/>
+          </a:p>
+        </p:txBody>
+      </p:sp>
+      <p:sp>
+        <p:nvSpPr>
+          <p:cNvPr id="14" name="TextBox 13"/>
+          <p:cNvSpPr txBox="1"/>
+          <p:nvPr/>
+        </p:nvSpPr>
+        <p:spPr>
+          <a:xfrm>
+            <a:off x="1600200" y="2788920"/>
+            <a:ext cx="10000000" cy="304800"/>
+          </a:xfrm>
+          <a:prstGeom prst="rect">
+            <a:avLst/>
+          </a:prstGeom>
+          <a:noFill/>
+        </p:spPr>
+        <p:txBody>
+          <a:bodyPr wrap="square" lIns="0" rIns="0" tIns="0" bIns="0" anchor="t">
+            <a:spAutoFit/>
+          </a:bodyPr>
+          <a:lstStyle/>
+          <a:p>
+            <a:pPr algn="l"/>
+            <a:r>
+              <a:rPr sz="1500" b="1" i="0">
+                <a:solidFill>
+                  <a:srgbClr val="1F3A6B"/>
+                </a:solidFill>
+                <a:latin typeface="Arial"/>
+              </a:rPr>
+              <a:t>RF08 · Detalhe</a:t>
+            </a:r>
+          </a:p>
+        </p:txBody>
+      </p:sp>
+      <p:sp>
+        <p:nvSpPr>
+          <p:cNvPr id="15" name="TextBox 14"/>
+          <p:cNvSpPr txBox="1"/>
+          <p:nvPr/>
+        </p:nvSpPr>
+        <p:spPr>
+          <a:xfrm>
+            <a:off x="1600200" y="3108960"/>
+            <a:ext cx="10000000" cy="365760"/>
+          </a:xfrm>
+          <a:prstGeom prst="rect">
+            <a:avLst/>
+          </a:prstGeom>
+          <a:noFill/>
+        </p:spPr>
+        <p:txBody>
+          <a:bodyPr wrap="square" lIns="0" rIns="0" tIns="0" bIns="0" anchor="t">
+            <a:spAutoFit/>
+          </a:bodyPr>
+          <a:lstStyle/>
+          <a:p>
+            <a:pPr algn="l"/>
+            <a:r>
+              <a:rPr sz="1100" b="0" i="0">
+                <a:solidFill>
+                  <a:srgbClr val="4A4A5A"/>
+                </a:solidFill>
+                <a:latin typeface="Arial"/>
+              </a:rPr>
+              <a:t>View consolidado: documentos, extrações, cobertura, comentários recentes.</a:t>
+            </a:r>
+          </a:p>
+        </p:txBody>
+      </p:sp>
+      <p:sp>
+        <p:nvSpPr>
+          <p:cNvPr id="16" name="Rectangle 15"/>
+          <p:cNvSpPr/>
+          <p:nvPr/>
+        </p:nvSpPr>
+        <p:spPr>
+          <a:xfrm>
+            <a:off x="685800" y="3566160"/>
+            <a:ext cx="685800" cy="822960"/>
+          </a:xfrm>
+          <a:prstGeom prst="rect">
+            <a:avLst/>
+          </a:prstGeom>
+          <a:solidFill>
+            <a:srgbClr val="E0261E"/>
+          </a:solidFill>
+          <a:ln>
+            <a:noFill/>
+          </a:ln>
+        </p:spPr>
+        <p:style>
+          <a:lnRef idx="1">
+            <a:schemeClr val="accent1"/>
+          </a:lnRef>
+          <a:fillRef idx="3">
+            <a:schemeClr val="accent1"/>
+          </a:fillRef>
+          <a:effectRef idx="2">
+            <a:schemeClr val="accent1"/>
+          </a:effectRef>
+          <a:fontRef idx="minor">
+            <a:schemeClr val="lt1"/>
+          </a:fontRef>
+        </p:style>
+        <p:txBody>
+          <a:bodyPr rtlCol="0" anchor="ctr"/>
+          <a:lstStyle/>
+          <a:p>
+            <a:pPr algn="ctr"/>
+          </a:p>
+        </p:txBody>
+      </p:sp>
+      <p:sp>
+        <p:nvSpPr>
+          <p:cNvPr id="17" name="TextBox 16"/>
+          <p:cNvSpPr txBox="1"/>
+          <p:nvPr/>
+        </p:nvSpPr>
+        <p:spPr>
+          <a:xfrm>
+            <a:off x="685800" y="3566160"/>
+            <a:ext cx="685800" cy="822960"/>
+          </a:xfrm>
+          <a:prstGeom prst="rect">
+            <a:avLst/>
+          </a:prstGeom>
+          <a:noFill/>
+        </p:spPr>
+        <p:txBody>
+          <a:bodyPr wrap="square" lIns="0" rIns="0" tIns="0" bIns="0" anchor="ctr">
+            <a:spAutoFit/>
+          </a:bodyPr>
+          <a:lstStyle/>
+          <a:p>
+            <a:pPr algn="ctr"/>
+            <a:r>
+              <a:rPr sz="2200" b="1" i="0">
+                <a:solidFill>
+                  <a:srgbClr val="FFFFFF"/>
+                </a:solidFill>
+                <a:latin typeface="Arial"/>
+              </a:rPr>
+              <a:t>G3</a:t>
+            </a:r>
+          </a:p>
+        </p:txBody>
+      </p:sp>
+      <p:sp>
+        <p:nvSpPr>
+          <p:cNvPr id="18" name="Rectangle 17"/>
+          <p:cNvSpPr/>
+          <p:nvPr/>
+        </p:nvSpPr>
+        <p:spPr>
+          <a:xfrm>
+            <a:off x="1371600" y="3566160"/>
+            <a:ext cx="10500000" cy="822960"/>
+          </a:xfrm>
+          <a:prstGeom prst="rect">
+            <a:avLst/>
+          </a:prstGeom>
+          <a:solidFill>
+            <a:srgbClr val="F4F4F6"/>
+          </a:solidFill>
+          <a:ln w="9525">
+            <a:solidFill>
+              <a:srgbClr val="D4D4DC"/>
+            </a:solidFill>
+          </a:ln>
+        </p:spPr>
+        <p:style>
+          <a:lnRef idx="1">
+            <a:schemeClr val="accent1"/>
+          </a:lnRef>
+          <a:fillRef idx="3">
+            <a:schemeClr val="accent1"/>
+          </a:fillRef>
+          <a:effectRef idx="2">
+            <a:schemeClr val="accent1"/>
+          </a:effectRef>
+          <a:fontRef idx="minor">
+            <a:schemeClr val="lt1"/>
+          </a:fontRef>
+        </p:style>
+        <p:txBody>
+          <a:bodyPr rtlCol="0" anchor="ctr"/>
+          <a:lstStyle/>
+          <a:p>
+            <a:pPr algn="ctr"/>
+          </a:p>
+        </p:txBody>
+      </p:sp>
+      <p:sp>
+        <p:nvSpPr>
+          <p:cNvPr id="19" name="TextBox 18"/>
+          <p:cNvSpPr txBox="1"/>
+          <p:nvPr/>
+        </p:nvSpPr>
+        <p:spPr>
+          <a:xfrm>
+            <a:off x="1600200" y="3657600"/>
+            <a:ext cx="10000000" cy="304800"/>
+          </a:xfrm>
+          <a:prstGeom prst="rect">
+            <a:avLst/>
+          </a:prstGeom>
+          <a:noFill/>
+        </p:spPr>
+        <p:txBody>
+          <a:bodyPr wrap="square" lIns="0" rIns="0" tIns="0" bIns="0" anchor="t">
+            <a:spAutoFit/>
+          </a:bodyPr>
+          <a:lstStyle/>
+          <a:p>
+            <a:pPr algn="l"/>
+            <a:r>
+              <a:rPr sz="1500" b="1" i="0">
+                <a:solidFill>
+                  <a:srgbClr val="1F3A6B"/>
+                </a:solidFill>
+                <a:latin typeface="Arial"/>
+              </a:rPr>
+              <a:t>RF10 + RF11 · Diálogo</a:t>
+            </a:r>
+          </a:p>
+        </p:txBody>
+      </p:sp>
+      <p:sp>
+        <p:nvSpPr>
+          <p:cNvPr id="20" name="TextBox 19"/>
+          <p:cNvSpPr txBox="1"/>
+          <p:nvPr/>
+        </p:nvSpPr>
+        <p:spPr>
+          <a:xfrm>
+            <a:off x="1600200" y="3977640"/>
+            <a:ext cx="10000000" cy="365760"/>
+          </a:xfrm>
+          <a:prstGeom prst="rect">
+            <a:avLst/>
+          </a:prstGeom>
+          <a:noFill/>
+        </p:spPr>
+        <p:txBody>
+          <a:bodyPr wrap="square" lIns="0" rIns="0" tIns="0" bIns="0" anchor="t">
+            <a:spAutoFit/>
+          </a:bodyPr>
+          <a:lstStyle/>
+          <a:p>
+            <a:pPr algn="l"/>
+            <a:r>
+              <a:rPr sz="1100" b="0" i="0">
+                <a:solidFill>
+                  <a:srgbClr val="4A4A5A"/>
+                </a:solidFill>
+                <a:latin typeface="Arial"/>
+              </a:rPr>
+              <a:t>Comentários com 1 nível de threading. Feed in-app cronológico por visibilidade.</a:t>
+            </a:r>
+          </a:p>
+        </p:txBody>
+      </p:sp>
+      <p:sp>
+        <p:nvSpPr>
+          <p:cNvPr id="21" name="Rectangle 20"/>
+          <p:cNvSpPr/>
+          <p:nvPr/>
+        </p:nvSpPr>
+        <p:spPr>
+          <a:xfrm>
+            <a:off x="685800" y="4434840"/>
+            <a:ext cx="685800" cy="822960"/>
+          </a:xfrm>
+          <a:prstGeom prst="rect">
+            <a:avLst/>
+          </a:prstGeom>
+          <a:solidFill>
+            <a:srgbClr val="E0261E"/>
+          </a:solidFill>
+          <a:ln>
+            <a:noFill/>
+          </a:ln>
+        </p:spPr>
+        <p:style>
+          <a:lnRef idx="1">
+            <a:schemeClr val="accent1"/>
+          </a:lnRef>
+          <a:fillRef idx="3">
+            <a:schemeClr val="accent1"/>
+          </a:fillRef>
+          <a:effectRef idx="2">
+            <a:schemeClr val="accent1"/>
+          </a:effectRef>
+          <a:fontRef idx="minor">
+            <a:schemeClr val="lt1"/>
+          </a:fontRef>
+        </p:style>
+        <p:txBody>
+          <a:bodyPr rtlCol="0" anchor="ctr"/>
+          <a:lstStyle/>
+          <a:p>
+            <a:pPr algn="ctr"/>
+          </a:p>
+        </p:txBody>
+      </p:sp>
+      <p:sp>
+        <p:nvSpPr>
+          <p:cNvPr id="22" name="TextBox 21"/>
+          <p:cNvSpPr txBox="1"/>
+          <p:nvPr/>
+        </p:nvSpPr>
+        <p:spPr>
+          <a:xfrm>
+            <a:off x="685800" y="4434840"/>
+            <a:ext cx="685800" cy="822960"/>
+          </a:xfrm>
+          <a:prstGeom prst="rect">
+            <a:avLst/>
+          </a:prstGeom>
+          <a:noFill/>
+        </p:spPr>
+        <p:txBody>
+          <a:bodyPr wrap="square" lIns="0" rIns="0" tIns="0" bIns="0" anchor="ctr">
+            <a:spAutoFit/>
+          </a:bodyPr>
+          <a:lstStyle/>
+          <a:p>
+            <a:pPr algn="ctr"/>
+            <a:r>
+              <a:rPr sz="2200" b="1" i="0">
+                <a:solidFill>
+                  <a:srgbClr val="FFFFFF"/>
+                </a:solidFill>
+                <a:latin typeface="Arial"/>
+              </a:rPr>
+              <a:t>G4</a:t>
+            </a:r>
+          </a:p>
+        </p:txBody>
+      </p:sp>
+      <p:sp>
+        <p:nvSpPr>
+          <p:cNvPr id="23" name="Rectangle 22"/>
+          <p:cNvSpPr/>
+          <p:nvPr/>
+        </p:nvSpPr>
+        <p:spPr>
+          <a:xfrm>
+            <a:off x="1371600" y="4434840"/>
+            <a:ext cx="10500000" cy="822960"/>
+          </a:xfrm>
+          <a:prstGeom prst="rect">
+            <a:avLst/>
+          </a:prstGeom>
+          <a:solidFill>
+            <a:srgbClr val="F4F4F6"/>
+          </a:solidFill>
+          <a:ln w="9525">
+            <a:solidFill>
+              <a:srgbClr val="D4D4DC"/>
+            </a:solidFill>
+          </a:ln>
+        </p:spPr>
+        <p:style>
+          <a:lnRef idx="1">
+            <a:schemeClr val="accent1"/>
+          </a:lnRef>
+          <a:fillRef idx="3">
+            <a:schemeClr val="accent1"/>
+          </a:fillRef>
+          <a:effectRef idx="2">
+            <a:schemeClr val="accent1"/>
+          </a:effectRef>
+          <a:fontRef idx="minor">
+            <a:schemeClr val="lt1"/>
+          </a:fontRef>
+        </p:style>
+        <p:txBody>
+          <a:bodyPr rtlCol="0" anchor="ctr"/>
+          <a:lstStyle/>
+          <a:p>
+            <a:pPr algn="ctr"/>
+          </a:p>
+        </p:txBody>
+      </p:sp>
+      <p:sp>
+        <p:nvSpPr>
+          <p:cNvPr id="24" name="TextBox 23"/>
+          <p:cNvSpPr txBox="1"/>
+          <p:nvPr/>
+        </p:nvSpPr>
+        <p:spPr>
+          <a:xfrm>
+            <a:off x="1600200" y="4526280"/>
+            <a:ext cx="10000000" cy="304800"/>
+          </a:xfrm>
+          <a:prstGeom prst="rect">
+            <a:avLst/>
+          </a:prstGeom>
+          <a:noFill/>
+        </p:spPr>
+        <p:txBody>
+          <a:bodyPr wrap="square" lIns="0" rIns="0" tIns="0" bIns="0" anchor="t">
+            <a:spAutoFit/>
+          </a:bodyPr>
+          <a:lstStyle/>
+          <a:p>
+            <a:pPr algn="l"/>
+            <a:r>
+              <a:rPr sz="1500" b="1" i="0">
+                <a:solidFill>
+                  <a:srgbClr val="1F3A6B"/>
+                </a:solidFill>
+                <a:latin typeface="Arial"/>
+              </a:rPr>
+              <a:t>RF12 · Resumo Cliente</a:t>
+            </a:r>
+          </a:p>
+        </p:txBody>
+      </p:sp>
+      <p:sp>
+        <p:nvSpPr>
+          <p:cNvPr id="25" name="TextBox 24"/>
+          <p:cNvSpPr txBox="1"/>
+          <p:nvPr/>
+        </p:nvSpPr>
+        <p:spPr>
+          <a:xfrm>
+            <a:off x="1600200" y="4846320"/>
+            <a:ext cx="10000000" cy="365760"/>
+          </a:xfrm>
+          <a:prstGeom prst="rect">
+            <a:avLst/>
+          </a:prstGeom>
+          <a:noFill/>
+        </p:spPr>
+        <p:txBody>
+          <a:bodyPr wrap="square" lIns="0" rIns="0" tIns="0" bIns="0" anchor="t">
+            <a:spAutoFit/>
+          </a:bodyPr>
+          <a:lstStyle/>
+          <a:p>
+            <a:pPr algn="l"/>
+            <a:r>
+              <a:rPr sz="1100" b="0" i="0">
+                <a:solidFill>
+                  <a:srgbClr val="4A4A5A"/>
+                </a:solidFill>
+                <a:latin typeface="Arial"/>
+              </a:rPr>
+              <a:t>IA tradutora: extração técnica vira narrativa acessível. Sempre revisada pelo consultor.</a:t>
+            </a:r>
+          </a:p>
+        </p:txBody>
+      </p:sp>
+      <p:sp>
+        <p:nvSpPr>
+          <p:cNvPr id="26" name="Rectangle 25"/>
+          <p:cNvSpPr/>
+          <p:nvPr/>
+        </p:nvSpPr>
+        <p:spPr>
+          <a:xfrm>
+            <a:off x="685800" y="5303520"/>
+            <a:ext cx="685800" cy="822960"/>
+          </a:xfrm>
+          <a:prstGeom prst="rect">
+            <a:avLst/>
+          </a:prstGeom>
+          <a:solidFill>
+            <a:srgbClr val="E0261E"/>
+          </a:solidFill>
+          <a:ln>
+            <a:noFill/>
+          </a:ln>
+        </p:spPr>
+        <p:style>
+          <a:lnRef idx="1">
+            <a:schemeClr val="accent1"/>
+          </a:lnRef>
+          <a:fillRef idx="3">
+            <a:schemeClr val="accent1"/>
+          </a:fillRef>
+          <a:effectRef idx="2">
+            <a:schemeClr val="accent1"/>
+          </a:effectRef>
+          <a:fontRef idx="minor">
+            <a:schemeClr val="lt1"/>
+          </a:fontRef>
+        </p:style>
+        <p:txBody>
+          <a:bodyPr rtlCol="0" anchor="ctr"/>
+          <a:lstStyle/>
+          <a:p>
+            <a:pPr algn="ctr"/>
+          </a:p>
+        </p:txBody>
+      </p:sp>
+      <p:sp>
+        <p:nvSpPr>
+          <p:cNvPr id="27" name="TextBox 26"/>
+          <p:cNvSpPr txBox="1"/>
+          <p:nvPr/>
+        </p:nvSpPr>
+        <p:spPr>
+          <a:xfrm>
+            <a:off x="685800" y="5303520"/>
+            <a:ext cx="685800" cy="822960"/>
+          </a:xfrm>
+          <a:prstGeom prst="rect">
+            <a:avLst/>
+          </a:prstGeom>
+          <a:noFill/>
+        </p:spPr>
+        <p:txBody>
+          <a:bodyPr wrap="square" lIns="0" rIns="0" tIns="0" bIns="0" anchor="ctr">
+            <a:spAutoFit/>
+          </a:bodyPr>
+          <a:lstStyle/>
+          <a:p>
+            <a:pPr algn="ctr"/>
+            <a:r>
+              <a:rPr sz="2200" b="1" i="0">
+                <a:solidFill>
+                  <a:srgbClr val="FFFFFF"/>
+                </a:solidFill>
+                <a:latin typeface="Arial"/>
+              </a:rPr>
+              <a:t>G5</a:t>
+            </a:r>
+          </a:p>
+        </p:txBody>
+      </p:sp>
+      <p:sp>
+        <p:nvSpPr>
+          <p:cNvPr id="28" name="Rectangle 27"/>
+          <p:cNvSpPr/>
+          <p:nvPr/>
+        </p:nvSpPr>
+        <p:spPr>
+          <a:xfrm>
+            <a:off x="1371600" y="5303520"/>
+            <a:ext cx="10500000" cy="822960"/>
+          </a:xfrm>
+          <a:prstGeom prst="rect">
+            <a:avLst/>
+          </a:prstGeom>
+          <a:solidFill>
+            <a:srgbClr val="F4F4F6"/>
+          </a:solidFill>
+          <a:ln w="9525">
+            <a:solidFill>
+              <a:srgbClr val="D4D4DC"/>
+            </a:solidFill>
+          </a:ln>
+        </p:spPr>
+        <p:style>
+          <a:lnRef idx="1">
+            <a:schemeClr val="accent1"/>
+          </a:lnRef>
+          <a:fillRef idx="3">
+            <a:schemeClr val="accent1"/>
+          </a:fillRef>
+          <a:effectRef idx="2">
+            <a:schemeClr val="accent1"/>
+          </a:effectRef>
+          <a:fontRef idx="minor">
+            <a:schemeClr val="lt1"/>
+          </a:fontRef>
+        </p:style>
+        <p:txBody>
+          <a:bodyPr rtlCol="0" anchor="ctr"/>
+          <a:lstStyle/>
+          <a:p>
+            <a:pPr algn="ctr"/>
+          </a:p>
+        </p:txBody>
+      </p:sp>
+      <p:sp>
+        <p:nvSpPr>
+          <p:cNvPr id="29" name="TextBox 28"/>
+          <p:cNvSpPr txBox="1"/>
+          <p:nvPr/>
+        </p:nvSpPr>
+        <p:spPr>
+          <a:xfrm>
+            <a:off x="1600200" y="5394960"/>
+            <a:ext cx="10000000" cy="304800"/>
+          </a:xfrm>
+          <a:prstGeom prst="rect">
+            <a:avLst/>
+          </a:prstGeom>
+          <a:noFill/>
+        </p:spPr>
+        <p:txBody>
+          <a:bodyPr wrap="square" lIns="0" rIns="0" tIns="0" bIns="0" anchor="t">
+            <a:spAutoFit/>
+          </a:bodyPr>
+          <a:lstStyle/>
+          <a:p>
+            <a:pPr algn="l"/>
+            <a:r>
+              <a:rPr sz="1500" b="1" i="0">
+                <a:solidFill>
+                  <a:srgbClr val="1F3A6B"/>
+                </a:solidFill>
+                <a:latin typeface="Arial"/>
+              </a:rPr>
+              <a:t>RF13 · Drafts</a:t>
+            </a:r>
+          </a:p>
+        </p:txBody>
+      </p:sp>
+      <p:sp>
+        <p:nvSpPr>
+          <p:cNvPr id="30" name="TextBox 29"/>
+          <p:cNvSpPr txBox="1"/>
+          <p:nvPr/>
+        </p:nvSpPr>
+        <p:spPr>
+          <a:xfrm>
+            <a:off x="1600200" y="5715000"/>
+            <a:ext cx="10000000" cy="365760"/>
+          </a:xfrm>
+          <a:prstGeom prst="rect">
+            <a:avLst/>
+          </a:prstGeom>
+          <a:noFill/>
+        </p:spPr>
+        <p:txBody>
+          <a:bodyPr wrap="square" lIns="0" rIns="0" tIns="0" bIns="0" anchor="t">
+            <a:spAutoFit/>
+          </a:bodyPr>
+          <a:lstStyle/>
+          <a:p>
+            <a:pPr algn="l"/>
+            <a:r>
+              <a:rPr sz="1100" b="0" i="0">
+                <a:solidFill>
+                  <a:srgbClr val="4A4A5A"/>
+                </a:solidFill>
+                <a:latin typeface="Arial"/>
+              </a:rPr>
+              <a:t>IA redutora de fricção: próximos passos e pontos de atenção. Consultor edita e publica.</a:t>
+            </a:r>
+          </a:p>
+        </p:txBody>
+      </p:sp>
+      <p:sp>
+        <p:nvSpPr>
+          <p:cNvPr id="31" name="Rectangle 30"/>
+          <p:cNvSpPr/>
+          <p:nvPr/>
+        </p:nvSpPr>
+        <p:spPr>
+          <a:xfrm>
+            <a:off x="457200" y="6400800"/>
+            <a:ext cx="11277600" cy="15240"/>
+          </a:xfrm>
+          <a:prstGeom prst="rect">
+            <a:avLst/>
+          </a:prstGeom>
+          <a:solidFill>
+            <a:srgbClr val="E0261E"/>
+          </a:solidFill>
+          <a:ln>
+            <a:noFill/>
+          </a:ln>
+        </p:spPr>
+        <p:style>
+          <a:lnRef idx="1">
+            <a:schemeClr val="accent1"/>
+          </a:lnRef>
+          <a:fillRef idx="3">
+            <a:schemeClr val="accent1"/>
+          </a:fillRef>
+          <a:effectRef idx="2">
+            <a:schemeClr val="accent1"/>
+          </a:effectRef>
+          <a:fontRef idx="minor">
+            <a:schemeClr val="lt1"/>
+          </a:fontRef>
+        </p:style>
+        <p:txBody>
+          <a:bodyPr rtlCol="0" anchor="ctr"/>
+          <a:lstStyle/>
+          <a:p>
+            <a:pPr algn="ctr"/>
+          </a:p>
+        </p:txBody>
+      </p:sp>
+      <p:sp>
+        <p:nvSpPr>
+          <p:cNvPr id="32" name="Rectangle 31"/>
+          <p:cNvSpPr/>
+          <p:nvPr/>
+        </p:nvSpPr>
+        <p:spPr>
+          <a:xfrm>
+            <a:off x="457200" y="6400800"/>
+            <a:ext cx="11277600" cy="15240"/>
+          </a:xfrm>
+          <a:prstGeom prst="rect">
+            <a:avLst/>
+          </a:prstGeom>
+          <a:solidFill>
+            <a:srgbClr val="E0261E"/>
+          </a:solidFill>
+          <a:ln>
+            <a:noFill/>
+          </a:ln>
+        </p:spPr>
+        <p:style>
+          <a:lnRef idx="1">
+            <a:schemeClr val="accent1"/>
+          </a:lnRef>
+          <a:fillRef idx="3">
+            <a:schemeClr val="accent1"/>
+          </a:fillRef>
+          <a:effectRef idx="2">
+            <a:schemeClr val="accent1"/>
+          </a:effectRef>
+          <a:fontRef idx="minor">
+            <a:schemeClr val="lt1"/>
+          </a:fontRef>
+        </p:style>
+        <p:txBody>
+          <a:bodyPr rtlCol="0" anchor="ctr"/>
+          <a:lstStyle/>
+          <a:p>
+            <a:pPr algn="ctr"/>
+          </a:p>
+        </p:txBody>
+      </p:sp>
+      <p:sp>
+        <p:nvSpPr>
+          <p:cNvPr id="33" name="Rectangle 32"/>
+          <p:cNvSpPr/>
+          <p:nvPr/>
+        </p:nvSpPr>
+        <p:spPr>
+          <a:xfrm>
+            <a:off x="457200" y="6400800"/>
+            <a:ext cx="11277600" cy="15240"/>
+          </a:xfrm>
+          <a:prstGeom prst="rect">
+            <a:avLst/>
+          </a:prstGeom>
+          <a:solidFill>
+            <a:srgbClr val="E0261E"/>
+          </a:solidFill>
+          <a:ln>
+            <a:noFill/>
+          </a:ln>
+        </p:spPr>
+        <p:style>
+          <a:lnRef idx="1">
+            <a:schemeClr val="accent1"/>
+          </a:lnRef>
+          <a:fillRef idx="3">
+            <a:schemeClr val="accent1"/>
+          </a:fillRef>
+          <a:effectRef idx="2">
+            <a:schemeClr val="accent1"/>
+          </a:effectRef>
+          <a:fontRef idx="minor">
+            <a:schemeClr val="lt1"/>
+          </a:fontRef>
+        </p:style>
+        <p:txBody>
+          <a:bodyPr rtlCol="0" anchor="ctr"/>
+          <a:lstStyle/>
+          <a:p>
+            <a:pPr algn="ctr"/>
+          </a:p>
+        </p:txBody>
+      </p:sp>
+      <p:sp>
+        <p:nvSpPr>
+          <p:cNvPr id="34" name="TextBox 33"/>
+          <p:cNvSpPr txBox="1"/>
+          <p:nvPr/>
+        </p:nvSpPr>
+        <p:spPr>
+          <a:xfrm>
+            <a:off x="457200" y="6492240"/>
+            <a:ext cx="8000000" cy="228600"/>
+          </a:xfrm>
+          <a:prstGeom prst="rect">
+            <a:avLst/>
+          </a:prstGeom>
+          <a:noFill/>
+        </p:spPr>
+        <p:txBody>
+          <a:bodyPr wrap="square" lIns="0" rIns="0" tIns="0" bIns="0" anchor="t">
+            <a:spAutoFit/>
+          </a:bodyPr>
+          <a:lstStyle/>
+          <a:p>
+            <a:pPr algn="l"/>
+            <a:r>
+              <a:rPr sz="900" b="0" i="0">
+                <a:solidFill>
+                  <a:srgbClr val="6B6B7A"/>
+                </a:solidFill>
+                <a:latin typeface="Arial"/>
+              </a:rPr>
+              <a:t>Equipe ObiOne · UPE/POLI · Maio 2026</a:t>
+            </a:r>
+          </a:p>
+        </p:txBody>
+      </p:sp>
+      <p:sp>
+        <p:nvSpPr>
+          <p:cNvPr id="35" name="TextBox 34"/>
+          <p:cNvSpPr txBox="1"/>
+          <p:nvPr/>
+        </p:nvSpPr>
+        <p:spPr>
+          <a:xfrm>
+            <a:off x="11000000" y="6492240"/>
+            <a:ext cx="1000000" cy="228600"/>
+          </a:xfrm>
+          <a:prstGeom prst="rect">
+            <a:avLst/>
+          </a:prstGeom>
+          <a:noFill/>
+        </p:spPr>
+        <p:txBody>
+          <a:bodyPr wrap="square" lIns="0" rIns="0" tIns="0" bIns="0" anchor="t">
+            <a:spAutoFit/>
+          </a:bodyPr>
+          <a:lstStyle/>
+          <a:p>
+            <a:pPr algn="r"/>
+            <a:r>
+              <a:rPr sz="900" b="0" i="0">
+                <a:solidFill>
+                  <a:srgbClr val="6B6B7A"/>
+                </a:solidFill>
+                <a:latin typeface="Arial"/>
+              </a:rPr>
+              <a:t>7 / 12</a:t>
+            </a:r>
+          </a:p>
+        </p:txBody>
+      </p:sp>
+      <p:pic>
+        <p:nvPicPr>
+          <p:cNvPr id="36" name="Picture 35" descr="image.png"/>
+          <p:cNvPicPr>
+            <a:picLocks noChangeAspect="1"/>
+          </p:cNvPicPr>
+          <p:nvPr/>
+        </p:nvPicPr>
+        <p:blipFill>
+          <a:blip r:embed="rId2"/>
+          <a:stretch>
+            <a:fillRect/>
+          </a:stretch>
+        </p:blipFill>
+        <p:spPr>
+          <a:xfrm>
+            <a:off x="11000000" y="228600"/>
+            <a:ext cx="1066800" cy="801716"/>
+          </a:xfrm>
+          <a:prstGeom prst="rect">
+            <a:avLst/>
+          </a:prstGeom>
+        </p:spPr>
+      </p:pic>
+    </p:spTree>
+  </p:cSld>
+  <p:clrMapOvr>
+    <a:masterClrMapping/>
+  </p:clrMapOvr>
+</p:sld>
+</file>
+
+<file path=ppt/slides/slide11.xml><?xml version="1.0" encoding="utf-8"?>
+<p:sld xmlns:a="http://schemas.openxmlformats.org/drawingml/2006/main" xmlns:p="http://schemas.openxmlformats.org/presentationml/2006/main" xmlns:r="http://schemas.openxmlformats.org/officeDocument/2006/relationships">
+  <p:cSld>
+    <p:spTree>
+      <p:nvGrpSpPr>
+        <p:cNvPr id="1" name=""/>
+        <p:cNvGrpSpPr/>
+        <p:nvPr/>
+      </p:nvGrpSpPr>
+      <p:grpSpPr/>
+      <p:sp>
+        <p:nvSpPr>
+          <p:cNvPr id="3" name="TextBox 2"/>
+          <p:cNvSpPr txBox="1"/>
+          <p:nvPr/>
+        </p:nvSpPr>
+        <p:spPr>
+          <a:xfrm>
+            <a:off x="457200" y="457200"/>
+            <a:ext cx="11277600" cy="228600"/>
+          </a:xfrm>
+          <a:prstGeom prst="rect">
+            <a:avLst/>
+          </a:prstGeom>
+          <a:noFill/>
+        </p:spPr>
+        <p:txBody>
+          <a:bodyPr wrap="square" lIns="0" rIns="0" tIns="0" bIns="0" anchor="t">
+            <a:spAutoFit/>
+          </a:bodyPr>
+          <a:lstStyle/>
+          <a:p>
+            <a:pPr algn="l"/>
+            <a:r>
+              <a:rPr sz="1100" b="1" i="0">
+                <a:solidFill>
+                  <a:srgbClr val="E0261E"/>
+                </a:solidFill>
+                <a:latin typeface="Arial"/>
+              </a:rPr>
+              <a:t>REQUISITOS · AVALIAÇÃO DSR</a:t>
+            </a:r>
+          </a:p>
+        </p:txBody>
+      </p:sp>
+      <p:sp>
+        <p:nvSpPr>
+          <p:cNvPr id="4" name="TextBox 3"/>
+          <p:cNvSpPr txBox="1"/>
+          <p:nvPr/>
+        </p:nvSpPr>
+        <p:spPr>
+          <a:xfrm>
+            <a:off x="457200" y="685800"/>
+            <a:ext cx="10000000" cy="685800"/>
+          </a:xfrm>
+          <a:prstGeom prst="rect">
+            <a:avLst/>
+          </a:prstGeom>
+          <a:noFill/>
+        </p:spPr>
+        <p:txBody>
+          <a:bodyPr wrap="square" lIns="0" rIns="0" tIns="0" bIns="0" anchor="t">
+            <a:spAutoFit/>
+          </a:bodyPr>
+          <a:lstStyle/>
+          <a:p>
+            <a:pPr algn="l"/>
+            <a:r>
+              <a:rPr sz="2800" b="1" i="0">
+                <a:solidFill>
+                  <a:srgbClr val="1F3A6B"/>
+                </a:solidFill>
+                <a:latin typeface="Arial"/>
+              </a:rPr>
+              <a:t>5 requisitos funcionais · sprint 5 · backend pronto · coleta humana pendente</a:t>
+            </a:r>
+          </a:p>
+        </p:txBody>
+      </p:sp>
+      <p:sp>
+        <p:nvSpPr>
+          <p:cNvPr id="5" name="Rectangle 4"/>
+          <p:cNvSpPr/>
+          <p:nvPr/>
+        </p:nvSpPr>
+        <p:spPr>
+          <a:xfrm>
+            <a:off x="457200" y="1432560"/>
+            <a:ext cx="685800" cy="36576"/>
+          </a:xfrm>
+          <a:prstGeom prst="rect">
+            <a:avLst/>
+          </a:prstGeom>
+          <a:solidFill>
+            <a:srgbClr val="E0261E"/>
+          </a:solidFill>
+          <a:ln>
+            <a:noFill/>
+          </a:ln>
+        </p:spPr>
+        <p:style>
+          <a:lnRef idx="1">
+            <a:schemeClr val="accent1"/>
+          </a:lnRef>
+          <a:fillRef idx="3">
+            <a:schemeClr val="accent1"/>
+          </a:fillRef>
+          <a:effectRef idx="2">
+            <a:schemeClr val="accent1"/>
+          </a:effectRef>
+          <a:fontRef idx="minor">
+            <a:schemeClr val="lt1"/>
+          </a:fontRef>
+        </p:style>
+        <p:txBody>
+          <a:bodyPr rtlCol="0" anchor="ctr"/>
+          <a:lstStyle/>
+          <a:p>
+            <a:pPr algn="ctr"/>
+          </a:p>
+        </p:txBody>
+      </p:sp>
+      <p:sp>
+        <p:nvSpPr>
+          <p:cNvPr id="6" name="Rectangle 5"/>
+          <p:cNvSpPr/>
+          <p:nvPr/>
+        </p:nvSpPr>
+        <p:spPr>
+          <a:xfrm>
+            <a:off x="685800" y="1828800"/>
+            <a:ext cx="685800" cy="822960"/>
+          </a:xfrm>
+          <a:prstGeom prst="rect">
+            <a:avLst/>
+          </a:prstGeom>
+          <a:solidFill>
+            <a:srgbClr val="E0261E"/>
+          </a:solidFill>
+          <a:ln>
+            <a:noFill/>
+          </a:ln>
+        </p:spPr>
+        <p:style>
+          <a:lnRef idx="1">
+            <a:schemeClr val="accent1"/>
+          </a:lnRef>
+          <a:fillRef idx="3">
+            <a:schemeClr val="accent1"/>
+          </a:fillRef>
+          <a:effectRef idx="2">
+            <a:schemeClr val="accent1"/>
+          </a:effectRef>
+          <a:fontRef idx="minor">
+            <a:schemeClr val="lt1"/>
+          </a:fontRef>
+        </p:style>
+        <p:txBody>
+          <a:bodyPr rtlCol="0" anchor="ctr"/>
+          <a:lstStyle/>
+          <a:p>
+            <a:pPr algn="ctr"/>
+          </a:p>
+        </p:txBody>
+      </p:sp>
+      <p:sp>
+        <p:nvSpPr>
+          <p:cNvPr id="7" name="TextBox 6"/>
+          <p:cNvSpPr txBox="1"/>
+          <p:nvPr/>
+        </p:nvSpPr>
+        <p:spPr>
+          <a:xfrm>
+            <a:off x="685800" y="1828800"/>
+            <a:ext cx="685800" cy="822960"/>
+          </a:xfrm>
+          <a:prstGeom prst="rect">
+            <a:avLst/>
+          </a:prstGeom>
+          <a:noFill/>
+        </p:spPr>
+        <p:txBody>
+          <a:bodyPr wrap="square" lIns="0" rIns="0" tIns="0" bIns="0" anchor="ctr">
+            <a:spAutoFit/>
+          </a:bodyPr>
+          <a:lstStyle/>
+          <a:p>
+            <a:pPr algn="ctr"/>
+            <a:r>
+              <a:rPr sz="2200" b="1" i="0">
+                <a:solidFill>
+                  <a:srgbClr val="FFFFFF"/>
+                </a:solidFill>
+                <a:latin typeface="Arial"/>
+              </a:rPr>
+              <a:t>G1</a:t>
+            </a:r>
+          </a:p>
+        </p:txBody>
+      </p:sp>
+      <p:sp>
+        <p:nvSpPr>
+          <p:cNvPr id="8" name="Rectangle 7"/>
+          <p:cNvSpPr/>
+          <p:nvPr/>
+        </p:nvSpPr>
+        <p:spPr>
+          <a:xfrm>
+            <a:off x="1371600" y="1828800"/>
+            <a:ext cx="10500000" cy="822960"/>
+          </a:xfrm>
+          <a:prstGeom prst="rect">
+            <a:avLst/>
+          </a:prstGeom>
+          <a:solidFill>
+            <a:srgbClr val="F4F4F6"/>
+          </a:solidFill>
+          <a:ln w="9525">
+            <a:solidFill>
+              <a:srgbClr val="D4D4DC"/>
+            </a:solidFill>
+          </a:ln>
+        </p:spPr>
+        <p:style>
+          <a:lnRef idx="1">
+            <a:schemeClr val="accent1"/>
+          </a:lnRef>
+          <a:fillRef idx="3">
+            <a:schemeClr val="accent1"/>
+          </a:fillRef>
+          <a:effectRef idx="2">
+            <a:schemeClr val="accent1"/>
+          </a:effectRef>
+          <a:fontRef idx="minor">
+            <a:schemeClr val="lt1"/>
+          </a:fontRef>
+        </p:style>
+        <p:txBody>
+          <a:bodyPr rtlCol="0" anchor="ctr"/>
+          <a:lstStyle/>
+          <a:p>
+            <a:pPr algn="ctr"/>
+          </a:p>
+        </p:txBody>
+      </p:sp>
+      <p:sp>
+        <p:nvSpPr>
+          <p:cNvPr id="9" name="TextBox 8"/>
+          <p:cNvSpPr txBox="1"/>
+          <p:nvPr/>
+        </p:nvSpPr>
+        <p:spPr>
+          <a:xfrm>
+            <a:off x="1600200" y="1920240"/>
+            <a:ext cx="10000000" cy="304800"/>
+          </a:xfrm>
+          <a:prstGeom prst="rect">
+            <a:avLst/>
+          </a:prstGeom>
+          <a:noFill/>
+        </p:spPr>
+        <p:txBody>
+          <a:bodyPr wrap="square" lIns="0" rIns="0" tIns="0" bIns="0" anchor="t">
+            <a:spAutoFit/>
+          </a:bodyPr>
+          <a:lstStyle/>
+          <a:p>
+            <a:pPr algn="l"/>
+            <a:r>
+              <a:rPr sz="1500" b="1" i="0">
+                <a:solidFill>
+                  <a:srgbClr val="1F3A6B"/>
+                </a:solidFill>
+                <a:latin typeface="Arial"/>
+              </a:rPr>
+              <a:t>RF14 · Gabarito</a:t>
+            </a:r>
+          </a:p>
+        </p:txBody>
+      </p:sp>
+      <p:sp>
+        <p:nvSpPr>
+          <p:cNvPr id="10" name="TextBox 9"/>
+          <p:cNvSpPr txBox="1"/>
+          <p:nvPr/>
+        </p:nvSpPr>
+        <p:spPr>
+          <a:xfrm>
+            <a:off x="1600200" y="2240280"/>
+            <a:ext cx="10000000" cy="365760"/>
+          </a:xfrm>
+          <a:prstGeom prst="rect">
+            <a:avLst/>
+          </a:prstGeom>
+          <a:noFill/>
+        </p:spPr>
+        <p:txBody>
+          <a:bodyPr wrap="square" lIns="0" rIns="0" tIns="0" bIns="0" anchor="t">
+            <a:spAutoFit/>
+          </a:bodyPr>
+          <a:lstStyle/>
+          <a:p>
+            <a:pPr algn="l"/>
+            <a:r>
+              <a:rPr sz="1100" b="0" i="0">
+                <a:solidFill>
+                  <a:srgbClr val="4A4A5A"/>
+                </a:solidFill>
+                <a:latin typeface="Arial"/>
+              </a:rPr>
+              <a:t>Importação de gabarito manual validado contra o schema JSON dos 44 atributos.</a:t>
+            </a:r>
+          </a:p>
+        </p:txBody>
+      </p:sp>
+      <p:sp>
+        <p:nvSpPr>
+          <p:cNvPr id="11" name="Rectangle 10"/>
+          <p:cNvSpPr/>
+          <p:nvPr/>
+        </p:nvSpPr>
+        <p:spPr>
+          <a:xfrm>
+            <a:off x="685800" y="2697480"/>
+            <a:ext cx="685800" cy="822960"/>
+          </a:xfrm>
+          <a:prstGeom prst="rect">
+            <a:avLst/>
+          </a:prstGeom>
+          <a:solidFill>
+            <a:srgbClr val="E0261E"/>
+          </a:solidFill>
+          <a:ln>
+            <a:noFill/>
+          </a:ln>
+        </p:spPr>
+        <p:style>
+          <a:lnRef idx="1">
+            <a:schemeClr val="accent1"/>
+          </a:lnRef>
+          <a:fillRef idx="3">
+            <a:schemeClr val="accent1"/>
+          </a:fillRef>
+          <a:effectRef idx="2">
+            <a:schemeClr val="accent1"/>
+          </a:effectRef>
+          <a:fontRef idx="minor">
+            <a:schemeClr val="lt1"/>
+          </a:fontRef>
+        </p:style>
+        <p:txBody>
+          <a:bodyPr rtlCol="0" anchor="ctr"/>
+          <a:lstStyle/>
+          <a:p>
+            <a:pPr algn="ctr"/>
+          </a:p>
+        </p:txBody>
+      </p:sp>
+      <p:sp>
+        <p:nvSpPr>
+          <p:cNvPr id="12" name="TextBox 11"/>
+          <p:cNvSpPr txBox="1"/>
+          <p:nvPr/>
+        </p:nvSpPr>
+        <p:spPr>
+          <a:xfrm>
+            <a:off x="685800" y="2697480"/>
+            <a:ext cx="685800" cy="822960"/>
+          </a:xfrm>
+          <a:prstGeom prst="rect">
+            <a:avLst/>
+          </a:prstGeom>
+          <a:noFill/>
+        </p:spPr>
+        <p:txBody>
+          <a:bodyPr wrap="square" lIns="0" rIns="0" tIns="0" bIns="0" anchor="ctr">
+            <a:spAutoFit/>
+          </a:bodyPr>
+          <a:lstStyle/>
+          <a:p>
+            <a:pPr algn="ctr"/>
+            <a:r>
+              <a:rPr sz="2200" b="1" i="0">
+                <a:solidFill>
+                  <a:srgbClr val="FFFFFF"/>
+                </a:solidFill>
+                <a:latin typeface="Arial"/>
+              </a:rPr>
+              <a:t>G2</a:t>
+            </a:r>
+          </a:p>
+        </p:txBody>
+      </p:sp>
+      <p:sp>
+        <p:nvSpPr>
+          <p:cNvPr id="13" name="Rectangle 12"/>
+          <p:cNvSpPr/>
+          <p:nvPr/>
+        </p:nvSpPr>
+        <p:spPr>
+          <a:xfrm>
+            <a:off x="1371600" y="2697480"/>
+            <a:ext cx="10500000" cy="822960"/>
+          </a:xfrm>
+          <a:prstGeom prst="rect">
+            <a:avLst/>
+          </a:prstGeom>
+          <a:solidFill>
+            <a:srgbClr val="F4F4F6"/>
+          </a:solidFill>
+          <a:ln w="9525">
+            <a:solidFill>
+              <a:srgbClr val="D4D4DC"/>
+            </a:solidFill>
+          </a:ln>
+        </p:spPr>
+        <p:style>
+          <a:lnRef idx="1">
+            <a:schemeClr val="accent1"/>
+          </a:lnRef>
+          <a:fillRef idx="3">
+            <a:schemeClr val="accent1"/>
+          </a:fillRef>
+          <a:effectRef idx="2">
+            <a:schemeClr val="accent1"/>
+          </a:effectRef>
+          <a:fontRef idx="minor">
+            <a:schemeClr val="lt1"/>
+          </a:fontRef>
+        </p:style>
+        <p:txBody>
+          <a:bodyPr rtlCol="0" anchor="ctr"/>
+          <a:lstStyle/>
+          <a:p>
+            <a:pPr algn="ctr"/>
+          </a:p>
+        </p:txBody>
+      </p:sp>
+      <p:sp>
+        <p:nvSpPr>
+          <p:cNvPr id="14" name="TextBox 13"/>
+          <p:cNvSpPr txBox="1"/>
+          <p:nvPr/>
+        </p:nvSpPr>
+        <p:spPr>
+          <a:xfrm>
+            <a:off x="1600200" y="2788920"/>
+            <a:ext cx="10000000" cy="304800"/>
+          </a:xfrm>
+          <a:prstGeom prst="rect">
+            <a:avLst/>
+          </a:prstGeom>
+          <a:noFill/>
+        </p:spPr>
+        <p:txBody>
+          <a:bodyPr wrap="square" lIns="0" rIns="0" tIns="0" bIns="0" anchor="t">
+            <a:spAutoFit/>
+          </a:bodyPr>
+          <a:lstStyle/>
+          <a:p>
+            <a:pPr algn="l"/>
+            <a:r>
+              <a:rPr sz="1500" b="1" i="0">
+                <a:solidFill>
+                  <a:srgbClr val="1F3A6B"/>
+                </a:solidFill>
+                <a:latin typeface="Arial"/>
+              </a:rPr>
+              <a:t>RF15 · Comparação</a:t>
+            </a:r>
+          </a:p>
+        </p:txBody>
+      </p:sp>
+      <p:sp>
+        <p:nvSpPr>
+          <p:cNvPr id="15" name="TextBox 14"/>
+          <p:cNvSpPr txBox="1"/>
+          <p:nvPr/>
+        </p:nvSpPr>
+        <p:spPr>
+          <a:xfrm>
+            <a:off x="1600200" y="3108960"/>
+            <a:ext cx="10000000" cy="365760"/>
+          </a:xfrm>
+          <a:prstGeom prst="rect">
+            <a:avLst/>
+          </a:prstGeom>
+          <a:noFill/>
+        </p:spPr>
+        <p:txBody>
+          <a:bodyPr wrap="square" lIns="0" rIns="0" tIns="0" bIns="0" anchor="t">
+            <a:spAutoFit/>
+          </a:bodyPr>
+          <a:lstStyle/>
+          <a:p>
+            <a:pPr algn="l"/>
+            <a:r>
+              <a:rPr sz="1100" b="0" i="0">
+                <a:solidFill>
+                  <a:srgbClr val="4A4A5A"/>
+                </a:solidFill>
+                <a:latin typeface="Arial"/>
+              </a:rPr>
+              <a:t>Critério híbrido: comparação exata (estruturado) + rubrica humana 0/0,5/1 + índice de concordância.</a:t>
+            </a:r>
+          </a:p>
+        </p:txBody>
+      </p:sp>
+      <p:sp>
+        <p:nvSpPr>
+          <p:cNvPr id="16" name="Rectangle 15"/>
+          <p:cNvSpPr/>
+          <p:nvPr/>
+        </p:nvSpPr>
+        <p:spPr>
+          <a:xfrm>
+            <a:off x="685800" y="3566160"/>
+            <a:ext cx="685800" cy="822960"/>
+          </a:xfrm>
+          <a:prstGeom prst="rect">
+            <a:avLst/>
+          </a:prstGeom>
+          <a:solidFill>
+            <a:srgbClr val="E0261E"/>
+          </a:solidFill>
+          <a:ln>
+            <a:noFill/>
+          </a:ln>
+        </p:spPr>
+        <p:style>
+          <a:lnRef idx="1">
+            <a:schemeClr val="accent1"/>
+          </a:lnRef>
+          <a:fillRef idx="3">
+            <a:schemeClr val="accent1"/>
+          </a:fillRef>
+          <a:effectRef idx="2">
+            <a:schemeClr val="accent1"/>
+          </a:effectRef>
+          <a:fontRef idx="minor">
+            <a:schemeClr val="lt1"/>
+          </a:fontRef>
+        </p:style>
+        <p:txBody>
+          <a:bodyPr rtlCol="0" anchor="ctr"/>
+          <a:lstStyle/>
+          <a:p>
+            <a:pPr algn="ctr"/>
+          </a:p>
+        </p:txBody>
+      </p:sp>
+      <p:sp>
+        <p:nvSpPr>
+          <p:cNvPr id="17" name="TextBox 16"/>
+          <p:cNvSpPr txBox="1"/>
+          <p:nvPr/>
+        </p:nvSpPr>
+        <p:spPr>
+          <a:xfrm>
+            <a:off x="685800" y="3566160"/>
+            <a:ext cx="685800" cy="822960"/>
+          </a:xfrm>
+          <a:prstGeom prst="rect">
+            <a:avLst/>
+          </a:prstGeom>
+          <a:noFill/>
+        </p:spPr>
+        <p:txBody>
+          <a:bodyPr wrap="square" lIns="0" rIns="0" tIns="0" bIns="0" anchor="ctr">
+            <a:spAutoFit/>
+          </a:bodyPr>
+          <a:lstStyle/>
+          <a:p>
+            <a:pPr algn="ctr"/>
+            <a:r>
+              <a:rPr sz="2200" b="1" i="0">
+                <a:solidFill>
+                  <a:srgbClr val="FFFFFF"/>
+                </a:solidFill>
+                <a:latin typeface="Arial"/>
+              </a:rPr>
+              <a:t>G3</a:t>
+            </a:r>
+          </a:p>
+        </p:txBody>
+      </p:sp>
+      <p:sp>
+        <p:nvSpPr>
+          <p:cNvPr id="18" name="Rectangle 17"/>
+          <p:cNvSpPr/>
+          <p:nvPr/>
+        </p:nvSpPr>
+        <p:spPr>
+          <a:xfrm>
+            <a:off x="1371600" y="3566160"/>
+            <a:ext cx="10500000" cy="822960"/>
+          </a:xfrm>
+          <a:prstGeom prst="rect">
+            <a:avLst/>
+          </a:prstGeom>
+          <a:solidFill>
+            <a:srgbClr val="F4F4F6"/>
+          </a:solidFill>
+          <a:ln w="9525">
+            <a:solidFill>
+              <a:srgbClr val="D4D4DC"/>
+            </a:solidFill>
+          </a:ln>
+        </p:spPr>
+        <p:style>
+          <a:lnRef idx="1">
+            <a:schemeClr val="accent1"/>
+          </a:lnRef>
+          <a:fillRef idx="3">
+            <a:schemeClr val="accent1"/>
+          </a:fillRef>
+          <a:effectRef idx="2">
+            <a:schemeClr val="accent1"/>
+          </a:effectRef>
+          <a:fontRef idx="minor">
+            <a:schemeClr val="lt1"/>
+          </a:fontRef>
+        </p:style>
+        <p:txBody>
+          <a:bodyPr rtlCol="0" anchor="ctr"/>
+          <a:lstStyle/>
+          <a:p>
+            <a:pPr algn="ctr"/>
+          </a:p>
+        </p:txBody>
+      </p:sp>
+      <p:sp>
+        <p:nvSpPr>
+          <p:cNvPr id="19" name="TextBox 18"/>
+          <p:cNvSpPr txBox="1"/>
+          <p:nvPr/>
+        </p:nvSpPr>
+        <p:spPr>
+          <a:xfrm>
+            <a:off x="1600200" y="3657600"/>
+            <a:ext cx="10000000" cy="304800"/>
+          </a:xfrm>
+          <a:prstGeom prst="rect">
+            <a:avLst/>
+          </a:prstGeom>
+          <a:noFill/>
+        </p:spPr>
+        <p:txBody>
+          <a:bodyPr wrap="square" lIns="0" rIns="0" tIns="0" bIns="0" anchor="t">
+            <a:spAutoFit/>
+          </a:bodyPr>
+          <a:lstStyle/>
+          <a:p>
+            <a:pPr algn="l"/>
+            <a:r>
+              <a:rPr sz="1500" b="1" i="0">
+                <a:solidFill>
+                  <a:srgbClr val="1F3A6B"/>
+                </a:solidFill>
+                <a:latin typeface="Arial"/>
+              </a:rPr>
+              <a:t>RF16 · Likert Consultoria</a:t>
+            </a:r>
+          </a:p>
+        </p:txBody>
+      </p:sp>
+      <p:sp>
+        <p:nvSpPr>
+          <p:cNvPr id="20" name="TextBox 19"/>
+          <p:cNvSpPr txBox="1"/>
+          <p:nvPr/>
+        </p:nvSpPr>
+        <p:spPr>
+          <a:xfrm>
+            <a:off x="1600200" y="3977640"/>
+            <a:ext cx="10000000" cy="365760"/>
+          </a:xfrm>
+          <a:prstGeom prst="rect">
+            <a:avLst/>
+          </a:prstGeom>
+          <a:noFill/>
+        </p:spPr>
+        <p:txBody>
+          <a:bodyPr wrap="square" lIns="0" rIns="0" tIns="0" bIns="0" anchor="t">
+            <a:spAutoFit/>
+          </a:bodyPr>
+          <a:lstStyle/>
+          <a:p>
+            <a:pPr algn="l"/>
+            <a:r>
+              <a:rPr sz="1100" b="0" i="0">
+                <a:solidFill>
+                  <a:srgbClr val="4A4A5A"/>
+                </a:solidFill>
+                <a:latin typeface="Arial"/>
+              </a:rPr>
+              <a:t>4 dimensões: utilidade dos drafts, fricção, qualidade do resumo, manutenibilidade.</a:t>
+            </a:r>
+          </a:p>
+        </p:txBody>
+      </p:sp>
+      <p:sp>
+        <p:nvSpPr>
+          <p:cNvPr id="21" name="Rectangle 20"/>
+          <p:cNvSpPr/>
+          <p:nvPr/>
+        </p:nvSpPr>
+        <p:spPr>
+          <a:xfrm>
+            <a:off x="685800" y="4434840"/>
+            <a:ext cx="685800" cy="822960"/>
+          </a:xfrm>
+          <a:prstGeom prst="rect">
+            <a:avLst/>
+          </a:prstGeom>
+          <a:solidFill>
+            <a:srgbClr val="E0261E"/>
+          </a:solidFill>
+          <a:ln>
+            <a:noFill/>
+          </a:ln>
+        </p:spPr>
+        <p:style>
+          <a:lnRef idx="1">
+            <a:schemeClr val="accent1"/>
+          </a:lnRef>
+          <a:fillRef idx="3">
+            <a:schemeClr val="accent1"/>
+          </a:fillRef>
+          <a:effectRef idx="2">
+            <a:schemeClr val="accent1"/>
+          </a:effectRef>
+          <a:fontRef idx="minor">
+            <a:schemeClr val="lt1"/>
+          </a:fontRef>
+        </p:style>
+        <p:txBody>
+          <a:bodyPr rtlCol="0" anchor="ctr"/>
+          <a:lstStyle/>
+          <a:p>
+            <a:pPr algn="ctr"/>
+          </a:p>
+        </p:txBody>
+      </p:sp>
+      <p:sp>
+        <p:nvSpPr>
+          <p:cNvPr id="22" name="TextBox 21"/>
+          <p:cNvSpPr txBox="1"/>
+          <p:nvPr/>
+        </p:nvSpPr>
+        <p:spPr>
+          <a:xfrm>
+            <a:off x="685800" y="4434840"/>
+            <a:ext cx="685800" cy="822960"/>
+          </a:xfrm>
+          <a:prstGeom prst="rect">
+            <a:avLst/>
+          </a:prstGeom>
+          <a:noFill/>
+        </p:spPr>
+        <p:txBody>
+          <a:bodyPr wrap="square" lIns="0" rIns="0" tIns="0" bIns="0" anchor="ctr">
+            <a:spAutoFit/>
+          </a:bodyPr>
+          <a:lstStyle/>
+          <a:p>
+            <a:pPr algn="ctr"/>
+            <a:r>
+              <a:rPr sz="2200" b="1" i="0">
+                <a:solidFill>
+                  <a:srgbClr val="FFFFFF"/>
+                </a:solidFill>
+                <a:latin typeface="Arial"/>
+              </a:rPr>
+              <a:t>G4</a:t>
+            </a:r>
+          </a:p>
+        </p:txBody>
+      </p:sp>
+      <p:sp>
+        <p:nvSpPr>
+          <p:cNvPr id="23" name="Rectangle 22"/>
+          <p:cNvSpPr/>
+          <p:nvPr/>
+        </p:nvSpPr>
+        <p:spPr>
+          <a:xfrm>
+            <a:off x="1371600" y="4434840"/>
+            <a:ext cx="10500000" cy="822960"/>
+          </a:xfrm>
+          <a:prstGeom prst="rect">
+            <a:avLst/>
+          </a:prstGeom>
+          <a:solidFill>
+            <a:srgbClr val="F4F4F6"/>
+          </a:solidFill>
+          <a:ln w="9525">
+            <a:solidFill>
+              <a:srgbClr val="D4D4DC"/>
+            </a:solidFill>
+          </a:ln>
+        </p:spPr>
+        <p:style>
+          <a:lnRef idx="1">
+            <a:schemeClr val="accent1"/>
+          </a:lnRef>
+          <a:fillRef idx="3">
+            <a:schemeClr val="accent1"/>
+          </a:fillRef>
+          <a:effectRef idx="2">
+            <a:schemeClr val="accent1"/>
+          </a:effectRef>
+          <a:fontRef idx="minor">
+            <a:schemeClr val="lt1"/>
+          </a:fontRef>
+        </p:style>
+        <p:txBody>
+          <a:bodyPr rtlCol="0" anchor="ctr"/>
+          <a:lstStyle/>
+          <a:p>
+            <a:pPr algn="ctr"/>
+          </a:p>
+        </p:txBody>
+      </p:sp>
+      <p:sp>
+        <p:nvSpPr>
+          <p:cNvPr id="24" name="TextBox 23"/>
+          <p:cNvSpPr txBox="1"/>
+          <p:nvPr/>
+        </p:nvSpPr>
+        <p:spPr>
+          <a:xfrm>
+            <a:off x="1600200" y="4526280"/>
+            <a:ext cx="10000000" cy="304800"/>
+          </a:xfrm>
+          <a:prstGeom prst="rect">
+            <a:avLst/>
+          </a:prstGeom>
+          <a:noFill/>
+        </p:spPr>
+        <p:txBody>
+          <a:bodyPr wrap="square" lIns="0" rIns="0" tIns="0" bIns="0" anchor="t">
+            <a:spAutoFit/>
+          </a:bodyPr>
+          <a:lstStyle/>
+          <a:p>
+            <a:pPr algn="l"/>
+            <a:r>
+              <a:rPr sz="1500" b="1" i="0">
+                <a:solidFill>
+                  <a:srgbClr val="1F3A6B"/>
+                </a:solidFill>
+                <a:latin typeface="Arial"/>
+              </a:rPr>
+              <a:t>RF17 · Likert Clientes</a:t>
+            </a:r>
+          </a:p>
+        </p:txBody>
+      </p:sp>
+      <p:sp>
+        <p:nvSpPr>
+          <p:cNvPr id="25" name="TextBox 24"/>
+          <p:cNvSpPr txBox="1"/>
+          <p:nvPr/>
+        </p:nvSpPr>
+        <p:spPr>
+          <a:xfrm>
+            <a:off x="1600200" y="4846320"/>
+            <a:ext cx="10000000" cy="365760"/>
+          </a:xfrm>
+          <a:prstGeom prst="rect">
+            <a:avLst/>
+          </a:prstGeom>
+          <a:noFill/>
+        </p:spPr>
+        <p:txBody>
+          <a:bodyPr wrap="square" lIns="0" rIns="0" tIns="0" bIns="0" anchor="t">
+            <a:spAutoFit/>
+          </a:bodyPr>
+          <a:lstStyle/>
+          <a:p>
+            <a:pPr algn="l"/>
+            <a:r>
+              <a:rPr sz="1100" b="0" i="0">
+                <a:solidFill>
+                  <a:srgbClr val="4A4A5A"/>
+                </a:solidFill>
+                <a:latin typeface="Arial"/>
+              </a:rPr>
+              <a:t>4 dimensões: clareza do resumo, utilidade do espaço, qualidade do diálogo, inclusão.</a:t>
+            </a:r>
+          </a:p>
+        </p:txBody>
+      </p:sp>
+      <p:sp>
+        <p:nvSpPr>
+          <p:cNvPr id="26" name="Rectangle 25"/>
+          <p:cNvSpPr/>
+          <p:nvPr/>
+        </p:nvSpPr>
+        <p:spPr>
+          <a:xfrm>
+            <a:off x="685800" y="5303520"/>
+            <a:ext cx="685800" cy="822960"/>
+          </a:xfrm>
+          <a:prstGeom prst="rect">
+            <a:avLst/>
+          </a:prstGeom>
+          <a:solidFill>
+            <a:srgbClr val="E0261E"/>
+          </a:solidFill>
+          <a:ln>
+            <a:noFill/>
+          </a:ln>
+        </p:spPr>
+        <p:style>
+          <a:lnRef idx="1">
+            <a:schemeClr val="accent1"/>
+          </a:lnRef>
+          <a:fillRef idx="3">
+            <a:schemeClr val="accent1"/>
+          </a:fillRef>
+          <a:effectRef idx="2">
+            <a:schemeClr val="accent1"/>
+          </a:effectRef>
+          <a:fontRef idx="minor">
+            <a:schemeClr val="lt1"/>
+          </a:fontRef>
+        </p:style>
+        <p:txBody>
+          <a:bodyPr rtlCol="0" anchor="ctr"/>
+          <a:lstStyle/>
+          <a:p>
+            <a:pPr algn="ctr"/>
+          </a:p>
+        </p:txBody>
+      </p:sp>
+      <p:sp>
+        <p:nvSpPr>
+          <p:cNvPr id="27" name="TextBox 26"/>
+          <p:cNvSpPr txBox="1"/>
+          <p:nvPr/>
+        </p:nvSpPr>
+        <p:spPr>
+          <a:xfrm>
+            <a:off x="685800" y="5303520"/>
+            <a:ext cx="685800" cy="822960"/>
+          </a:xfrm>
+          <a:prstGeom prst="rect">
+            <a:avLst/>
+          </a:prstGeom>
+          <a:noFill/>
+        </p:spPr>
+        <p:txBody>
+          <a:bodyPr wrap="square" lIns="0" rIns="0" tIns="0" bIns="0" anchor="ctr">
+            <a:spAutoFit/>
+          </a:bodyPr>
+          <a:lstStyle/>
+          <a:p>
+            <a:pPr algn="ctr"/>
+            <a:r>
+              <a:rPr sz="2200" b="1" i="0">
+                <a:solidFill>
+                  <a:srgbClr val="FFFFFF"/>
+                </a:solidFill>
+                <a:latin typeface="Arial"/>
+              </a:rPr>
+              <a:t>G5</a:t>
+            </a:r>
+          </a:p>
+        </p:txBody>
+      </p:sp>
+      <p:sp>
+        <p:nvSpPr>
+          <p:cNvPr id="28" name="Rectangle 27"/>
+          <p:cNvSpPr/>
+          <p:nvPr/>
+        </p:nvSpPr>
+        <p:spPr>
+          <a:xfrm>
+            <a:off x="1371600" y="5303520"/>
+            <a:ext cx="10500000" cy="822960"/>
+          </a:xfrm>
+          <a:prstGeom prst="rect">
+            <a:avLst/>
+          </a:prstGeom>
+          <a:solidFill>
+            <a:srgbClr val="F4F4F6"/>
+          </a:solidFill>
+          <a:ln w="9525">
+            <a:solidFill>
+              <a:srgbClr val="D4D4DC"/>
+            </a:solidFill>
+          </a:ln>
+        </p:spPr>
+        <p:style>
+          <a:lnRef idx="1">
+            <a:schemeClr val="accent1"/>
+          </a:lnRef>
+          <a:fillRef idx="3">
+            <a:schemeClr val="accent1"/>
+          </a:fillRef>
+          <a:effectRef idx="2">
+            <a:schemeClr val="accent1"/>
+          </a:effectRef>
+          <a:fontRef idx="minor">
+            <a:schemeClr val="lt1"/>
+          </a:fontRef>
+        </p:style>
+        <p:txBody>
+          <a:bodyPr rtlCol="0" anchor="ctr"/>
+          <a:lstStyle/>
+          <a:p>
+            <a:pPr algn="ctr"/>
+          </a:p>
+        </p:txBody>
+      </p:sp>
+      <p:sp>
+        <p:nvSpPr>
+          <p:cNvPr id="29" name="TextBox 28"/>
+          <p:cNvSpPr txBox="1"/>
+          <p:nvPr/>
+        </p:nvSpPr>
+        <p:spPr>
+          <a:xfrm>
+            <a:off x="1600200" y="5394960"/>
+            <a:ext cx="10000000" cy="304800"/>
+          </a:xfrm>
+          <a:prstGeom prst="rect">
+            <a:avLst/>
+          </a:prstGeom>
+          <a:noFill/>
+        </p:spPr>
+        <p:txBody>
+          <a:bodyPr wrap="square" lIns="0" rIns="0" tIns="0" bIns="0" anchor="t">
+            <a:spAutoFit/>
+          </a:bodyPr>
+          <a:lstStyle/>
+          <a:p>
+            <a:pPr algn="l"/>
+            <a:r>
+              <a:rPr sz="1500" b="1" i="0">
+                <a:solidFill>
+                  <a:srgbClr val="1F3A6B"/>
+                </a:solidFill>
+                <a:latin typeface="Arial"/>
+              </a:rPr>
+              <a:t>RF18 · Exportação</a:t>
+            </a:r>
+          </a:p>
+        </p:txBody>
+      </p:sp>
+      <p:sp>
+        <p:nvSpPr>
+          <p:cNvPr id="30" name="TextBox 29"/>
+          <p:cNvSpPr txBox="1"/>
+          <p:nvPr/>
+        </p:nvSpPr>
+        <p:spPr>
+          <a:xfrm>
+            <a:off x="1600200" y="5715000"/>
+            <a:ext cx="10000000" cy="365760"/>
+          </a:xfrm>
+          <a:prstGeom prst="rect">
+            <a:avLst/>
+          </a:prstGeom>
+          <a:noFill/>
+        </p:spPr>
+        <p:txBody>
+          <a:bodyPr wrap="square" lIns="0" rIns="0" tIns="0" bIns="0" anchor="t">
+            <a:spAutoFit/>
+          </a:bodyPr>
+          <a:lstStyle/>
+          <a:p>
+            <a:pPr algn="l"/>
+            <a:r>
+              <a:rPr sz="1100" b="0" i="0">
+                <a:solidFill>
+                  <a:srgbClr val="4A4A5A"/>
+                </a:solidFill>
+                <a:latin typeface="Arial"/>
+              </a:rPr>
+              <a:t>Bundle JSON (research) + CSV long-format (rubrica). Subsidia o relato de experiência.</a:t>
+            </a:r>
+          </a:p>
+        </p:txBody>
+      </p:sp>
+      <p:sp>
+        <p:nvSpPr>
+          <p:cNvPr id="31" name="Rectangle 30"/>
+          <p:cNvSpPr/>
+          <p:nvPr/>
+        </p:nvSpPr>
+        <p:spPr>
+          <a:xfrm>
+            <a:off x="457200" y="6400800"/>
+            <a:ext cx="11277600" cy="15240"/>
+          </a:xfrm>
+          <a:prstGeom prst="rect">
+            <a:avLst/>
+          </a:prstGeom>
+          <a:solidFill>
+            <a:srgbClr val="E0261E"/>
+          </a:solidFill>
+          <a:ln>
+            <a:noFill/>
+          </a:ln>
+        </p:spPr>
+        <p:style>
+          <a:lnRef idx="1">
+            <a:schemeClr val="accent1"/>
+          </a:lnRef>
+          <a:fillRef idx="3">
+            <a:schemeClr val="accent1"/>
+          </a:fillRef>
+          <a:effectRef idx="2">
+            <a:schemeClr val="accent1"/>
+          </a:effectRef>
+          <a:fontRef idx="minor">
+            <a:schemeClr val="lt1"/>
+          </a:fontRef>
+        </p:style>
+        <p:txBody>
+          <a:bodyPr rtlCol="0" anchor="ctr"/>
+          <a:lstStyle/>
+          <a:p>
+            <a:pPr algn="ctr"/>
+          </a:p>
+        </p:txBody>
+      </p:sp>
+      <p:sp>
+        <p:nvSpPr>
+          <p:cNvPr id="32" name="Rectangle 31"/>
+          <p:cNvSpPr/>
+          <p:nvPr/>
+        </p:nvSpPr>
+        <p:spPr>
+          <a:xfrm>
+            <a:off x="457200" y="6400800"/>
+            <a:ext cx="11277600" cy="15240"/>
+          </a:xfrm>
+          <a:prstGeom prst="rect">
+            <a:avLst/>
+          </a:prstGeom>
+          <a:solidFill>
+            <a:srgbClr val="E0261E"/>
+          </a:solidFill>
+          <a:ln>
+            <a:noFill/>
+          </a:ln>
+        </p:spPr>
+        <p:style>
+          <a:lnRef idx="1">
+            <a:schemeClr val="accent1"/>
+          </a:lnRef>
+          <a:fillRef idx="3">
+            <a:schemeClr val="accent1"/>
+          </a:fillRef>
+          <a:effectRef idx="2">
+            <a:schemeClr val="accent1"/>
+          </a:effectRef>
+          <a:fontRef idx="minor">
+            <a:schemeClr val="lt1"/>
+          </a:fontRef>
+        </p:style>
+        <p:txBody>
+          <a:bodyPr rtlCol="0" anchor="ctr"/>
+          <a:lstStyle/>
+          <a:p>
+            <a:pPr algn="ctr"/>
+          </a:p>
+        </p:txBody>
+      </p:sp>
+      <p:sp>
+        <p:nvSpPr>
+          <p:cNvPr id="33" name="Rectangle 32"/>
+          <p:cNvSpPr/>
+          <p:nvPr/>
+        </p:nvSpPr>
+        <p:spPr>
+          <a:xfrm>
+            <a:off x="457200" y="6400800"/>
+            <a:ext cx="11277600" cy="15240"/>
+          </a:xfrm>
+          <a:prstGeom prst="rect">
+            <a:avLst/>
+          </a:prstGeom>
+          <a:solidFill>
+            <a:srgbClr val="E0261E"/>
+          </a:solidFill>
+          <a:ln>
+            <a:noFill/>
+          </a:ln>
+        </p:spPr>
+        <p:style>
+          <a:lnRef idx="1">
+            <a:schemeClr val="accent1"/>
+          </a:lnRef>
+          <a:fillRef idx="3">
+            <a:schemeClr val="accent1"/>
+          </a:fillRef>
+          <a:effectRef idx="2">
+            <a:schemeClr val="accent1"/>
+          </a:effectRef>
+          <a:fontRef idx="minor">
+            <a:schemeClr val="lt1"/>
+          </a:fontRef>
+        </p:style>
+        <p:txBody>
+          <a:bodyPr rtlCol="0" anchor="ctr"/>
+          <a:lstStyle/>
+          <a:p>
+            <a:pPr algn="ctr"/>
+          </a:p>
+        </p:txBody>
+      </p:sp>
+      <p:sp>
+        <p:nvSpPr>
+          <p:cNvPr id="34" name="TextBox 33"/>
+          <p:cNvSpPr txBox="1"/>
+          <p:nvPr/>
+        </p:nvSpPr>
+        <p:spPr>
+          <a:xfrm>
+            <a:off x="457200" y="6492240"/>
+            <a:ext cx="8000000" cy="228600"/>
+          </a:xfrm>
+          <a:prstGeom prst="rect">
+            <a:avLst/>
+          </a:prstGeom>
+          <a:noFill/>
+        </p:spPr>
+        <p:txBody>
+          <a:bodyPr wrap="square" lIns="0" rIns="0" tIns="0" bIns="0" anchor="t">
+            <a:spAutoFit/>
+          </a:bodyPr>
+          <a:lstStyle/>
+          <a:p>
+            <a:pPr algn="l"/>
+            <a:r>
+              <a:rPr sz="900" b="0" i="0">
+                <a:solidFill>
+                  <a:srgbClr val="6B6B7A"/>
+                </a:solidFill>
+                <a:latin typeface="Arial"/>
+              </a:rPr>
+              <a:t>Equipe ObiOne · UPE/POLI · Maio 2026</a:t>
+            </a:r>
+          </a:p>
+        </p:txBody>
+      </p:sp>
+      <p:sp>
+        <p:nvSpPr>
+          <p:cNvPr id="35" name="TextBox 34"/>
+          <p:cNvSpPr txBox="1"/>
+          <p:nvPr/>
+        </p:nvSpPr>
+        <p:spPr>
+          <a:xfrm>
+            <a:off x="11000000" y="6492240"/>
+            <a:ext cx="1000000" cy="228600"/>
+          </a:xfrm>
+          <a:prstGeom prst="rect">
+            <a:avLst/>
+          </a:prstGeom>
+          <a:noFill/>
+        </p:spPr>
+        <p:txBody>
+          <a:bodyPr wrap="square" lIns="0" rIns="0" tIns="0" bIns="0" anchor="t">
+            <a:spAutoFit/>
+          </a:bodyPr>
+          <a:lstStyle/>
+          <a:p>
+            <a:pPr algn="r"/>
+            <a:r>
+              <a:rPr sz="900" b="0" i="0">
+                <a:solidFill>
+                  <a:srgbClr val="6B6B7A"/>
+                </a:solidFill>
+                <a:latin typeface="Arial"/>
+              </a:rPr>
+              <a:t>8 / 12</a:t>
+            </a:r>
+          </a:p>
+        </p:txBody>
+      </p:sp>
+      <p:pic>
+        <p:nvPicPr>
+          <p:cNvPr id="36" name="Picture 35" descr="image.png"/>
+          <p:cNvPicPr>
+            <a:picLocks noChangeAspect="1"/>
+          </p:cNvPicPr>
+          <p:nvPr/>
+        </p:nvPicPr>
+        <p:blipFill>
+          <a:blip r:embed="rId2"/>
+          <a:stretch>
+            <a:fillRect/>
+          </a:stretch>
+        </p:blipFill>
+        <p:spPr>
+          <a:xfrm>
+            <a:off x="11000000" y="228600"/>
+            <a:ext cx="1066800" cy="801716"/>
+          </a:xfrm>
+          <a:prstGeom prst="rect">
+            <a:avLst/>
+          </a:prstGeom>
+        </p:spPr>
+      </p:pic>
+    </p:spTree>
+  </p:cSld>
+  <p:clrMapOvr>
+    <a:masterClrMapping/>
+  </p:clrMapOvr>
+</p:sld>
+</file>
+
+<file path=ppt/slides/slide12.xml><?xml version="1.0" encoding="utf-8"?>
+<p:sld xmlns:a="http://schemas.openxmlformats.org/drawingml/2006/main" xmlns:p="http://schemas.openxmlformats.org/presentationml/2006/main" xmlns:r="http://schemas.openxmlformats.org/officeDocument/2006/relationships">
+  <p:cSld>
+    <p:spTree>
+      <p:nvGrpSpPr>
+        <p:cNvPr id="1" name=""/>
+        <p:cNvGrpSpPr/>
+        <p:nvPr/>
+      </p:nvGrpSpPr>
+      <p:grpSpPr/>
+      <p:sp>
+        <p:nvSpPr>
+          <p:cNvPr id="3" name="TextBox 2"/>
+          <p:cNvSpPr txBox="1"/>
+          <p:nvPr/>
+        </p:nvSpPr>
+        <p:spPr>
+          <a:xfrm>
+            <a:off x="457200" y="457200"/>
+            <a:ext cx="11277600" cy="228600"/>
+          </a:xfrm>
+          <a:prstGeom prst="rect">
+            <a:avLst/>
+          </a:prstGeom>
+          <a:noFill/>
+        </p:spPr>
+        <p:txBody>
+          <a:bodyPr wrap="square" lIns="0" rIns="0" tIns="0" bIns="0" anchor="t">
+            <a:spAutoFit/>
+          </a:bodyPr>
+          <a:lstStyle/>
+          <a:p>
+            <a:pPr algn="l"/>
+            <a:r>
+              <a:rPr sz="1100" b="1" i="0">
+                <a:solidFill>
+                  <a:srgbClr val="E0261E"/>
+                </a:solidFill>
+                <a:latin typeface="Arial"/>
+              </a:rPr>
+              <a:t>REQUISITOS NÃO-FUNCIONAIS</a:t>
+            </a:r>
+          </a:p>
+        </p:txBody>
+      </p:sp>
+      <p:sp>
+        <p:nvSpPr>
+          <p:cNvPr id="4" name="TextBox 3"/>
+          <p:cNvSpPr txBox="1"/>
+          <p:nvPr/>
+        </p:nvSpPr>
+        <p:spPr>
+          <a:xfrm>
+            <a:off x="457200" y="685800"/>
+            <a:ext cx="10000000" cy="685800"/>
+          </a:xfrm>
+          <a:prstGeom prst="rect">
+            <a:avLst/>
+          </a:prstGeom>
+          <a:noFill/>
+        </p:spPr>
+        <p:txBody>
+          <a:bodyPr wrap="square" lIns="0" rIns="0" tIns="0" bIns="0" anchor="t">
+            <a:spAutoFit/>
+          </a:bodyPr>
+          <a:lstStyle/>
+          <a:p>
+            <a:pPr algn="l"/>
+            <a:r>
+              <a:rPr sz="2800" b="1" i="0">
+                <a:solidFill>
+                  <a:srgbClr val="1F3A6B"/>
+                </a:solidFill>
+                <a:latin typeface="Arial"/>
+              </a:rPr>
+              <a:t>9 RNFs organizados por tema · todos endereçados arquiteturalmente</a:t>
+            </a:r>
+          </a:p>
+        </p:txBody>
+      </p:sp>
+      <p:sp>
+        <p:nvSpPr>
+          <p:cNvPr id="5" name="Rectangle 4"/>
+          <p:cNvSpPr/>
+          <p:nvPr/>
+        </p:nvSpPr>
+        <p:spPr>
+          <a:xfrm>
+            <a:off x="457200" y="1432560"/>
+            <a:ext cx="685800" cy="36576"/>
+          </a:xfrm>
+          <a:prstGeom prst="rect">
+            <a:avLst/>
+          </a:prstGeom>
+          <a:solidFill>
+            <a:srgbClr val="E0261E"/>
+          </a:solidFill>
+          <a:ln>
+            <a:noFill/>
+          </a:ln>
+        </p:spPr>
+        <p:style>
+          <a:lnRef idx="1">
+            <a:schemeClr val="accent1"/>
+          </a:lnRef>
+          <a:fillRef idx="3">
+            <a:schemeClr val="accent1"/>
+          </a:fillRef>
+          <a:effectRef idx="2">
+            <a:schemeClr val="accent1"/>
+          </a:effectRef>
+          <a:fontRef idx="minor">
+            <a:schemeClr val="lt1"/>
+          </a:fontRef>
+        </p:style>
+        <p:txBody>
+          <a:bodyPr rtlCol="0" anchor="ctr"/>
+          <a:lstStyle/>
+          <a:p>
+            <a:pPr algn="ctr"/>
+          </a:p>
+        </p:txBody>
+      </p:sp>
+      <p:sp>
+        <p:nvSpPr>
+          <p:cNvPr id="6" name="Rectangle 5"/>
+          <p:cNvSpPr/>
+          <p:nvPr/>
+        </p:nvSpPr>
+        <p:spPr>
+          <a:xfrm>
+            <a:off x="685800" y="1828800"/>
+            <a:ext cx="685800" cy="822960"/>
+          </a:xfrm>
+          <a:prstGeom prst="rect">
+            <a:avLst/>
+          </a:prstGeom>
+          <a:solidFill>
+            <a:srgbClr val="E0261E"/>
+          </a:solidFill>
+          <a:ln>
+            <a:noFill/>
+          </a:ln>
+        </p:spPr>
+        <p:style>
+          <a:lnRef idx="1">
+            <a:schemeClr val="accent1"/>
+          </a:lnRef>
+          <a:fillRef idx="3">
+            <a:schemeClr val="accent1"/>
+          </a:fillRef>
+          <a:effectRef idx="2">
+            <a:schemeClr val="accent1"/>
+          </a:effectRef>
+          <a:fontRef idx="minor">
+            <a:schemeClr val="lt1"/>
+          </a:fontRef>
+        </p:style>
+        <p:txBody>
+          <a:bodyPr rtlCol="0" anchor="ctr"/>
+          <a:lstStyle/>
+          <a:p>
+            <a:pPr algn="ctr"/>
+          </a:p>
+        </p:txBody>
+      </p:sp>
+      <p:sp>
+        <p:nvSpPr>
+          <p:cNvPr id="7" name="TextBox 6"/>
+          <p:cNvSpPr txBox="1"/>
+          <p:nvPr/>
+        </p:nvSpPr>
+        <p:spPr>
+          <a:xfrm>
+            <a:off x="685800" y="1828800"/>
+            <a:ext cx="685800" cy="822960"/>
+          </a:xfrm>
+          <a:prstGeom prst="rect">
+            <a:avLst/>
+          </a:prstGeom>
+          <a:noFill/>
+        </p:spPr>
+        <p:txBody>
+          <a:bodyPr wrap="square" lIns="0" rIns="0" tIns="0" bIns="0" anchor="ctr">
+            <a:spAutoFit/>
+          </a:bodyPr>
+          <a:lstStyle/>
+          <a:p>
+            <a:pPr algn="ctr"/>
+            <a:r>
+              <a:rPr sz="2200" b="1" i="0">
+                <a:solidFill>
+                  <a:srgbClr val="FFFFFF"/>
+                </a:solidFill>
+                <a:latin typeface="Arial"/>
+              </a:rPr>
+              <a:t>G1</a:t>
+            </a:r>
+          </a:p>
+        </p:txBody>
+      </p:sp>
+      <p:sp>
+        <p:nvSpPr>
+          <p:cNvPr id="8" name="Rectangle 7"/>
+          <p:cNvSpPr/>
+          <p:nvPr/>
+        </p:nvSpPr>
+        <p:spPr>
+          <a:xfrm>
+            <a:off x="1371600" y="1828800"/>
+            <a:ext cx="10500000" cy="822960"/>
+          </a:xfrm>
+          <a:prstGeom prst="rect">
+            <a:avLst/>
+          </a:prstGeom>
+          <a:solidFill>
+            <a:srgbClr val="F4F4F6"/>
+          </a:solidFill>
+          <a:ln w="9525">
+            <a:solidFill>
+              <a:srgbClr val="D4D4DC"/>
+            </a:solidFill>
+          </a:ln>
+        </p:spPr>
+        <p:style>
+          <a:lnRef idx="1">
+            <a:schemeClr val="accent1"/>
+          </a:lnRef>
+          <a:fillRef idx="3">
+            <a:schemeClr val="accent1"/>
+          </a:fillRef>
+          <a:effectRef idx="2">
+            <a:schemeClr val="accent1"/>
+          </a:effectRef>
+          <a:fontRef idx="minor">
+            <a:schemeClr val="lt1"/>
+          </a:fontRef>
+        </p:style>
+        <p:txBody>
+          <a:bodyPr rtlCol="0" anchor="ctr"/>
+          <a:lstStyle/>
+          <a:p>
+            <a:pPr algn="ctr"/>
+          </a:p>
+        </p:txBody>
+      </p:sp>
+      <p:sp>
+        <p:nvSpPr>
+          <p:cNvPr id="9" name="TextBox 8"/>
+          <p:cNvSpPr txBox="1"/>
+          <p:nvPr/>
+        </p:nvSpPr>
+        <p:spPr>
+          <a:xfrm>
+            <a:off x="1600200" y="1920240"/>
+            <a:ext cx="10000000" cy="304800"/>
+          </a:xfrm>
+          <a:prstGeom prst="rect">
+            <a:avLst/>
+          </a:prstGeom>
+          <a:noFill/>
+        </p:spPr>
+        <p:txBody>
+          <a:bodyPr wrap="square" lIns="0" rIns="0" tIns="0" bIns="0" anchor="t">
+            <a:spAutoFit/>
+          </a:bodyPr>
+          <a:lstStyle/>
+          <a:p>
+            <a:pPr algn="l"/>
+            <a:r>
+              <a:rPr sz="1500" b="1" i="0">
+                <a:solidFill>
+                  <a:srgbClr val="1F3A6B"/>
+                </a:solidFill>
+                <a:latin typeface="Arial"/>
+              </a:rPr>
+              <a:t>Segurança &amp; LGPD</a:t>
+            </a:r>
+          </a:p>
+        </p:txBody>
+      </p:sp>
+      <p:sp>
+        <p:nvSpPr>
+          <p:cNvPr id="10" name="TextBox 9"/>
+          <p:cNvSpPr txBox="1"/>
+          <p:nvPr/>
+        </p:nvSpPr>
+        <p:spPr>
+          <a:xfrm>
+            <a:off x="1600200" y="2240280"/>
+            <a:ext cx="10000000" cy="365760"/>
+          </a:xfrm>
+          <a:prstGeom prst="rect">
+            <a:avLst/>
+          </a:prstGeom>
+          <a:noFill/>
+        </p:spPr>
+        <p:txBody>
+          <a:bodyPr wrap="square" lIns="0" rIns="0" tIns="0" bIns="0" anchor="t">
+            <a:spAutoFit/>
+          </a:bodyPr>
+          <a:lstStyle/>
+          <a:p>
+            <a:pPr algn="l"/>
+            <a:r>
+              <a:rPr sz="1100" b="0" i="0">
+                <a:solidFill>
+                  <a:srgbClr val="4A4A5A"/>
+                </a:solidFill>
+                <a:latin typeface="Arial"/>
+              </a:rPr>
+              <a:t>RNF01 · auth obrigatório em todas as rotas · RNF02 · NDA + criptografia + logs de acesso.</a:t>
+            </a:r>
+          </a:p>
+        </p:txBody>
+      </p:sp>
+      <p:sp>
+        <p:nvSpPr>
+          <p:cNvPr id="11" name="Rectangle 10"/>
+          <p:cNvSpPr/>
+          <p:nvPr/>
+        </p:nvSpPr>
+        <p:spPr>
+          <a:xfrm>
+            <a:off x="685800" y="2697480"/>
+            <a:ext cx="685800" cy="822960"/>
+          </a:xfrm>
+          <a:prstGeom prst="rect">
+            <a:avLst/>
+          </a:prstGeom>
+          <a:solidFill>
+            <a:srgbClr val="E0261E"/>
+          </a:solidFill>
+          <a:ln>
+            <a:noFill/>
+          </a:ln>
+        </p:spPr>
+        <p:style>
+          <a:lnRef idx="1">
+            <a:schemeClr val="accent1"/>
+          </a:lnRef>
+          <a:fillRef idx="3">
+            <a:schemeClr val="accent1"/>
+          </a:fillRef>
+          <a:effectRef idx="2">
+            <a:schemeClr val="accent1"/>
+          </a:effectRef>
+          <a:fontRef idx="minor">
+            <a:schemeClr val="lt1"/>
+          </a:fontRef>
+        </p:style>
+        <p:txBody>
+          <a:bodyPr rtlCol="0" anchor="ctr"/>
+          <a:lstStyle/>
+          <a:p>
+            <a:pPr algn="ctr"/>
+          </a:p>
+        </p:txBody>
+      </p:sp>
+      <p:sp>
+        <p:nvSpPr>
+          <p:cNvPr id="12" name="TextBox 11"/>
+          <p:cNvSpPr txBox="1"/>
+          <p:nvPr/>
+        </p:nvSpPr>
+        <p:spPr>
+          <a:xfrm>
+            <a:off x="685800" y="2697480"/>
+            <a:ext cx="685800" cy="822960"/>
+          </a:xfrm>
+          <a:prstGeom prst="rect">
+            <a:avLst/>
+          </a:prstGeom>
+          <a:noFill/>
+        </p:spPr>
+        <p:txBody>
+          <a:bodyPr wrap="square" lIns="0" rIns="0" tIns="0" bIns="0" anchor="ctr">
+            <a:spAutoFit/>
+          </a:bodyPr>
+          <a:lstStyle/>
+          <a:p>
+            <a:pPr algn="ctr"/>
+            <a:r>
+              <a:rPr sz="2200" b="1" i="0">
+                <a:solidFill>
+                  <a:srgbClr val="FFFFFF"/>
+                </a:solidFill>
+                <a:latin typeface="Arial"/>
+              </a:rPr>
+              <a:t>G2</a:t>
+            </a:r>
+          </a:p>
+        </p:txBody>
+      </p:sp>
+      <p:sp>
+        <p:nvSpPr>
+          <p:cNvPr id="13" name="Rectangle 12"/>
+          <p:cNvSpPr/>
+          <p:nvPr/>
+        </p:nvSpPr>
+        <p:spPr>
+          <a:xfrm>
+            <a:off x="1371600" y="2697480"/>
+            <a:ext cx="10500000" cy="822960"/>
+          </a:xfrm>
+          <a:prstGeom prst="rect">
+            <a:avLst/>
+          </a:prstGeom>
+          <a:solidFill>
+            <a:srgbClr val="F4F4F6"/>
+          </a:solidFill>
+          <a:ln w="9525">
+            <a:solidFill>
+              <a:srgbClr val="D4D4DC"/>
+            </a:solidFill>
+          </a:ln>
+        </p:spPr>
+        <p:style>
+          <a:lnRef idx="1">
+            <a:schemeClr val="accent1"/>
+          </a:lnRef>
+          <a:fillRef idx="3">
+            <a:schemeClr val="accent1"/>
+          </a:fillRef>
+          <a:effectRef idx="2">
+            <a:schemeClr val="accent1"/>
+          </a:effectRef>
+          <a:fontRef idx="minor">
+            <a:schemeClr val="lt1"/>
+          </a:fontRef>
+        </p:style>
+        <p:txBody>
+          <a:bodyPr rtlCol="0" anchor="ctr"/>
+          <a:lstStyle/>
+          <a:p>
+            <a:pPr algn="ctr"/>
+          </a:p>
+        </p:txBody>
+      </p:sp>
+      <p:sp>
+        <p:nvSpPr>
+          <p:cNvPr id="14" name="TextBox 13"/>
+          <p:cNvSpPr txBox="1"/>
+          <p:nvPr/>
+        </p:nvSpPr>
+        <p:spPr>
+          <a:xfrm>
+            <a:off x="1600200" y="2788920"/>
+            <a:ext cx="10000000" cy="304800"/>
+          </a:xfrm>
+          <a:prstGeom prst="rect">
+            <a:avLst/>
+          </a:prstGeom>
+          <a:noFill/>
+        </p:spPr>
+        <p:txBody>
+          <a:bodyPr wrap="square" lIns="0" rIns="0" tIns="0" bIns="0" anchor="t">
+            <a:spAutoFit/>
+          </a:bodyPr>
+          <a:lstStyle/>
+          <a:p>
+            <a:pPr algn="l"/>
+            <a:r>
+              <a:rPr sz="1500" b="1" i="0">
+                <a:solidFill>
+                  <a:srgbClr val="1F3A6B"/>
+                </a:solidFill>
+                <a:latin typeface="Arial"/>
+              </a:rPr>
+              <a:t>Reprodutibilidade</a:t>
+            </a:r>
+          </a:p>
+        </p:txBody>
+      </p:sp>
+      <p:sp>
+        <p:nvSpPr>
+          <p:cNvPr id="15" name="TextBox 14"/>
+          <p:cNvSpPr txBox="1"/>
+          <p:nvPr/>
+        </p:nvSpPr>
+        <p:spPr>
+          <a:xfrm>
+            <a:off x="1600200" y="3108960"/>
+            <a:ext cx="10000000" cy="365760"/>
+          </a:xfrm>
+          <a:prstGeom prst="rect">
+            <a:avLst/>
+          </a:prstGeom>
+          <a:noFill/>
+        </p:spPr>
+        <p:txBody>
+          <a:bodyPr wrap="square" lIns="0" rIns="0" tIns="0" bIns="0" anchor="t">
+            <a:spAutoFit/>
+          </a:bodyPr>
+          <a:lstStyle/>
+          <a:p>
+            <a:pPr algn="l"/>
+            <a:r>
+              <a:rPr sz="1100" b="0" i="0">
+                <a:solidFill>
+                  <a:srgbClr val="4A4A5A"/>
+                </a:solidFill>
+                <a:latin typeface="Arial"/>
+              </a:rPr>
+              <a:t>RNF03 · versão do prompt e modelo LLM registrados · RNF04 · schema JSON versionado v1.0.0.</a:t>
+            </a:r>
+          </a:p>
+        </p:txBody>
+      </p:sp>
+      <p:sp>
+        <p:nvSpPr>
+          <p:cNvPr id="16" name="Rectangle 15"/>
+          <p:cNvSpPr/>
+          <p:nvPr/>
+        </p:nvSpPr>
+        <p:spPr>
+          <a:xfrm>
+            <a:off x="685800" y="3566160"/>
+            <a:ext cx="685800" cy="822960"/>
+          </a:xfrm>
+          <a:prstGeom prst="rect">
+            <a:avLst/>
+          </a:prstGeom>
+          <a:solidFill>
+            <a:srgbClr val="E0261E"/>
+          </a:solidFill>
+          <a:ln>
+            <a:noFill/>
+          </a:ln>
+        </p:spPr>
+        <p:style>
+          <a:lnRef idx="1">
+            <a:schemeClr val="accent1"/>
+          </a:lnRef>
+          <a:fillRef idx="3">
+            <a:schemeClr val="accent1"/>
+          </a:fillRef>
+          <a:effectRef idx="2">
+            <a:schemeClr val="accent1"/>
+          </a:effectRef>
+          <a:fontRef idx="minor">
+            <a:schemeClr val="lt1"/>
+          </a:fontRef>
+        </p:style>
+        <p:txBody>
+          <a:bodyPr rtlCol="0" anchor="ctr"/>
+          <a:lstStyle/>
+          <a:p>
+            <a:pPr algn="ctr"/>
+          </a:p>
+        </p:txBody>
+      </p:sp>
+      <p:sp>
+        <p:nvSpPr>
+          <p:cNvPr id="17" name="TextBox 16"/>
+          <p:cNvSpPr txBox="1"/>
+          <p:nvPr/>
+        </p:nvSpPr>
+        <p:spPr>
+          <a:xfrm>
+            <a:off x="685800" y="3566160"/>
+            <a:ext cx="685800" cy="822960"/>
+          </a:xfrm>
+          <a:prstGeom prst="rect">
+            <a:avLst/>
+          </a:prstGeom>
+          <a:noFill/>
+        </p:spPr>
+        <p:txBody>
+          <a:bodyPr wrap="square" lIns="0" rIns="0" tIns="0" bIns="0" anchor="ctr">
+            <a:spAutoFit/>
+          </a:bodyPr>
+          <a:lstStyle/>
+          <a:p>
+            <a:pPr algn="ctr"/>
+            <a:r>
+              <a:rPr sz="2200" b="1" i="0">
+                <a:solidFill>
+                  <a:srgbClr val="FFFFFF"/>
+                </a:solidFill>
+                <a:latin typeface="Arial"/>
+              </a:rPr>
+              <a:t>G3</a:t>
+            </a:r>
+          </a:p>
+        </p:txBody>
+      </p:sp>
+      <p:sp>
+        <p:nvSpPr>
+          <p:cNvPr id="18" name="Rectangle 17"/>
+          <p:cNvSpPr/>
+          <p:nvPr/>
+        </p:nvSpPr>
+        <p:spPr>
+          <a:xfrm>
+            <a:off x="1371600" y="3566160"/>
+            <a:ext cx="10500000" cy="822960"/>
+          </a:xfrm>
+          <a:prstGeom prst="rect">
+            <a:avLst/>
+          </a:prstGeom>
+          <a:solidFill>
+            <a:srgbClr val="F4F4F6"/>
+          </a:solidFill>
+          <a:ln w="9525">
+            <a:solidFill>
+              <a:srgbClr val="D4D4DC"/>
+            </a:solidFill>
+          </a:ln>
+        </p:spPr>
+        <p:style>
+          <a:lnRef idx="1">
+            <a:schemeClr val="accent1"/>
+          </a:lnRef>
+          <a:fillRef idx="3">
+            <a:schemeClr val="accent1"/>
+          </a:fillRef>
+          <a:effectRef idx="2">
+            <a:schemeClr val="accent1"/>
+          </a:effectRef>
+          <a:fontRef idx="minor">
+            <a:schemeClr val="lt1"/>
+          </a:fontRef>
+        </p:style>
+        <p:txBody>
+          <a:bodyPr rtlCol="0" anchor="ctr"/>
+          <a:lstStyle/>
+          <a:p>
+            <a:pPr algn="ctr"/>
+          </a:p>
+        </p:txBody>
+      </p:sp>
+      <p:sp>
+        <p:nvSpPr>
+          <p:cNvPr id="19" name="TextBox 18"/>
+          <p:cNvSpPr txBox="1"/>
+          <p:nvPr/>
+        </p:nvSpPr>
+        <p:spPr>
+          <a:xfrm>
+            <a:off x="1600200" y="3657600"/>
+            <a:ext cx="10000000" cy="304800"/>
+          </a:xfrm>
+          <a:prstGeom prst="rect">
+            <a:avLst/>
+          </a:prstGeom>
+          <a:noFill/>
+        </p:spPr>
+        <p:txBody>
+          <a:bodyPr wrap="square" lIns="0" rIns="0" tIns="0" bIns="0" anchor="t">
+            <a:spAutoFit/>
+          </a:bodyPr>
+          <a:lstStyle/>
+          <a:p>
+            <a:pPr algn="l"/>
+            <a:r>
+              <a:rPr sz="1500" b="1" i="0">
+                <a:solidFill>
+                  <a:srgbClr val="1F3A6B"/>
+                </a:solidFill>
+                <a:latin typeface="Arial"/>
+              </a:rPr>
+              <a:t>Performance</a:t>
+            </a:r>
+          </a:p>
+        </p:txBody>
+      </p:sp>
+      <p:sp>
+        <p:nvSpPr>
+          <p:cNvPr id="20" name="TextBox 19"/>
+          <p:cNvSpPr txBox="1"/>
+          <p:nvPr/>
+        </p:nvSpPr>
+        <p:spPr>
+          <a:xfrm>
+            <a:off x="1600200" y="3977640"/>
+            <a:ext cx="10000000" cy="365760"/>
+          </a:xfrm>
+          <a:prstGeom prst="rect">
+            <a:avLst/>
+          </a:prstGeom>
+          <a:noFill/>
+        </p:spPr>
+        <p:txBody>
+          <a:bodyPr wrap="square" lIns="0" rIns="0" tIns="0" bIns="0" anchor="t">
+            <a:spAutoFit/>
+          </a:bodyPr>
+          <a:lstStyle/>
+          <a:p>
+            <a:pPr algn="l"/>
+            <a:r>
+              <a:rPr sz="1100" b="0" i="0">
+                <a:solidFill>
+                  <a:srgbClr val="4A4A5A"/>
+                </a:solidFill>
+                <a:latin typeface="Arial"/>
+              </a:rPr>
+              <a:t>RNF05 · extração LLM ≤ 90s/doc (medido 46-79s) · RNF06 · endpoints REST ≤ 500ms p95.</a:t>
+            </a:r>
+          </a:p>
+        </p:txBody>
+      </p:sp>
+      <p:sp>
+        <p:nvSpPr>
+          <p:cNvPr id="21" name="Rectangle 20"/>
+          <p:cNvSpPr/>
+          <p:nvPr/>
+        </p:nvSpPr>
+        <p:spPr>
+          <a:xfrm>
+            <a:off x="685800" y="4434840"/>
+            <a:ext cx="685800" cy="822960"/>
+          </a:xfrm>
+          <a:prstGeom prst="rect">
+            <a:avLst/>
+          </a:prstGeom>
+          <a:solidFill>
+            <a:srgbClr val="E0261E"/>
+          </a:solidFill>
+          <a:ln>
+            <a:noFill/>
+          </a:ln>
+        </p:spPr>
+        <p:style>
+          <a:lnRef idx="1">
+            <a:schemeClr val="accent1"/>
+          </a:lnRef>
+          <a:fillRef idx="3">
+            <a:schemeClr val="accent1"/>
+          </a:fillRef>
+          <a:effectRef idx="2">
+            <a:schemeClr val="accent1"/>
+          </a:effectRef>
+          <a:fontRef idx="minor">
+            <a:schemeClr val="lt1"/>
+          </a:fontRef>
+        </p:style>
+        <p:txBody>
+          <a:bodyPr rtlCol="0" anchor="ctr"/>
+          <a:lstStyle/>
+          <a:p>
+            <a:pPr algn="ctr"/>
+          </a:p>
+        </p:txBody>
+      </p:sp>
+      <p:sp>
+        <p:nvSpPr>
+          <p:cNvPr id="22" name="TextBox 21"/>
+          <p:cNvSpPr txBox="1"/>
+          <p:nvPr/>
+        </p:nvSpPr>
+        <p:spPr>
+          <a:xfrm>
+            <a:off x="685800" y="4434840"/>
+            <a:ext cx="685800" cy="822960"/>
+          </a:xfrm>
+          <a:prstGeom prst="rect">
+            <a:avLst/>
+          </a:prstGeom>
+          <a:noFill/>
+        </p:spPr>
+        <p:txBody>
+          <a:bodyPr wrap="square" lIns="0" rIns="0" tIns="0" bIns="0" anchor="ctr">
+            <a:spAutoFit/>
+          </a:bodyPr>
+          <a:lstStyle/>
+          <a:p>
+            <a:pPr algn="ctr"/>
+            <a:r>
+              <a:rPr sz="2200" b="1" i="0">
+                <a:solidFill>
+                  <a:srgbClr val="FFFFFF"/>
+                </a:solidFill>
+                <a:latin typeface="Arial"/>
+              </a:rPr>
+              <a:t>G4</a:t>
+            </a:r>
+          </a:p>
+        </p:txBody>
+      </p:sp>
+      <p:sp>
+        <p:nvSpPr>
+          <p:cNvPr id="23" name="Rectangle 22"/>
+          <p:cNvSpPr/>
+          <p:nvPr/>
+        </p:nvSpPr>
+        <p:spPr>
+          <a:xfrm>
+            <a:off x="1371600" y="4434840"/>
+            <a:ext cx="10500000" cy="822960"/>
+          </a:xfrm>
+          <a:prstGeom prst="rect">
+            <a:avLst/>
+          </a:prstGeom>
+          <a:solidFill>
+            <a:srgbClr val="F4F4F6"/>
+          </a:solidFill>
+          <a:ln w="9525">
+            <a:solidFill>
+              <a:srgbClr val="D4D4DC"/>
+            </a:solidFill>
+          </a:ln>
+        </p:spPr>
+        <p:style>
+          <a:lnRef idx="1">
+            <a:schemeClr val="accent1"/>
+          </a:lnRef>
+          <a:fillRef idx="3">
+            <a:schemeClr val="accent1"/>
+          </a:fillRef>
+          <a:effectRef idx="2">
+            <a:schemeClr val="accent1"/>
+          </a:effectRef>
+          <a:fontRef idx="minor">
+            <a:schemeClr val="lt1"/>
+          </a:fontRef>
+        </p:style>
+        <p:txBody>
+          <a:bodyPr rtlCol="0" anchor="ctr"/>
+          <a:lstStyle/>
+          <a:p>
+            <a:pPr algn="ctr"/>
+          </a:p>
+        </p:txBody>
+      </p:sp>
+      <p:sp>
+        <p:nvSpPr>
+          <p:cNvPr id="24" name="TextBox 23"/>
+          <p:cNvSpPr txBox="1"/>
+          <p:nvPr/>
+        </p:nvSpPr>
+        <p:spPr>
+          <a:xfrm>
+            <a:off x="1600200" y="4526280"/>
+            <a:ext cx="10000000" cy="304800"/>
+          </a:xfrm>
+          <a:prstGeom prst="rect">
+            <a:avLst/>
+          </a:prstGeom>
+          <a:noFill/>
+        </p:spPr>
+        <p:txBody>
+          <a:bodyPr wrap="square" lIns="0" rIns="0" tIns="0" bIns="0" anchor="t">
+            <a:spAutoFit/>
+          </a:bodyPr>
+          <a:lstStyle/>
+          <a:p>
+            <a:pPr algn="l"/>
+            <a:r>
+              <a:rPr sz="1500" b="1" i="0">
+                <a:solidFill>
+                  <a:srgbClr val="1F3A6B"/>
+                </a:solidFill>
+                <a:latin typeface="Arial"/>
+              </a:rPr>
+              <a:t>Usabilidade</a:t>
+            </a:r>
+          </a:p>
+        </p:txBody>
+      </p:sp>
+      <p:sp>
+        <p:nvSpPr>
+          <p:cNvPr id="25" name="TextBox 24"/>
+          <p:cNvSpPr txBox="1"/>
+          <p:nvPr/>
+        </p:nvSpPr>
+        <p:spPr>
+          <a:xfrm>
+            <a:off x="1600200" y="4846320"/>
+            <a:ext cx="10000000" cy="365760"/>
+          </a:xfrm>
+          <a:prstGeom prst="rect">
+            <a:avLst/>
+          </a:prstGeom>
+          <a:noFill/>
+        </p:spPr>
+        <p:txBody>
+          <a:bodyPr wrap="square" lIns="0" rIns="0" tIns="0" bIns="0" anchor="t">
+            <a:spAutoFit/>
+          </a:bodyPr>
+          <a:lstStyle/>
+          <a:p>
+            <a:pPr algn="l"/>
+            <a:r>
+              <a:rPr sz="1100" b="0" i="0">
+                <a:solidFill>
+                  <a:srgbClr val="4A4A5A"/>
+                </a:solidFill>
+                <a:latin typeface="Arial"/>
+              </a:rPr>
+              <a:t>RNF07 · linguagem cidadã no Resumo do Cliente · sem jargão técnico · revisão obrigatória.</a:t>
+            </a:r>
+          </a:p>
+        </p:txBody>
+      </p:sp>
+      <p:sp>
+        <p:nvSpPr>
+          <p:cNvPr id="26" name="Rectangle 25"/>
+          <p:cNvSpPr/>
+          <p:nvPr/>
+        </p:nvSpPr>
+        <p:spPr>
+          <a:xfrm>
+            <a:off x="685800" y="5303520"/>
+            <a:ext cx="685800" cy="822960"/>
+          </a:xfrm>
+          <a:prstGeom prst="rect">
+            <a:avLst/>
+          </a:prstGeom>
+          <a:solidFill>
+            <a:srgbClr val="E0261E"/>
+          </a:solidFill>
+          <a:ln>
+            <a:noFill/>
+          </a:ln>
+        </p:spPr>
+        <p:style>
+          <a:lnRef idx="1">
+            <a:schemeClr val="accent1"/>
+          </a:lnRef>
+          <a:fillRef idx="3">
+            <a:schemeClr val="accent1"/>
+          </a:fillRef>
+          <a:effectRef idx="2">
+            <a:schemeClr val="accent1"/>
+          </a:effectRef>
+          <a:fontRef idx="minor">
+            <a:schemeClr val="lt1"/>
+          </a:fontRef>
+        </p:style>
+        <p:txBody>
+          <a:bodyPr rtlCol="0" anchor="ctr"/>
+          <a:lstStyle/>
+          <a:p>
+            <a:pPr algn="ctr"/>
+          </a:p>
+        </p:txBody>
+      </p:sp>
+      <p:sp>
+        <p:nvSpPr>
+          <p:cNvPr id="27" name="TextBox 26"/>
+          <p:cNvSpPr txBox="1"/>
+          <p:nvPr/>
+        </p:nvSpPr>
+        <p:spPr>
+          <a:xfrm>
+            <a:off x="685800" y="5303520"/>
+            <a:ext cx="685800" cy="822960"/>
+          </a:xfrm>
+          <a:prstGeom prst="rect">
+            <a:avLst/>
+          </a:prstGeom>
+          <a:noFill/>
+        </p:spPr>
+        <p:txBody>
+          <a:bodyPr wrap="square" lIns="0" rIns="0" tIns="0" bIns="0" anchor="ctr">
+            <a:spAutoFit/>
+          </a:bodyPr>
+          <a:lstStyle/>
+          <a:p>
+            <a:pPr algn="ctr"/>
+            <a:r>
+              <a:rPr sz="2200" b="1" i="0">
+                <a:solidFill>
+                  <a:srgbClr val="FFFFFF"/>
+                </a:solidFill>
+                <a:latin typeface="Arial"/>
+              </a:rPr>
+              <a:t>G5</a:t>
+            </a:r>
+          </a:p>
+        </p:txBody>
+      </p:sp>
+      <p:sp>
+        <p:nvSpPr>
+          <p:cNvPr id="28" name="Rectangle 27"/>
+          <p:cNvSpPr/>
+          <p:nvPr/>
+        </p:nvSpPr>
+        <p:spPr>
+          <a:xfrm>
+            <a:off x="1371600" y="5303520"/>
+            <a:ext cx="10500000" cy="822960"/>
+          </a:xfrm>
+          <a:prstGeom prst="rect">
+            <a:avLst/>
+          </a:prstGeom>
+          <a:solidFill>
+            <a:srgbClr val="F4F4F6"/>
+          </a:solidFill>
+          <a:ln w="9525">
+            <a:solidFill>
+              <a:srgbClr val="D4D4DC"/>
+            </a:solidFill>
+          </a:ln>
+        </p:spPr>
+        <p:style>
+          <a:lnRef idx="1">
+            <a:schemeClr val="accent1"/>
+          </a:lnRef>
+          <a:fillRef idx="3">
+            <a:schemeClr val="accent1"/>
+          </a:fillRef>
+          <a:effectRef idx="2">
+            <a:schemeClr val="accent1"/>
+          </a:effectRef>
+          <a:fontRef idx="minor">
+            <a:schemeClr val="lt1"/>
+          </a:fontRef>
+        </p:style>
+        <p:txBody>
+          <a:bodyPr rtlCol="0" anchor="ctr"/>
+          <a:lstStyle/>
+          <a:p>
+            <a:pPr algn="ctr"/>
+          </a:p>
+        </p:txBody>
+      </p:sp>
+      <p:sp>
+        <p:nvSpPr>
+          <p:cNvPr id="29" name="TextBox 28"/>
+          <p:cNvSpPr txBox="1"/>
+          <p:nvPr/>
+        </p:nvSpPr>
+        <p:spPr>
+          <a:xfrm>
+            <a:off x="1600200" y="5394960"/>
+            <a:ext cx="10000000" cy="304800"/>
+          </a:xfrm>
+          <a:prstGeom prst="rect">
+            <a:avLst/>
+          </a:prstGeom>
+          <a:noFill/>
+        </p:spPr>
+        <p:txBody>
+          <a:bodyPr wrap="square" lIns="0" rIns="0" tIns="0" bIns="0" anchor="t">
+            <a:spAutoFit/>
+          </a:bodyPr>
+          <a:lstStyle/>
+          <a:p>
+            <a:pPr algn="l"/>
+            <a:r>
+              <a:rPr sz="1500" b="1" i="0">
+                <a:solidFill>
+                  <a:srgbClr val="1F3A6B"/>
+                </a:solidFill>
+                <a:latin typeface="Arial"/>
+              </a:rPr>
+              <a:t>Manutenibilidade &amp; Custo</a:t>
+            </a:r>
+          </a:p>
+        </p:txBody>
+      </p:sp>
+      <p:sp>
+        <p:nvSpPr>
+          <p:cNvPr id="30" name="TextBox 29"/>
+          <p:cNvSpPr txBox="1"/>
+          <p:nvPr/>
+        </p:nvSpPr>
+        <p:spPr>
+          <a:xfrm>
+            <a:off x="1600200" y="5715000"/>
+            <a:ext cx="10000000" cy="365760"/>
+          </a:xfrm>
+          <a:prstGeom prst="rect">
+            <a:avLst/>
+          </a:prstGeom>
+          <a:noFill/>
+        </p:spPr>
+        <p:txBody>
+          <a:bodyPr wrap="square" lIns="0" rIns="0" tIns="0" bIns="0" anchor="t">
+            <a:spAutoFit/>
+          </a:bodyPr>
+          <a:lstStyle/>
+          <a:p>
+            <a:pPr algn="l"/>
+            <a:r>
+              <a:rPr sz="1100" b="0" i="0">
+                <a:solidFill>
+                  <a:srgbClr val="4A4A5A"/>
+                </a:solidFill>
+                <a:latin typeface="Arial"/>
+              </a:rPr>
+              <a:t>RNF08 · ports &amp; adapters (LLM, storage) · RNF09 · Ollama local como default zero-cost.</a:t>
+            </a:r>
+          </a:p>
+        </p:txBody>
+      </p:sp>
+      <p:sp>
+        <p:nvSpPr>
+          <p:cNvPr id="31" name="Rectangle 30"/>
+          <p:cNvSpPr/>
+          <p:nvPr/>
+        </p:nvSpPr>
+        <p:spPr>
+          <a:xfrm>
+            <a:off x="457200" y="6400800"/>
+            <a:ext cx="11277600" cy="15240"/>
+          </a:xfrm>
+          <a:prstGeom prst="rect">
+            <a:avLst/>
+          </a:prstGeom>
+          <a:solidFill>
+            <a:srgbClr val="E0261E"/>
+          </a:solidFill>
+          <a:ln>
+            <a:noFill/>
+          </a:ln>
+        </p:spPr>
+        <p:style>
+          <a:lnRef idx="1">
+            <a:schemeClr val="accent1"/>
+          </a:lnRef>
+          <a:fillRef idx="3">
+            <a:schemeClr val="accent1"/>
+          </a:fillRef>
+          <a:effectRef idx="2">
+            <a:schemeClr val="accent1"/>
+          </a:effectRef>
+          <a:fontRef idx="minor">
+            <a:schemeClr val="lt1"/>
+          </a:fontRef>
+        </p:style>
+        <p:txBody>
+          <a:bodyPr rtlCol="0" anchor="ctr"/>
+          <a:lstStyle/>
+          <a:p>
+            <a:pPr algn="ctr"/>
+          </a:p>
+        </p:txBody>
+      </p:sp>
+      <p:sp>
+        <p:nvSpPr>
+          <p:cNvPr id="32" name="Rectangle 31"/>
+          <p:cNvSpPr/>
+          <p:nvPr/>
+        </p:nvSpPr>
+        <p:spPr>
+          <a:xfrm>
+            <a:off x="457200" y="6400800"/>
+            <a:ext cx="11277600" cy="15240"/>
+          </a:xfrm>
+          <a:prstGeom prst="rect">
+            <a:avLst/>
+          </a:prstGeom>
+          <a:solidFill>
+            <a:srgbClr val="E0261E"/>
+          </a:solidFill>
+          <a:ln>
+            <a:noFill/>
+          </a:ln>
+        </p:spPr>
+        <p:style>
+          <a:lnRef idx="1">
+            <a:schemeClr val="accent1"/>
+          </a:lnRef>
+          <a:fillRef idx="3">
+            <a:schemeClr val="accent1"/>
+          </a:fillRef>
+          <a:effectRef idx="2">
+            <a:schemeClr val="accent1"/>
+          </a:effectRef>
+          <a:fontRef idx="minor">
+            <a:schemeClr val="lt1"/>
+          </a:fontRef>
+        </p:style>
+        <p:txBody>
+          <a:bodyPr rtlCol="0" anchor="ctr"/>
+          <a:lstStyle/>
+          <a:p>
+            <a:pPr algn="ctr"/>
+          </a:p>
+        </p:txBody>
+      </p:sp>
+      <p:sp>
+        <p:nvSpPr>
+          <p:cNvPr id="33" name="Rectangle 32"/>
+          <p:cNvSpPr/>
+          <p:nvPr/>
+        </p:nvSpPr>
+        <p:spPr>
+          <a:xfrm>
+            <a:off x="457200" y="6400800"/>
+            <a:ext cx="11277600" cy="15240"/>
+          </a:xfrm>
+          <a:prstGeom prst="rect">
+            <a:avLst/>
+          </a:prstGeom>
+          <a:solidFill>
+            <a:srgbClr val="E0261E"/>
+          </a:solidFill>
+          <a:ln>
+            <a:noFill/>
+          </a:ln>
+        </p:spPr>
+        <p:style>
+          <a:lnRef idx="1">
+            <a:schemeClr val="accent1"/>
+          </a:lnRef>
+          <a:fillRef idx="3">
+            <a:schemeClr val="accent1"/>
+          </a:fillRef>
+          <a:effectRef idx="2">
+            <a:schemeClr val="accent1"/>
+          </a:effectRef>
+          <a:fontRef idx="minor">
+            <a:schemeClr val="lt1"/>
+          </a:fontRef>
+        </p:style>
+        <p:txBody>
+          <a:bodyPr rtlCol="0" anchor="ctr"/>
+          <a:lstStyle/>
+          <a:p>
+            <a:pPr algn="ctr"/>
+          </a:p>
+        </p:txBody>
+      </p:sp>
+      <p:sp>
+        <p:nvSpPr>
+          <p:cNvPr id="34" name="TextBox 33"/>
+          <p:cNvSpPr txBox="1"/>
+          <p:nvPr/>
+        </p:nvSpPr>
+        <p:spPr>
+          <a:xfrm>
+            <a:off x="457200" y="6492240"/>
+            <a:ext cx="8000000" cy="228600"/>
+          </a:xfrm>
+          <a:prstGeom prst="rect">
+            <a:avLst/>
+          </a:prstGeom>
+          <a:noFill/>
+        </p:spPr>
+        <p:txBody>
+          <a:bodyPr wrap="square" lIns="0" rIns="0" tIns="0" bIns="0" anchor="t">
+            <a:spAutoFit/>
+          </a:bodyPr>
+          <a:lstStyle/>
+          <a:p>
+            <a:pPr algn="l"/>
+            <a:r>
+              <a:rPr sz="900" b="0" i="0">
+                <a:solidFill>
+                  <a:srgbClr val="6B6B7A"/>
+                </a:solidFill>
+                <a:latin typeface="Arial"/>
+              </a:rPr>
+              <a:t>Equipe ObiOne · UPE/POLI · Maio 2026</a:t>
+            </a:r>
+          </a:p>
+        </p:txBody>
+      </p:sp>
+      <p:sp>
+        <p:nvSpPr>
+          <p:cNvPr id="35" name="TextBox 34"/>
+          <p:cNvSpPr txBox="1"/>
+          <p:nvPr/>
+        </p:nvSpPr>
+        <p:spPr>
+          <a:xfrm>
+            <a:off x="11000000" y="6492240"/>
+            <a:ext cx="1000000" cy="228600"/>
+          </a:xfrm>
+          <a:prstGeom prst="rect">
+            <a:avLst/>
+          </a:prstGeom>
+          <a:noFill/>
+        </p:spPr>
+        <p:txBody>
+          <a:bodyPr wrap="square" lIns="0" rIns="0" tIns="0" bIns="0" anchor="t">
+            <a:spAutoFit/>
+          </a:bodyPr>
+          <a:lstStyle/>
+          <a:p>
+            <a:pPr algn="r"/>
+            <a:r>
+              <a:rPr sz="900" b="0" i="0">
+                <a:solidFill>
+                  <a:srgbClr val="6B6B7A"/>
+                </a:solidFill>
+                <a:latin typeface="Arial"/>
+              </a:rPr>
+              <a:t>9 / 12</a:t>
+            </a:r>
+          </a:p>
+        </p:txBody>
+      </p:sp>
+      <p:pic>
+        <p:nvPicPr>
+          <p:cNvPr id="36" name="Picture 35" descr="image.png"/>
+          <p:cNvPicPr>
+            <a:picLocks noChangeAspect="1"/>
+          </p:cNvPicPr>
+          <p:nvPr/>
+        </p:nvPicPr>
+        <p:blipFill>
+          <a:blip r:embed="rId2"/>
+          <a:stretch>
+            <a:fillRect/>
+          </a:stretch>
+        </p:blipFill>
+        <p:spPr>
+          <a:xfrm>
+            <a:off x="11000000" y="228600"/>
+            <a:ext cx="1066800" cy="801716"/>
+          </a:xfrm>
+          <a:prstGeom prst="rect">
+            <a:avLst/>
+          </a:prstGeom>
+        </p:spPr>
+      </p:pic>
+    </p:spTree>
+  </p:cSld>
+  <p:clrMapOvr>
+    <a:masterClrMapping/>
+  </p:clrMapOvr>
+</p:sld>
+</file>
+
 <file path=ppt/slides/slide2.xml><?xml version="1.0" encoding="utf-8"?>
 <p:sld xmlns:a="http://schemas.openxmlformats.org/drawingml/2006/main" xmlns:p="http://schemas.openxmlformats.org/presentationml/2006/main" xmlns:r="http://schemas.openxmlformats.org/officeDocument/2006/relationships">
   <p:cSld>
@@ -5706,7 +10105,7 @@
                 </a:solidFill>
                 <a:latin typeface="Arial"/>
               </a:rPr>
-              <a:t>2 / 8</a:t>
+              <a:t>2 / 12</a:t>
             </a:r>
           </a:p>
         </p:txBody>
@@ -6809,7 +11208,7 @@
                 </a:solidFill>
                 <a:latin typeface="Arial"/>
               </a:rPr>
-              <a:t>3 / 8</a:t>
+              <a:t>3 / 12</a:t>
             </a:r>
           </a:p>
         </p:txBody>
@@ -6929,7 +11328,7 @@
                 </a:solidFill>
                 <a:latin typeface="Arial"/>
               </a:rPr>
-              <a:t>5 grupos · 18 requisitos funcionais</a:t>
+              <a:t>5 grupos · 18 requisitos funcionais · smoke real Ollama em 5/5 docs</a:t>
             </a:r>
           </a:p>
         </p:txBody>
@@ -7165,7 +11564,7 @@
                 </a:solidFill>
                 <a:latin typeface="Arial"/>
               </a:rPr>
-              <a:t>Extração via LLM dos atributos do Quadro 37 a partir de documentos .docx.</a:t>
+              <a:t>Extração dos 44 atributos via Llama 3.1 8B. Smoke em 5/5 projetos · 46% cobertura média em ~66s/doc.</a:t>
             </a:r>
           </a:p>
         </p:txBody>
@@ -8136,7 +12535,7 @@
                 </a:solidFill>
                 <a:latin typeface="Arial"/>
               </a:rPr>
-              <a:t>5 / 8</a:t>
+              <a:t>5 / 12</a:t>
             </a:r>
           </a:p>
         </p:txBody>
@@ -10702,7 +15101,7 @@
                 </a:solidFill>
                 <a:latin typeface="Arial"/>
               </a:rPr>
-              <a:t>6 / 8</a:t>
+              <a:t>10 / 12</a:t>
             </a:r>
           </a:p>
         </p:txBody>
@@ -11023,7 +15422,7 @@
                 </a:solidFill>
                 <a:latin typeface="Arial"/>
               </a:rPr>
-              <a:t>Sprint 1 · esta semana</a:t>
+              <a:t>Sprint 0 + Sprint 1 antecipada</a:t>
             </a:r>
           </a:p>
         </p:txBody>
@@ -11093,7 +15492,7 @@
                 </a:solidFill>
                 <a:latin typeface="Arial"/>
               </a:rPr>
-              <a:t>Requisitos</a:t>
+              <a:t>Requisitos + protocolo</a:t>
             </a:r>
           </a:p>
         </p:txBody>
@@ -11128,7 +15527,7 @@
                 </a:solidFill>
                 <a:latin typeface="Arial"/>
               </a:rPr>
-              <a:t>18 funcionais + 9 não funcionais em formato ficha.</a:t>
+              <a:t>18 RFs + 9 RNFs + rubrica híbrida 0/0,5/1 + Kappa.</a:t>
             </a:r>
           </a:p>
         </p:txBody>
@@ -11198,7 +15597,7 @@
                 </a:solidFill>
                 <a:latin typeface="Arial"/>
               </a:rPr>
-              <a:t>Atributos-alvo do MPO</a:t>
+              <a:t>Backend MVP entregue</a:t>
             </a:r>
           </a:p>
         </p:txBody>
@@ -11233,7 +15632,7 @@
                 </a:solidFill>
                 <a:latin typeface="Arial"/>
               </a:rPr>
-              <a:t>44 atributos do Quadro 37 categorizados.</a:t>
+              <a:t>18/18 USs · 287 testes · 32 endpoints · 8 migrations · CI rodando.</a:t>
             </a:r>
           </a:p>
         </p:txBody>
@@ -11303,7 +15702,7 @@
                 </a:solidFill>
                 <a:latin typeface="Arial"/>
               </a:rPr>
-              <a:t>Protocolo de avaliação</a:t>
+              <a:t>Smoke real do pipeline LLM</a:t>
             </a:r>
           </a:p>
         </p:txBody>
@@ -11338,7 +15737,7 @@
                 </a:solidFill>
                 <a:latin typeface="Arial"/>
               </a:rPr>
-              <a:t>Rubrica híbrida 0/0,5/1 + Kappa.</a:t>
+              <a:t>Llama 3.1 8B local em 5/5 projetos · 46% cobertura média.</a:t>
             </a:r>
           </a:p>
         </p:txBody>
@@ -11566,7 +15965,7 @@
                 </a:solidFill>
                 <a:latin typeface="Arial"/>
               </a:rPr>
-              <a:t>Sprint 2 (22 mai - 4 jun)</a:t>
+              <a:t>Frontend e gabarito (sprints 2-4)</a:t>
             </a:r>
           </a:p>
         </p:txBody>
@@ -11601,7 +16000,7 @@
                 </a:solidFill>
                 <a:latin typeface="Arial"/>
               </a:rPr>
-              <a:t>Cadastro · upload · auth · pipeline LLM nos 5 projetos.</a:t>
+              <a:t>Bruno integra os 32 endpoints. Cynthia + Moisés produzem o gabarito manual.</a:t>
             </a:r>
           </a:p>
         </p:txBody>
@@ -11671,7 +16070,7 @@
                 </a:solidFill>
                 <a:latin typeface="Arial"/>
               </a:rPr>
-              <a:t>Gabaritos manuais</a:t>
+              <a:t>Sprint 5 destravada</a:t>
             </a:r>
           </a:p>
         </p:txBody>
@@ -11706,7 +16105,7 @@
                 </a:solidFill>
                 <a:latin typeface="Arial"/>
               </a:rPr>
-              <a:t>Valença piloto · depois Freire Batista e Kaka JJ.</a:t>
+              <a:t>Backend compara via /extractions/evaluation · rubrica humana + Kappa.</a:t>
             </a:r>
           </a:p>
         </p:txBody>
@@ -11811,7 +16210,7 @@
                 </a:solidFill>
                 <a:latin typeface="Arial"/>
               </a:rPr>
-              <a:t>Dashboard + IA-Assistente operacionais.</a:t>
+              <a:t>Frontend pronto · IA-Assistente em uso real · Likert lançado.</a:t>
             </a:r>
           </a:p>
         </p:txBody>
@@ -12010,7 +16409,7 @@
                 </a:solidFill>
                 <a:latin typeface="Arial"/>
               </a:rPr>
-              <a:t>7 / 8</a:t>
+              <a:t>11 / 12</a:t>
             </a:r>
           </a:p>
         </p:txBody>
@@ -13427,7 +17826,7 @@
                 </a:solidFill>
                 <a:latin typeface="Arial"/>
               </a:rPr>
-              <a:t>4 / 8</a:t>
+              <a:t>4 / 12</a:t>
             </a:r>
           </a:p>
         </p:txBody>
@@ -13435,6 +17834,1325 @@
       <p:pic>
         <p:nvPicPr>
           <p:cNvPr id="38" name="Picture 37" descr="image.png"/>
+          <p:cNvPicPr>
+            <a:picLocks noChangeAspect="1"/>
+          </p:cNvPicPr>
+          <p:nvPr/>
+        </p:nvPicPr>
+        <p:blipFill>
+          <a:blip r:embed="rId2"/>
+          <a:stretch>
+            <a:fillRect/>
+          </a:stretch>
+        </p:blipFill>
+        <p:spPr>
+          <a:xfrm>
+            <a:off x="11000000" y="228600"/>
+            <a:ext cx="1066800" cy="801716"/>
+          </a:xfrm>
+          <a:prstGeom prst="rect">
+            <a:avLst/>
+          </a:prstGeom>
+        </p:spPr>
+      </p:pic>
+    </p:spTree>
+  </p:cSld>
+  <p:clrMapOvr>
+    <a:masterClrMapping/>
+  </p:clrMapOvr>
+</p:sld>
+</file>
+
+<file path=ppt/slides/slide9.xml><?xml version="1.0" encoding="utf-8"?>
+<p:sld xmlns:a="http://schemas.openxmlformats.org/drawingml/2006/main" xmlns:p="http://schemas.openxmlformats.org/presentationml/2006/main" xmlns:r="http://schemas.openxmlformats.org/officeDocument/2006/relationships">
+  <p:cSld>
+    <p:spTree>
+      <p:nvGrpSpPr>
+        <p:cNvPr id="1" name=""/>
+        <p:cNvGrpSpPr/>
+        <p:nvPr/>
+      </p:nvGrpSpPr>
+      <p:grpSpPr/>
+      <p:sp>
+        <p:nvSpPr>
+          <p:cNvPr id="3" name="TextBox 2"/>
+          <p:cNvSpPr txBox="1"/>
+          <p:nvPr/>
+        </p:nvSpPr>
+        <p:spPr>
+          <a:xfrm>
+            <a:off x="457200" y="457200"/>
+            <a:ext cx="11277600" cy="228600"/>
+          </a:xfrm>
+          <a:prstGeom prst="rect">
+            <a:avLst/>
+          </a:prstGeom>
+          <a:noFill/>
+        </p:spPr>
+        <p:txBody>
+          <a:bodyPr wrap="square" lIns="0" rIns="0" tIns="0" bIns="0" anchor="t">
+            <a:spAutoFit/>
+          </a:bodyPr>
+          <a:lstStyle/>
+          <a:p>
+            <a:pPr algn="l"/>
+            <a:r>
+              <a:rPr sz="1100" b="1" i="0">
+                <a:solidFill>
+                  <a:srgbClr val="E0261E"/>
+                </a:solidFill>
+                <a:latin typeface="Arial"/>
+              </a:rPr>
+              <a:t>REQUISITOS · FUNDAÇÃO + PIPELINE</a:t>
+            </a:r>
+          </a:p>
+        </p:txBody>
+      </p:sp>
+      <p:sp>
+        <p:nvSpPr>
+          <p:cNvPr id="4" name="TextBox 3"/>
+          <p:cNvSpPr txBox="1"/>
+          <p:nvPr/>
+        </p:nvSpPr>
+        <p:spPr>
+          <a:xfrm>
+            <a:off x="457200" y="685800"/>
+            <a:ext cx="10000000" cy="685800"/>
+          </a:xfrm>
+          <a:prstGeom prst="rect">
+            <a:avLst/>
+          </a:prstGeom>
+          <a:noFill/>
+        </p:spPr>
+        <p:txBody>
+          <a:bodyPr wrap="square" lIns="0" rIns="0" tIns="0" bIns="0" anchor="t">
+            <a:spAutoFit/>
+          </a:bodyPr>
+          <a:lstStyle/>
+          <a:p>
+            <a:pPr algn="l"/>
+            <a:r>
+              <a:rPr sz="2800" b="1" i="0">
+                <a:solidFill>
+                  <a:srgbClr val="1F3A6B"/>
+                </a:solidFill>
+                <a:latin typeface="Arial"/>
+              </a:rPr>
+              <a:t>6 requisitos funcionais · sprints 2 e 3 · todos implementados</a:t>
+            </a:r>
+          </a:p>
+        </p:txBody>
+      </p:sp>
+      <p:sp>
+        <p:nvSpPr>
+          <p:cNvPr id="5" name="Rectangle 4"/>
+          <p:cNvSpPr/>
+          <p:nvPr/>
+        </p:nvSpPr>
+        <p:spPr>
+          <a:xfrm>
+            <a:off x="457200" y="1432560"/>
+            <a:ext cx="685800" cy="36576"/>
+          </a:xfrm>
+          <a:prstGeom prst="rect">
+            <a:avLst/>
+          </a:prstGeom>
+          <a:solidFill>
+            <a:srgbClr val="E0261E"/>
+          </a:solidFill>
+          <a:ln>
+            <a:noFill/>
+          </a:ln>
+        </p:spPr>
+        <p:style>
+          <a:lnRef idx="1">
+            <a:schemeClr val="accent1"/>
+          </a:lnRef>
+          <a:fillRef idx="3">
+            <a:schemeClr val="accent1"/>
+          </a:fillRef>
+          <a:effectRef idx="2">
+            <a:schemeClr val="accent1"/>
+          </a:effectRef>
+          <a:fontRef idx="minor">
+            <a:schemeClr val="lt1"/>
+          </a:fontRef>
+        </p:style>
+        <p:txBody>
+          <a:bodyPr rtlCol="0" anchor="ctr"/>
+          <a:lstStyle/>
+          <a:p>
+            <a:pPr algn="ctr"/>
+          </a:p>
+        </p:txBody>
+      </p:sp>
+      <p:sp>
+        <p:nvSpPr>
+          <p:cNvPr id="6" name="Rectangle 5"/>
+          <p:cNvSpPr/>
+          <p:nvPr/>
+        </p:nvSpPr>
+        <p:spPr>
+          <a:xfrm>
+            <a:off x="685800" y="1828800"/>
+            <a:ext cx="685800" cy="822960"/>
+          </a:xfrm>
+          <a:prstGeom prst="rect">
+            <a:avLst/>
+          </a:prstGeom>
+          <a:solidFill>
+            <a:srgbClr val="E0261E"/>
+          </a:solidFill>
+          <a:ln>
+            <a:noFill/>
+          </a:ln>
+        </p:spPr>
+        <p:style>
+          <a:lnRef idx="1">
+            <a:schemeClr val="accent1"/>
+          </a:lnRef>
+          <a:fillRef idx="3">
+            <a:schemeClr val="accent1"/>
+          </a:fillRef>
+          <a:effectRef idx="2">
+            <a:schemeClr val="accent1"/>
+          </a:effectRef>
+          <a:fontRef idx="minor">
+            <a:schemeClr val="lt1"/>
+          </a:fontRef>
+        </p:style>
+        <p:txBody>
+          <a:bodyPr rtlCol="0" anchor="ctr"/>
+          <a:lstStyle/>
+          <a:p>
+            <a:pPr algn="ctr"/>
+          </a:p>
+        </p:txBody>
+      </p:sp>
+      <p:sp>
+        <p:nvSpPr>
+          <p:cNvPr id="7" name="TextBox 6"/>
+          <p:cNvSpPr txBox="1"/>
+          <p:nvPr/>
+        </p:nvSpPr>
+        <p:spPr>
+          <a:xfrm>
+            <a:off x="685800" y="1828800"/>
+            <a:ext cx="685800" cy="822960"/>
+          </a:xfrm>
+          <a:prstGeom prst="rect">
+            <a:avLst/>
+          </a:prstGeom>
+          <a:noFill/>
+        </p:spPr>
+        <p:txBody>
+          <a:bodyPr wrap="square" lIns="0" rIns="0" tIns="0" bIns="0" anchor="ctr">
+            <a:spAutoFit/>
+          </a:bodyPr>
+          <a:lstStyle/>
+          <a:p>
+            <a:pPr algn="ctr"/>
+            <a:r>
+              <a:rPr sz="2200" b="1" i="0">
+                <a:solidFill>
+                  <a:srgbClr val="FFFFFF"/>
+                </a:solidFill>
+                <a:latin typeface="Arial"/>
+              </a:rPr>
+              <a:t>G1</a:t>
+            </a:r>
+          </a:p>
+        </p:txBody>
+      </p:sp>
+      <p:sp>
+        <p:nvSpPr>
+          <p:cNvPr id="8" name="Rectangle 7"/>
+          <p:cNvSpPr/>
+          <p:nvPr/>
+        </p:nvSpPr>
+        <p:spPr>
+          <a:xfrm>
+            <a:off x="1371600" y="1828800"/>
+            <a:ext cx="10500000" cy="822960"/>
+          </a:xfrm>
+          <a:prstGeom prst="rect">
+            <a:avLst/>
+          </a:prstGeom>
+          <a:solidFill>
+            <a:srgbClr val="F4F4F6"/>
+          </a:solidFill>
+          <a:ln w="9525">
+            <a:solidFill>
+              <a:srgbClr val="D4D4DC"/>
+            </a:solidFill>
+          </a:ln>
+        </p:spPr>
+        <p:style>
+          <a:lnRef idx="1">
+            <a:schemeClr val="accent1"/>
+          </a:lnRef>
+          <a:fillRef idx="3">
+            <a:schemeClr val="accent1"/>
+          </a:fillRef>
+          <a:effectRef idx="2">
+            <a:schemeClr val="accent1"/>
+          </a:effectRef>
+          <a:fontRef idx="minor">
+            <a:schemeClr val="lt1"/>
+          </a:fontRef>
+        </p:style>
+        <p:txBody>
+          <a:bodyPr rtlCol="0" anchor="ctr"/>
+          <a:lstStyle/>
+          <a:p>
+            <a:pPr algn="ctr"/>
+          </a:p>
+        </p:txBody>
+      </p:sp>
+      <p:sp>
+        <p:nvSpPr>
+          <p:cNvPr id="9" name="TextBox 8"/>
+          <p:cNvSpPr txBox="1"/>
+          <p:nvPr/>
+        </p:nvSpPr>
+        <p:spPr>
+          <a:xfrm>
+            <a:off x="1600200" y="1920240"/>
+            <a:ext cx="10000000" cy="304800"/>
+          </a:xfrm>
+          <a:prstGeom prst="rect">
+            <a:avLst/>
+          </a:prstGeom>
+          <a:noFill/>
+        </p:spPr>
+        <p:txBody>
+          <a:bodyPr wrap="square" lIns="0" rIns="0" tIns="0" bIns="0" anchor="t">
+            <a:spAutoFit/>
+          </a:bodyPr>
+          <a:lstStyle/>
+          <a:p>
+            <a:pPr algn="l"/>
+            <a:r>
+              <a:rPr sz="1500" b="1" i="0">
+                <a:solidFill>
+                  <a:srgbClr val="1F3A6B"/>
+                </a:solidFill>
+                <a:latin typeface="Arial"/>
+              </a:rPr>
+              <a:t>RF01 · Autenticar</a:t>
+            </a:r>
+          </a:p>
+        </p:txBody>
+      </p:sp>
+      <p:sp>
+        <p:nvSpPr>
+          <p:cNvPr id="10" name="TextBox 9"/>
+          <p:cNvSpPr txBox="1"/>
+          <p:nvPr/>
+        </p:nvSpPr>
+        <p:spPr>
+          <a:xfrm>
+            <a:off x="1600200" y="2240280"/>
+            <a:ext cx="10000000" cy="365760"/>
+          </a:xfrm>
+          <a:prstGeom prst="rect">
+            <a:avLst/>
+          </a:prstGeom>
+          <a:noFill/>
+        </p:spPr>
+        <p:txBody>
+          <a:bodyPr wrap="square" lIns="0" rIns="0" tIns="0" bIns="0" anchor="t">
+            <a:spAutoFit/>
+          </a:bodyPr>
+          <a:lstStyle/>
+          <a:p>
+            <a:pPr algn="l"/>
+            <a:r>
+              <a:rPr sz="1100" b="0" i="0">
+                <a:solidFill>
+                  <a:srgbClr val="4A4A5A"/>
+                </a:solidFill>
+                <a:latin typeface="Arial"/>
+              </a:rPr>
+              <a:t>JWT com expiração de 24h. Admin cria usuários; sem cadastro público.</a:t>
+            </a:r>
+          </a:p>
+        </p:txBody>
+      </p:sp>
+      <p:sp>
+        <p:nvSpPr>
+          <p:cNvPr id="11" name="Rectangle 10"/>
+          <p:cNvSpPr/>
+          <p:nvPr/>
+        </p:nvSpPr>
+        <p:spPr>
+          <a:xfrm>
+            <a:off x="685800" y="2697480"/>
+            <a:ext cx="685800" cy="822960"/>
+          </a:xfrm>
+          <a:prstGeom prst="rect">
+            <a:avLst/>
+          </a:prstGeom>
+          <a:solidFill>
+            <a:srgbClr val="E0261E"/>
+          </a:solidFill>
+          <a:ln>
+            <a:noFill/>
+          </a:ln>
+        </p:spPr>
+        <p:style>
+          <a:lnRef idx="1">
+            <a:schemeClr val="accent1"/>
+          </a:lnRef>
+          <a:fillRef idx="3">
+            <a:schemeClr val="accent1"/>
+          </a:fillRef>
+          <a:effectRef idx="2">
+            <a:schemeClr val="accent1"/>
+          </a:effectRef>
+          <a:fontRef idx="minor">
+            <a:schemeClr val="lt1"/>
+          </a:fontRef>
+        </p:style>
+        <p:txBody>
+          <a:bodyPr rtlCol="0" anchor="ctr"/>
+          <a:lstStyle/>
+          <a:p>
+            <a:pPr algn="ctr"/>
+          </a:p>
+        </p:txBody>
+      </p:sp>
+      <p:sp>
+        <p:nvSpPr>
+          <p:cNvPr id="12" name="TextBox 11"/>
+          <p:cNvSpPr txBox="1"/>
+          <p:nvPr/>
+        </p:nvSpPr>
+        <p:spPr>
+          <a:xfrm>
+            <a:off x="685800" y="2697480"/>
+            <a:ext cx="685800" cy="822960"/>
+          </a:xfrm>
+          <a:prstGeom prst="rect">
+            <a:avLst/>
+          </a:prstGeom>
+          <a:noFill/>
+        </p:spPr>
+        <p:txBody>
+          <a:bodyPr wrap="square" lIns="0" rIns="0" tIns="0" bIns="0" anchor="ctr">
+            <a:spAutoFit/>
+          </a:bodyPr>
+          <a:lstStyle/>
+          <a:p>
+            <a:pPr algn="ctr"/>
+            <a:r>
+              <a:rPr sz="2200" b="1" i="0">
+                <a:solidFill>
+                  <a:srgbClr val="FFFFFF"/>
+                </a:solidFill>
+                <a:latin typeface="Arial"/>
+              </a:rPr>
+              <a:t>G2</a:t>
+            </a:r>
+          </a:p>
+        </p:txBody>
+      </p:sp>
+      <p:sp>
+        <p:nvSpPr>
+          <p:cNvPr id="13" name="Rectangle 12"/>
+          <p:cNvSpPr/>
+          <p:nvPr/>
+        </p:nvSpPr>
+        <p:spPr>
+          <a:xfrm>
+            <a:off x="1371600" y="2697480"/>
+            <a:ext cx="10500000" cy="822960"/>
+          </a:xfrm>
+          <a:prstGeom prst="rect">
+            <a:avLst/>
+          </a:prstGeom>
+          <a:solidFill>
+            <a:srgbClr val="F4F4F6"/>
+          </a:solidFill>
+          <a:ln w="9525">
+            <a:solidFill>
+              <a:srgbClr val="D4D4DC"/>
+            </a:solidFill>
+          </a:ln>
+        </p:spPr>
+        <p:style>
+          <a:lnRef idx="1">
+            <a:schemeClr val="accent1"/>
+          </a:lnRef>
+          <a:fillRef idx="3">
+            <a:schemeClr val="accent1"/>
+          </a:fillRef>
+          <a:effectRef idx="2">
+            <a:schemeClr val="accent1"/>
+          </a:effectRef>
+          <a:fontRef idx="minor">
+            <a:schemeClr val="lt1"/>
+          </a:fontRef>
+        </p:style>
+        <p:txBody>
+          <a:bodyPr rtlCol="0" anchor="ctr"/>
+          <a:lstStyle/>
+          <a:p>
+            <a:pPr algn="ctr"/>
+          </a:p>
+        </p:txBody>
+      </p:sp>
+      <p:sp>
+        <p:nvSpPr>
+          <p:cNvPr id="14" name="TextBox 13"/>
+          <p:cNvSpPr txBox="1"/>
+          <p:nvPr/>
+        </p:nvSpPr>
+        <p:spPr>
+          <a:xfrm>
+            <a:off x="1600200" y="2788920"/>
+            <a:ext cx="10000000" cy="304800"/>
+          </a:xfrm>
+          <a:prstGeom prst="rect">
+            <a:avLst/>
+          </a:prstGeom>
+          <a:noFill/>
+        </p:spPr>
+        <p:txBody>
+          <a:bodyPr wrap="square" lIns="0" rIns="0" tIns="0" bIns="0" anchor="t">
+            <a:spAutoFit/>
+          </a:bodyPr>
+          <a:lstStyle/>
+          <a:p>
+            <a:pPr algn="l"/>
+            <a:r>
+              <a:rPr sz="1500" b="1" i="0">
+                <a:solidFill>
+                  <a:srgbClr val="1F3A6B"/>
+                </a:solidFill>
+                <a:latin typeface="Arial"/>
+              </a:rPr>
+              <a:t>RF02 · Perfis</a:t>
+            </a:r>
+          </a:p>
+        </p:txBody>
+      </p:sp>
+      <p:sp>
+        <p:nvSpPr>
+          <p:cNvPr id="15" name="TextBox 14"/>
+          <p:cNvSpPr txBox="1"/>
+          <p:nvPr/>
+        </p:nvSpPr>
+        <p:spPr>
+          <a:xfrm>
+            <a:off x="1600200" y="3108960"/>
+            <a:ext cx="10000000" cy="365760"/>
+          </a:xfrm>
+          <a:prstGeom prst="rect">
+            <a:avLst/>
+          </a:prstGeom>
+          <a:noFill/>
+        </p:spPr>
+        <p:txBody>
+          <a:bodyPr wrap="square" lIns="0" rIns="0" tIns="0" bIns="0" anchor="t">
+            <a:spAutoFit/>
+          </a:bodyPr>
+          <a:lstStyle/>
+          <a:p>
+            <a:pPr algn="l"/>
+            <a:r>
+              <a:rPr sz="1100" b="0" i="0">
+                <a:solidFill>
+                  <a:srgbClr val="4A4A5A"/>
+                </a:solidFill>
+                <a:latin typeface="Arial"/>
+              </a:rPr>
+              <a:t>Consultor, cliente, admin. Acesso semi-aberto materializa o modelo do MPO.</a:t>
+            </a:r>
+          </a:p>
+        </p:txBody>
+      </p:sp>
+      <p:sp>
+        <p:nvSpPr>
+          <p:cNvPr id="16" name="Rectangle 15"/>
+          <p:cNvSpPr/>
+          <p:nvPr/>
+        </p:nvSpPr>
+        <p:spPr>
+          <a:xfrm>
+            <a:off x="685800" y="3566160"/>
+            <a:ext cx="685800" cy="822960"/>
+          </a:xfrm>
+          <a:prstGeom prst="rect">
+            <a:avLst/>
+          </a:prstGeom>
+          <a:solidFill>
+            <a:srgbClr val="E0261E"/>
+          </a:solidFill>
+          <a:ln>
+            <a:noFill/>
+          </a:ln>
+        </p:spPr>
+        <p:style>
+          <a:lnRef idx="1">
+            <a:schemeClr val="accent1"/>
+          </a:lnRef>
+          <a:fillRef idx="3">
+            <a:schemeClr val="accent1"/>
+          </a:fillRef>
+          <a:effectRef idx="2">
+            <a:schemeClr val="accent1"/>
+          </a:effectRef>
+          <a:fontRef idx="minor">
+            <a:schemeClr val="lt1"/>
+          </a:fontRef>
+        </p:style>
+        <p:txBody>
+          <a:bodyPr rtlCol="0" anchor="ctr"/>
+          <a:lstStyle/>
+          <a:p>
+            <a:pPr algn="ctr"/>
+          </a:p>
+        </p:txBody>
+      </p:sp>
+      <p:sp>
+        <p:nvSpPr>
+          <p:cNvPr id="17" name="TextBox 16"/>
+          <p:cNvSpPr txBox="1"/>
+          <p:nvPr/>
+        </p:nvSpPr>
+        <p:spPr>
+          <a:xfrm>
+            <a:off x="685800" y="3566160"/>
+            <a:ext cx="685800" cy="822960"/>
+          </a:xfrm>
+          <a:prstGeom prst="rect">
+            <a:avLst/>
+          </a:prstGeom>
+          <a:noFill/>
+        </p:spPr>
+        <p:txBody>
+          <a:bodyPr wrap="square" lIns="0" rIns="0" tIns="0" bIns="0" anchor="ctr">
+            <a:spAutoFit/>
+          </a:bodyPr>
+          <a:lstStyle/>
+          <a:p>
+            <a:pPr algn="ctr"/>
+            <a:r>
+              <a:rPr sz="2200" b="1" i="0">
+                <a:solidFill>
+                  <a:srgbClr val="FFFFFF"/>
+                </a:solidFill>
+                <a:latin typeface="Arial"/>
+              </a:rPr>
+              <a:t>G3</a:t>
+            </a:r>
+          </a:p>
+        </p:txBody>
+      </p:sp>
+      <p:sp>
+        <p:nvSpPr>
+          <p:cNvPr id="18" name="Rectangle 17"/>
+          <p:cNvSpPr/>
+          <p:nvPr/>
+        </p:nvSpPr>
+        <p:spPr>
+          <a:xfrm>
+            <a:off x="1371600" y="3566160"/>
+            <a:ext cx="10500000" cy="822960"/>
+          </a:xfrm>
+          <a:prstGeom prst="rect">
+            <a:avLst/>
+          </a:prstGeom>
+          <a:solidFill>
+            <a:srgbClr val="F4F4F6"/>
+          </a:solidFill>
+          <a:ln w="9525">
+            <a:solidFill>
+              <a:srgbClr val="D4D4DC"/>
+            </a:solidFill>
+          </a:ln>
+        </p:spPr>
+        <p:style>
+          <a:lnRef idx="1">
+            <a:schemeClr val="accent1"/>
+          </a:lnRef>
+          <a:fillRef idx="3">
+            <a:schemeClr val="accent1"/>
+          </a:fillRef>
+          <a:effectRef idx="2">
+            <a:schemeClr val="accent1"/>
+          </a:effectRef>
+          <a:fontRef idx="minor">
+            <a:schemeClr val="lt1"/>
+          </a:fontRef>
+        </p:style>
+        <p:txBody>
+          <a:bodyPr rtlCol="0" anchor="ctr"/>
+          <a:lstStyle/>
+          <a:p>
+            <a:pPr algn="ctr"/>
+          </a:p>
+        </p:txBody>
+      </p:sp>
+      <p:sp>
+        <p:nvSpPr>
+          <p:cNvPr id="19" name="TextBox 18"/>
+          <p:cNvSpPr txBox="1"/>
+          <p:nvPr/>
+        </p:nvSpPr>
+        <p:spPr>
+          <a:xfrm>
+            <a:off x="1600200" y="3657600"/>
+            <a:ext cx="10000000" cy="304800"/>
+          </a:xfrm>
+          <a:prstGeom prst="rect">
+            <a:avLst/>
+          </a:prstGeom>
+          <a:noFill/>
+        </p:spPr>
+        <p:txBody>
+          <a:bodyPr wrap="square" lIns="0" rIns="0" tIns="0" bIns="0" anchor="t">
+            <a:spAutoFit/>
+          </a:bodyPr>
+          <a:lstStyle/>
+          <a:p>
+            <a:pPr algn="l"/>
+            <a:r>
+              <a:rPr sz="1500" b="1" i="0">
+                <a:solidFill>
+                  <a:srgbClr val="1F3A6B"/>
+                </a:solidFill>
+                <a:latin typeface="Arial"/>
+              </a:rPr>
+              <a:t>RF03 · Cadastro</a:t>
+            </a:r>
+          </a:p>
+        </p:txBody>
+      </p:sp>
+      <p:sp>
+        <p:nvSpPr>
+          <p:cNvPr id="20" name="TextBox 19"/>
+          <p:cNvSpPr txBox="1"/>
+          <p:nvPr/>
+        </p:nvSpPr>
+        <p:spPr>
+          <a:xfrm>
+            <a:off x="1600200" y="3977640"/>
+            <a:ext cx="10000000" cy="365760"/>
+          </a:xfrm>
+          <a:prstGeom prst="rect">
+            <a:avLst/>
+          </a:prstGeom>
+          <a:noFill/>
+        </p:spPr>
+        <p:txBody>
+          <a:bodyPr wrap="square" lIns="0" rIns="0" tIns="0" bIns="0" anchor="t">
+            <a:spAutoFit/>
+          </a:bodyPr>
+          <a:lstStyle/>
+          <a:p>
+            <a:pPr algn="l"/>
+            <a:r>
+              <a:rPr sz="1100" b="0" i="0">
+                <a:solidFill>
+                  <a:srgbClr val="4A4A5A"/>
+                </a:solidFill>
+                <a:latin typeface="Arial"/>
+              </a:rPr>
+              <a:t>Projeto com nome, domínio (legal/health/sports/branding/gastronomy/other), descrição.</a:t>
+            </a:r>
+          </a:p>
+        </p:txBody>
+      </p:sp>
+      <p:sp>
+        <p:nvSpPr>
+          <p:cNvPr id="21" name="Rectangle 20"/>
+          <p:cNvSpPr/>
+          <p:nvPr/>
+        </p:nvSpPr>
+        <p:spPr>
+          <a:xfrm>
+            <a:off x="685800" y="4434840"/>
+            <a:ext cx="685800" cy="822960"/>
+          </a:xfrm>
+          <a:prstGeom prst="rect">
+            <a:avLst/>
+          </a:prstGeom>
+          <a:solidFill>
+            <a:srgbClr val="E0261E"/>
+          </a:solidFill>
+          <a:ln>
+            <a:noFill/>
+          </a:ln>
+        </p:spPr>
+        <p:style>
+          <a:lnRef idx="1">
+            <a:schemeClr val="accent1"/>
+          </a:lnRef>
+          <a:fillRef idx="3">
+            <a:schemeClr val="accent1"/>
+          </a:fillRef>
+          <a:effectRef idx="2">
+            <a:schemeClr val="accent1"/>
+          </a:effectRef>
+          <a:fontRef idx="minor">
+            <a:schemeClr val="lt1"/>
+          </a:fontRef>
+        </p:style>
+        <p:txBody>
+          <a:bodyPr rtlCol="0" anchor="ctr"/>
+          <a:lstStyle/>
+          <a:p>
+            <a:pPr algn="ctr"/>
+          </a:p>
+        </p:txBody>
+      </p:sp>
+      <p:sp>
+        <p:nvSpPr>
+          <p:cNvPr id="22" name="TextBox 21"/>
+          <p:cNvSpPr txBox="1"/>
+          <p:nvPr/>
+        </p:nvSpPr>
+        <p:spPr>
+          <a:xfrm>
+            <a:off x="685800" y="4434840"/>
+            <a:ext cx="685800" cy="822960"/>
+          </a:xfrm>
+          <a:prstGeom prst="rect">
+            <a:avLst/>
+          </a:prstGeom>
+          <a:noFill/>
+        </p:spPr>
+        <p:txBody>
+          <a:bodyPr wrap="square" lIns="0" rIns="0" tIns="0" bIns="0" anchor="ctr">
+            <a:spAutoFit/>
+          </a:bodyPr>
+          <a:lstStyle/>
+          <a:p>
+            <a:pPr algn="ctr"/>
+            <a:r>
+              <a:rPr sz="2200" b="1" i="0">
+                <a:solidFill>
+                  <a:srgbClr val="FFFFFF"/>
+                </a:solidFill>
+                <a:latin typeface="Arial"/>
+              </a:rPr>
+              <a:t>G4</a:t>
+            </a:r>
+          </a:p>
+        </p:txBody>
+      </p:sp>
+      <p:sp>
+        <p:nvSpPr>
+          <p:cNvPr id="23" name="Rectangle 22"/>
+          <p:cNvSpPr/>
+          <p:nvPr/>
+        </p:nvSpPr>
+        <p:spPr>
+          <a:xfrm>
+            <a:off x="1371600" y="4434840"/>
+            <a:ext cx="10500000" cy="822960"/>
+          </a:xfrm>
+          <a:prstGeom prst="rect">
+            <a:avLst/>
+          </a:prstGeom>
+          <a:solidFill>
+            <a:srgbClr val="F4F4F6"/>
+          </a:solidFill>
+          <a:ln w="9525">
+            <a:solidFill>
+              <a:srgbClr val="D4D4DC"/>
+            </a:solidFill>
+          </a:ln>
+        </p:spPr>
+        <p:style>
+          <a:lnRef idx="1">
+            <a:schemeClr val="accent1"/>
+          </a:lnRef>
+          <a:fillRef idx="3">
+            <a:schemeClr val="accent1"/>
+          </a:fillRef>
+          <a:effectRef idx="2">
+            <a:schemeClr val="accent1"/>
+          </a:effectRef>
+          <a:fontRef idx="minor">
+            <a:schemeClr val="lt1"/>
+          </a:fontRef>
+        </p:style>
+        <p:txBody>
+          <a:bodyPr rtlCol="0" anchor="ctr"/>
+          <a:lstStyle/>
+          <a:p>
+            <a:pPr algn="ctr"/>
+          </a:p>
+        </p:txBody>
+      </p:sp>
+      <p:sp>
+        <p:nvSpPr>
+          <p:cNvPr id="24" name="TextBox 23"/>
+          <p:cNvSpPr txBox="1"/>
+          <p:nvPr/>
+        </p:nvSpPr>
+        <p:spPr>
+          <a:xfrm>
+            <a:off x="1600200" y="4526280"/>
+            <a:ext cx="10000000" cy="304800"/>
+          </a:xfrm>
+          <a:prstGeom prst="rect">
+            <a:avLst/>
+          </a:prstGeom>
+          <a:noFill/>
+        </p:spPr>
+        <p:txBody>
+          <a:bodyPr wrap="square" lIns="0" rIns="0" tIns="0" bIns="0" anchor="t">
+            <a:spAutoFit/>
+          </a:bodyPr>
+          <a:lstStyle/>
+          <a:p>
+            <a:pPr algn="l"/>
+            <a:r>
+              <a:rPr sz="1500" b="1" i="0">
+                <a:solidFill>
+                  <a:srgbClr val="1F3A6B"/>
+                </a:solidFill>
+                <a:latin typeface="Arial"/>
+              </a:rPr>
+              <a:t>RF04 · Upload .docx</a:t>
+            </a:r>
+          </a:p>
+        </p:txBody>
+      </p:sp>
+      <p:sp>
+        <p:nvSpPr>
+          <p:cNvPr id="25" name="TextBox 24"/>
+          <p:cNvSpPr txBox="1"/>
+          <p:nvPr/>
+        </p:nvSpPr>
+        <p:spPr>
+          <a:xfrm>
+            <a:off x="1600200" y="4846320"/>
+            <a:ext cx="10000000" cy="365760"/>
+          </a:xfrm>
+          <a:prstGeom prst="rect">
+            <a:avLst/>
+          </a:prstGeom>
+          <a:noFill/>
+        </p:spPr>
+        <p:txBody>
+          <a:bodyPr wrap="square" lIns="0" rIns="0" tIns="0" bIns="0" anchor="t">
+            <a:spAutoFit/>
+          </a:bodyPr>
+          <a:lstStyle/>
+          <a:p>
+            <a:pPr algn="l"/>
+            <a:r>
+              <a:rPr sz="1100" b="0" i="0">
+                <a:solidFill>
+                  <a:srgbClr val="4A4A5A"/>
+                </a:solidFill>
+                <a:latin typeface="Arial"/>
+              </a:rPr>
+              <a:t>Multipart com validação MIME + sha256 + limite de 50 MB. Rejeita duplicatas.</a:t>
+            </a:r>
+          </a:p>
+        </p:txBody>
+      </p:sp>
+      <p:sp>
+        <p:nvSpPr>
+          <p:cNvPr id="26" name="Rectangle 25"/>
+          <p:cNvSpPr/>
+          <p:nvPr/>
+        </p:nvSpPr>
+        <p:spPr>
+          <a:xfrm>
+            <a:off x="685800" y="5303520"/>
+            <a:ext cx="685800" cy="822960"/>
+          </a:xfrm>
+          <a:prstGeom prst="rect">
+            <a:avLst/>
+          </a:prstGeom>
+          <a:solidFill>
+            <a:srgbClr val="E0261E"/>
+          </a:solidFill>
+          <a:ln>
+            <a:noFill/>
+          </a:ln>
+        </p:spPr>
+        <p:style>
+          <a:lnRef idx="1">
+            <a:schemeClr val="accent1"/>
+          </a:lnRef>
+          <a:fillRef idx="3">
+            <a:schemeClr val="accent1"/>
+          </a:fillRef>
+          <a:effectRef idx="2">
+            <a:schemeClr val="accent1"/>
+          </a:effectRef>
+          <a:fontRef idx="minor">
+            <a:schemeClr val="lt1"/>
+          </a:fontRef>
+        </p:style>
+        <p:txBody>
+          <a:bodyPr rtlCol="0" anchor="ctr"/>
+          <a:lstStyle/>
+          <a:p>
+            <a:pPr algn="ctr"/>
+          </a:p>
+        </p:txBody>
+      </p:sp>
+      <p:sp>
+        <p:nvSpPr>
+          <p:cNvPr id="27" name="TextBox 26"/>
+          <p:cNvSpPr txBox="1"/>
+          <p:nvPr/>
+        </p:nvSpPr>
+        <p:spPr>
+          <a:xfrm>
+            <a:off x="685800" y="5303520"/>
+            <a:ext cx="685800" cy="822960"/>
+          </a:xfrm>
+          <a:prstGeom prst="rect">
+            <a:avLst/>
+          </a:prstGeom>
+          <a:noFill/>
+        </p:spPr>
+        <p:txBody>
+          <a:bodyPr wrap="square" lIns="0" rIns="0" tIns="0" bIns="0" anchor="ctr">
+            <a:spAutoFit/>
+          </a:bodyPr>
+          <a:lstStyle/>
+          <a:p>
+            <a:pPr algn="ctr"/>
+            <a:r>
+              <a:rPr sz="2200" b="1" i="0">
+                <a:solidFill>
+                  <a:srgbClr val="FFFFFF"/>
+                </a:solidFill>
+                <a:latin typeface="Arial"/>
+              </a:rPr>
+              <a:t>G5</a:t>
+            </a:r>
+          </a:p>
+        </p:txBody>
+      </p:sp>
+      <p:sp>
+        <p:nvSpPr>
+          <p:cNvPr id="28" name="Rectangle 27"/>
+          <p:cNvSpPr/>
+          <p:nvPr/>
+        </p:nvSpPr>
+        <p:spPr>
+          <a:xfrm>
+            <a:off x="1371600" y="5303520"/>
+            <a:ext cx="10500000" cy="822960"/>
+          </a:xfrm>
+          <a:prstGeom prst="rect">
+            <a:avLst/>
+          </a:prstGeom>
+          <a:solidFill>
+            <a:srgbClr val="F4F4F6"/>
+          </a:solidFill>
+          <a:ln w="9525">
+            <a:solidFill>
+              <a:srgbClr val="D4D4DC"/>
+            </a:solidFill>
+          </a:ln>
+        </p:spPr>
+        <p:style>
+          <a:lnRef idx="1">
+            <a:schemeClr val="accent1"/>
+          </a:lnRef>
+          <a:fillRef idx="3">
+            <a:schemeClr val="accent1"/>
+          </a:fillRef>
+          <a:effectRef idx="2">
+            <a:schemeClr val="accent1"/>
+          </a:effectRef>
+          <a:fontRef idx="minor">
+            <a:schemeClr val="lt1"/>
+          </a:fontRef>
+        </p:style>
+        <p:txBody>
+          <a:bodyPr rtlCol="0" anchor="ctr"/>
+          <a:lstStyle/>
+          <a:p>
+            <a:pPr algn="ctr"/>
+          </a:p>
+        </p:txBody>
+      </p:sp>
+      <p:sp>
+        <p:nvSpPr>
+          <p:cNvPr id="29" name="TextBox 28"/>
+          <p:cNvSpPr txBox="1"/>
+          <p:nvPr/>
+        </p:nvSpPr>
+        <p:spPr>
+          <a:xfrm>
+            <a:off x="1600200" y="5394960"/>
+            <a:ext cx="10000000" cy="304800"/>
+          </a:xfrm>
+          <a:prstGeom prst="rect">
+            <a:avLst/>
+          </a:prstGeom>
+          <a:noFill/>
+        </p:spPr>
+        <p:txBody>
+          <a:bodyPr wrap="square" lIns="0" rIns="0" tIns="0" bIns="0" anchor="t">
+            <a:spAutoFit/>
+          </a:bodyPr>
+          <a:lstStyle/>
+          <a:p>
+            <a:pPr algn="l"/>
+            <a:r>
+              <a:rPr sz="1500" b="1" i="0">
+                <a:solidFill>
+                  <a:srgbClr val="1F3A6B"/>
+                </a:solidFill>
+                <a:latin typeface="Arial"/>
+              </a:rPr>
+              <a:t>RF05 + RF06 · Extração</a:t>
+            </a:r>
+          </a:p>
+        </p:txBody>
+      </p:sp>
+      <p:sp>
+        <p:nvSpPr>
+          <p:cNvPr id="30" name="TextBox 29"/>
+          <p:cNvSpPr txBox="1"/>
+          <p:nvPr/>
+        </p:nvSpPr>
+        <p:spPr>
+          <a:xfrm>
+            <a:off x="1600200" y="5715000"/>
+            <a:ext cx="10000000" cy="365760"/>
+          </a:xfrm>
+          <a:prstGeom prst="rect">
+            <a:avLst/>
+          </a:prstGeom>
+          <a:noFill/>
+        </p:spPr>
+        <p:txBody>
+          <a:bodyPr wrap="square" lIns="0" rIns="0" tIns="0" bIns="0" anchor="t">
+            <a:spAutoFit/>
+          </a:bodyPr>
+          <a:lstStyle/>
+          <a:p>
+            <a:pPr algn="l"/>
+            <a:r>
+              <a:rPr sz="1100" b="0" i="0">
+                <a:solidFill>
+                  <a:srgbClr val="4A4A5A"/>
+                </a:solidFill>
+                <a:latin typeface="Arial"/>
+              </a:rPr>
+              <a:t>44 atributos do Quadro 37 via LLM. Persistência com prompt + modelo registrados.</a:t>
+            </a:r>
+          </a:p>
+        </p:txBody>
+      </p:sp>
+      <p:sp>
+        <p:nvSpPr>
+          <p:cNvPr id="31" name="Rectangle 30"/>
+          <p:cNvSpPr/>
+          <p:nvPr/>
+        </p:nvSpPr>
+        <p:spPr>
+          <a:xfrm>
+            <a:off x="457200" y="6400800"/>
+            <a:ext cx="11277600" cy="15240"/>
+          </a:xfrm>
+          <a:prstGeom prst="rect">
+            <a:avLst/>
+          </a:prstGeom>
+          <a:solidFill>
+            <a:srgbClr val="E0261E"/>
+          </a:solidFill>
+          <a:ln>
+            <a:noFill/>
+          </a:ln>
+        </p:spPr>
+        <p:style>
+          <a:lnRef idx="1">
+            <a:schemeClr val="accent1"/>
+          </a:lnRef>
+          <a:fillRef idx="3">
+            <a:schemeClr val="accent1"/>
+          </a:fillRef>
+          <a:effectRef idx="2">
+            <a:schemeClr val="accent1"/>
+          </a:effectRef>
+          <a:fontRef idx="minor">
+            <a:schemeClr val="lt1"/>
+          </a:fontRef>
+        </p:style>
+        <p:txBody>
+          <a:bodyPr rtlCol="0" anchor="ctr"/>
+          <a:lstStyle/>
+          <a:p>
+            <a:pPr algn="ctr"/>
+          </a:p>
+        </p:txBody>
+      </p:sp>
+      <p:sp>
+        <p:nvSpPr>
+          <p:cNvPr id="32" name="Rectangle 31"/>
+          <p:cNvSpPr/>
+          <p:nvPr/>
+        </p:nvSpPr>
+        <p:spPr>
+          <a:xfrm>
+            <a:off x="457200" y="6400800"/>
+            <a:ext cx="11277600" cy="15240"/>
+          </a:xfrm>
+          <a:prstGeom prst="rect">
+            <a:avLst/>
+          </a:prstGeom>
+          <a:solidFill>
+            <a:srgbClr val="E0261E"/>
+          </a:solidFill>
+          <a:ln>
+            <a:noFill/>
+          </a:ln>
+        </p:spPr>
+        <p:style>
+          <a:lnRef idx="1">
+            <a:schemeClr val="accent1"/>
+          </a:lnRef>
+          <a:fillRef idx="3">
+            <a:schemeClr val="accent1"/>
+          </a:fillRef>
+          <a:effectRef idx="2">
+            <a:schemeClr val="accent1"/>
+          </a:effectRef>
+          <a:fontRef idx="minor">
+            <a:schemeClr val="lt1"/>
+          </a:fontRef>
+        </p:style>
+        <p:txBody>
+          <a:bodyPr rtlCol="0" anchor="ctr"/>
+          <a:lstStyle/>
+          <a:p>
+            <a:pPr algn="ctr"/>
+          </a:p>
+        </p:txBody>
+      </p:sp>
+      <p:sp>
+        <p:nvSpPr>
+          <p:cNvPr id="33" name="Rectangle 32"/>
+          <p:cNvSpPr/>
+          <p:nvPr/>
+        </p:nvSpPr>
+        <p:spPr>
+          <a:xfrm>
+            <a:off x="457200" y="6400800"/>
+            <a:ext cx="11277600" cy="15240"/>
+          </a:xfrm>
+          <a:prstGeom prst="rect">
+            <a:avLst/>
+          </a:prstGeom>
+          <a:solidFill>
+            <a:srgbClr val="E0261E"/>
+          </a:solidFill>
+          <a:ln>
+            <a:noFill/>
+          </a:ln>
+        </p:spPr>
+        <p:style>
+          <a:lnRef idx="1">
+            <a:schemeClr val="accent1"/>
+          </a:lnRef>
+          <a:fillRef idx="3">
+            <a:schemeClr val="accent1"/>
+          </a:fillRef>
+          <a:effectRef idx="2">
+            <a:schemeClr val="accent1"/>
+          </a:effectRef>
+          <a:fontRef idx="minor">
+            <a:schemeClr val="lt1"/>
+          </a:fontRef>
+        </p:style>
+        <p:txBody>
+          <a:bodyPr rtlCol="0" anchor="ctr"/>
+          <a:lstStyle/>
+          <a:p>
+            <a:pPr algn="ctr"/>
+          </a:p>
+        </p:txBody>
+      </p:sp>
+      <p:sp>
+        <p:nvSpPr>
+          <p:cNvPr id="34" name="TextBox 33"/>
+          <p:cNvSpPr txBox="1"/>
+          <p:nvPr/>
+        </p:nvSpPr>
+        <p:spPr>
+          <a:xfrm>
+            <a:off x="457200" y="6492240"/>
+            <a:ext cx="8000000" cy="228600"/>
+          </a:xfrm>
+          <a:prstGeom prst="rect">
+            <a:avLst/>
+          </a:prstGeom>
+          <a:noFill/>
+        </p:spPr>
+        <p:txBody>
+          <a:bodyPr wrap="square" lIns="0" rIns="0" tIns="0" bIns="0" anchor="t">
+            <a:spAutoFit/>
+          </a:bodyPr>
+          <a:lstStyle/>
+          <a:p>
+            <a:pPr algn="l"/>
+            <a:r>
+              <a:rPr sz="900" b="0" i="0">
+                <a:solidFill>
+                  <a:srgbClr val="6B6B7A"/>
+                </a:solidFill>
+                <a:latin typeface="Arial"/>
+              </a:rPr>
+              <a:t>Equipe ObiOne · UPE/POLI · Maio 2026</a:t>
+            </a:r>
+          </a:p>
+        </p:txBody>
+      </p:sp>
+      <p:sp>
+        <p:nvSpPr>
+          <p:cNvPr id="35" name="TextBox 34"/>
+          <p:cNvSpPr txBox="1"/>
+          <p:nvPr/>
+        </p:nvSpPr>
+        <p:spPr>
+          <a:xfrm>
+            <a:off x="11000000" y="6492240"/>
+            <a:ext cx="1000000" cy="228600"/>
+          </a:xfrm>
+          <a:prstGeom prst="rect">
+            <a:avLst/>
+          </a:prstGeom>
+          <a:noFill/>
+        </p:spPr>
+        <p:txBody>
+          <a:bodyPr wrap="square" lIns="0" rIns="0" tIns="0" bIns="0" anchor="t">
+            <a:spAutoFit/>
+          </a:bodyPr>
+          <a:lstStyle/>
+          <a:p>
+            <a:pPr algn="r"/>
+            <a:r>
+              <a:rPr sz="900" b="0" i="0">
+                <a:solidFill>
+                  <a:srgbClr val="6B6B7A"/>
+                </a:solidFill>
+                <a:latin typeface="Arial"/>
+              </a:rPr>
+              <a:t>6 / 12</a:t>
+            </a:r>
+          </a:p>
+        </p:txBody>
+      </p:sp>
+      <p:pic>
+        <p:nvPicPr>
+          <p:cNvPr id="36" name="Picture 35" descr="image.png"/>
           <p:cNvPicPr>
             <a:picLocks noChangeAspect="1"/>
           </p:cNvPicPr>

--- a/atividades/apresentacoes/sr1_2026-05-22.pptx
+++ b/atividades/apresentacoes/sr1_2026-05-22.pptx
@@ -116,1674 +116,6 @@
     </a:lvl9pPr>
   </p:defaultTextStyle>
 </p:presentation>
-</file>
-
-<file path=ppt/notesMasters/notesMaster1.xml><?xml version="1.0" encoding="utf-8"?>
-<p:notesMaster xmlns:a="http://schemas.openxmlformats.org/drawingml/2006/main" xmlns:p="http://schemas.openxmlformats.org/presentationml/2006/main" xmlns:r="http://schemas.openxmlformats.org/officeDocument/2006/relationships">
-  <p:cSld>
-    <p:bg>
-      <p:bgRef idx="1001">
-        <a:schemeClr val="bg1"/>
-      </p:bgRef>
-    </p:bg>
-    <p:spTree>
-      <p:nvGrpSpPr>
-        <p:cNvPr id="1" name=""/>
-        <p:cNvGrpSpPr/>
-        <p:nvPr/>
-      </p:nvGrpSpPr>
-      <p:grpSpPr>
-        <a:xfrm>
-          <a:off x="0" y="0"/>
-          <a:ext cx="0" cy="0"/>
-          <a:chOff x="0" y="0"/>
-          <a:chExt cx="0" cy="0"/>
-        </a:xfrm>
-      </p:grpSpPr>
-      <p:sp>
-        <p:nvSpPr>
-          <p:cNvPr id="2" name="Header Placeholder 1"/>
-          <p:cNvSpPr>
-            <a:spLocks noGrp="1"/>
-          </p:cNvSpPr>
-          <p:nvPr>
-            <p:ph type="hdr" sz="quarter"/>
-          </p:nvPr>
-        </p:nvSpPr>
-        <p:spPr>
-          <a:xfrm>
-            <a:off x="0" y="0"/>
-            <a:ext cx="2971800" cy="457200"/>
-          </a:xfrm>
-          <a:prstGeom prst="rect">
-            <a:avLst/>
-          </a:prstGeom>
-        </p:spPr>
-        <p:txBody>
-          <a:bodyPr vert="horz" lIns="91440" tIns="45720" rIns="91440" bIns="45720" rtlCol="0"/>
-          <a:lstStyle>
-            <a:lvl1pPr algn="l">
-              <a:defRPr sz="1200"/>
-            </a:lvl1pPr>
-          </a:lstStyle>
-          <a:p>
-            <a:endParaRPr lang="en-US"/>
-          </a:p>
-        </p:txBody>
-      </p:sp>
-      <p:sp>
-        <p:nvSpPr>
-          <p:cNvPr id="3" name="Date Placeholder 2"/>
-          <p:cNvSpPr>
-            <a:spLocks noGrp="1"/>
-          </p:cNvSpPr>
-          <p:nvPr>
-            <p:ph type="dt" idx="1"/>
-          </p:nvPr>
-        </p:nvSpPr>
-        <p:spPr>
-          <a:xfrm>
-            <a:off x="3884613" y="0"/>
-            <a:ext cx="2971800" cy="457200"/>
-          </a:xfrm>
-          <a:prstGeom prst="rect">
-            <a:avLst/>
-          </a:prstGeom>
-        </p:spPr>
-        <p:txBody>
-          <a:bodyPr vert="horz" lIns="91440" tIns="45720" rIns="91440" bIns="45720" rtlCol="0"/>
-          <a:lstStyle>
-            <a:lvl1pPr algn="r">
-              <a:defRPr sz="1200"/>
-            </a:lvl1pPr>
-          </a:lstStyle>
-          <a:p>
-            <a:fld id="{0F89C1C7-3DCD-1040-A9CF-14679D8B5DDD}" type="datetimeFigureOut">
-              <a:rPr lang="en-US" smtClean="0"/>
-              <a:t>10/17/16</a:t>
-            </a:fld>
-            <a:endParaRPr lang="en-US"/>
-          </a:p>
-        </p:txBody>
-      </p:sp>
-      <p:sp>
-        <p:nvSpPr>
-          <p:cNvPr id="4" name="Slide Image Placeholder 3"/>
-          <p:cNvSpPr>
-            <a:spLocks noGrp="1" noRot="1" noChangeAspect="1"/>
-          </p:cNvSpPr>
-          <p:nvPr>
-            <p:ph type="sldImg" idx="2"/>
-          </p:nvPr>
-        </p:nvSpPr>
-        <p:spPr>
-          <a:xfrm>
-            <a:off x="1143000" y="685800"/>
-            <a:ext cx="4572000" cy="3429000"/>
-          </a:xfrm>
-          <a:prstGeom prst="rect">
-            <a:avLst/>
-          </a:prstGeom>
-          <a:noFill/>
-          <a:ln w="12700">
-            <a:solidFill>
-              <a:prstClr val="black"/>
-            </a:solidFill>
-          </a:ln>
-        </p:spPr>
-        <p:txBody>
-          <a:bodyPr vert="horz" lIns="91440" tIns="45720" rIns="91440" bIns="45720" rtlCol="0" anchor="ctr"/>
-          <a:lstStyle/>
-          <a:p>
-            <a:endParaRPr lang="en-US"/>
-          </a:p>
-        </p:txBody>
-      </p:sp>
-      <p:sp>
-        <p:nvSpPr>
-          <p:cNvPr id="5" name="Notes Placeholder 4"/>
-          <p:cNvSpPr>
-            <a:spLocks noGrp="1"/>
-          </p:cNvSpPr>
-          <p:nvPr>
-            <p:ph type="body" sz="quarter" idx="3"/>
-          </p:nvPr>
-        </p:nvSpPr>
-        <p:spPr>
-          <a:xfrm>
-            <a:off x="685800" y="4343400"/>
-            <a:ext cx="5486400" cy="4114800"/>
-          </a:xfrm>
-          <a:prstGeom prst="rect">
-            <a:avLst/>
-          </a:prstGeom>
-        </p:spPr>
-        <p:txBody>
-          <a:bodyPr vert="horz" lIns="91440" tIns="45720" rIns="91440" bIns="45720" rtlCol="0"/>
-          <a:lstStyle/>
-          <a:p>
-            <a:pPr lvl="0"/>
-            <a:r>
-              <a:rPr lang="en-US" smtClean="0"/>
-              <a:t>Click to edit Master text styles</a:t>
-            </a:r>
-          </a:p>
-          <a:p>
-            <a:pPr lvl="1"/>
-            <a:r>
-              <a:rPr lang="en-US" smtClean="0"/>
-              <a:t>Second level</a:t>
-            </a:r>
-          </a:p>
-          <a:p>
-            <a:pPr lvl="2"/>
-            <a:r>
-              <a:rPr lang="en-US" smtClean="0"/>
-              <a:t>Third level</a:t>
-            </a:r>
-          </a:p>
-          <a:p>
-            <a:pPr lvl="3"/>
-            <a:r>
-              <a:rPr lang="en-US" smtClean="0"/>
-              <a:t>Fourth level</a:t>
-            </a:r>
-          </a:p>
-          <a:p>
-            <a:pPr lvl="4"/>
-            <a:r>
-              <a:rPr lang="en-US" smtClean="0"/>
-              <a:t>Fifth level</a:t>
-            </a:r>
-            <a:endParaRPr lang="en-US"/>
-          </a:p>
-        </p:txBody>
-      </p:sp>
-      <p:sp>
-        <p:nvSpPr>
-          <p:cNvPr id="6" name="Footer Placeholder 5"/>
-          <p:cNvSpPr>
-            <a:spLocks noGrp="1"/>
-          </p:cNvSpPr>
-          <p:nvPr>
-            <p:ph type="ftr" sz="quarter" idx="4"/>
-          </p:nvPr>
-        </p:nvSpPr>
-        <p:spPr>
-          <a:xfrm>
-            <a:off x="0" y="8685213"/>
-            <a:ext cx="2971800" cy="457200"/>
-          </a:xfrm>
-          <a:prstGeom prst="rect">
-            <a:avLst/>
-          </a:prstGeom>
-        </p:spPr>
-        <p:txBody>
-          <a:bodyPr vert="horz" lIns="91440" tIns="45720" rIns="91440" bIns="45720" rtlCol="0" anchor="b"/>
-          <a:lstStyle>
-            <a:lvl1pPr algn="l">
-              <a:defRPr sz="1200"/>
-            </a:lvl1pPr>
-          </a:lstStyle>
-          <a:p>
-            <a:endParaRPr lang="en-US"/>
-          </a:p>
-        </p:txBody>
-      </p:sp>
-      <p:sp>
-        <p:nvSpPr>
-          <p:cNvPr id="7" name="Slide Number Placeholder 6"/>
-          <p:cNvSpPr>
-            <a:spLocks noGrp="1"/>
-          </p:cNvSpPr>
-          <p:nvPr>
-            <p:ph type="sldNum" sz="quarter" idx="5"/>
-          </p:nvPr>
-        </p:nvSpPr>
-        <p:spPr>
-          <a:xfrm>
-            <a:off x="3884613" y="8685213"/>
-            <a:ext cx="2971800" cy="457200"/>
-          </a:xfrm>
-          <a:prstGeom prst="rect">
-            <a:avLst/>
-          </a:prstGeom>
-        </p:spPr>
-        <p:txBody>
-          <a:bodyPr vert="horz" lIns="91440" tIns="45720" rIns="91440" bIns="45720" rtlCol="0" anchor="b"/>
-          <a:lstStyle>
-            <a:lvl1pPr algn="r">
-              <a:defRPr sz="1200"/>
-            </a:lvl1pPr>
-          </a:lstStyle>
-          <a:p>
-            <a:fld id="{BB5E49A5-4136-284D-997B-48E1D791AD67}" type="slidenum">
-              <a:rPr lang="en-US" smtClean="0"/>
-              <a:t>‹#›</a:t>
-            </a:fld>
-            <a:endParaRPr lang="en-US"/>
-          </a:p>
-        </p:txBody>
-      </p:sp>
-    </p:spTree>
-    <p:extLst>
-      <p:ext uri="{BB962C8B-B14F-4D97-AF65-F5344CB8AC3E}">
-        <p14:creationId xmlns:p14="http://schemas.microsoft.com/office/powerpoint/2010/main" val="2623252185"/>
-      </p:ext>
-    </p:extLst>
-  </p:cSld>
-  <p:clrMap bg1="lt1" tx1="dk1" bg2="lt2" tx2="dk2" accent1="accent1" accent2="accent2" accent3="accent3" accent4="accent4" accent5="accent5" accent6="accent6" hlink="hlink" folHlink="folHlink"/>
-  <p:notesStyle>
-    <a:lvl1pPr marL="0" algn="l" defTabSz="457200" rtl="0" eaLnBrk="1" latinLnBrk="0" hangingPunct="1">
-      <a:defRPr sz="1200" kern="1200">
-        <a:solidFill>
-          <a:schemeClr val="tx1"/>
-        </a:solidFill>
-        <a:latin typeface="+mn-lt"/>
-        <a:ea typeface="+mn-ea"/>
-        <a:cs typeface="+mn-cs"/>
-      </a:defRPr>
-    </a:lvl1pPr>
-    <a:lvl2pPr marL="457200" algn="l" defTabSz="457200" rtl="0" eaLnBrk="1" latinLnBrk="0" hangingPunct="1">
-      <a:defRPr sz="1200" kern="1200">
-        <a:solidFill>
-          <a:schemeClr val="tx1"/>
-        </a:solidFill>
-        <a:latin typeface="+mn-lt"/>
-        <a:ea typeface="+mn-ea"/>
-        <a:cs typeface="+mn-cs"/>
-      </a:defRPr>
-    </a:lvl2pPr>
-    <a:lvl3pPr marL="914400" algn="l" defTabSz="457200" rtl="0" eaLnBrk="1" latinLnBrk="0" hangingPunct="1">
-      <a:defRPr sz="1200" kern="1200">
-        <a:solidFill>
-          <a:schemeClr val="tx1"/>
-        </a:solidFill>
-        <a:latin typeface="+mn-lt"/>
-        <a:ea typeface="+mn-ea"/>
-        <a:cs typeface="+mn-cs"/>
-      </a:defRPr>
-    </a:lvl3pPr>
-    <a:lvl4pPr marL="1371600" algn="l" defTabSz="457200" rtl="0" eaLnBrk="1" latinLnBrk="0" hangingPunct="1">
-      <a:defRPr sz="1200" kern="1200">
-        <a:solidFill>
-          <a:schemeClr val="tx1"/>
-        </a:solidFill>
-        <a:latin typeface="+mn-lt"/>
-        <a:ea typeface="+mn-ea"/>
-        <a:cs typeface="+mn-cs"/>
-      </a:defRPr>
-    </a:lvl4pPr>
-    <a:lvl5pPr marL="1828800" algn="l" defTabSz="457200" rtl="0" eaLnBrk="1" latinLnBrk="0" hangingPunct="1">
-      <a:defRPr sz="1200" kern="1200">
-        <a:solidFill>
-          <a:schemeClr val="tx1"/>
-        </a:solidFill>
-        <a:latin typeface="+mn-lt"/>
-        <a:ea typeface="+mn-ea"/>
-        <a:cs typeface="+mn-cs"/>
-      </a:defRPr>
-    </a:lvl5pPr>
-    <a:lvl6pPr marL="2286000" algn="l" defTabSz="457200" rtl="0" eaLnBrk="1" latinLnBrk="0" hangingPunct="1">
-      <a:defRPr sz="1200" kern="1200">
-        <a:solidFill>
-          <a:schemeClr val="tx1"/>
-        </a:solidFill>
-        <a:latin typeface="+mn-lt"/>
-        <a:ea typeface="+mn-ea"/>
-        <a:cs typeface="+mn-cs"/>
-      </a:defRPr>
-    </a:lvl6pPr>
-    <a:lvl7pPr marL="2743200" algn="l" defTabSz="457200" rtl="0" eaLnBrk="1" latinLnBrk="0" hangingPunct="1">
-      <a:defRPr sz="1200" kern="1200">
-        <a:solidFill>
-          <a:schemeClr val="tx1"/>
-        </a:solidFill>
-        <a:latin typeface="+mn-lt"/>
-        <a:ea typeface="+mn-ea"/>
-        <a:cs typeface="+mn-cs"/>
-      </a:defRPr>
-    </a:lvl7pPr>
-    <a:lvl8pPr marL="3200400" algn="l" defTabSz="457200" rtl="0" eaLnBrk="1" latinLnBrk="0" hangingPunct="1">
-      <a:defRPr sz="1200" kern="1200">
-        <a:solidFill>
-          <a:schemeClr val="tx1"/>
-        </a:solidFill>
-        <a:latin typeface="+mn-lt"/>
-        <a:ea typeface="+mn-ea"/>
-        <a:cs typeface="+mn-cs"/>
-      </a:defRPr>
-    </a:lvl8pPr>
-    <a:lvl9pPr marL="3657600" algn="l" defTabSz="457200" rtl="0" eaLnBrk="1" latinLnBrk="0" hangingPunct="1">
-      <a:defRPr sz="1200" kern="1200">
-        <a:solidFill>
-          <a:schemeClr val="tx1"/>
-        </a:solidFill>
-        <a:latin typeface="+mn-lt"/>
-        <a:ea typeface="+mn-ea"/>
-        <a:cs typeface="+mn-cs"/>
-      </a:defRPr>
-    </a:lvl9pPr>
-  </p:notesStyle>
-</p:notesMaster>
-</file>
-
-<file path=ppt/notesSlides/notesSlide1.xml><?xml version="1.0" encoding="utf-8"?>
-<p:notes xmlns:a="http://schemas.openxmlformats.org/drawingml/2006/main" xmlns:p="http://schemas.openxmlformats.org/presentationml/2006/main" xmlns:r="http://schemas.openxmlformats.org/officeDocument/2006/relationships">
-  <p:cSld>
-    <p:spTree>
-      <p:nvGrpSpPr>
-        <p:cNvPr id="1" name=""/>
-        <p:cNvGrpSpPr/>
-        <p:nvPr/>
-      </p:nvGrpSpPr>
-      <p:grpSpPr>
-        <a:xfrm>
-          <a:off x="0" y="0"/>
-          <a:ext cx="0" cy="0"/>
-          <a:chOff x="0" y="0"/>
-          <a:chExt cx="0" cy="0"/>
-        </a:xfrm>
-      </p:grpSpPr>
-      <p:sp>
-        <p:nvSpPr>
-          <p:cNvPr id="2" name="Slide Image Placeholder 1"/>
-          <p:cNvSpPr>
-            <a:spLocks noGrp="1"/>
-          </p:cNvSpPr>
-          <p:nvPr>
-            <p:ph type="sldImg" idx="2"/>
-          </p:nvPr>
-        </p:nvSpPr>
-        <p:spPr/>
-      </p:sp>
-      <p:sp>
-        <p:nvSpPr>
-          <p:cNvPr id="3" name="Notes Placeholder 2"/>
-          <p:cNvSpPr>
-            <a:spLocks noGrp="1"/>
-          </p:cNvSpPr>
-          <p:nvPr>
-            <p:ph type="body" idx="3" sz="quarter"/>
-          </p:nvPr>
-        </p:nvSpPr>
-        <p:spPr/>
-        <p:txBody>
-          <a:bodyPr/>
-          <a:lstStyle/>
-          <a:p>
-            <a:r>
-              <a:t>[Tempo: ~30s]</a:t>
-            </a:r>
-          </a:p>
-          <a:p/>
-          <a:p>
-            <a:r>
-              <a:t>Saudação inicial. Apresentar o grupo e a cadeira:</a:t>
-            </a:r>
-          </a:p>
-          <a:p>
-            <a:r>
-              <a:t>"Somos Bruno, Cynthia, Moisés e Raniel, do grupo ObiOne, da cadeira Tópicos Avançados em Engenharia de Software, do prof. Ivaldir."</a:t>
-            </a:r>
-          </a:p>
-          <a:p/>
-          <a:p>
-            <a:r>
-              <a:t>Gancho: "Esse é o nosso Status Report 1. Vamos te mostrar o que é o ObiOne, o que vamos entregar até 10/07, e onde estamos agora — e adianto: estamos bem mais à frente do que o cronograma original previa."</a:t>
-            </a:r>
-          </a:p>
-        </p:txBody>
-      </p:sp>
-      <p:sp>
-        <p:nvSpPr>
-          <p:cNvPr id="4" name="Slide Number Placeholder 3"/>
-          <p:cNvSpPr>
-            <a:spLocks noGrp="1"/>
-          </p:cNvSpPr>
-          <p:nvPr>
-            <p:ph type="sldNum" idx="5" sz="quarter"/>
-          </p:nvPr>
-        </p:nvSpPr>
-        <p:spPr/>
-      </p:sp>
-    </p:spTree>
-  </p:cSld>
-  <p:clrMapOvr>
-    <a:masterClrMapping/>
-  </p:clrMapOvr>
-</p:notes>
-</file>
-
-<file path=ppt/notesSlides/notesSlide10.xml><?xml version="1.0" encoding="utf-8"?>
-<p:notes xmlns:a="http://schemas.openxmlformats.org/drawingml/2006/main" xmlns:p="http://schemas.openxmlformats.org/presentationml/2006/main" xmlns:r="http://schemas.openxmlformats.org/officeDocument/2006/relationships">
-  <p:cSld>
-    <p:spTree>
-      <p:nvGrpSpPr>
-        <p:cNvPr id="1" name=""/>
-        <p:cNvGrpSpPr/>
-        <p:nvPr/>
-      </p:nvGrpSpPr>
-      <p:grpSpPr>
-        <a:xfrm>
-          <a:off x="0" y="0"/>
-          <a:ext cx="0" cy="0"/>
-          <a:chOff x="0" y="0"/>
-          <a:chExt cx="0" cy="0"/>
-        </a:xfrm>
-      </p:grpSpPr>
-      <p:sp>
-        <p:nvSpPr>
-          <p:cNvPr id="2" name="Slide Image Placeholder 1"/>
-          <p:cNvSpPr>
-            <a:spLocks noGrp="1"/>
-          </p:cNvSpPr>
-          <p:nvPr>
-            <p:ph type="sldImg" idx="2"/>
-          </p:nvPr>
-        </p:nvSpPr>
-        <p:spPr/>
-      </p:sp>
-      <p:sp>
-        <p:nvSpPr>
-          <p:cNvPr id="3" name="Notes Placeholder 2"/>
-          <p:cNvSpPr>
-            <a:spLocks noGrp="1"/>
-          </p:cNvSpPr>
-          <p:nvPr>
-            <p:ph type="body" idx="3" sz="quarter"/>
-          </p:nvPr>
-        </p:nvSpPr>
-        <p:spPr/>
-        <p:txBody>
-          <a:bodyPr/>
-          <a:lstStyle/>
-          <a:p>
-            <a:r>
-              <a:t>[Tempo: ~1.5min]</a:t>
-            </a:r>
-          </a:p>
-          <a:p/>
-          <a:p>
-            <a:r>
-              <a:t>"São 9 semanas até 10/07, divididas em 4 marcos. Mas atenção: M1 e parte de M2 já estão atingidos antecipadamente."</a:t>
-            </a:r>
-          </a:p>
-          <a:p/>
-          <a:p>
-            <a:r>
-              <a:t>Percorra rapidamente os marcos:</a:t>
-            </a:r>
-          </a:p>
-          <a:p>
-            <a:r>
-              <a:t>- M1 PREPARAÇÃO (22-28 mai · esta semana): atributos, protocolo, primeiros gabaritos. ✅ ATINGIDO.</a:t>
-            </a:r>
-          </a:p>
-          <a:p>
-            <a:r>
-              <a:t>- M2 PIPELINE (29 mai - 11 jun): núcleo técnico. Cadastro + upload + auth + extração LLM nos 5 projetos. ✅ ATINGIDO (3 semanas antecipado).</a:t>
-            </a:r>
-          </a:p>
-          <a:p>
-            <a:r>
-              <a:t>- M3 DASHBOARD + IA (12-25 jun): a comunidade ganha vida. Backend pronto; falta o frontend.</a:t>
-            </a:r>
-          </a:p>
-          <a:p>
-            <a:r>
-              <a:t>- M4 AVALIAÇÃO (26 jun - 2 jul): fecha o ciclo DSR. Precisão, Recall, F1, Kappa, Likert × 2. Backend pronto; falta coleta humana.</a:t>
-            </a:r>
-          </a:p>
-          <a:p/>
-          <a:p>
-            <a:r>
-              <a:t>FECHAMENTO: "Escrita do relato de 3-9/07. Apresentação final em 10/07."</a:t>
-            </a:r>
-          </a:p>
-        </p:txBody>
-      </p:sp>
-      <p:sp>
-        <p:nvSpPr>
-          <p:cNvPr id="4" name="Slide Number Placeholder 3"/>
-          <p:cNvSpPr>
-            <a:spLocks noGrp="1"/>
-          </p:cNvSpPr>
-          <p:nvPr>
-            <p:ph type="sldNum" idx="5" sz="quarter"/>
-          </p:nvPr>
-        </p:nvSpPr>
-        <p:spPr/>
-      </p:sp>
-    </p:spTree>
-  </p:cSld>
-  <p:clrMapOvr>
-    <a:masterClrMapping/>
-  </p:clrMapOvr>
-</p:notes>
-</file>
-
-<file path=ppt/notesSlides/notesSlide11.xml><?xml version="1.0" encoding="utf-8"?>
-<p:notes xmlns:a="http://schemas.openxmlformats.org/drawingml/2006/main" xmlns:p="http://schemas.openxmlformats.org/presentationml/2006/main" xmlns:r="http://schemas.openxmlformats.org/officeDocument/2006/relationships">
-  <p:cSld>
-    <p:spTree>
-      <p:nvGrpSpPr>
-        <p:cNvPr id="1" name=""/>
-        <p:cNvGrpSpPr/>
-        <p:nvPr/>
-      </p:nvGrpSpPr>
-      <p:grpSpPr>
-        <a:xfrm>
-          <a:off x="0" y="0"/>
-          <a:ext cx="0" cy="0"/>
-          <a:chOff x="0" y="0"/>
-          <a:chExt cx="0" cy="0"/>
-        </a:xfrm>
-      </p:grpSpPr>
-      <p:sp>
-        <p:nvSpPr>
-          <p:cNvPr id="2" name="Slide Image Placeholder 1"/>
-          <p:cNvSpPr>
-            <a:spLocks noGrp="1"/>
-          </p:cNvSpPr>
-          <p:nvPr>
-            <p:ph type="sldImg" idx="2"/>
-          </p:nvPr>
-        </p:nvSpPr>
-        <p:spPr/>
-      </p:sp>
-      <p:sp>
-        <p:nvSpPr>
-          <p:cNvPr id="3" name="Notes Placeholder 2"/>
-          <p:cNvSpPr>
-            <a:spLocks noGrp="1"/>
-          </p:cNvSpPr>
-          <p:nvPr>
-            <p:ph type="body" idx="3" sz="quarter"/>
-          </p:nvPr>
-        </p:nvSpPr>
-        <p:spPr/>
-        <p:txBody>
-          <a:bodyPr/>
-          <a:lstStyle/>
-          <a:p>
-            <a:r>
-              <a:t>[Tempo: ~1.5min]</a:t>
-            </a:r>
-          </a:p>
-          <a:p/>
-          <a:p>
-            <a:r>
-              <a:t>"Onde estamos AGORA e o que vem nas próximas semanas."</a:t>
-            </a:r>
-          </a:p>
-          <a:p/>
-          <a:p>
-            <a:r>
-              <a:t>CARD ESQUERDO — ESTÁ FEITO (Sprint 0 + Sprint 1 antecipada):</a:t>
-            </a:r>
-          </a:p>
-          <a:p>
-            <a:r>
-              <a:t>1. REQUISITOS + PROTOCOLO: 18 RFs, 9 RNFs, rubrica híbrida 0/0,5/1 + Kappa.</a:t>
-            </a:r>
-          </a:p>
-          <a:p>
-            <a:r>
-              <a:t>2. BACKEND MVP ENTREGUE: 18/18 USs implementadas. 287 testes verdes. CI rodando em cada PR.</a:t>
-            </a:r>
-          </a:p>
-          <a:p>
-            <a:r>
-              <a:t>3. SMOKE REAL DO PIPELINE LLM: Llama 3.1 8B local em 5/5 projetos do estudo, 46% cobertura média.</a:t>
-            </a:r>
-          </a:p>
-          <a:p/>
-          <a:p>
-            <a:r>
-              <a:t>CARD DIREITO — PRÓXIMAS SEMANAS:</a:t>
-            </a:r>
-          </a:p>
-          <a:p>
-            <a:r>
-              <a:t>4. FRONTEND + GABARITO (sprints 2-4): Bruno integra os 32 endpoints; Cynthia + Moisés produzem o gabarito de 3 projetos.</a:t>
-            </a:r>
-          </a:p>
-          <a:p>
-            <a:r>
-              <a:t>5. SPRINT 5 DESTRAVADA: backend compara via /extractions/evaluation; falta a rubrica humana 0/0,5/1.</a:t>
-            </a:r>
-          </a:p>
-          <a:p>
-            <a:r>
-              <a:t>6. STATUS REPORT 2 (19/06): frontend pronto, IA-Assistente em uso real, Likert lançado.</a:t>
-            </a:r>
-          </a:p>
-        </p:txBody>
-      </p:sp>
-      <p:sp>
-        <p:nvSpPr>
-          <p:cNvPr id="4" name="Slide Number Placeholder 3"/>
-          <p:cNvSpPr>
-            <a:spLocks noGrp="1"/>
-          </p:cNvSpPr>
-          <p:nvPr>
-            <p:ph type="sldNum" idx="5" sz="quarter"/>
-          </p:nvPr>
-        </p:nvSpPr>
-        <p:spPr/>
-      </p:sp>
-    </p:spTree>
-  </p:cSld>
-  <p:clrMapOvr>
-    <a:masterClrMapping/>
-  </p:clrMapOvr>
-</p:notes>
-</file>
-
-<file path=ppt/notesSlides/notesSlide12.xml><?xml version="1.0" encoding="utf-8"?>
-<p:notes xmlns:a="http://schemas.openxmlformats.org/drawingml/2006/main" xmlns:p="http://schemas.openxmlformats.org/presentationml/2006/main" xmlns:r="http://schemas.openxmlformats.org/officeDocument/2006/relationships">
-  <p:cSld>
-    <p:spTree>
-      <p:nvGrpSpPr>
-        <p:cNvPr id="1" name=""/>
-        <p:cNvGrpSpPr/>
-        <p:nvPr/>
-      </p:nvGrpSpPr>
-      <p:grpSpPr>
-        <a:xfrm>
-          <a:off x="0" y="0"/>
-          <a:ext cx="0" cy="0"/>
-          <a:chOff x="0" y="0"/>
-          <a:chExt cx="0" cy="0"/>
-        </a:xfrm>
-      </p:grpSpPr>
-      <p:sp>
-        <p:nvSpPr>
-          <p:cNvPr id="2" name="Slide Image Placeholder 1"/>
-          <p:cNvSpPr>
-            <a:spLocks noGrp="1"/>
-          </p:cNvSpPr>
-          <p:nvPr>
-            <p:ph type="sldImg" idx="2"/>
-          </p:nvPr>
-        </p:nvSpPr>
-        <p:spPr/>
-      </p:sp>
-      <p:sp>
-        <p:nvSpPr>
-          <p:cNvPr id="3" name="Notes Placeholder 2"/>
-          <p:cNvSpPr>
-            <a:spLocks noGrp="1"/>
-          </p:cNvSpPr>
-          <p:nvPr>
-            <p:ph type="body" idx="3" sz="quarter"/>
-          </p:nvPr>
-        </p:nvSpPr>
-        <p:spPr/>
-        <p:txBody>
-          <a:bodyPr/>
-          <a:lstStyle/>
-          <a:p>
-            <a:r>
-              <a:t>[Tempo: ~30s + perguntas]</a:t>
-            </a:r>
-          </a:p>
-          <a:p/>
-          <a:p>
-            <a:r>
-              <a:t>"Esse foi nosso Status Report 1. Documentação completa no repositório raniel90/obione — incluindo os 32 endpoints com request/response real (api_responses.md) e 5 diagramas Mermaid da arquitetura. Abrimos para perguntas."</a:t>
-            </a:r>
-          </a:p>
-          <a:p/>
-          <a:p>
-            <a:r>
-              <a:t>Antecipe perguntas prováveis (responda só se vierem):</a:t>
-            </a:r>
-          </a:p>
-          <a:p>
-            <a:r>
-              <a:t>- "Como vão validar o LLM?" → rubrica híbrida + 2 avaliadores independentes + Kappa. Backend já compara estruturado.</a:t>
-            </a:r>
-          </a:p>
-          <a:p>
-            <a:r>
-              <a:t>- "Quem são os clientes?" → consultoria parceira; 5 projetos reais de domínios distintos (jurídico, saúde, esporte, branding, fitoterápicos).</a:t>
-            </a:r>
-          </a:p>
-          <a:p>
-            <a:r>
-              <a:t>- "E se a IA errar?" → IA gera DRAFT, consultor revisa antes de publicar. Cliente nunca vê não-revisado.</a:t>
-            </a:r>
-          </a:p>
-          <a:p>
-            <a:r>
-              <a:t>- "Por que LLM e não regex/parser?" → heterogeneidade dos .docx; LLM lida com variação semântica. Comprovado em smoke.</a:t>
-            </a:r>
-          </a:p>
-          <a:p>
-            <a:r>
-              <a:t>- "Por que 46% de cobertura?" → muitos atributos do MPO são genuinamente ausentes no documento. Sprint 5 quantifica via precisão/recall.</a:t>
-            </a:r>
-          </a:p>
-          <a:p>
-            <a:r>
-              <a:t>- "Por que tão adiantado?" → IA generativa acelerou implementação; o trabalho intelectual (requisitos, arquitetura, protocolo) virou base sólida pra automação.</a:t>
-            </a:r>
-          </a:p>
-        </p:txBody>
-      </p:sp>
-      <p:sp>
-        <p:nvSpPr>
-          <p:cNvPr id="4" name="Slide Number Placeholder 3"/>
-          <p:cNvSpPr>
-            <a:spLocks noGrp="1"/>
-          </p:cNvSpPr>
-          <p:nvPr>
-            <p:ph type="sldNum" idx="5" sz="quarter"/>
-          </p:nvPr>
-        </p:nvSpPr>
-        <p:spPr/>
-      </p:sp>
-    </p:spTree>
-  </p:cSld>
-  <p:clrMapOvr>
-    <a:masterClrMapping/>
-  </p:clrMapOvr>
-</p:notes>
-</file>
-
-<file path=ppt/notesSlides/notesSlide2.xml><?xml version="1.0" encoding="utf-8"?>
-<p:notes xmlns:a="http://schemas.openxmlformats.org/drawingml/2006/main" xmlns:p="http://schemas.openxmlformats.org/presentationml/2006/main" xmlns:r="http://schemas.openxmlformats.org/officeDocument/2006/relationships">
-  <p:cSld>
-    <p:spTree>
-      <p:nvGrpSpPr>
-        <p:cNvPr id="1" name=""/>
-        <p:cNvGrpSpPr/>
-        <p:nvPr/>
-      </p:nvGrpSpPr>
-      <p:grpSpPr>
-        <a:xfrm>
-          <a:off x="0" y="0"/>
-          <a:ext cx="0" cy="0"/>
-          <a:chOff x="0" y="0"/>
-          <a:chExt cx="0" cy="0"/>
-        </a:xfrm>
-      </p:grpSpPr>
-      <p:sp>
-        <p:nvSpPr>
-          <p:cNvPr id="2" name="Slide Image Placeholder 1"/>
-          <p:cNvSpPr>
-            <a:spLocks noGrp="1"/>
-          </p:cNvSpPr>
-          <p:nvPr>
-            <p:ph type="sldImg" idx="2"/>
-          </p:nvPr>
-        </p:nvSpPr>
-        <p:spPr/>
-      </p:sp>
-      <p:sp>
-        <p:nvSpPr>
-          <p:cNvPr id="3" name="Notes Placeholder 2"/>
-          <p:cNvSpPr>
-            <a:spLocks noGrp="1"/>
-          </p:cNvSpPr>
-          <p:nvPr>
-            <p:ph type="body" idx="3" sz="quarter"/>
-          </p:nvPr>
-        </p:nvSpPr>
-        <p:spPr/>
-        <p:txBody>
-          <a:bodyPr/>
-          <a:lstStyle/>
-          <a:p>
-            <a:r>
-              <a:t>[Tempo: ~30s]</a:t>
-            </a:r>
-          </a:p>
-          <a:p/>
-          <a:p>
-            <a:r>
-              <a:t>Apresente o roteiro em 4 blocos sem detalhar:</a:t>
-            </a:r>
-          </a:p>
-          <a:p>
-            <a:r>
-              <a:t>"Quatro partes: o contexto que motiva o projeto, o que vamos construir + os requisitos em detalhe, onde estamos hoje (incluindo o backend já entregue), e fechamos com o cronograma e os próximos passos."</a:t>
-            </a:r>
-          </a:p>
-        </p:txBody>
-      </p:sp>
-      <p:sp>
-        <p:nvSpPr>
-          <p:cNvPr id="4" name="Slide Number Placeholder 3"/>
-          <p:cNvSpPr>
-            <a:spLocks noGrp="1"/>
-          </p:cNvSpPr>
-          <p:nvPr>
-            <p:ph type="sldNum" idx="5" sz="quarter"/>
-          </p:nvPr>
-        </p:nvSpPr>
-        <p:spPr/>
-      </p:sp>
-    </p:spTree>
-  </p:cSld>
-  <p:clrMapOvr>
-    <a:masterClrMapping/>
-  </p:clrMapOvr>
-</p:notes>
-</file>
-
-<file path=ppt/notesSlides/notesSlide3.xml><?xml version="1.0" encoding="utf-8"?>
-<p:notes xmlns:a="http://schemas.openxmlformats.org/drawingml/2006/main" xmlns:p="http://schemas.openxmlformats.org/presentationml/2006/main" xmlns:r="http://schemas.openxmlformats.org/officeDocument/2006/relationships">
-  <p:cSld>
-    <p:spTree>
-      <p:nvGrpSpPr>
-        <p:cNvPr id="1" name=""/>
-        <p:cNvGrpSpPr/>
-        <p:nvPr/>
-      </p:nvGrpSpPr>
-      <p:grpSpPr>
-        <a:xfrm>
-          <a:off x="0" y="0"/>
-          <a:ext cx="0" cy="0"/>
-          <a:chOff x="0" y="0"/>
-          <a:chExt cx="0" cy="0"/>
-        </a:xfrm>
-      </p:grpSpPr>
-      <p:sp>
-        <p:nvSpPr>
-          <p:cNvPr id="2" name="Slide Image Placeholder 1"/>
-          <p:cNvSpPr>
-            <a:spLocks noGrp="1"/>
-          </p:cNvSpPr>
-          <p:nvPr>
-            <p:ph type="sldImg" idx="2"/>
-          </p:nvPr>
-        </p:nvSpPr>
-        <p:spPr/>
-      </p:sp>
-      <p:sp>
-        <p:nvSpPr>
-          <p:cNvPr id="3" name="Notes Placeholder 2"/>
-          <p:cNvSpPr>
-            <a:spLocks noGrp="1"/>
-          </p:cNvSpPr>
-          <p:nvPr>
-            <p:ph type="body" idx="3" sz="quarter"/>
-          </p:nvPr>
-        </p:nvSpPr>
-        <p:spPr/>
-        <p:txBody>
-          <a:bodyPr/>
-          <a:lstStyle/>
-          <a:p>
-            <a:r>
-              <a:t>[Tempo: ~2min — slide-chave para criar tensão narrativa]</a:t>
-            </a:r>
-          </a:p>
-          <a:p/>
-          <a:p>
-            <a:r>
-              <a:t>CARD ESQUERDO — "Observatórios vs. ferramentas":</a:t>
-            </a:r>
-          </a:p>
-          <a:p>
-            <a:r>
-              <a:t>"Observatório é MAIS que dashboard. É um espaço de conhecimento entre múltiplos atores — consultoria, clientes, pesquisa — mediado por interação contínua. Ferramentas de gestão como Jira ou planilhas só oferecem visualização de status. Falta o tecido social e a curadoria do conhecimento."</a:t>
-            </a:r>
-          </a:p>
-          <a:p/>
-          <a:p>
-            <a:r>
-              <a:t>TRANSIÇÃO para o card direito:</a:t>
-            </a:r>
-          </a:p>
-          <a:p>
-            <a:r>
-              <a:t>"Se observatórios são tão valiosos, por que são raros na prática? Porque mantê-los vivos é CARO."</a:t>
-            </a:r>
-          </a:p>
-          <a:p/>
-          <a:p>
-            <a:r>
-              <a:t>CARD DIREITO — três fontes de fricção:</a:t>
-            </a:r>
-          </a:p>
-          <a:p>
-            <a:r>
-              <a:t>1. Manual: ler .docx, estruturar, atualizar a curadoria de atributos</a:t>
-            </a:r>
-          </a:p>
-          <a:p>
-            <a:r>
-              <a:t>2. Repetitivo: comunicar progresso ao cliente em linguagem acessível</a:t>
-            </a:r>
-          </a:p>
-          <a:p>
-            <a:r>
-              <a:t>3. Custoso: manter engajamento da comunidade — responder, contextualizar</a:t>
-            </a:r>
-          </a:p>
-          <a:p/>
-          <a:p>
-            <a:r>
-              <a:t>FECHAMENTO: "Sem reduzir essa fricção, observatório fica restrito à teoria. É aí que entra a IA Generativa — e o ObiOne."</a:t>
-            </a:r>
-          </a:p>
-          <a:p/>
-          <a:p>
-            <a:r>
-              <a:t>Bases citadas: Vieira (2022) Cap. 5 (MPO); OPTI-PE como caso prático; Seção 6.4 sobre Trabalhos Futuros.</a:t>
-            </a:r>
-          </a:p>
-        </p:txBody>
-      </p:sp>
-      <p:sp>
-        <p:nvSpPr>
-          <p:cNvPr id="4" name="Slide Number Placeholder 3"/>
-          <p:cNvSpPr>
-            <a:spLocks noGrp="1"/>
-          </p:cNvSpPr>
-          <p:nvPr>
-            <p:ph type="sldNum" idx="5" sz="quarter"/>
-          </p:nvPr>
-        </p:nvSpPr>
-        <p:spPr/>
-      </p:sp>
-    </p:spTree>
-  </p:cSld>
-  <p:clrMapOvr>
-    <a:masterClrMapping/>
-  </p:clrMapOvr>
-</p:notes>
-</file>
-
-<file path=ppt/notesSlides/notesSlide4.xml><?xml version="1.0" encoding="utf-8"?>
-<p:notes xmlns:a="http://schemas.openxmlformats.org/drawingml/2006/main" xmlns:p="http://schemas.openxmlformats.org/presentationml/2006/main" xmlns:r="http://schemas.openxmlformats.org/officeDocument/2006/relationships">
-  <p:cSld>
-    <p:spTree>
-      <p:nvGrpSpPr>
-        <p:cNvPr id="1" name=""/>
-        <p:cNvGrpSpPr/>
-        <p:nvPr/>
-      </p:nvGrpSpPr>
-      <p:grpSpPr>
-        <a:xfrm>
-          <a:off x="0" y="0"/>
-          <a:ext cx="0" cy="0"/>
-          <a:chOff x="0" y="0"/>
-          <a:chExt cx="0" cy="0"/>
-        </a:xfrm>
-      </p:grpSpPr>
-      <p:sp>
-        <p:nvSpPr>
-          <p:cNvPr id="2" name="Slide Image Placeholder 1"/>
-          <p:cNvSpPr>
-            <a:spLocks noGrp="1"/>
-          </p:cNvSpPr>
-          <p:nvPr>
-            <p:ph type="sldImg" idx="2"/>
-          </p:nvPr>
-        </p:nvSpPr>
-        <p:spPr/>
-      </p:sp>
-      <p:sp>
-        <p:nvSpPr>
-          <p:cNvPr id="3" name="Notes Placeholder 2"/>
-          <p:cNvSpPr>
-            <a:spLocks noGrp="1"/>
-          </p:cNvSpPr>
-          <p:nvPr>
-            <p:ph type="body" idx="3" sz="quarter"/>
-          </p:nvPr>
-        </p:nvSpPr>
-        <p:spPr/>
-        <p:txBody>
-          <a:bodyPr/>
-          <a:lstStyle/>
-          <a:p>
-            <a:r>
-              <a:t>[Tempo: ~3min — NÚCLEO ESTRATÉGICO da apresentação]</a:t>
-            </a:r>
-          </a:p>
-          <a:p/>
-          <a:p>
-            <a:r>
-              <a:t>CARD ESQUERDO — "O que é o ObiOne":</a:t>
-            </a:r>
-          </a:p>
-          <a:p>
-            <a:r>
-              <a:t>Diga claramente: "O ObiOne é um observatório-de-portfólio para consultoria de projetos."</a:t>
-            </a:r>
-          </a:p>
-          <a:p/>
-          <a:p>
-            <a:r>
-              <a:t>PARA QUEM E PARA QUÊ — três audiências:</a:t>
-            </a:r>
-          </a:p>
-          <a:p>
-            <a:r>
-              <a:t>- CONSULTORIA: observa o portfólio como conhecimento estruturado, não como pasta de Drive.</a:t>
-            </a:r>
-          </a:p>
-          <a:p>
-            <a:r>
-              <a:t>- CLIENTE: acompanha o PRÓPRIO projeto em linguagem acessível, sem depender de reunião.</a:t>
-            </a:r>
-          </a:p>
-          <a:p>
-            <a:r>
-              <a:t>- COMUNIDADE vira ativo: comentários, comparativos cross-projeto, IA mantém o tecido vivo.</a:t>
-            </a:r>
-          </a:p>
-          <a:p/>
-          <a:p>
-            <a:r>
-              <a:t>PAUSA — deixe assentar.</a:t>
-            </a:r>
-          </a:p>
-          <a:p/>
-          <a:p>
-            <a:r>
-              <a:t>CARD DIREITO — "Por que isso é diferente do que já existe? Combinação inédita em 3 vetores":</a:t>
-            </a:r>
-          </a:p>
-          <a:p>
-            <a:r>
-              <a:t>- vs. PM (Jira, Trello, Asana): gerenciam tarefas e prazos. ObiOne OBSERVA o projeto como objeto de conhecimento, mapeando 44 atributos do MPO.</a:t>
-            </a:r>
-          </a:p>
-          <a:p>
-            <a:r>
-              <a:t>- vs. BI (Power BI, Looker): mostram métricas. ObiOne extrai SIGNIFICADO de .docx com LLM.</a:t>
-            </a:r>
-          </a:p>
-          <a:p>
-            <a:r>
-              <a:t>- vs. OBSERVATÓRIOS ACADÊMICOS (OPTI-PE): são instrumentos de pesquisa estáticos. ObiOne é OPERACIONAL — consultoria e clientes no dia-a-dia.</a:t>
-            </a:r>
-          </a:p>
-          <a:p/>
-          <a:p>
-            <a:r>
-              <a:t>FECHAMENTO: "Único a combinar observação MPO + extração com IA + comunidade ativa em uma só plataforma."</a:t>
-            </a:r>
-          </a:p>
-          <a:p/>
-          <a:p>
-            <a:r>
-              <a:t>Bases citadas: Quadro 37 do MPO (44 atributos); OPTI-PE (Vieira 2022 Cap. 5); levantamento de ferramentas de mercado.</a:t>
-            </a:r>
-          </a:p>
-        </p:txBody>
-      </p:sp>
-      <p:sp>
-        <p:nvSpPr>
-          <p:cNvPr id="4" name="Slide Number Placeholder 3"/>
-          <p:cNvSpPr>
-            <a:spLocks noGrp="1"/>
-          </p:cNvSpPr>
-          <p:nvPr>
-            <p:ph type="sldNum" idx="5" sz="quarter"/>
-          </p:nvPr>
-        </p:nvSpPr>
-        <p:spPr/>
-      </p:sp>
-    </p:spTree>
-  </p:cSld>
-  <p:clrMapOvr>
-    <a:masterClrMapping/>
-  </p:clrMapOvr>
-</p:notes>
-</file>
-
-<file path=ppt/notesSlides/notesSlide5.xml><?xml version="1.0" encoding="utf-8"?>
-<p:notes xmlns:a="http://schemas.openxmlformats.org/drawingml/2006/main" xmlns:p="http://schemas.openxmlformats.org/presentationml/2006/main" xmlns:r="http://schemas.openxmlformats.org/officeDocument/2006/relationships">
-  <p:cSld>
-    <p:spTree>
-      <p:nvGrpSpPr>
-        <p:cNvPr id="1" name=""/>
-        <p:cNvGrpSpPr/>
-        <p:nvPr/>
-      </p:nvGrpSpPr>
-      <p:grpSpPr>
-        <a:xfrm>
-          <a:off x="0" y="0"/>
-          <a:ext cx="0" cy="0"/>
-          <a:chOff x="0" y="0"/>
-          <a:chExt cx="0" cy="0"/>
-        </a:xfrm>
-      </p:grpSpPr>
-      <p:sp>
-        <p:nvSpPr>
-          <p:cNvPr id="2" name="Slide Image Placeholder 1"/>
-          <p:cNvSpPr>
-            <a:spLocks noGrp="1"/>
-          </p:cNvSpPr>
-          <p:nvPr>
-            <p:ph type="sldImg" idx="2"/>
-          </p:nvPr>
-        </p:nvSpPr>
-        <p:spPr/>
-      </p:sp>
-      <p:sp>
-        <p:nvSpPr>
-          <p:cNvPr id="3" name="Notes Placeholder 2"/>
-          <p:cNvSpPr>
-            <a:spLocks noGrp="1"/>
-          </p:cNvSpPr>
-          <p:nvPr>
-            <p:ph type="body" idx="3" sz="quarter"/>
-          </p:nvPr>
-        </p:nvSpPr>
-        <p:spPr/>
-        <p:txBody>
-          <a:bodyPr/>
-          <a:lstStyle/>
-          <a:p>
-            <a:r>
-              <a:t>[Tempo: ~1.5min]</a:t>
-            </a:r>
-          </a:p>
-          <a:p/>
-          <a:p>
-            <a:r>
-              <a:t>Descer ao nível da execução:</a:t>
-            </a:r>
-          </a:p>
-          <a:p>
-            <a:r>
-              <a:t>"Agora o como — escopo organizado em 5 grupos, 18 requisitos funcionais. Importante: o pipeline LLM já está comprovado — rodamos em 5/5 projetos do estudo com 46% de cobertura média em ~66s por documento."</a:t>
-            </a:r>
-          </a:p>
-          <a:p/>
-          <a:p>
-            <a:r>
-              <a:t>Aponte para cada grupo brevemente (NÃO leia tudo):</a:t>
-            </a:r>
-          </a:p>
-          <a:p>
-            <a:r>
-              <a:t>- G1 PIPELINE LLM: extrai os 44 atributos via Llama 3.1 8B local. Smoke real feito.</a:t>
-            </a:r>
-          </a:p>
-          <a:p>
-            <a:r>
-              <a:t>- G2 OBSERVAÇÃO: dashboard de cobertura — cliente vê apenas o seu projeto</a:t>
-            </a:r>
-          </a:p>
-          <a:p>
-            <a:r>
-              <a:t>- G3 COMUNIDADE: auth, perfis semi-abertos, comentários e feed</a:t>
-            </a:r>
-          </a:p>
-          <a:p>
-            <a:r>
-              <a:t>- G4 IA-ASSISTENTE: Resumo do Cliente (tradutora) + Drafts (redutora de fricção)</a:t>
-            </a:r>
-          </a:p>
-          <a:p>
-            <a:r>
-              <a:t>- G5 AVALIAÇÃO: rubrica + Cohen's Kappa nos 3 projetos + Likert × 2 audiências</a:t>
-            </a:r>
-          </a:p>
-          <a:p/>
-          <a:p>
-            <a:r>
-              <a:t>TRANSIÇÃO: "Vou agora detalhar cada bloco de requisitos — começando pela Fundação e o Pipeline."</a:t>
-            </a:r>
-          </a:p>
-        </p:txBody>
-      </p:sp>
-      <p:sp>
-        <p:nvSpPr>
-          <p:cNvPr id="4" name="Slide Number Placeholder 3"/>
-          <p:cNvSpPr>
-            <a:spLocks noGrp="1"/>
-          </p:cNvSpPr>
-          <p:nvPr>
-            <p:ph type="sldNum" idx="5" sz="quarter"/>
-          </p:nvPr>
-        </p:nvSpPr>
-        <p:spPr/>
-      </p:sp>
-    </p:spTree>
-  </p:cSld>
-  <p:clrMapOvr>
-    <a:masterClrMapping/>
-  </p:clrMapOvr>
-</p:notes>
-</file>
-
-<file path=ppt/notesSlides/notesSlide6.xml><?xml version="1.0" encoding="utf-8"?>
-<p:notes xmlns:a="http://schemas.openxmlformats.org/drawingml/2006/main" xmlns:p="http://schemas.openxmlformats.org/presentationml/2006/main" xmlns:r="http://schemas.openxmlformats.org/officeDocument/2006/relationships">
-  <p:cSld>
-    <p:spTree>
-      <p:nvGrpSpPr>
-        <p:cNvPr id="1" name=""/>
-        <p:cNvGrpSpPr/>
-        <p:nvPr/>
-      </p:nvGrpSpPr>
-      <p:grpSpPr>
-        <a:xfrm>
-          <a:off x="0" y="0"/>
-          <a:ext cx="0" cy="0"/>
-          <a:chOff x="0" y="0"/>
-          <a:chExt cx="0" cy="0"/>
-        </a:xfrm>
-      </p:grpSpPr>
-      <p:sp>
-        <p:nvSpPr>
-          <p:cNvPr id="2" name="Slide Image Placeholder 1"/>
-          <p:cNvSpPr>
-            <a:spLocks noGrp="1"/>
-          </p:cNvSpPr>
-          <p:nvPr>
-            <p:ph type="sldImg" idx="2"/>
-          </p:nvPr>
-        </p:nvSpPr>
-        <p:spPr/>
-      </p:sp>
-      <p:sp>
-        <p:nvSpPr>
-          <p:cNvPr id="3" name="Notes Placeholder 2"/>
-          <p:cNvSpPr>
-            <a:spLocks noGrp="1"/>
-          </p:cNvSpPr>
-          <p:nvPr>
-            <p:ph type="body" idx="3" sz="quarter"/>
-          </p:nvPr>
-        </p:nvSpPr>
-        <p:spPr/>
-        <p:txBody>
-          <a:bodyPr/>
-          <a:lstStyle/>
-          <a:p>
-            <a:r>
-              <a:t>[Tempo: ~1.5min]</a:t>
-            </a:r>
-          </a:p>
-          <a:p/>
-          <a:p>
-            <a:r>
-              <a:t>CARD por CARD — Fundação + Pipeline:</a:t>
-            </a:r>
-          </a:p>
-          <a:p>
-            <a:r>
-              <a:t>- RF01 AUTENTICAR: JWT 24h, admin cria contas, sem cadastro público.</a:t>
-            </a:r>
-          </a:p>
-          <a:p>
-            <a:r>
-              <a:t>- RF02 PERFIS: 3 papéis (consultor, cliente, admin). Acesso semi-aberto = característica MPO.</a:t>
-            </a:r>
-          </a:p>
-          <a:p>
-            <a:r>
-              <a:t>- RF03 CADASTRO: 6 domínios suportados (legal, health, sports, branding, gastronomy, other).</a:t>
-            </a:r>
-          </a:p>
-          <a:p>
-            <a:r>
-              <a:t>- RF04 UPLOAD .DOCX: sha256 + 50 MB max, rejeita duplicatas.</a:t>
-            </a:r>
-          </a:p>
-          <a:p>
-            <a:r>
-              <a:t>- RF05 + RF06 EXTRAÇÃO: 44 atributos do Quadro 37, prompt e modelo registrados em cada extração.</a:t>
-            </a:r>
-          </a:p>
-          <a:p/>
-          <a:p>
-            <a:r>
-              <a:t>FECHAMENTO: "Os 6 requisitos da Fundação e do Pipeline estão TODOS implementados no backend."</a:t>
-            </a:r>
-          </a:p>
-        </p:txBody>
-      </p:sp>
-      <p:sp>
-        <p:nvSpPr>
-          <p:cNvPr id="4" name="Slide Number Placeholder 3"/>
-          <p:cNvSpPr>
-            <a:spLocks noGrp="1"/>
-          </p:cNvSpPr>
-          <p:nvPr>
-            <p:ph type="sldNum" idx="5" sz="quarter"/>
-          </p:nvPr>
-        </p:nvSpPr>
-        <p:spPr/>
-      </p:sp>
-    </p:spTree>
-  </p:cSld>
-  <p:clrMapOvr>
-    <a:masterClrMapping/>
-  </p:clrMapOvr>
-</p:notes>
-</file>
-
-<file path=ppt/notesSlides/notesSlide7.xml><?xml version="1.0" encoding="utf-8"?>
-<p:notes xmlns:a="http://schemas.openxmlformats.org/drawingml/2006/main" xmlns:p="http://schemas.openxmlformats.org/presentationml/2006/main" xmlns:r="http://schemas.openxmlformats.org/officeDocument/2006/relationships">
-  <p:cSld>
-    <p:spTree>
-      <p:nvGrpSpPr>
-        <p:cNvPr id="1" name=""/>
-        <p:cNvGrpSpPr/>
-        <p:nvPr/>
-      </p:nvGrpSpPr>
-      <p:grpSpPr>
-        <a:xfrm>
-          <a:off x="0" y="0"/>
-          <a:ext cx="0" cy="0"/>
-          <a:chOff x="0" y="0"/>
-          <a:chExt cx="0" cy="0"/>
-        </a:xfrm>
-      </p:grpSpPr>
-      <p:sp>
-        <p:nvSpPr>
-          <p:cNvPr id="2" name="Slide Image Placeholder 1"/>
-          <p:cNvSpPr>
-            <a:spLocks noGrp="1"/>
-          </p:cNvSpPr>
-          <p:nvPr>
-            <p:ph type="sldImg" idx="2"/>
-          </p:nvPr>
-        </p:nvSpPr>
-        <p:spPr/>
-      </p:sp>
-      <p:sp>
-        <p:nvSpPr>
-          <p:cNvPr id="3" name="Notes Placeholder 2"/>
-          <p:cNvSpPr>
-            <a:spLocks noGrp="1"/>
-          </p:cNvSpPr>
-          <p:nvPr>
-            <p:ph type="body" idx="3" sz="quarter"/>
-          </p:nvPr>
-        </p:nvSpPr>
-        <p:spPr/>
-        <p:txBody>
-          <a:bodyPr/>
-          <a:lstStyle/>
-          <a:p>
-            <a:r>
-              <a:t>[Tempo: ~1.5min]</a:t>
-            </a:r>
-          </a:p>
-          <a:p/>
-          <a:p>
-            <a:r>
-              <a:t>CARD por CARD — Observação + Comunidade + IA:</a:t>
-            </a:r>
-          </a:p>
-          <a:p>
-            <a:r>
-              <a:t>- RF07 + RF09 PORTFÓLIO: visão do consultor com status derivado e cobertura % do MPO.</a:t>
-            </a:r>
-          </a:p>
-          <a:p>
-            <a:r>
-              <a:t>- RF08 DETALHE: view consolidado por projeto.</a:t>
-            </a:r>
-          </a:p>
-          <a:p>
-            <a:r>
-              <a:t>- RF10 + RF11 DIÁLOGO: comentários com 1 nível de threading + feed in-app cronológico.</a:t>
-            </a:r>
-          </a:p>
-          <a:p>
-            <a:r>
-              <a:t>- RF12 RESUMO DO CLIENTE: IA TRADUTORA — extração técnica vira narrativa acessível.</a:t>
-            </a:r>
-          </a:p>
-          <a:p>
-            <a:r>
-              <a:t>- RF13 DRAFTS: IA REDUTORA DE FRICÇÃO — propõe próximos passos e pontos de atenção.</a:t>
-            </a:r>
-          </a:p>
-          <a:p/>
-          <a:p>
-            <a:r>
-              <a:t>ENFATIZE: "Toda saída da IA passa por revisão do consultor antes de virar pública. O cliente nunca vê draft."</a:t>
-            </a:r>
-          </a:p>
-        </p:txBody>
-      </p:sp>
-      <p:sp>
-        <p:nvSpPr>
-          <p:cNvPr id="4" name="Slide Number Placeholder 3"/>
-          <p:cNvSpPr>
-            <a:spLocks noGrp="1"/>
-          </p:cNvSpPr>
-          <p:nvPr>
-            <p:ph type="sldNum" idx="5" sz="quarter"/>
-          </p:nvPr>
-        </p:nvSpPr>
-        <p:spPr/>
-      </p:sp>
-    </p:spTree>
-  </p:cSld>
-  <p:clrMapOvr>
-    <a:masterClrMapping/>
-  </p:clrMapOvr>
-</p:notes>
-</file>
-
-<file path=ppt/notesSlides/notesSlide8.xml><?xml version="1.0" encoding="utf-8"?>
-<p:notes xmlns:a="http://schemas.openxmlformats.org/drawingml/2006/main" xmlns:p="http://schemas.openxmlformats.org/presentationml/2006/main" xmlns:r="http://schemas.openxmlformats.org/officeDocument/2006/relationships">
-  <p:cSld>
-    <p:spTree>
-      <p:nvGrpSpPr>
-        <p:cNvPr id="1" name=""/>
-        <p:cNvGrpSpPr/>
-        <p:nvPr/>
-      </p:nvGrpSpPr>
-      <p:grpSpPr>
-        <a:xfrm>
-          <a:off x="0" y="0"/>
-          <a:ext cx="0" cy="0"/>
-          <a:chOff x="0" y="0"/>
-          <a:chExt cx="0" cy="0"/>
-        </a:xfrm>
-      </p:grpSpPr>
-      <p:sp>
-        <p:nvSpPr>
-          <p:cNvPr id="2" name="Slide Image Placeholder 1"/>
-          <p:cNvSpPr>
-            <a:spLocks noGrp="1"/>
-          </p:cNvSpPr>
-          <p:nvPr>
-            <p:ph type="sldImg" idx="2"/>
-          </p:nvPr>
-        </p:nvSpPr>
-        <p:spPr/>
-      </p:sp>
-      <p:sp>
-        <p:nvSpPr>
-          <p:cNvPr id="3" name="Notes Placeholder 2"/>
-          <p:cNvSpPr>
-            <a:spLocks noGrp="1"/>
-          </p:cNvSpPr>
-          <p:nvPr>
-            <p:ph type="body" idx="3" sz="quarter"/>
-          </p:nvPr>
-        </p:nvSpPr>
-        <p:spPr/>
-        <p:txBody>
-          <a:bodyPr/>
-          <a:lstStyle/>
-          <a:p>
-            <a:r>
-              <a:t>[Tempo: ~1.5min]</a:t>
-            </a:r>
-          </a:p>
-          <a:p/>
-          <a:p>
-            <a:r>
-              <a:t>CARD por CARD — Avaliação DSR:</a:t>
-            </a:r>
-          </a:p>
-          <a:p>
-            <a:r>
-              <a:t>- RF14 GABARITO: backend já carrega; produção do gabarito é responsabilidade de Cynthia e Moisés.</a:t>
-            </a:r>
-          </a:p>
-          <a:p>
-            <a:r>
-              <a:t>- RF15 COMPARAÇÃO: critério híbrido — comparação exata em estruturados + rubrica humana 0/0,5/1 em texto livre + Cohen's Kappa entre avaliadores.</a:t>
-            </a:r>
-          </a:p>
-          <a:p>
-            <a:r>
-              <a:t>- RF16 LIKERT CONSULTORIA: 4 dimensões — utilidade dos drafts, fricção, qualidade do resumo, manutenibilidade.</a:t>
-            </a:r>
-          </a:p>
-          <a:p>
-            <a:r>
-              <a:t>- RF17 LIKERT CLIENTES: 4 dimensões — clareza, utilidade do espaço, qualidade do diálogo, sentido de inclusão.</a:t>
-            </a:r>
-          </a:p>
-          <a:p>
-            <a:r>
-              <a:t>- RF18 EXPORTAÇÃO: JSON bundle (research) + CSV long-format (rubrica).</a:t>
-            </a:r>
-          </a:p>
-          <a:p/>
-          <a:p>
-            <a:r>
-              <a:t>DESTAQUE: "Todo o backend de avaliação está pronto. Sprint 5 vira coleta humana — não código."</a:t>
-            </a:r>
-          </a:p>
-        </p:txBody>
-      </p:sp>
-      <p:sp>
-        <p:nvSpPr>
-          <p:cNvPr id="4" name="Slide Number Placeholder 3"/>
-          <p:cNvSpPr>
-            <a:spLocks noGrp="1"/>
-          </p:cNvSpPr>
-          <p:nvPr>
-            <p:ph type="sldNum" idx="5" sz="quarter"/>
-          </p:nvPr>
-        </p:nvSpPr>
-        <p:spPr/>
-      </p:sp>
-    </p:spTree>
-  </p:cSld>
-  <p:clrMapOvr>
-    <a:masterClrMapping/>
-  </p:clrMapOvr>
-</p:notes>
-</file>
-
-<file path=ppt/notesSlides/notesSlide9.xml><?xml version="1.0" encoding="utf-8"?>
-<p:notes xmlns:a="http://schemas.openxmlformats.org/drawingml/2006/main" xmlns:p="http://schemas.openxmlformats.org/presentationml/2006/main" xmlns:r="http://schemas.openxmlformats.org/officeDocument/2006/relationships">
-  <p:cSld>
-    <p:spTree>
-      <p:nvGrpSpPr>
-        <p:cNvPr id="1" name=""/>
-        <p:cNvGrpSpPr/>
-        <p:nvPr/>
-      </p:nvGrpSpPr>
-      <p:grpSpPr>
-        <a:xfrm>
-          <a:off x="0" y="0"/>
-          <a:ext cx="0" cy="0"/>
-          <a:chOff x="0" y="0"/>
-          <a:chExt cx="0" cy="0"/>
-        </a:xfrm>
-      </p:grpSpPr>
-      <p:sp>
-        <p:nvSpPr>
-          <p:cNvPr id="2" name="Slide Image Placeholder 1"/>
-          <p:cNvSpPr>
-            <a:spLocks noGrp="1"/>
-          </p:cNvSpPr>
-          <p:nvPr>
-            <p:ph type="sldImg" idx="2"/>
-          </p:nvPr>
-        </p:nvSpPr>
-        <p:spPr/>
-      </p:sp>
-      <p:sp>
-        <p:nvSpPr>
-          <p:cNvPr id="3" name="Notes Placeholder 2"/>
-          <p:cNvSpPr>
-            <a:spLocks noGrp="1"/>
-          </p:cNvSpPr>
-          <p:nvPr>
-            <p:ph type="body" idx="3" sz="quarter"/>
-          </p:nvPr>
-        </p:nvSpPr>
-        <p:spPr/>
-        <p:txBody>
-          <a:bodyPr/>
-          <a:lstStyle/>
-          <a:p>
-            <a:r>
-              <a:t>[Tempo: ~1min]</a:t>
-            </a:r>
-          </a:p>
-          <a:p/>
-          <a:p>
-            <a:r>
-              <a:t>5 TEMAS por 9 RNFs:</a:t>
-            </a:r>
-          </a:p>
-          <a:p>
-            <a:r>
-              <a:t>- SEGURANÇA &amp; LGPD (RNF01 + RNF02): auth obrigatório, criptografia em trânsito, logs de acesso.</a:t>
-            </a:r>
-          </a:p>
-          <a:p>
-            <a:r>
-              <a:t>- REPRODUTIBILIDADE (RNF03 + RNF04): versão de prompt + modelo LLM registrados; schema JSON versionado.</a:t>
-            </a:r>
-          </a:p>
-          <a:p>
-            <a:r>
-              <a:t>- PERFORMANCE (RNF05 + RNF06): extração ≤ 90s (medimos 46-79s) e REST ≤ 500ms p95.</a:t>
-            </a:r>
-          </a:p>
-          <a:p>
-            <a:r>
-              <a:t>- USABILIDADE (RNF07): linguagem cidadã no Resumo do Cliente.</a:t>
-            </a:r>
-          </a:p>
-          <a:p>
-            <a:r>
-              <a:t>- MANUTENIBILIDADE + CUSTO (RNF08 + RNF09): ports &amp; adapters arquitetural + Ollama local zero-cost.</a:t>
-            </a:r>
-          </a:p>
-          <a:p/>
-          <a:p>
-            <a:r>
-              <a:t>PONTE: "RNFs não viram US, mas todos estão endereçados arquiteturalmente. Vamos ao cronograma."</a:t>
-            </a:r>
-          </a:p>
-        </p:txBody>
-      </p:sp>
-      <p:sp>
-        <p:nvSpPr>
-          <p:cNvPr id="4" name="Slide Number Placeholder 3"/>
-          <p:cNvSpPr>
-            <a:spLocks noGrp="1"/>
-          </p:cNvSpPr>
-          <p:nvPr>
-            <p:ph type="sldNum" idx="5" sz="quarter"/>
-          </p:nvPr>
-        </p:nvSpPr>
-        <p:spPr/>
-      </p:sp>
-    </p:spTree>
-  </p:cSld>
-  <p:clrMapOvr>
-    <a:masterClrMapping/>
-  </p:clrMapOvr>
-</p:notes>
 </file>
 
 <file path=ppt/slideLayouts/slideLayout1.xml><?xml version="1.0" encoding="utf-8"?>
@@ -5210,6 +3542,14 @@
 <file path=ppt/slides/slide10.xml><?xml version="1.0" encoding="utf-8"?>
 <p:sld xmlns:a="http://schemas.openxmlformats.org/drawingml/2006/main" xmlns:p="http://schemas.openxmlformats.org/presentationml/2006/main" xmlns:r="http://schemas.openxmlformats.org/officeDocument/2006/relationships">
   <p:cSld>
+    <p:bg>
+      <p:bgPr>
+        <a:solidFill>
+          <a:srgbClr val="FFFFFF"/>
+        </a:solidFill>
+        <a:effectLst/>
+      </p:bgPr>
+    </p:bg>
     <p:spTree>
       <p:nvGrpSpPr>
         <p:cNvPr id="1" name=""/>
@@ -6529,6 +4869,14 @@
 <file path=ppt/slides/slide11.xml><?xml version="1.0" encoding="utf-8"?>
 <p:sld xmlns:a="http://schemas.openxmlformats.org/drawingml/2006/main" xmlns:p="http://schemas.openxmlformats.org/presentationml/2006/main" xmlns:r="http://schemas.openxmlformats.org/officeDocument/2006/relationships">
   <p:cSld>
+    <p:bg>
+      <p:bgPr>
+        <a:solidFill>
+          <a:srgbClr val="FFFFFF"/>
+        </a:solidFill>
+        <a:effectLst/>
+      </p:bgPr>
+    </p:bg>
     <p:spTree>
       <p:nvGrpSpPr>
         <p:cNvPr id="1" name=""/>
@@ -7848,6 +6196,14 @@
 <file path=ppt/slides/slide12.xml><?xml version="1.0" encoding="utf-8"?>
 <p:sld xmlns:a="http://schemas.openxmlformats.org/drawingml/2006/main" xmlns:p="http://schemas.openxmlformats.org/presentationml/2006/main" xmlns:r="http://schemas.openxmlformats.org/officeDocument/2006/relationships">
   <p:cSld>
+    <p:bg>
+      <p:bgPr>
+        <a:solidFill>
+          <a:srgbClr val="FFFFFF"/>
+        </a:solidFill>
+        <a:effectLst/>
+      </p:bgPr>
+    </p:bg>
     <p:spTree>
       <p:nvGrpSpPr>
         <p:cNvPr id="1" name=""/>
@@ -16771,6 +15127,14 @@
 <file path=ppt/slides/slide8.xml><?xml version="1.0" encoding="utf-8"?>
 <p:sld xmlns:a="http://schemas.openxmlformats.org/drawingml/2006/main" xmlns:p="http://schemas.openxmlformats.org/presentationml/2006/main" xmlns:r="http://schemas.openxmlformats.org/officeDocument/2006/relationships">
   <p:cSld>
+    <p:bg>
+      <p:bgPr>
+        <a:solidFill>
+          <a:srgbClr val="FFFFFF"/>
+        </a:solidFill>
+        <a:effectLst/>
+      </p:bgPr>
+    </p:bg>
     <p:spTree>
       <p:nvGrpSpPr>
         <p:cNvPr id="1" name=""/>
@@ -17866,6 +16230,14 @@
 <file path=ppt/slides/slide9.xml><?xml version="1.0" encoding="utf-8"?>
 <p:sld xmlns:a="http://schemas.openxmlformats.org/drawingml/2006/main" xmlns:p="http://schemas.openxmlformats.org/presentationml/2006/main" xmlns:r="http://schemas.openxmlformats.org/officeDocument/2006/relationships">
   <p:cSld>
+    <p:bg>
+      <p:bgPr>
+        <a:solidFill>
+          <a:srgbClr val="FFFFFF"/>
+        </a:solidFill>
+        <a:effectLst/>
+      </p:bgPr>
+    </p:bg>
     <p:spTree>
       <p:nvGrpSpPr>
         <p:cNvPr id="1" name=""/>
@@ -19500,324 +17872,4 @@
   </a:objectDefaults>
   <a:extraClrSchemeLst/>
 </a:theme>
-</file>
-
-<file path=ppt/theme/theme2.xml><?xml version="1.0" encoding="utf-8"?>
-<a:theme xmlns:a="http://schemas.openxmlformats.org/drawingml/2006/main" name="Office Theme">
-  <a:themeElements>
-    <a:clrScheme name="Office">
-      <a:dk1>
-        <a:sysClr val="windowText" lastClr="000000"/>
-      </a:dk1>
-      <a:lt1>
-        <a:sysClr val="window" lastClr="FFFFFF"/>
-      </a:lt1>
-      <a:dk2>
-        <a:srgbClr val="1F497D"/>
-      </a:dk2>
-      <a:lt2>
-        <a:srgbClr val="EEECE1"/>
-      </a:lt2>
-      <a:accent1>
-        <a:srgbClr val="4F81BD"/>
-      </a:accent1>
-      <a:accent2>
-        <a:srgbClr val="C0504D"/>
-      </a:accent2>
-      <a:accent3>
-        <a:srgbClr val="9BBB59"/>
-      </a:accent3>
-      <a:accent4>
-        <a:srgbClr val="8064A2"/>
-      </a:accent4>
-      <a:accent5>
-        <a:srgbClr val="4BACC6"/>
-      </a:accent5>
-      <a:accent6>
-        <a:srgbClr val="F79646"/>
-      </a:accent6>
-      <a:hlink>
-        <a:srgbClr val="0000FF"/>
-      </a:hlink>
-      <a:folHlink>
-        <a:srgbClr val="800080"/>
-      </a:folHlink>
-    </a:clrScheme>
-    <a:fontScheme name="Office">
-      <a:majorFont>
-        <a:latin typeface="Calibri"/>
-        <a:ea typeface=""/>
-        <a:cs typeface=""/>
-        <a:font script="Jpan" typeface="ＭＳ Ｐゴシック"/>
-        <a:font script="Hang" typeface="맑은 고딕"/>
-        <a:font script="Hans" typeface="宋体"/>
-        <a:font script="Hant" typeface="新細明體"/>
-        <a:font script="Arab" typeface="Times New Roman"/>
-        <a:font script="Hebr" typeface="Times New Roman"/>
-        <a:font script="Thai" typeface="Angsana New"/>
-        <a:font script="Ethi" typeface="Nyala"/>
-        <a:font script="Beng" typeface="Vrinda"/>
-        <a:font script="Gujr" typeface="Shruti"/>
-        <a:font script="Khmr" typeface="MoolBoran"/>
-        <a:font script="Knda" typeface="Tunga"/>
-        <a:font script="Guru" typeface="Raavi"/>
-        <a:font script="Cans" typeface="Euphemia"/>
-        <a:font script="Cher" typeface="Plantagenet Cherokee"/>
-        <a:font script="Yiii" typeface="Microsoft Yi Baiti"/>
-        <a:font script="Tibt" typeface="Microsoft Himalaya"/>
-        <a:font script="Thaa" typeface="MV Boli"/>
-        <a:font script="Deva" typeface="Mangal"/>
-        <a:font script="Telu" typeface="Gautami"/>
-        <a:font script="Taml" typeface="Latha"/>
-        <a:font script="Syrc" typeface="Estrangelo Edessa"/>
-        <a:font script="Orya" typeface="Kalinga"/>
-        <a:font script="Mlym" typeface="Kartika"/>
-        <a:font script="Laoo" typeface="DokChampa"/>
-        <a:font script="Sinh" typeface="Iskoola Pota"/>
-        <a:font script="Mong" typeface="Mongolian Baiti"/>
-        <a:font script="Viet" typeface="Times New Roman"/>
-        <a:font script="Uigh" typeface="Microsoft Uighur"/>
-        <a:font script="Geor" typeface="Sylfaen"/>
-      </a:majorFont>
-      <a:minorFont>
-        <a:latin typeface="Calibri"/>
-        <a:ea typeface=""/>
-        <a:cs typeface=""/>
-        <a:font script="Jpan" typeface="ＭＳ Ｐゴシック"/>
-        <a:font script="Hang" typeface="맑은 고딕"/>
-        <a:font script="Hans" typeface="宋体"/>
-        <a:font script="Hant" typeface="新細明體"/>
-        <a:font script="Arab" typeface="Arial"/>
-        <a:font script="Hebr" typeface="Arial"/>
-        <a:font script="Thai" typeface="Cordia New"/>
-        <a:font script="Ethi" typeface="Nyala"/>
-        <a:font script="Beng" typeface="Vrinda"/>
-        <a:font script="Gujr" typeface="Shruti"/>
-        <a:font script="Khmr" typeface="DaunPenh"/>
-        <a:font script="Knda" typeface="Tunga"/>
-        <a:font script="Guru" typeface="Raavi"/>
-        <a:font script="Cans" typeface="Euphemia"/>
-        <a:font script="Cher" typeface="Plantagenet Cherokee"/>
-        <a:font script="Yiii" typeface="Microsoft Yi Baiti"/>
-        <a:font script="Tibt" typeface="Microsoft Himalaya"/>
-        <a:font script="Thaa" typeface="MV Boli"/>
-        <a:font script="Deva" typeface="Mangal"/>
-        <a:font script="Telu" typeface="Gautami"/>
-        <a:font script="Taml" typeface="Latha"/>
-        <a:font script="Syrc" typeface="Estrangelo Edessa"/>
-        <a:font script="Orya" typeface="Kalinga"/>
-        <a:font script="Mlym" typeface="Kartika"/>
-        <a:font script="Laoo" typeface="DokChampa"/>
-        <a:font script="Sinh" typeface="Iskoola Pota"/>
-        <a:font script="Mong" typeface="Mongolian Baiti"/>
-        <a:font script="Viet" typeface="Arial"/>
-        <a:font script="Uigh" typeface="Microsoft Uighur"/>
-        <a:font script="Geor" typeface="Sylfaen"/>
-      </a:minorFont>
-    </a:fontScheme>
-    <a:fmtScheme name="Office">
-      <a:fillStyleLst>
-        <a:solidFill>
-          <a:schemeClr val="phClr"/>
-        </a:solidFill>
-        <a:gradFill rotWithShape="1">
-          <a:gsLst>
-            <a:gs pos="0">
-              <a:schemeClr val="phClr">
-                <a:tint val="50000"/>
-                <a:satMod val="300000"/>
-              </a:schemeClr>
-            </a:gs>
-            <a:gs pos="35000">
-              <a:schemeClr val="phClr">
-                <a:tint val="37000"/>
-                <a:satMod val="300000"/>
-              </a:schemeClr>
-            </a:gs>
-            <a:gs pos="100000">
-              <a:schemeClr val="phClr">
-                <a:tint val="15000"/>
-                <a:satMod val="350000"/>
-              </a:schemeClr>
-            </a:gs>
-          </a:gsLst>
-          <a:lin ang="16200000" scaled="1"/>
-        </a:gradFill>
-        <a:gradFill rotWithShape="1">
-          <a:gsLst>
-            <a:gs pos="0">
-              <a:schemeClr val="phClr">
-                <a:tint val="100000"/>
-                <a:shade val="100000"/>
-                <a:satMod val="130000"/>
-              </a:schemeClr>
-            </a:gs>
-            <a:gs pos="100000">
-              <a:schemeClr val="phClr">
-                <a:tint val="50000"/>
-                <a:shade val="100000"/>
-                <a:satMod val="350000"/>
-              </a:schemeClr>
-            </a:gs>
-          </a:gsLst>
-          <a:lin ang="16200000" scaled="0"/>
-        </a:gradFill>
-      </a:fillStyleLst>
-      <a:lnStyleLst>
-        <a:ln w="9525" cap="flat" cmpd="sng" algn="ctr">
-          <a:solidFill>
-            <a:schemeClr val="phClr">
-              <a:shade val="95000"/>
-              <a:satMod val="105000"/>
-            </a:schemeClr>
-          </a:solidFill>
-          <a:prstDash val="solid"/>
-        </a:ln>
-        <a:ln w="25400" cap="flat" cmpd="sng" algn="ctr">
-          <a:solidFill>
-            <a:schemeClr val="phClr"/>
-          </a:solidFill>
-          <a:prstDash val="solid"/>
-        </a:ln>
-        <a:ln w="38100" cap="flat" cmpd="sng" algn="ctr">
-          <a:solidFill>
-            <a:schemeClr val="phClr"/>
-          </a:solidFill>
-          <a:prstDash val="solid"/>
-        </a:ln>
-      </a:lnStyleLst>
-      <a:effectStyleLst>
-        <a:effectStyle>
-          <a:effectLst>
-            <a:outerShdw blurRad="40000" dist="20000" dir="5400000" rotWithShape="0">
-              <a:srgbClr val="000000">
-                <a:alpha val="38000"/>
-              </a:srgbClr>
-            </a:outerShdw>
-          </a:effectLst>
-        </a:effectStyle>
-        <a:effectStyle>
-          <a:effectLst>
-            <a:outerShdw blurRad="40000" dist="23000" dir="5400000" rotWithShape="0">
-              <a:srgbClr val="000000">
-                <a:alpha val="35000"/>
-              </a:srgbClr>
-            </a:outerShdw>
-          </a:effectLst>
-        </a:effectStyle>
-        <a:effectStyle>
-          <a:effectLst>
-            <a:outerShdw blurRad="40000" dist="23000" dir="5400000" rotWithShape="0">
-              <a:srgbClr val="000000">
-                <a:alpha val="35000"/>
-              </a:srgbClr>
-            </a:outerShdw>
-          </a:effectLst>
-          <a:scene3d>
-            <a:camera prst="orthographicFront">
-              <a:rot lat="0" lon="0" rev="0"/>
-            </a:camera>
-            <a:lightRig rig="threePt" dir="t">
-              <a:rot lat="0" lon="0" rev="1200000"/>
-            </a:lightRig>
-          </a:scene3d>
-          <a:sp3d>
-            <a:bevelT w="63500" h="25400"/>
-          </a:sp3d>
-        </a:effectStyle>
-      </a:effectStyleLst>
-      <a:bgFillStyleLst>
-        <a:solidFill>
-          <a:schemeClr val="phClr"/>
-        </a:solidFill>
-        <a:gradFill rotWithShape="1">
-          <a:gsLst>
-            <a:gs pos="0">
-              <a:schemeClr val="phClr">
-                <a:tint val="40000"/>
-                <a:satMod val="350000"/>
-              </a:schemeClr>
-            </a:gs>
-            <a:gs pos="40000">
-              <a:schemeClr val="phClr">
-                <a:tint val="45000"/>
-                <a:shade val="99000"/>
-                <a:satMod val="350000"/>
-              </a:schemeClr>
-            </a:gs>
-            <a:gs pos="100000">
-              <a:schemeClr val="phClr">
-                <a:shade val="20000"/>
-                <a:satMod val="255000"/>
-              </a:schemeClr>
-            </a:gs>
-          </a:gsLst>
-          <a:path path="circle">
-            <a:fillToRect l="50000" t="-80000" r="50000" b="180000"/>
-          </a:path>
-        </a:gradFill>
-        <a:gradFill rotWithShape="1">
-          <a:gsLst>
-            <a:gs pos="0">
-              <a:schemeClr val="phClr">
-                <a:tint val="80000"/>
-                <a:satMod val="300000"/>
-              </a:schemeClr>
-            </a:gs>
-            <a:gs pos="100000">
-              <a:schemeClr val="phClr">
-                <a:shade val="30000"/>
-                <a:satMod val="200000"/>
-              </a:schemeClr>
-            </a:gs>
-          </a:gsLst>
-          <a:path path="circle">
-            <a:fillToRect l="50000" t="50000" r="50000" b="50000"/>
-          </a:path>
-        </a:gradFill>
-      </a:bgFillStyleLst>
-    </a:fmtScheme>
-  </a:themeElements>
-  <a:objectDefaults>
-    <a:spDef>
-      <a:spPr/>
-      <a:bodyPr/>
-      <a:lstStyle/>
-      <a:style>
-        <a:lnRef idx="1">
-          <a:schemeClr val="accent1"/>
-        </a:lnRef>
-        <a:fillRef idx="3">
-          <a:schemeClr val="accent1"/>
-        </a:fillRef>
-        <a:effectRef idx="2">
-          <a:schemeClr val="accent1"/>
-        </a:effectRef>
-        <a:fontRef idx="minor">
-          <a:schemeClr val="lt1"/>
-        </a:fontRef>
-      </a:style>
-    </a:spDef>
-    <a:lnDef>
-      <a:spPr/>
-      <a:bodyPr/>
-      <a:lstStyle/>
-      <a:style>
-        <a:lnRef idx="2">
-          <a:schemeClr val="accent1"/>
-        </a:lnRef>
-        <a:fillRef idx="0">
-          <a:schemeClr val="accent1"/>
-        </a:fillRef>
-        <a:effectRef idx="1">
-          <a:schemeClr val="accent1"/>
-        </a:effectRef>
-        <a:fontRef idx="minor">
-          <a:schemeClr val="tx1"/>
-        </a:fontRef>
-      </a:style>
-    </a:lnDef>
-  </a:objectDefaults>
-  <a:extraClrSchemeLst/>
-</a:theme>
 </file>
--- a/atividades/apresentacoes/sr1_2026-05-22.pptx
+++ b/atividades/apresentacoes/sr1_2026-05-22.pptx
@@ -3273,7 +3273,7 @@
                 </a:solidFill>
                 <a:latin typeface="Arial"/>
               </a:rPr>
-              <a:t>Apresentação à cadeira Tópicos Avançados em Engenharia de Software</a:t>
+              <a:t>Backend MVP entregue · 4 semanas antes do previsto</a:t>
             </a:r>
           </a:p>
         </p:txBody>
@@ -3622,7 +3622,7 @@
                 </a:solidFill>
                 <a:latin typeface="Arial"/>
               </a:rPr>
-              <a:t>7 requisitos funcionais · sprints 3 e 4 · todos implementados</a:t>
+              <a:t>7 RFs · sprints 3 e 4 · todos implementados</a:t>
             </a:r>
           </a:p>
         </p:txBody>
@@ -3858,7 +3858,7 @@
                 </a:solidFill>
                 <a:latin typeface="Arial"/>
               </a:rPr>
-              <a:t>Visão do consultor com status derivado e cobertura % do MPO por projeto.</a:t>
+              <a:t>Visão do consultor com status e cobertura % do MPO.</a:t>
             </a:r>
           </a:p>
         </p:txBody>
@@ -4051,7 +4051,7 @@
                 </a:solidFill>
                 <a:latin typeface="Arial"/>
               </a:rPr>
-              <a:t>View consolidado: documentos, extrações, cobertura, comentários recentes.</a:t>
+              <a:t>Documentos, extrações, cobertura e comentários recentes do projeto.</a:t>
             </a:r>
           </a:p>
         </p:txBody>
@@ -4244,7 +4244,7 @@
                 </a:solidFill>
                 <a:latin typeface="Arial"/>
               </a:rPr>
-              <a:t>Comentários com 1 nível de threading. Feed in-app cronológico por visibilidade.</a:t>
+              <a:t>Comentários com 1 nível de threading + feed in-app cronológico.</a:t>
             </a:r>
           </a:p>
         </p:txBody>
@@ -4437,7 +4437,7 @@
                 </a:solidFill>
                 <a:latin typeface="Arial"/>
               </a:rPr>
-              <a:t>IA tradutora: extração técnica vira narrativa acessível. Sempre revisada pelo consultor.</a:t>
+              <a:t>IA tradutora. Sempre revisado pelo consultor antes de publicar.</a:t>
             </a:r>
           </a:p>
         </p:txBody>
@@ -4630,7 +4630,7 @@
                 </a:solidFill>
                 <a:latin typeface="Arial"/>
               </a:rPr>
-              <a:t>IA redutora de fricção: próximos passos e pontos de atenção. Consultor edita e publica.</a:t>
+              <a:t>IA redutora de fricção. Próximos passos e pontos de atenção.</a:t>
             </a:r>
           </a:p>
         </p:txBody>
@@ -4949,7 +4949,7 @@
                 </a:solidFill>
                 <a:latin typeface="Arial"/>
               </a:rPr>
-              <a:t>5 requisitos funcionais · sprint 5 · backend pronto · coleta humana pendente</a:t>
+              <a:t>Sprint 5 · backend pronto · coleta humana pendente</a:t>
             </a:r>
           </a:p>
         </p:txBody>
@@ -5185,7 +5185,7 @@
                 </a:solidFill>
                 <a:latin typeface="Arial"/>
               </a:rPr>
-              <a:t>Importação de gabarito manual validado contra o schema JSON dos 44 atributos.</a:t>
+              <a:t>Gabarito humano carregado e validado contra os 44 atributos do MPO.</a:t>
             </a:r>
           </a:p>
         </p:txBody>
@@ -5378,7 +5378,7 @@
                 </a:solidFill>
                 <a:latin typeface="Arial"/>
               </a:rPr>
-              <a:t>Critério híbrido: comparação exata (estruturado) + rubrica humana 0/0,5/1 + índice de concordância.</a:t>
+              <a:t>Comparação exata em estruturado + rubrica humana 0/0,5/1 + concordância humana.</a:t>
             </a:r>
           </a:p>
         </p:txBody>
@@ -5571,7 +5571,7 @@
                 </a:solidFill>
                 <a:latin typeface="Arial"/>
               </a:rPr>
-              <a:t>4 dimensões: utilidade dos drafts, fricção, qualidade do resumo, manutenibilidade.</a:t>
+              <a:t>4 dimensões: drafts, fricção, qualidade do resumo, manutenibilidade.</a:t>
             </a:r>
           </a:p>
         </p:txBody>
@@ -5764,7 +5764,7 @@
                 </a:solidFill>
                 <a:latin typeface="Arial"/>
               </a:rPr>
-              <a:t>4 dimensões: clareza do resumo, utilidade do espaço, qualidade do diálogo, inclusão.</a:t>
+              <a:t>4 dimensões: clareza, utilidade do espaço, diálogo, sentido de inclusão.</a:t>
             </a:r>
           </a:p>
         </p:txBody>
@@ -5957,7 +5957,7 @@
                 </a:solidFill>
                 <a:latin typeface="Arial"/>
               </a:rPr>
-              <a:t>Bundle JSON (research) + CSV long-format (rubrica). Subsidia o relato de experiência.</a:t>
+              <a:t>JSON (research) + CSV long-format (rubrica). Subsidia o relato.</a:t>
             </a:r>
           </a:p>
         </p:txBody>
@@ -6276,7 +6276,7 @@
                 </a:solidFill>
                 <a:latin typeface="Arial"/>
               </a:rPr>
-              <a:t>9 RNFs organizados por tema · todos endereçados arquiteturalmente</a:t>
+              <a:t>9 RNFs por tema · todos endereçados arquiteturalmente</a:t>
             </a:r>
           </a:p>
         </p:txBody>
@@ -6512,7 +6512,7 @@
                 </a:solidFill>
                 <a:latin typeface="Arial"/>
               </a:rPr>
-              <a:t>RNF01 · auth obrigatório em todas as rotas · RNF02 · NDA + criptografia + logs de acesso.</a:t>
+              <a:t>Autenticação obrigatória (RNF01). NDA + criptografia + logs (RNF02).</a:t>
             </a:r>
           </a:p>
         </p:txBody>
@@ -6705,7 +6705,7 @@
                 </a:solidFill>
                 <a:latin typeface="Arial"/>
               </a:rPr>
-              <a:t>RNF03 · versão do prompt e modelo LLM registrados · RNF04 · schema JSON versionado v1.0.0.</a:t>
+              <a:t>Prompt e modelo LLM registrados (RNF03). Schema JSON versionado (RNF04).</a:t>
             </a:r>
           </a:p>
         </p:txBody>
@@ -6898,7 +6898,7 @@
                 </a:solidFill>
                 <a:latin typeface="Arial"/>
               </a:rPr>
-              <a:t>RNF05 · extração LLM ≤ 90s/doc (medido 46-79s) · RNF06 · endpoints REST ≤ 500ms p95.</a:t>
+              <a:t>Extração LLM ≤ 90s, medido 46-79s (RNF05). REST ≤ 500ms p95 (RNF06).</a:t>
             </a:r>
           </a:p>
         </p:txBody>
@@ -7091,7 +7091,7 @@
                 </a:solidFill>
                 <a:latin typeface="Arial"/>
               </a:rPr>
-              <a:t>RNF07 · linguagem cidadã no Resumo do Cliente · sem jargão técnico · revisão obrigatória.</a:t>
+              <a:t>Linguagem cidadã no Resumo do Cliente. Revisão obrigatória (RNF07).</a:t>
             </a:r>
           </a:p>
         </p:txBody>
@@ -7284,7 +7284,7 @@
                 </a:solidFill>
                 <a:latin typeface="Arial"/>
               </a:rPr>
-              <a:t>RNF08 · ports &amp; adapters (LLM, storage) · RNF09 · Ollama local como default zero-cost.</a:t>
+              <a:t>Ports &amp; adapters para LLM e storage (RNF08). Ollama local zero-cost (RNF09).</a:t>
             </a:r>
           </a:p>
         </p:txBody>
@@ -8988,7 +8988,7 @@
                 </a:solidFill>
                 <a:latin typeface="Arial"/>
               </a:rPr>
-              <a:t>Manual</a:t>
+              <a:t>44 atrib.</a:t>
             </a:r>
           </a:p>
         </p:txBody>
@@ -9023,7 +9023,7 @@
                 </a:solidFill>
                 <a:latin typeface="Arial"/>
               </a:rPr>
-              <a:t>curadoria de atributos do projeto</a:t>
+              <a:t>por projeto, curados à mão</a:t>
             </a:r>
           </a:p>
         </p:txBody>
@@ -9058,7 +9058,7 @@
                 </a:solidFill>
                 <a:latin typeface="Arial"/>
               </a:rPr>
-              <a:t>ler documentos, estruturar, atualizar</a:t>
+              <a:t>ler .docx, estruturar, atualizar</a:t>
             </a:r>
           </a:p>
         </p:txBody>
@@ -10306,7 +10306,7 @@
                 </a:solidFill>
                 <a:latin typeface="Arial"/>
               </a:rPr>
-              <a:t>Auth, perfis semi-abertos, comentários e feed in-app.</a:t>
+              <a:t>Autenticação, perfis semi-abertos, comentários e feed in-app.</a:t>
             </a:r>
           </a:p>
         </p:txBody>
@@ -10692,7 +10692,7 @@
                 </a:solidFill>
                 <a:latin typeface="Arial"/>
               </a:rPr>
-              <a:t>Precisão · recall · F1 · Kappa em 3 projetos + Likert × 2 audiências.</a:t>
+              <a:t>Precisão · recall · F1 · concordância humana em 3 projetos + Likert × 2.</a:t>
             </a:r>
           </a:p>
         </p:txBody>
@@ -11220,7 +11220,7 @@
                 </a:solidFill>
                 <a:latin typeface="Arial"/>
               </a:rPr>
-              <a:t>M1</a:t>
+              <a:t>M1 ✓</a:t>
             </a:r>
           </a:p>
         </p:txBody>
@@ -11535,7 +11535,7 @@
                 </a:solidFill>
                 <a:latin typeface="Arial"/>
               </a:rPr>
-              <a:t>Destrava todo o Sprint 1.</a:t>
+              <a:t>Concluído. Destravou o Sprint 1.</a:t>
             </a:r>
           </a:p>
         </p:txBody>
@@ -11648,7 +11648,7 @@
                 </a:solidFill>
                 <a:latin typeface="Arial"/>
               </a:rPr>
-              <a:t>Status Report 1</a:t>
+              <a:t>Status Report 1 (hoje)</a:t>
             </a:r>
           </a:p>
         </p:txBody>
@@ -11771,7 +11771,7 @@
                 </a:solidFill>
                 <a:latin typeface="Arial"/>
               </a:rPr>
-              <a:t>M2</a:t>
+              <a:t>M2 ✓</a:t>
             </a:r>
           </a:p>
         </p:txBody>
@@ -11946,7 +11946,7 @@
                 </a:solidFill>
                 <a:latin typeface="Arial"/>
               </a:rPr>
-              <a:t>Cadastro · upload · auth</a:t>
+              <a:t>Cadastro · upload · autenticação</a:t>
             </a:r>
           </a:p>
         </p:txBody>
@@ -12051,7 +12051,7 @@
                 </a:solidFill>
                 <a:latin typeface="Arial"/>
               </a:rPr>
-              <a:t>Núcleo técnico da extração de atributos.</a:t>
+              <a:t>Backend antecipado. Smoke Ollama 5/5.</a:t>
             </a:r>
           </a:p>
         </p:txBody>
@@ -12164,7 +12164,7 @@
                 </a:solidFill>
                 <a:latin typeface="Arial"/>
               </a:rPr>
-              <a:t>5 JSONs persistidos</a:t>
+              <a:t>Extrações dos 5 projetos</a:t>
             </a:r>
           </a:p>
         </p:txBody>
@@ -14461,7 +14461,7 @@
                 </a:solidFill>
                 <a:latin typeface="Arial"/>
               </a:rPr>
-              <a:t>Backend compara via /extractions/evaluation · rubrica humana + Kappa.</a:t>
+              <a:t>Backend compara via /extractions/evaluation. Rubrica humana + concordância.</a:t>
             </a:r>
           </a:p>
         </p:txBody>
@@ -15041,7 +15041,7 @@
                 </a:solidFill>
                 <a:latin typeface="Arial"/>
               </a:rPr>
-              <a:t>github.com/raniel90/obione</a:t>
+              <a:t>github.com/raniel90/obione  ·  endpoints documentados  ·  diagramas de arquitetura</a:t>
             </a:r>
           </a:p>
         </p:txBody>
@@ -16310,7 +16310,7 @@
                 </a:solidFill>
                 <a:latin typeface="Arial"/>
               </a:rPr>
-              <a:t>6 requisitos funcionais · sprints 2 e 3 · todos implementados</a:t>
+              <a:t>6 RFs · sprints 2 e 3 · todos implementados</a:t>
             </a:r>
           </a:p>
         </p:txBody>
@@ -16546,7 +16546,7 @@
                 </a:solidFill>
                 <a:latin typeface="Arial"/>
               </a:rPr>
-              <a:t>JWT com expiração de 24h. Admin cria usuários; sem cadastro público.</a:t>
+              <a:t>JWT 24h. Admin cria usuários, sem cadastro público.</a:t>
             </a:r>
           </a:p>
         </p:txBody>
@@ -16739,7 +16739,7 @@
                 </a:solidFill>
                 <a:latin typeface="Arial"/>
               </a:rPr>
-              <a:t>Consultor, cliente, admin. Acesso semi-aberto materializa o modelo do MPO.</a:t>
+              <a:t>Consultor, cliente, admin. Acesso semi-aberto conforme MPO.</a:t>
             </a:r>
           </a:p>
         </p:txBody>
@@ -16932,7 +16932,7 @@
                 </a:solidFill>
                 <a:latin typeface="Arial"/>
               </a:rPr>
-              <a:t>Projeto com nome, domínio (legal/health/sports/branding/gastronomy/other), descrição.</a:t>
+              <a:t>Projeto com nome, domínio e descrição.</a:t>
             </a:r>
           </a:p>
         </p:txBody>
@@ -17125,7 +17125,7 @@
                 </a:solidFill>
                 <a:latin typeface="Arial"/>
               </a:rPr>
-              <a:t>Multipart com validação MIME + sha256 + limite de 50 MB. Rejeita duplicatas.</a:t>
+              <a:t>Validação de tipo + checksum + limite 50 MB. Rejeita duplicatas.</a:t>
             </a:r>
           </a:p>
         </p:txBody>
@@ -17318,7 +17318,7 @@
                 </a:solidFill>
                 <a:latin typeface="Arial"/>
               </a:rPr>
-              <a:t>44 atributos do Quadro 37 via LLM. Persistência com prompt + modelo registrados.</a:t>
+              <a:t>44 atributos do Quadro 37 via LLM. Prompt e modelo registrados.</a:t>
             </a:r>
           </a:p>
         </p:txBody>
